--- a/翻译研究方法/第1组/问卷调查法正反例_v14.pptx
+++ b/翻译研究方法/第1组/问卷调查法正反例_v14.pptx
@@ -5,51 +5,52 @@
     <p:sldMasterId id="2147483648" r:id="rId1"/>
   </p:sldMasterIdLst>
   <p:notesMasterIdLst>
-    <p:notesMasterId r:id="rId4"/>
+    <p:notesMasterId r:id="rId38"/>
   </p:notesMasterIdLst>
   <p:handoutMasterIdLst>
-    <p:handoutMasterId r:id="rId10"/>
+    <p:handoutMasterId r:id="rId39"/>
   </p:handoutMasterIdLst>
   <p:sldIdLst>
-    <p:sldId id="256" r:id="rId9"/>
-    <p:sldId id="257" r:id="rId8"/>
-    <p:sldId id="258" r:id="rId7"/>
+    <p:sldId id="256" r:id="rId3"/>
+    <p:sldId id="290" r:id="rId4"/>
+    <p:sldId id="258" r:id="rId5"/>
     <p:sldId id="259" r:id="rId6"/>
-    <p:sldId id="260" r:id="rId5"/>
-    <p:sldId id="261" r:id="rId3"/>
-    <p:sldId id="262" r:id="rId15"/>
-    <p:sldId id="263" r:id="rId16"/>
-    <p:sldId id="264" r:id="rId17"/>
-    <p:sldId id="265" r:id="rId18"/>
-    <p:sldId id="266" r:id="rId19"/>
-    <p:sldId id="267" r:id="rId20"/>
-    <p:sldId id="268" r:id="rId21"/>
-    <p:sldId id="269" r:id="rId22"/>
-    <p:sldId id="270" r:id="rId23"/>
-    <p:sldId id="271" r:id="rId24"/>
-    <p:sldId id="272" r:id="rId25"/>
-    <p:sldId id="273" r:id="rId26"/>
-    <p:sldId id="274" r:id="rId27"/>
-    <p:sldId id="275" r:id="rId28"/>
-    <p:sldId id="276" r:id="rId29"/>
-    <p:sldId id="277" r:id="rId30"/>
-    <p:sldId id="278" r:id="rId31"/>
-    <p:sldId id="279" r:id="rId32"/>
-    <p:sldId id="280" r:id="rId33"/>
-    <p:sldId id="281" r:id="rId34"/>
-    <p:sldId id="282" r:id="rId35"/>
-    <p:sldId id="283" r:id="rId36"/>
-    <p:sldId id="284" r:id="rId37"/>
-    <p:sldId id="285" r:id="rId38"/>
-    <p:sldId id="286" r:id="rId39"/>
-    <p:sldId id="287" r:id="rId40"/>
-    <p:sldId id="288" r:id="rId41"/>
-    <p:sldId id="289" r:id="rId42"/>
+    <p:sldId id="260" r:id="rId7"/>
+    <p:sldId id="261" r:id="rId8"/>
+    <p:sldId id="262" r:id="rId9"/>
+    <p:sldId id="263" r:id="rId10"/>
+    <p:sldId id="264" r:id="rId11"/>
+    <p:sldId id="265" r:id="rId12"/>
+    <p:sldId id="266" r:id="rId13"/>
+    <p:sldId id="267" r:id="rId14"/>
+    <p:sldId id="268" r:id="rId15"/>
+    <p:sldId id="269" r:id="rId16"/>
+    <p:sldId id="270" r:id="rId17"/>
+    <p:sldId id="271" r:id="rId18"/>
+    <p:sldId id="272" r:id="rId19"/>
+    <p:sldId id="273" r:id="rId20"/>
+    <p:sldId id="274" r:id="rId21"/>
+    <p:sldId id="275" r:id="rId22"/>
+    <p:sldId id="276" r:id="rId23"/>
+    <p:sldId id="277" r:id="rId24"/>
+    <p:sldId id="278" r:id="rId25"/>
+    <p:sldId id="279" r:id="rId26"/>
+    <p:sldId id="280" r:id="rId27"/>
+    <p:sldId id="281" r:id="rId28"/>
+    <p:sldId id="282" r:id="rId29"/>
+    <p:sldId id="283" r:id="rId30"/>
+    <p:sldId id="284" r:id="rId31"/>
+    <p:sldId id="285" r:id="rId32"/>
+    <p:sldId id="286" r:id="rId33"/>
+    <p:sldId id="287" r:id="rId34"/>
+    <p:sldId id="288" r:id="rId35"/>
+    <p:sldId id="291" r:id="rId36"/>
+    <p:sldId id="289" r:id="rId37"/>
   </p:sldIdLst>
   <p:sldSz cx="12192000" cy="6858000"/>
   <p:notesSz cx="6858000" cy="9144000"/>
   <p:custDataLst>
-    <p:tags r:id="rId14"/>
+    <p:tags r:id="rId43"/>
   </p:custDataLst>
   <p:defaultTextStyle>
     <a:defPPr>
@@ -149,12 +150,12 @@
   <p:extLst>
     <p:ext uri="{EFAFB233-063F-42B5-8137-9DF3F51BA10A}">
       <p15:sldGuideLst xmlns:p15="http://schemas.microsoft.com/office/powerpoint/2012/main">
-        <p15:guide id="1" orient="horz" pos="2139" userDrawn="1">
+        <p15:guide id="1" orient="horz" pos="2131" userDrawn="1">
           <p15:clr>
             <a:srgbClr val="A4A3A4"/>
           </p15:clr>
         </p15:guide>
-        <p15:guide id="2" pos="3840" userDrawn="1">
+        <p15:guide id="2" pos="3830" userDrawn="1">
           <p15:clr>
             <a:srgbClr val="A4A3A4"/>
           </p15:clr>
@@ -7981,7 +7982,7 @@
 </file>
 
 <file path=ppt/slides/slide1.xml><?xml version="1.0" encoding="utf-8"?>
-<p:sld xmlns:a="http://schemas.openxmlformats.org/drawingml/2006/main" xmlns:p="http://schemas.openxmlformats.org/presentationml/2006/main" xmlns:r="http://schemas.openxmlformats.org/officeDocument/2006/relationships">
+<p:sld xmlns:a="http://schemas.openxmlformats.org/drawingml/2006/main" xmlns:r="http://schemas.openxmlformats.org/officeDocument/2006/relationships" xmlns:p="http://schemas.openxmlformats.org/presentationml/2006/main">
   <p:cSld>
     <p:spTree>
       <p:nvGrpSpPr>
@@ -8007,7 +8008,7 @@
           <a:noFill/>
         </p:spPr>
         <p:txBody>
-          <a:bodyPr wrap="square" lIns="0" rIns="0" tIns="0" bIns="0" anchor="t">
+          <a:bodyPr wrap="square" lIns="0" tIns="0" rIns="0" bIns="0" anchor="t">
             <a:spAutoFit/>
           </a:bodyPr>
           <a:lstStyle/>
@@ -8028,25 +8029,33 @@
                 <a:solidFill>
                   <a:srgbClr val="000000"/>
                 </a:solidFill>
-                <a:latin typeface="Times New Roman"/>
-                <a:ea typeface="黑体"/>
-                <a:cs typeface="黑体"/>
+                <a:latin typeface="Times New Roman" panose="02020603050405020304"/>
+                <a:ea typeface="黑体" panose="02010609060101010101" charset="-122"/>
+                <a:cs typeface="黑体" panose="02010609060101010101" charset="-122"/>
               </a:rPr>
               <a:t>问卷调查法在翻译研究中的应用</a:t>
             </a:r>
-          </a:p>
-        </p:txBody>
-      </p:sp>
-      <p:sp>
-        <p:nvSpPr>
-          <p:cNvPr id="3" name="TextBox 2"/>
+            <a:endParaRPr sz="3600" b="1" i="0">
+              <a:solidFill>
+                <a:srgbClr val="000000"/>
+              </a:solidFill>
+              <a:latin typeface="Times New Roman" panose="02020603050405020304"/>
+              <a:ea typeface="黑体" panose="02010609060101010101" charset="-122"/>
+              <a:cs typeface="黑体" panose="02010609060101010101" charset="-122"/>
+            </a:endParaRPr>
+          </a:p>
+        </p:txBody>
+      </p:sp>
+      <p:sp>
+        <p:nvSpPr>
+          <p:cNvPr id="4" name="TextBox 3"/>
           <p:cNvSpPr txBox="1"/>
           <p:nvPr/>
         </p:nvSpPr>
         <p:spPr>
           <a:xfrm>
-            <a:off x="914400" y="3383280"/>
-            <a:ext cx="10332720" cy="457200"/>
+            <a:off x="914400" y="3302000"/>
+            <a:ext cx="10332720" cy="479425"/>
           </a:xfrm>
           <a:prstGeom prst="rect">
             <a:avLst/>
@@ -8054,7 +8063,7 @@
           <a:noFill/>
         </p:spPr>
         <p:txBody>
-          <a:bodyPr wrap="square" lIns="0" rIns="0" tIns="0" bIns="0" anchor="t">
+          <a:bodyPr wrap="square" lIns="0" tIns="0" rIns="0" bIns="0" anchor="t">
             <a:spAutoFit/>
           </a:bodyPr>
           <a:lstStyle/>
@@ -8071,63 +8080,24 @@
               </a:spcAft>
             </a:pPr>
             <a:r>
-              <a:rPr sz="2000" b="0" i="0">
-                <a:solidFill>
-                  <a:srgbClr val="000000"/>
-                </a:solidFill>
-                <a:latin typeface="Times New Roman"/>
-                <a:ea typeface="宋体"/>
-                <a:cs typeface="宋体"/>
-              </a:rPr>
-              <a:t>用两篇论文，讲清一份问卷从提问到结论的全过程</a:t>
-            </a:r>
-          </a:p>
-        </p:txBody>
-      </p:sp>
-      <p:sp>
-        <p:nvSpPr>
-          <p:cNvPr id="4" name="TextBox 3"/>
-          <p:cNvSpPr txBox="1"/>
-          <p:nvPr/>
-        </p:nvSpPr>
-        <p:spPr>
-          <a:xfrm>
-            <a:off x="914400" y="3931920"/>
-            <a:ext cx="10332720" cy="365760"/>
-          </a:xfrm>
-          <a:prstGeom prst="rect">
-            <a:avLst/>
-          </a:prstGeom>
-          <a:noFill/>
-        </p:spPr>
-        <p:txBody>
-          <a:bodyPr wrap="square" lIns="0" rIns="0" tIns="0" bIns="0" anchor="t">
-            <a:spAutoFit/>
-          </a:bodyPr>
-          <a:lstStyle/>
-          <a:p>
-            <a:pPr algn="ctr">
-              <a:lnSpc>
-                <a:spcPct val="130000"/>
-              </a:lnSpc>
-              <a:spcBef>
-                <a:spcPts val="0"/>
-              </a:spcBef>
-              <a:spcAft>
-                <a:spcPts val="0"/>
-              </a:spcAft>
-            </a:pPr>
-            <a:r>
-              <a:rPr sz="1500" b="0" i="0">
+              <a:rPr sz="2400" b="0" i="0">
                 <a:solidFill>
                   <a:srgbClr val="404040"/>
                 </a:solidFill>
-                <a:latin typeface="Times New Roman"/>
-                <a:ea typeface="宋体"/>
-                <a:cs typeface="宋体"/>
+                <a:latin typeface="Times New Roman" panose="02020603050405020304"/>
+                <a:ea typeface="宋体" panose="02010600030101010101" pitchFamily="2" charset="-122"/>
+                <a:cs typeface="宋体" panose="02010600030101010101" pitchFamily="2" charset="-122"/>
               </a:rPr>
               <a:t>Questionnaire Survey in Translation Studies</a:t>
             </a:r>
+            <a:endParaRPr sz="2400" b="0" i="0">
+              <a:solidFill>
+                <a:srgbClr val="404040"/>
+              </a:solidFill>
+              <a:latin typeface="Times New Roman" panose="02020603050405020304"/>
+              <a:ea typeface="宋体" panose="02010600030101010101" pitchFamily="2" charset="-122"/>
+              <a:cs typeface="宋体" panose="02010600030101010101" pitchFamily="2" charset="-122"/>
+            </a:endParaRPr>
           </a:p>
         </p:txBody>
       </p:sp>
@@ -8148,7 +8118,7 @@
           <a:noFill/>
         </p:spPr>
         <p:txBody>
-          <a:bodyPr wrap="square" lIns="0" rIns="0" tIns="0" bIns="0" anchor="t">
+          <a:bodyPr wrap="square" lIns="0" tIns="0" rIns="0" bIns="0" anchor="t">
             <a:spAutoFit/>
           </a:bodyPr>
           <a:lstStyle/>
@@ -8169,12 +8139,20 @@
                 <a:solidFill>
                   <a:srgbClr val="000000"/>
                 </a:solidFill>
-                <a:latin typeface="Times New Roman"/>
-                <a:ea typeface="宋体"/>
-                <a:cs typeface="宋体"/>
+                <a:latin typeface="Times New Roman" panose="02020603050405020304"/>
+                <a:ea typeface="宋体" panose="02010600030101010101" pitchFamily="2" charset="-122"/>
+                <a:cs typeface="宋体" panose="02010600030101010101" pitchFamily="2" charset="-122"/>
               </a:rPr>
               <a:t>汇报人：陈冠臻    学号：20261210050</a:t>
             </a:r>
+            <a:endParaRPr sz="1400" b="0" i="0">
+              <a:solidFill>
+                <a:srgbClr val="000000"/>
+              </a:solidFill>
+              <a:latin typeface="Times New Roman" panose="02020603050405020304"/>
+              <a:ea typeface="宋体" panose="02010600030101010101" pitchFamily="2" charset="-122"/>
+              <a:cs typeface="宋体" panose="02010600030101010101" pitchFamily="2" charset="-122"/>
+            </a:endParaRPr>
           </a:p>
           <a:p>
             <a:pPr algn="ctr">
@@ -8193,12 +8171,20 @@
                 <a:solidFill>
                   <a:srgbClr val="000000"/>
                 </a:solidFill>
-                <a:latin typeface="Times New Roman"/>
-                <a:ea typeface="宋体"/>
-                <a:cs typeface="宋体"/>
+                <a:latin typeface="Times New Roman" panose="02020603050405020304"/>
+                <a:ea typeface="宋体" panose="02010600030101010101" pitchFamily="2" charset="-122"/>
+                <a:cs typeface="宋体" panose="02010600030101010101" pitchFamily="2" charset="-122"/>
               </a:rPr>
               <a:t>2026 年 10 月 12 日</a:t>
             </a:r>
+            <a:endParaRPr sz="1400" b="0" i="0">
+              <a:solidFill>
+                <a:srgbClr val="000000"/>
+              </a:solidFill>
+              <a:latin typeface="Times New Roman" panose="02020603050405020304"/>
+              <a:ea typeface="宋体" panose="02010600030101010101" pitchFamily="2" charset="-122"/>
+              <a:cs typeface="宋体" panose="02010600030101010101" pitchFamily="2" charset="-122"/>
+            </a:endParaRPr>
           </a:p>
         </p:txBody>
       </p:sp>
@@ -8211,7 +8197,7 @@
 </file>
 
 <file path=ppt/slides/slide10.xml><?xml version="1.0" encoding="utf-8"?>
-<p:sld xmlns:a="http://schemas.openxmlformats.org/drawingml/2006/main" xmlns:p="http://schemas.openxmlformats.org/presentationml/2006/main" xmlns:r="http://schemas.openxmlformats.org/officeDocument/2006/relationships">
+<p:sld xmlns:a="http://schemas.openxmlformats.org/drawingml/2006/main" xmlns:r="http://schemas.openxmlformats.org/officeDocument/2006/relationships" xmlns:p="http://schemas.openxmlformats.org/presentationml/2006/main">
   <p:cSld>
     <p:spTree>
       <p:nvGrpSpPr>
@@ -8237,7 +8223,7 @@
           <a:noFill/>
         </p:spPr>
         <p:txBody>
-          <a:bodyPr wrap="square" lIns="0" rIns="0" tIns="0" bIns="0" anchor="t">
+          <a:bodyPr wrap="square" lIns="0" tIns="0" rIns="0" bIns="0" anchor="t">
             <a:spAutoFit/>
           </a:bodyPr>
           <a:lstStyle/>
@@ -8258,12 +8244,20 @@
                 <a:solidFill>
                   <a:srgbClr val="000000"/>
                 </a:solidFill>
-                <a:latin typeface="Times New Roman"/>
-                <a:ea typeface="黑体"/>
-                <a:cs typeface="黑体"/>
+                <a:latin typeface="Times New Roman" panose="02020603050405020304"/>
+                <a:ea typeface="黑体" panose="02010609060101010101" charset="-122"/>
+                <a:cs typeface="黑体" panose="02010609060101010101" charset="-122"/>
               </a:rPr>
               <a:t>第一步：先想清楚「到底要测什么」</a:t>
             </a:r>
+            <a:endParaRPr sz="2300" b="1" i="0">
+              <a:solidFill>
+                <a:srgbClr val="000000"/>
+              </a:solidFill>
+              <a:latin typeface="Times New Roman" panose="02020603050405020304"/>
+              <a:ea typeface="黑体" panose="02010609060101010101" charset="-122"/>
+              <a:cs typeface="黑体" panose="02010609060101010101" charset="-122"/>
+            </a:endParaRPr>
           </a:p>
         </p:txBody>
       </p:sp>
@@ -8276,7 +8270,7 @@
           <p:nvPr/>
         </p:nvPicPr>
         <p:blipFill>
-          <a:blip r:embed="rId2"/>
+          <a:blip r:embed="rId1"/>
           <a:stretch>
             <a:fillRect/>
           </a:stretch>
@@ -8352,7 +8346,7 @@
           <a:noFill/>
         </p:spPr>
         <p:txBody>
-          <a:bodyPr wrap="square" lIns="0" rIns="0" tIns="0" bIns="0" anchor="t">
+          <a:bodyPr wrap="square" lIns="0" tIns="0" rIns="0" bIns="0" anchor="t">
             <a:spAutoFit/>
           </a:bodyPr>
           <a:lstStyle/>
@@ -8373,12 +8367,20 @@
                 <a:solidFill>
                   <a:srgbClr val="404040"/>
                 </a:solidFill>
-                <a:latin typeface="Times New Roman"/>
-                <a:ea typeface="宋体"/>
-                <a:cs typeface="宋体"/>
+                <a:latin typeface="Times New Roman" panose="02020603050405020304"/>
+                <a:ea typeface="宋体" panose="02010600030101010101" pitchFamily="2" charset="-122"/>
+                <a:cs typeface="宋体" panose="02010600030101010101" pitchFamily="2" charset="-122"/>
               </a:rPr>
               <a:t>四个维度（表 1）</a:t>
             </a:r>
+            <a:endParaRPr sz="950" b="0" i="0">
+              <a:solidFill>
+                <a:srgbClr val="404040"/>
+              </a:solidFill>
+              <a:latin typeface="Times New Roman" panose="02020603050405020304"/>
+              <a:ea typeface="宋体" panose="02010600030101010101" pitchFamily="2" charset="-122"/>
+              <a:cs typeface="宋体" panose="02010600030101010101" pitchFamily="2" charset="-122"/>
+            </a:endParaRPr>
           </a:p>
         </p:txBody>
       </p:sp>
@@ -8391,7 +8393,7 @@
           <p:nvPr/>
         </p:nvPicPr>
         <p:blipFill>
-          <a:blip r:embed="rId3"/>
+          <a:blip r:embed="rId2"/>
           <a:stretch>
             <a:fillRect/>
           </a:stretch>
@@ -8467,7 +8469,7 @@
           <a:noFill/>
         </p:spPr>
         <p:txBody>
-          <a:bodyPr wrap="square" lIns="0" rIns="0" tIns="0" bIns="0" anchor="t">
+          <a:bodyPr wrap="square" lIns="0" tIns="0" rIns="0" bIns="0" anchor="t">
             <a:spAutoFit/>
           </a:bodyPr>
           <a:lstStyle/>
@@ -8488,12 +8490,20 @@
                 <a:solidFill>
                   <a:srgbClr val="404040"/>
                 </a:solidFill>
-                <a:latin typeface="Times New Roman"/>
-                <a:ea typeface="宋体"/>
-                <a:cs typeface="宋体"/>
+                <a:latin typeface="Times New Roman" panose="02020603050405020304"/>
+                <a:ea typeface="宋体" panose="02010600030101010101" pitchFamily="2" charset="-122"/>
+                <a:cs typeface="宋体" panose="02010600030101010101" pitchFamily="2" charset="-122"/>
               </a:rPr>
               <a:t>构念来源：日志 + 访谈</a:t>
             </a:r>
+            <a:endParaRPr sz="950" b="0" i="0">
+              <a:solidFill>
+                <a:srgbClr val="404040"/>
+              </a:solidFill>
+              <a:latin typeface="Times New Roman" panose="02020603050405020304"/>
+              <a:ea typeface="宋体" panose="02010600030101010101" pitchFamily="2" charset="-122"/>
+              <a:cs typeface="宋体" panose="02010600030101010101" pitchFamily="2" charset="-122"/>
+            </a:endParaRPr>
           </a:p>
         </p:txBody>
       </p:sp>
@@ -8514,7 +8524,7 @@
           <a:noFill/>
         </p:spPr>
         <p:txBody>
-          <a:bodyPr wrap="square" lIns="0" rIns="0" tIns="0" bIns="0" anchor="t">
+          <a:bodyPr wrap="square" lIns="0" tIns="0" rIns="0" bIns="0" anchor="t">
             <a:spAutoFit/>
           </a:bodyPr>
           <a:lstStyle/>
@@ -8535,12 +8545,20 @@
                 <a:solidFill>
                   <a:srgbClr val="000000"/>
                 </a:solidFill>
-                <a:latin typeface="Times New Roman"/>
-                <a:ea typeface="宋体"/>
-                <a:cs typeface="宋体"/>
+                <a:latin typeface="Times New Roman" panose="02020603050405020304"/>
+                <a:ea typeface="宋体" panose="02010600030101010101" pitchFamily="2" charset="-122"/>
+                <a:cs typeface="宋体" panose="02010600030101010101" pitchFamily="2" charset="-122"/>
               </a:rPr>
               <a:t>· 「笔记熟练度」是个抽象概念，作者先把它拆成两阶段：记笔记、读笔记；再细分成四个维度：听记协调、系统性、时效性、使用。</a:t>
             </a:r>
+            <a:endParaRPr sz="2000" b="0" i="0">
+              <a:solidFill>
+                <a:srgbClr val="000000"/>
+              </a:solidFill>
+              <a:latin typeface="Times New Roman" panose="02020603050405020304"/>
+              <a:ea typeface="宋体" panose="02010600030101010101" pitchFamily="2" charset="-122"/>
+              <a:cs typeface="宋体" panose="02010600030101010101" pitchFamily="2" charset="-122"/>
+            </a:endParaRPr>
           </a:p>
           <a:p>
             <a:pPr algn="l">
@@ -8559,12 +8577,20 @@
                 <a:solidFill>
                   <a:srgbClr val="000000"/>
                 </a:solidFill>
-                <a:latin typeface="Times New Roman"/>
-                <a:ea typeface="宋体"/>
-                <a:cs typeface="宋体"/>
+                <a:latin typeface="Times New Roman" panose="02020603050405020304"/>
+                <a:ea typeface="宋体" panose="02010600030101010101" pitchFamily="2" charset="-122"/>
+                <a:cs typeface="宋体" panose="02010600030101010101" pitchFamily="2" charset="-122"/>
               </a:rPr>
               <a:t>· 这四个维度不是拍脑袋想的——是分析了 72 份学员日志、访谈了 4 位学生译员和 6 位口译教师，归纳出来的。</a:t>
             </a:r>
+            <a:endParaRPr sz="2000" b="0" i="0">
+              <a:solidFill>
+                <a:srgbClr val="000000"/>
+              </a:solidFill>
+              <a:latin typeface="Times New Roman" panose="02020603050405020304"/>
+              <a:ea typeface="宋体" panose="02010600030101010101" pitchFamily="2" charset="-122"/>
+              <a:cs typeface="宋体" panose="02010600030101010101" pitchFamily="2" charset="-122"/>
+            </a:endParaRPr>
           </a:p>
           <a:p>
             <a:pPr algn="l">
@@ -8583,12 +8609,20 @@
                 <a:solidFill>
                   <a:srgbClr val="000000"/>
                 </a:solidFill>
-                <a:latin typeface="Times New Roman"/>
-                <a:ea typeface="宋体"/>
-                <a:cs typeface="宋体"/>
+                <a:latin typeface="Times New Roman" panose="02020603050405020304"/>
+                <a:ea typeface="宋体" panose="02010600030101010101" pitchFamily="2" charset="-122"/>
+                <a:cs typeface="宋体" panose="02010600030101010101" pitchFamily="2" charset="-122"/>
               </a:rPr>
               <a:t>· 逻辑：先把「要测什么」定义清楚，后面写题才有依据。很多研究翻车，就是概念没想清就急着出题。</a:t>
             </a:r>
+            <a:endParaRPr sz="2000" b="0" i="0">
+              <a:solidFill>
+                <a:srgbClr val="000000"/>
+              </a:solidFill>
+              <a:latin typeface="Times New Roman" panose="02020603050405020304"/>
+              <a:ea typeface="宋体" panose="02010600030101010101" pitchFamily="2" charset="-122"/>
+              <a:cs typeface="宋体" panose="02010600030101010101" pitchFamily="2" charset="-122"/>
+            </a:endParaRPr>
           </a:p>
         </p:txBody>
       </p:sp>
@@ -8609,7 +8643,7 @@
           <a:noFill/>
         </p:spPr>
         <p:txBody>
-          <a:bodyPr wrap="square" lIns="0" rIns="0" tIns="0" bIns="0" anchor="t">
+          <a:bodyPr wrap="square" lIns="0" tIns="0" rIns="0" bIns="0" anchor="t">
             <a:spAutoFit/>
           </a:bodyPr>
           <a:lstStyle/>
@@ -8630,12 +8664,20 @@
                 <a:solidFill>
                   <a:srgbClr val="404040"/>
                 </a:solidFill>
-                <a:latin typeface="Times New Roman"/>
-                <a:ea typeface="宋体"/>
-                <a:cs typeface="宋体"/>
+                <a:latin typeface="Times New Roman" panose="02020603050405020304"/>
+                <a:ea typeface="宋体" panose="02010600030101010101" pitchFamily="2" charset="-122"/>
+                <a:cs typeface="宋体" panose="02010600030101010101" pitchFamily="2" charset="-122"/>
               </a:rPr>
               <a:t>10 / 34</a:t>
             </a:r>
+            <a:endParaRPr sz="1000" b="0" i="0">
+              <a:solidFill>
+                <a:srgbClr val="404040"/>
+              </a:solidFill>
+              <a:latin typeface="Times New Roman" panose="02020603050405020304"/>
+              <a:ea typeface="宋体" panose="02010600030101010101" pitchFamily="2" charset="-122"/>
+              <a:cs typeface="宋体" panose="02010600030101010101" pitchFamily="2" charset="-122"/>
+            </a:endParaRPr>
           </a:p>
         </p:txBody>
       </p:sp>
@@ -8648,7 +8690,7 @@
 </file>
 
 <file path=ppt/slides/slide11.xml><?xml version="1.0" encoding="utf-8"?>
-<p:sld xmlns:a="http://schemas.openxmlformats.org/drawingml/2006/main" xmlns:p="http://schemas.openxmlformats.org/presentationml/2006/main" xmlns:r="http://schemas.openxmlformats.org/officeDocument/2006/relationships">
+<p:sld xmlns:a="http://schemas.openxmlformats.org/drawingml/2006/main" xmlns:r="http://schemas.openxmlformats.org/officeDocument/2006/relationships" xmlns:p="http://schemas.openxmlformats.org/presentationml/2006/main">
   <p:cSld>
     <p:spTree>
       <p:nvGrpSpPr>
@@ -8674,7 +8716,7 @@
           <a:noFill/>
         </p:spPr>
         <p:txBody>
-          <a:bodyPr wrap="square" lIns="0" rIns="0" tIns="0" bIns="0" anchor="t">
+          <a:bodyPr wrap="square" lIns="0" tIns="0" rIns="0" bIns="0" anchor="t">
             <a:spAutoFit/>
           </a:bodyPr>
           <a:lstStyle/>
@@ -8695,12 +8737,20 @@
                 <a:solidFill>
                   <a:srgbClr val="000000"/>
                 </a:solidFill>
-                <a:latin typeface="Times New Roman"/>
-                <a:ea typeface="黑体"/>
-                <a:cs typeface="黑体"/>
+                <a:latin typeface="Times New Roman" panose="02020603050405020304"/>
+                <a:ea typeface="黑体" panose="02010609060101010101" charset="-122"/>
+                <a:cs typeface="黑体" panose="02010609060101010101" charset="-122"/>
               </a:rPr>
               <a:t>第二步：题是从真实材料里来的</a:t>
             </a:r>
+            <a:endParaRPr sz="2300" b="1" i="0">
+              <a:solidFill>
+                <a:srgbClr val="000000"/>
+              </a:solidFill>
+              <a:latin typeface="Times New Roman" panose="02020603050405020304"/>
+              <a:ea typeface="黑体" panose="02010609060101010101" charset="-122"/>
+              <a:cs typeface="黑体" panose="02010609060101010101" charset="-122"/>
+            </a:endParaRPr>
           </a:p>
         </p:txBody>
       </p:sp>
@@ -8713,7 +8763,7 @@
           <p:nvPr/>
         </p:nvPicPr>
         <p:blipFill>
-          <a:blip r:embed="rId2"/>
+          <a:blip r:embed="rId1"/>
           <a:stretch>
             <a:fillRect/>
           </a:stretch>
@@ -8789,7 +8839,7 @@
           <a:noFill/>
         </p:spPr>
         <p:txBody>
-          <a:bodyPr wrap="square" lIns="0" rIns="0" tIns="0" bIns="0" anchor="t">
+          <a:bodyPr wrap="square" lIns="0" tIns="0" rIns="0" bIns="0" anchor="t">
             <a:spAutoFit/>
           </a:bodyPr>
           <a:lstStyle/>
@@ -8810,12 +8860,20 @@
                 <a:solidFill>
                   <a:srgbClr val="404040"/>
                 </a:solidFill>
-                <a:latin typeface="Times New Roman"/>
-                <a:ea typeface="宋体"/>
-                <a:cs typeface="宋体"/>
+                <a:latin typeface="Times New Roman" panose="02020603050405020304"/>
+                <a:ea typeface="宋体" panose="02010600030101010101" pitchFamily="2" charset="-122"/>
+                <a:cs typeface="宋体" panose="02010600030101010101" pitchFamily="2" charset="-122"/>
               </a:rPr>
               <a:t>题项编写：译员表达 + 评审 + 74 题</a:t>
             </a:r>
+            <a:endParaRPr sz="950" b="0" i="0">
+              <a:solidFill>
+                <a:srgbClr val="404040"/>
+              </a:solidFill>
+              <a:latin typeface="Times New Roman" panose="02020603050405020304"/>
+              <a:ea typeface="宋体" panose="02010600030101010101" pitchFamily="2" charset="-122"/>
+              <a:cs typeface="宋体" panose="02010600030101010101" pitchFamily="2" charset="-122"/>
+            </a:endParaRPr>
           </a:p>
         </p:txBody>
       </p:sp>
@@ -8828,7 +8886,7 @@
         <p:spPr>
           <a:xfrm>
             <a:off x="640080" y="1874519"/>
-            <a:ext cx="6720840" cy="3931920"/>
+            <a:ext cx="6720840" cy="2528570"/>
           </a:xfrm>
           <a:prstGeom prst="rect">
             <a:avLst/>
@@ -8836,7 +8894,7 @@
           <a:noFill/>
         </p:spPr>
         <p:txBody>
-          <a:bodyPr wrap="square" lIns="0" rIns="0" tIns="0" bIns="0" anchor="t">
+          <a:bodyPr wrap="square" lIns="0" tIns="0" rIns="0" bIns="0" anchor="t">
             <a:spAutoFit/>
           </a:bodyPr>
           <a:lstStyle/>
@@ -8857,12 +8915,20 @@
                 <a:solidFill>
                   <a:srgbClr val="000000"/>
                 </a:solidFill>
-                <a:latin typeface="Times New Roman"/>
-                <a:ea typeface="宋体"/>
-                <a:cs typeface="宋体"/>
-              </a:rPr>
-              <a:t>· 题目不是凭空编的，是借助前面的日志和访谈来写，题干尽量用译员自己的话，避免「学术腔」。</a:t>
-            </a:r>
+                <a:latin typeface="Times New Roman" panose="02020603050405020304"/>
+                <a:ea typeface="宋体" panose="02010600030101010101" pitchFamily="2" charset="-122"/>
+                <a:cs typeface="宋体" panose="02010600030101010101" pitchFamily="2" charset="-122"/>
+              </a:rPr>
+              <a:t>· 题目不是凭空编的，是借助前面的日志和访谈来写，题干尽量用译员自己的话，避免学术腔。</a:t>
+            </a:r>
+            <a:endParaRPr sz="2000" b="0" i="0">
+              <a:solidFill>
+                <a:srgbClr val="000000"/>
+              </a:solidFill>
+              <a:latin typeface="Times New Roman" panose="02020603050405020304"/>
+              <a:ea typeface="宋体" panose="02010600030101010101" pitchFamily="2" charset="-122"/>
+              <a:cs typeface="宋体" panose="02010600030101010101" pitchFamily="2" charset="-122"/>
+            </a:endParaRPr>
           </a:p>
           <a:p>
             <a:pPr algn="l">
@@ -8881,12 +8947,20 @@
                 <a:solidFill>
                   <a:srgbClr val="000000"/>
                 </a:solidFill>
-                <a:latin typeface="Times New Roman"/>
-                <a:ea typeface="宋体"/>
-                <a:cs typeface="宋体"/>
+                <a:latin typeface="Times New Roman" panose="02020603050405020304"/>
+                <a:ea typeface="宋体" panose="02010600030101010101" pitchFamily="2" charset="-122"/>
+                <a:cs typeface="宋体" panose="02010600030101010101" pitchFamily="2" charset="-122"/>
               </a:rPr>
               <a:t>· 写完还请 5 名学员、3 名教师评审，删掉说不清、重复的题。初始题库 74 题，3 轮评审、历时半年，压到 28 题。</a:t>
             </a:r>
+            <a:endParaRPr sz="2000" b="0" i="0">
+              <a:solidFill>
+                <a:srgbClr val="000000"/>
+              </a:solidFill>
+              <a:latin typeface="Times New Roman" panose="02020603050405020304"/>
+              <a:ea typeface="宋体" panose="02010600030101010101" pitchFamily="2" charset="-122"/>
+              <a:cs typeface="宋体" panose="02010600030101010101" pitchFamily="2" charset="-122"/>
+            </a:endParaRPr>
           </a:p>
           <a:p>
             <a:pPr algn="l">
@@ -8905,12 +8979,20 @@
                 <a:solidFill>
                   <a:srgbClr val="000000"/>
                 </a:solidFill>
-                <a:latin typeface="Times New Roman"/>
-                <a:ea typeface="宋体"/>
-                <a:cs typeface="宋体"/>
+                <a:latin typeface="Times New Roman" panose="02020603050405020304"/>
+                <a:ea typeface="宋体" panose="02010600030101010101" pitchFamily="2" charset="-122"/>
+                <a:cs typeface="宋体" panose="02010600030101010101" pitchFamily="2" charset="-122"/>
               </a:rPr>
               <a:t>· 逻辑：题目的来源、生成、评审，每一步都有交代，这就是「构念 → 题项」走扎实的样子。</a:t>
             </a:r>
+            <a:endParaRPr sz="2000" b="0" i="0">
+              <a:solidFill>
+                <a:srgbClr val="000000"/>
+              </a:solidFill>
+              <a:latin typeface="Times New Roman" panose="02020603050405020304"/>
+              <a:ea typeface="宋体" panose="02010600030101010101" pitchFamily="2" charset="-122"/>
+              <a:cs typeface="宋体" panose="02010600030101010101" pitchFamily="2" charset="-122"/>
+            </a:endParaRPr>
           </a:p>
         </p:txBody>
       </p:sp>
@@ -8931,7 +9013,7 @@
           <a:noFill/>
         </p:spPr>
         <p:txBody>
-          <a:bodyPr wrap="square" lIns="0" rIns="0" tIns="0" bIns="0" anchor="t">
+          <a:bodyPr wrap="square" lIns="0" tIns="0" rIns="0" bIns="0" anchor="t">
             <a:spAutoFit/>
           </a:bodyPr>
           <a:lstStyle/>
@@ -8952,12 +9034,20 @@
                 <a:solidFill>
                   <a:srgbClr val="404040"/>
                 </a:solidFill>
-                <a:latin typeface="Times New Roman"/>
-                <a:ea typeface="宋体"/>
-                <a:cs typeface="宋体"/>
+                <a:latin typeface="Times New Roman" panose="02020603050405020304"/>
+                <a:ea typeface="宋体" panose="02010600030101010101" pitchFamily="2" charset="-122"/>
+                <a:cs typeface="宋体" panose="02010600030101010101" pitchFamily="2" charset="-122"/>
               </a:rPr>
               <a:t>11 / 34</a:t>
             </a:r>
+            <a:endParaRPr sz="1000" b="0" i="0">
+              <a:solidFill>
+                <a:srgbClr val="404040"/>
+              </a:solidFill>
+              <a:latin typeface="Times New Roman" panose="02020603050405020304"/>
+              <a:ea typeface="宋体" panose="02010600030101010101" pitchFamily="2" charset="-122"/>
+              <a:cs typeface="宋体" panose="02010600030101010101" pitchFamily="2" charset="-122"/>
+            </a:endParaRPr>
           </a:p>
         </p:txBody>
       </p:sp>
@@ -8970,7 +9060,7 @@
 </file>
 
 <file path=ppt/slides/slide12.xml><?xml version="1.0" encoding="utf-8"?>
-<p:sld xmlns:a="http://schemas.openxmlformats.org/drawingml/2006/main" xmlns:p="http://schemas.openxmlformats.org/presentationml/2006/main" xmlns:r="http://schemas.openxmlformats.org/officeDocument/2006/relationships">
+<p:sld xmlns:a="http://schemas.openxmlformats.org/drawingml/2006/main" xmlns:r="http://schemas.openxmlformats.org/officeDocument/2006/relationships" xmlns:p="http://schemas.openxmlformats.org/presentationml/2006/main">
   <p:cSld>
     <p:spTree>
       <p:nvGrpSpPr>
@@ -8996,7 +9086,7 @@
           <a:noFill/>
         </p:spPr>
         <p:txBody>
-          <a:bodyPr wrap="square" lIns="0" rIns="0" tIns="0" bIns="0" anchor="t">
+          <a:bodyPr wrap="square" lIns="0" tIns="0" rIns="0" bIns="0" anchor="t">
             <a:spAutoFit/>
           </a:bodyPr>
           <a:lstStyle/>
@@ -9017,12 +9107,20 @@
                 <a:solidFill>
                   <a:srgbClr val="000000"/>
                 </a:solidFill>
-                <a:latin typeface="Times New Roman"/>
-                <a:ea typeface="黑体"/>
-                <a:cs typeface="黑体"/>
+                <a:latin typeface="Times New Roman" panose="02020603050405020304"/>
+                <a:ea typeface="黑体" panose="02010609060101010101" charset="-122"/>
+                <a:cs typeface="黑体" panose="02010609060101010101" charset="-122"/>
               </a:rPr>
               <a:t>第三步：先小规模试一下，再大规模用</a:t>
             </a:r>
+            <a:endParaRPr sz="2300" b="1" i="0">
+              <a:solidFill>
+                <a:srgbClr val="000000"/>
+              </a:solidFill>
+              <a:latin typeface="Times New Roman" panose="02020603050405020304"/>
+              <a:ea typeface="黑体" panose="02010609060101010101" charset="-122"/>
+              <a:cs typeface="黑体" panose="02010609060101010101" charset="-122"/>
+            </a:endParaRPr>
           </a:p>
         </p:txBody>
       </p:sp>
@@ -9035,7 +9133,7 @@
           <p:nvPr/>
         </p:nvPicPr>
         <p:blipFill>
-          <a:blip r:embed="rId2"/>
+          <a:blip r:embed="rId1"/>
           <a:stretch>
             <a:fillRect/>
           </a:stretch>
@@ -9111,7 +9209,7 @@
           <a:noFill/>
         </p:spPr>
         <p:txBody>
-          <a:bodyPr wrap="square" lIns="0" rIns="0" tIns="0" bIns="0" anchor="t">
+          <a:bodyPr wrap="square" lIns="0" tIns="0" rIns="0" bIns="0" anchor="t">
             <a:spAutoFit/>
           </a:bodyPr>
           <a:lstStyle/>
@@ -9132,12 +9230,20 @@
                 <a:solidFill>
                   <a:srgbClr val="404040"/>
                 </a:solidFill>
-                <a:latin typeface="Times New Roman"/>
-                <a:ea typeface="宋体"/>
-                <a:cs typeface="宋体"/>
+                <a:latin typeface="Times New Roman" panose="02020603050405020304"/>
+                <a:ea typeface="宋体" panose="02010600030101010101" pitchFamily="2" charset="-122"/>
+                <a:cs typeface="宋体" panose="02010600030101010101" pitchFamily="2" charset="-122"/>
               </a:rPr>
               <a:t>评审 28 题 · 试测 54 人 · 删 7 留 21</a:t>
             </a:r>
+            <a:endParaRPr sz="950" b="0" i="0">
+              <a:solidFill>
+                <a:srgbClr val="404040"/>
+              </a:solidFill>
+              <a:latin typeface="Times New Roman" panose="02020603050405020304"/>
+              <a:ea typeface="宋体" panose="02010600030101010101" pitchFamily="2" charset="-122"/>
+              <a:cs typeface="宋体" panose="02010600030101010101" pitchFamily="2" charset="-122"/>
+            </a:endParaRPr>
           </a:p>
         </p:txBody>
       </p:sp>
@@ -9150,7 +9256,7 @@
         <p:spPr>
           <a:xfrm>
             <a:off x="640080" y="1874519"/>
-            <a:ext cx="6720840" cy="3931920"/>
+            <a:ext cx="6720840" cy="3856990"/>
           </a:xfrm>
           <a:prstGeom prst="rect">
             <a:avLst/>
@@ -9158,7 +9264,7 @@
           <a:noFill/>
         </p:spPr>
         <p:txBody>
-          <a:bodyPr wrap="square" lIns="0" rIns="0" tIns="0" bIns="0" anchor="t">
+          <a:bodyPr wrap="square" lIns="0" tIns="0" rIns="0" bIns="0" anchor="t">
             <a:spAutoFit/>
           </a:bodyPr>
           <a:lstStyle/>
@@ -9179,12 +9285,20 @@
                 <a:solidFill>
                   <a:srgbClr val="000000"/>
                 </a:solidFill>
-                <a:latin typeface="Times New Roman"/>
-                <a:ea typeface="宋体"/>
-                <a:cs typeface="宋体"/>
+                <a:latin typeface="Times New Roman" panose="02020603050405020304"/>
+                <a:ea typeface="宋体" panose="02010600030101010101" pitchFamily="2" charset="-122"/>
+                <a:cs typeface="宋体" panose="02010600030101010101" pitchFamily="2" charset="-122"/>
               </a:rPr>
               <a:t>· 专家评审后剩 28 题，先找 54 名学生试测，不急着发给所有人。</a:t>
             </a:r>
+            <a:endParaRPr sz="2000" b="0" i="0">
+              <a:solidFill>
+                <a:srgbClr val="000000"/>
+              </a:solidFill>
+              <a:latin typeface="Times New Roman" panose="02020603050405020304"/>
+              <a:ea typeface="宋体" panose="02010600030101010101" pitchFamily="2" charset="-122"/>
+              <a:cs typeface="宋体" panose="02010600030101010101" pitchFamily="2" charset="-122"/>
+            </a:endParaRPr>
           </a:p>
           <a:p>
             <a:pPr algn="l">
@@ -9203,12 +9317,20 @@
                 <a:solidFill>
                   <a:srgbClr val="000000"/>
                 </a:solidFill>
-                <a:latin typeface="Times New Roman"/>
-                <a:ea typeface="宋体"/>
-                <a:cs typeface="宋体"/>
-              </a:rPr>
-              <a:t>· 两种删题方法：① 极端组比较——看高分的人和低分的人，某道题答得是不是明显不同，区分不开的题删掉；② 同质性检验——看每道题和总分是不是一路，不一路的删掉。</a:t>
-            </a:r>
+                <a:latin typeface="Times New Roman" panose="02020603050405020304"/>
+                <a:ea typeface="宋体" panose="02010600030101010101" pitchFamily="2" charset="-122"/>
+                <a:cs typeface="宋体" panose="02010600030101010101" pitchFamily="2" charset="-122"/>
+              </a:rPr>
+              <a:t>· 两种删题方法：</a:t>
+            </a:r>
+            <a:endParaRPr sz="2000" b="0" i="0">
+              <a:solidFill>
+                <a:srgbClr val="000000"/>
+              </a:solidFill>
+              <a:latin typeface="Times New Roman" panose="02020603050405020304"/>
+              <a:ea typeface="宋体" panose="02010600030101010101" pitchFamily="2" charset="-122"/>
+              <a:cs typeface="宋体" panose="02010600030101010101" pitchFamily="2" charset="-122"/>
+            </a:endParaRPr>
           </a:p>
           <a:p>
             <a:pPr algn="l">
@@ -9227,12 +9349,20 @@
                 <a:solidFill>
                   <a:srgbClr val="000000"/>
                 </a:solidFill>
-                <a:latin typeface="Times New Roman"/>
-                <a:ea typeface="宋体"/>
-                <a:cs typeface="宋体"/>
-              </a:rPr>
-              <a:t>· 结果删掉 7 题、留 21 题。作者还把量表改名叫「自我描述量表」，让人更愿意如实作答。</a:t>
-            </a:r>
+                <a:latin typeface="Times New Roman" panose="02020603050405020304"/>
+                <a:ea typeface="宋体" panose="02010600030101010101" pitchFamily="2" charset="-122"/>
+                <a:cs typeface="宋体" panose="02010600030101010101" pitchFamily="2" charset="-122"/>
+              </a:rPr>
+              <a:t>① 极端组比较——看高分的人和低分的人，某道题答得是不是明显不同，区分不开的题删掉；② 同质性检验——看每道题和总分是不是一路，不一路的删掉。</a:t>
+            </a:r>
+            <a:endParaRPr sz="2000" b="0" i="0">
+              <a:solidFill>
+                <a:srgbClr val="000000"/>
+              </a:solidFill>
+              <a:latin typeface="Times New Roman" panose="02020603050405020304"/>
+              <a:ea typeface="宋体" panose="02010600030101010101" pitchFamily="2" charset="-122"/>
+              <a:cs typeface="宋体" panose="02010600030101010101" pitchFamily="2" charset="-122"/>
+            </a:endParaRPr>
           </a:p>
           <a:p>
             <a:pPr algn="l">
@@ -9251,12 +9381,52 @@
                 <a:solidFill>
                   <a:srgbClr val="000000"/>
                 </a:solidFill>
-                <a:latin typeface="Times New Roman"/>
-                <a:ea typeface="宋体"/>
-                <a:cs typeface="宋体"/>
-              </a:rPr>
-              <a:t>· 逻辑：题先经得起小范围检验，才敢大规模发。</a:t>
-            </a:r>
+                <a:latin typeface="Times New Roman" panose="02020603050405020304"/>
+                <a:ea typeface="宋体" panose="02010600030101010101" pitchFamily="2" charset="-122"/>
+                <a:cs typeface="宋体" panose="02010600030101010101" pitchFamily="2" charset="-122"/>
+              </a:rPr>
+              <a:t>· 结果删掉 7 题、留 21 题。作者还把量表改名叫「自我描述量表」，让人更愿意如实作答。</a:t>
+            </a:r>
+            <a:endParaRPr sz="2000" b="0" i="0">
+              <a:solidFill>
+                <a:srgbClr val="000000"/>
+              </a:solidFill>
+              <a:latin typeface="Times New Roman" panose="02020603050405020304"/>
+              <a:ea typeface="宋体" panose="02010600030101010101" pitchFamily="2" charset="-122"/>
+              <a:cs typeface="宋体" panose="02010600030101010101" pitchFamily="2" charset="-122"/>
+            </a:endParaRPr>
+          </a:p>
+          <a:p>
+            <a:pPr algn="l">
+              <a:lnSpc>
+                <a:spcPct val="130000"/>
+              </a:lnSpc>
+              <a:spcBef>
+                <a:spcPts val="0"/>
+              </a:spcBef>
+              <a:spcAft>
+                <a:spcPts val="500"/>
+              </a:spcAft>
+            </a:pPr>
+            <a:r>
+              <a:rPr sz="2000" b="0" i="0">
+                <a:solidFill>
+                  <a:srgbClr val="000000"/>
+                </a:solidFill>
+                <a:latin typeface="Times New Roman" panose="02020603050405020304"/>
+                <a:ea typeface="宋体" panose="02010600030101010101" pitchFamily="2" charset="-122"/>
+                <a:cs typeface="宋体" panose="02010600030101010101" pitchFamily="2" charset="-122"/>
+              </a:rPr>
+              <a:t>· 题先经得起小范围检验，才敢大规模发。</a:t>
+            </a:r>
+            <a:endParaRPr sz="2000" b="0" i="0">
+              <a:solidFill>
+                <a:srgbClr val="000000"/>
+              </a:solidFill>
+              <a:latin typeface="Times New Roman" panose="02020603050405020304"/>
+              <a:ea typeface="宋体" panose="02010600030101010101" pitchFamily="2" charset="-122"/>
+              <a:cs typeface="宋体" panose="02010600030101010101" pitchFamily="2" charset="-122"/>
+            </a:endParaRPr>
           </a:p>
         </p:txBody>
       </p:sp>
@@ -9277,7 +9447,7 @@
           <a:noFill/>
         </p:spPr>
         <p:txBody>
-          <a:bodyPr wrap="square" lIns="0" rIns="0" tIns="0" bIns="0" anchor="t">
+          <a:bodyPr wrap="square" lIns="0" tIns="0" rIns="0" bIns="0" anchor="t">
             <a:spAutoFit/>
           </a:bodyPr>
           <a:lstStyle/>
@@ -9298,12 +9468,20 @@
                 <a:solidFill>
                   <a:srgbClr val="404040"/>
                 </a:solidFill>
-                <a:latin typeface="Times New Roman"/>
-                <a:ea typeface="宋体"/>
-                <a:cs typeface="宋体"/>
+                <a:latin typeface="Times New Roman" panose="02020603050405020304"/>
+                <a:ea typeface="宋体" panose="02010600030101010101" pitchFamily="2" charset="-122"/>
+                <a:cs typeface="宋体" panose="02010600030101010101" pitchFamily="2" charset="-122"/>
               </a:rPr>
               <a:t>12 / 34</a:t>
             </a:r>
+            <a:endParaRPr sz="1000" b="0" i="0">
+              <a:solidFill>
+                <a:srgbClr val="404040"/>
+              </a:solidFill>
+              <a:latin typeface="Times New Roman" panose="02020603050405020304"/>
+              <a:ea typeface="宋体" panose="02010600030101010101" pitchFamily="2" charset="-122"/>
+              <a:cs typeface="宋体" panose="02010600030101010101" pitchFamily="2" charset="-122"/>
+            </a:endParaRPr>
           </a:p>
         </p:txBody>
       </p:sp>
@@ -9316,7 +9494,7 @@
 </file>
 
 <file path=ppt/slides/slide13.xml><?xml version="1.0" encoding="utf-8"?>
-<p:sld xmlns:a="http://schemas.openxmlformats.org/drawingml/2006/main" xmlns:p="http://schemas.openxmlformats.org/presentationml/2006/main" xmlns:r="http://schemas.openxmlformats.org/officeDocument/2006/relationships">
+<p:sld xmlns:a="http://schemas.openxmlformats.org/drawingml/2006/main" xmlns:r="http://schemas.openxmlformats.org/officeDocument/2006/relationships" xmlns:p="http://schemas.openxmlformats.org/presentationml/2006/main">
   <p:cSld>
     <p:spTree>
       <p:nvGrpSpPr>
@@ -9342,7 +9520,7 @@
           <a:noFill/>
         </p:spPr>
         <p:txBody>
-          <a:bodyPr wrap="square" lIns="0" rIns="0" tIns="0" bIns="0" anchor="t">
+          <a:bodyPr wrap="square" lIns="0" tIns="0" rIns="0" bIns="0" anchor="t">
             <a:spAutoFit/>
           </a:bodyPr>
           <a:lstStyle/>
@@ -9363,12 +9541,20 @@
                 <a:solidFill>
                   <a:srgbClr val="000000"/>
                 </a:solidFill>
-                <a:latin typeface="Times New Roman"/>
-                <a:ea typeface="黑体"/>
-                <a:cs typeface="黑体"/>
+                <a:latin typeface="Times New Roman" panose="02020603050405020304"/>
+                <a:ea typeface="黑体" panose="02010609060101010101" charset="-122"/>
+                <a:cs typeface="黑体" panose="02010609060101010101" charset="-122"/>
               </a:rPr>
               <a:t>第四步：正式发给 144 人，看信度</a:t>
             </a:r>
+            <a:endParaRPr sz="2300" b="1" i="0">
+              <a:solidFill>
+                <a:srgbClr val="000000"/>
+              </a:solidFill>
+              <a:latin typeface="Times New Roman" panose="02020603050405020304"/>
+              <a:ea typeface="黑体" panose="02010609060101010101" charset="-122"/>
+              <a:cs typeface="黑体" panose="02010609060101010101" charset="-122"/>
+            </a:endParaRPr>
           </a:p>
         </p:txBody>
       </p:sp>
@@ -9381,7 +9567,7 @@
           <p:nvPr/>
         </p:nvPicPr>
         <p:blipFill>
-          <a:blip r:embed="rId2"/>
+          <a:blip r:embed="rId1"/>
           <a:stretch>
             <a:fillRect/>
           </a:stretch>
@@ -9457,7 +9643,7 @@
           <a:noFill/>
         </p:spPr>
         <p:txBody>
-          <a:bodyPr wrap="square" lIns="0" rIns="0" tIns="0" bIns="0" anchor="t">
+          <a:bodyPr wrap="square" lIns="0" tIns="0" rIns="0" bIns="0" anchor="t">
             <a:spAutoFit/>
           </a:bodyPr>
           <a:lstStyle/>
@@ -9478,12 +9664,20 @@
                 <a:solidFill>
                   <a:srgbClr val="404040"/>
                 </a:solidFill>
-                <a:latin typeface="Times New Roman"/>
-                <a:ea typeface="宋体"/>
-                <a:cs typeface="宋体"/>
+                <a:latin typeface="Times New Roman" panose="02020603050405020304"/>
+                <a:ea typeface="宋体" panose="02010600030101010101" pitchFamily="2" charset="-122"/>
+                <a:cs typeface="宋体" panose="02010600030101010101" pitchFamily="2" charset="-122"/>
               </a:rPr>
               <a:t>总量表 Cronbach's α = .901</a:t>
             </a:r>
+            <a:endParaRPr sz="950" b="0" i="0">
+              <a:solidFill>
+                <a:srgbClr val="404040"/>
+              </a:solidFill>
+              <a:latin typeface="Times New Roman" panose="02020603050405020304"/>
+              <a:ea typeface="宋体" panose="02010600030101010101" pitchFamily="2" charset="-122"/>
+              <a:cs typeface="宋体" panose="02010600030101010101" pitchFamily="2" charset="-122"/>
+            </a:endParaRPr>
           </a:p>
         </p:txBody>
       </p:sp>
@@ -9504,7 +9698,7 @@
           <a:noFill/>
         </p:spPr>
         <p:txBody>
-          <a:bodyPr wrap="square" lIns="0" rIns="0" tIns="0" bIns="0" anchor="t">
+          <a:bodyPr wrap="square" lIns="0" tIns="0" rIns="0" bIns="0" anchor="t">
             <a:spAutoFit/>
           </a:bodyPr>
           <a:lstStyle/>
@@ -9525,12 +9719,20 @@
                 <a:solidFill>
                   <a:srgbClr val="000000"/>
                 </a:solidFill>
-                <a:latin typeface="Times New Roman"/>
-                <a:ea typeface="宋体"/>
-                <a:cs typeface="宋体"/>
+                <a:latin typeface="Times New Roman" panose="02020603050405020304"/>
+                <a:ea typeface="宋体" panose="02010600030101010101" pitchFamily="2" charset="-122"/>
+                <a:cs typeface="宋体" panose="02010600030101010101" pitchFamily="2" charset="-122"/>
               </a:rPr>
               <a:t>· 正式施测：144 名有近一学年笔记训练的学生。</a:t>
             </a:r>
+            <a:endParaRPr sz="2000" b="0" i="0">
+              <a:solidFill>
+                <a:srgbClr val="000000"/>
+              </a:solidFill>
+              <a:latin typeface="Times New Roman" panose="02020603050405020304"/>
+              <a:ea typeface="宋体" panose="02010600030101010101" pitchFamily="2" charset="-122"/>
+              <a:cs typeface="宋体" panose="02010600030101010101" pitchFamily="2" charset="-122"/>
+            </a:endParaRPr>
           </a:p>
           <a:p>
             <a:pPr algn="l">
@@ -9549,12 +9751,20 @@
                 <a:solidFill>
                   <a:srgbClr val="000000"/>
                 </a:solidFill>
-                <a:latin typeface="Times New Roman"/>
-                <a:ea typeface="宋体"/>
-                <a:cs typeface="宋体"/>
+                <a:latin typeface="Times New Roman" panose="02020603050405020304"/>
+                <a:ea typeface="宋体" panose="02010600030101010101" pitchFamily="2" charset="-122"/>
+                <a:cs typeface="宋体" panose="02010600030101010101" pitchFamily="2" charset="-122"/>
               </a:rPr>
               <a:t>· 信度 α = .901：α 是「题目之间一不一致」的指标，取值 0 到 1，越大越稳；≥ .7 算可用，≥ .9 是优秀。.901 说明这 21 题高度一致。</a:t>
             </a:r>
+            <a:endParaRPr sz="2000" b="0" i="0">
+              <a:solidFill>
+                <a:srgbClr val="000000"/>
+              </a:solidFill>
+              <a:latin typeface="Times New Roman" panose="02020603050405020304"/>
+              <a:ea typeface="宋体" panose="02010600030101010101" pitchFamily="2" charset="-122"/>
+              <a:cs typeface="宋体" panose="02010600030101010101" pitchFamily="2" charset="-122"/>
+            </a:endParaRPr>
           </a:p>
           <a:p>
             <a:pPr algn="l">
@@ -9573,12 +9783,20 @@
                 <a:solidFill>
                   <a:srgbClr val="000000"/>
                 </a:solidFill>
-                <a:latin typeface="Times New Roman"/>
-                <a:ea typeface="宋体"/>
-                <a:cs typeface="宋体"/>
+                <a:latin typeface="Times New Roman" panose="02020603050405020304"/>
+                <a:ea typeface="宋体" panose="02010600030101010101" pitchFamily="2" charset="-122"/>
+                <a:cs typeface="宋体" panose="02010600030101010101" pitchFamily="2" charset="-122"/>
               </a:rPr>
               <a:t>· 逻辑：先证明「测得稳」，这是后面一切结论的前提——量都量不稳，后面的效度就无从谈起。</a:t>
             </a:r>
+            <a:endParaRPr sz="2000" b="0" i="0">
+              <a:solidFill>
+                <a:srgbClr val="000000"/>
+              </a:solidFill>
+              <a:latin typeface="Times New Roman" panose="02020603050405020304"/>
+              <a:ea typeface="宋体" panose="02010600030101010101" pitchFamily="2" charset="-122"/>
+              <a:cs typeface="宋体" panose="02010600030101010101" pitchFamily="2" charset="-122"/>
+            </a:endParaRPr>
           </a:p>
         </p:txBody>
       </p:sp>
@@ -9599,7 +9817,7 @@
           <a:noFill/>
         </p:spPr>
         <p:txBody>
-          <a:bodyPr wrap="square" lIns="0" rIns="0" tIns="0" bIns="0" anchor="t">
+          <a:bodyPr wrap="square" lIns="0" tIns="0" rIns="0" bIns="0" anchor="t">
             <a:spAutoFit/>
           </a:bodyPr>
           <a:lstStyle/>
@@ -9620,12 +9838,20 @@
                 <a:solidFill>
                   <a:srgbClr val="404040"/>
                 </a:solidFill>
-                <a:latin typeface="Times New Roman"/>
-                <a:ea typeface="宋体"/>
-                <a:cs typeface="宋体"/>
+                <a:latin typeface="Times New Roman" panose="02020603050405020304"/>
+                <a:ea typeface="宋体" panose="02010600030101010101" pitchFamily="2" charset="-122"/>
+                <a:cs typeface="宋体" panose="02010600030101010101" pitchFamily="2" charset="-122"/>
               </a:rPr>
               <a:t>13 / 34</a:t>
             </a:r>
+            <a:endParaRPr sz="1000" b="0" i="0">
+              <a:solidFill>
+                <a:srgbClr val="404040"/>
+              </a:solidFill>
+              <a:latin typeface="Times New Roman" panose="02020603050405020304"/>
+              <a:ea typeface="宋体" panose="02010600030101010101" pitchFamily="2" charset="-122"/>
+              <a:cs typeface="宋体" panose="02010600030101010101" pitchFamily="2" charset="-122"/>
+            </a:endParaRPr>
           </a:p>
         </p:txBody>
       </p:sp>
@@ -9638,7 +9864,7 @@
 </file>
 
 <file path=ppt/slides/slide14.xml><?xml version="1.0" encoding="utf-8"?>
-<p:sld xmlns:a="http://schemas.openxmlformats.org/drawingml/2006/main" xmlns:p="http://schemas.openxmlformats.org/presentationml/2006/main" xmlns:r="http://schemas.openxmlformats.org/officeDocument/2006/relationships">
+<p:sld xmlns:a="http://schemas.openxmlformats.org/drawingml/2006/main" xmlns:r="http://schemas.openxmlformats.org/officeDocument/2006/relationships" xmlns:p="http://schemas.openxmlformats.org/presentationml/2006/main">
   <p:cSld>
     <p:spTree>
       <p:nvGrpSpPr>
@@ -9664,7 +9890,7 @@
           <a:noFill/>
         </p:spPr>
         <p:txBody>
-          <a:bodyPr wrap="square" lIns="0" rIns="0" tIns="0" bIns="0" anchor="t">
+          <a:bodyPr wrap="square" lIns="0" tIns="0" rIns="0" bIns="0" anchor="t">
             <a:spAutoFit/>
           </a:bodyPr>
           <a:lstStyle/>
@@ -9685,12 +9911,20 @@
                 <a:solidFill>
                   <a:srgbClr val="000000"/>
                 </a:solidFill>
-                <a:latin typeface="Times New Roman"/>
-                <a:ea typeface="黑体"/>
-                <a:cs typeface="黑体"/>
+                <a:latin typeface="Times New Roman" panose="02020603050405020304"/>
+                <a:ea typeface="黑体" panose="02010609060101010101" charset="-122"/>
+                <a:cs typeface="黑体" panose="02010609060101010101" charset="-122"/>
               </a:rPr>
               <a:t>第五步：证明「测得准」（上）</a:t>
             </a:r>
+            <a:endParaRPr sz="2300" b="1" i="0">
+              <a:solidFill>
+                <a:srgbClr val="000000"/>
+              </a:solidFill>
+              <a:latin typeface="Times New Roman" panose="02020603050405020304"/>
+              <a:ea typeface="黑体" panose="02010609060101010101" charset="-122"/>
+              <a:cs typeface="黑体" panose="02010609060101010101" charset="-122"/>
+            </a:endParaRPr>
           </a:p>
         </p:txBody>
       </p:sp>
@@ -9703,7 +9937,7 @@
           <p:nvPr/>
         </p:nvPicPr>
         <p:blipFill>
-          <a:blip r:embed="rId2"/>
+          <a:blip r:embed="rId1"/>
           <a:stretch>
             <a:fillRect/>
           </a:stretch>
@@ -9779,7 +10013,7 @@
           <a:noFill/>
         </p:spPr>
         <p:txBody>
-          <a:bodyPr wrap="square" lIns="0" rIns="0" tIns="0" bIns="0" anchor="t">
+          <a:bodyPr wrap="square" lIns="0" tIns="0" rIns="0" bIns="0" anchor="t">
             <a:spAutoFit/>
           </a:bodyPr>
           <a:lstStyle/>
@@ -9800,12 +10034,20 @@
                 <a:solidFill>
                   <a:srgbClr val="404040"/>
                 </a:solidFill>
-                <a:latin typeface="Times New Roman"/>
-                <a:ea typeface="宋体"/>
-                <a:cs typeface="宋体"/>
+                <a:latin typeface="Times New Roman" panose="02020603050405020304"/>
+                <a:ea typeface="宋体" panose="02010600030101010101" pitchFamily="2" charset="-122"/>
+                <a:cs typeface="宋体" panose="02010600030101010101" pitchFamily="2" charset="-122"/>
               </a:rPr>
               <a:t>内容效度 CVI = 1</a:t>
             </a:r>
+            <a:endParaRPr sz="950" b="0" i="0">
+              <a:solidFill>
+                <a:srgbClr val="404040"/>
+              </a:solidFill>
+              <a:latin typeface="Times New Roman" panose="02020603050405020304"/>
+              <a:ea typeface="宋体" panose="02010600030101010101" pitchFamily="2" charset="-122"/>
+              <a:cs typeface="宋体" panose="02010600030101010101" pitchFamily="2" charset="-122"/>
+            </a:endParaRPr>
           </a:p>
         </p:txBody>
       </p:sp>
@@ -9818,7 +10060,7 @@
           <p:nvPr/>
         </p:nvPicPr>
         <p:blipFill>
-          <a:blip r:embed="rId3"/>
+          <a:blip r:embed="rId2"/>
           <a:stretch>
             <a:fillRect/>
           </a:stretch>
@@ -9894,7 +10136,7 @@
           <a:noFill/>
         </p:spPr>
         <p:txBody>
-          <a:bodyPr wrap="square" lIns="0" rIns="0" tIns="0" bIns="0" anchor="t">
+          <a:bodyPr wrap="square" lIns="0" tIns="0" rIns="0" bIns="0" anchor="t">
             <a:spAutoFit/>
           </a:bodyPr>
           <a:lstStyle/>
@@ -9915,12 +10157,20 @@
                 <a:solidFill>
                   <a:srgbClr val="404040"/>
                 </a:solidFill>
-                <a:latin typeface="Times New Roman"/>
-                <a:ea typeface="宋体"/>
-                <a:cs typeface="宋体"/>
+                <a:latin typeface="Times New Roman" panose="02020603050405020304"/>
+                <a:ea typeface="宋体" panose="02010600030101010101" pitchFamily="2" charset="-122"/>
+                <a:cs typeface="宋体" panose="02010600030101010101" pitchFamily="2" charset="-122"/>
               </a:rPr>
               <a:t>因素分析 60.49%</a:t>
             </a:r>
+            <a:endParaRPr sz="950" b="0" i="0">
+              <a:solidFill>
+                <a:srgbClr val="404040"/>
+              </a:solidFill>
+              <a:latin typeface="Times New Roman" panose="02020603050405020304"/>
+              <a:ea typeface="宋体" panose="02010600030101010101" pitchFamily="2" charset="-122"/>
+              <a:cs typeface="宋体" panose="02010600030101010101" pitchFamily="2" charset="-122"/>
+            </a:endParaRPr>
           </a:p>
         </p:txBody>
       </p:sp>
@@ -9941,7 +10191,7 @@
           <a:noFill/>
         </p:spPr>
         <p:txBody>
-          <a:bodyPr wrap="square" lIns="0" rIns="0" tIns="0" bIns="0" anchor="t">
+          <a:bodyPr wrap="square" lIns="0" tIns="0" rIns="0" bIns="0" anchor="t">
             <a:spAutoFit/>
           </a:bodyPr>
           <a:lstStyle/>
@@ -9962,12 +10212,20 @@
                 <a:solidFill>
                   <a:srgbClr val="000000"/>
                 </a:solidFill>
-                <a:latin typeface="Times New Roman"/>
-                <a:ea typeface="宋体"/>
-                <a:cs typeface="宋体"/>
+                <a:latin typeface="Times New Roman" panose="02020603050405020304"/>
+                <a:ea typeface="宋体" panose="02010600030101010101" pitchFamily="2" charset="-122"/>
+                <a:cs typeface="宋体" panose="02010600030101010101" pitchFamily="2" charset="-122"/>
               </a:rPr>
               <a:t>· 光稳还不够，还要准——题是不是真在测「笔记熟练度」，而不是测成了别的东西。</a:t>
             </a:r>
+            <a:endParaRPr sz="2000" b="0" i="0">
+              <a:solidFill>
+                <a:srgbClr val="000000"/>
+              </a:solidFill>
+              <a:latin typeface="Times New Roman" panose="02020603050405020304"/>
+              <a:ea typeface="宋体" panose="02010600030101010101" pitchFamily="2" charset="-122"/>
+              <a:cs typeface="宋体" panose="02010600030101010101" pitchFamily="2" charset="-122"/>
+            </a:endParaRPr>
           </a:p>
           <a:p>
             <a:pPr algn="l">
@@ -9986,12 +10244,20 @@
                 <a:solidFill>
                   <a:srgbClr val="000000"/>
                 </a:solidFill>
-                <a:latin typeface="Times New Roman"/>
-                <a:ea typeface="宋体"/>
-                <a:cs typeface="宋体"/>
+                <a:latin typeface="Times New Roman" panose="02020603050405020304"/>
+                <a:ea typeface="宋体" panose="02010600030101010101" pitchFamily="2" charset="-122"/>
+                <a:cs typeface="宋体" panose="02010600030101010101" pitchFamily="2" charset="-122"/>
               </a:rPr>
               <a:t>· 内容效度：请 8 名专家看题目内容对不对、和维度对不对得上，结果 CVI = 1（满分），说明题目内容上没问题。</a:t>
             </a:r>
+            <a:endParaRPr sz="2000" b="0" i="0">
+              <a:solidFill>
+                <a:srgbClr val="000000"/>
+              </a:solidFill>
+              <a:latin typeface="Times New Roman" panose="02020603050405020304"/>
+              <a:ea typeface="宋体" panose="02010600030101010101" pitchFamily="2" charset="-122"/>
+              <a:cs typeface="宋体" panose="02010600030101010101" pitchFamily="2" charset="-122"/>
+            </a:endParaRPr>
           </a:p>
           <a:p>
             <a:pPr algn="l">
@@ -10010,12 +10276,20 @@
                 <a:solidFill>
                   <a:srgbClr val="000000"/>
                 </a:solidFill>
-                <a:latin typeface="Times New Roman"/>
-                <a:ea typeface="宋体"/>
-                <a:cs typeface="宋体"/>
+                <a:latin typeface="Times New Roman" panose="02020603050405020304"/>
+                <a:ea typeface="宋体" panose="02010600030101010101" pitchFamily="2" charset="-122"/>
+                <a:cs typeface="宋体" panose="02010600030101010101" pitchFamily="2" charset="-122"/>
               </a:rPr>
               <a:t>· 结构效度：做因素分析，让数据自己「分组」，结果正好分成预设的 4 组，解释 60.49% 的变异——数据自己长出了作者预设的结构。</a:t>
             </a:r>
+            <a:endParaRPr sz="2000" b="0" i="0">
+              <a:solidFill>
+                <a:srgbClr val="000000"/>
+              </a:solidFill>
+              <a:latin typeface="Times New Roman" panose="02020603050405020304"/>
+              <a:ea typeface="宋体" panose="02010600030101010101" pitchFamily="2" charset="-122"/>
+              <a:cs typeface="宋体" panose="02010600030101010101" pitchFamily="2" charset="-122"/>
+            </a:endParaRPr>
           </a:p>
         </p:txBody>
       </p:sp>
@@ -10036,7 +10310,7 @@
           <a:noFill/>
         </p:spPr>
         <p:txBody>
-          <a:bodyPr wrap="square" lIns="0" rIns="0" tIns="0" bIns="0" anchor="t">
+          <a:bodyPr wrap="square" lIns="0" tIns="0" rIns="0" bIns="0" anchor="t">
             <a:spAutoFit/>
           </a:bodyPr>
           <a:lstStyle/>
@@ -10057,12 +10331,20 @@
                 <a:solidFill>
                   <a:srgbClr val="404040"/>
                 </a:solidFill>
-                <a:latin typeface="Times New Roman"/>
-                <a:ea typeface="宋体"/>
-                <a:cs typeface="宋体"/>
+                <a:latin typeface="Times New Roman" panose="02020603050405020304"/>
+                <a:ea typeface="宋体" panose="02010600030101010101" pitchFamily="2" charset="-122"/>
+                <a:cs typeface="宋体" panose="02010600030101010101" pitchFamily="2" charset="-122"/>
               </a:rPr>
               <a:t>14 / 34</a:t>
             </a:r>
+            <a:endParaRPr sz="1000" b="0" i="0">
+              <a:solidFill>
+                <a:srgbClr val="404040"/>
+              </a:solidFill>
+              <a:latin typeface="Times New Roman" panose="02020603050405020304"/>
+              <a:ea typeface="宋体" panose="02010600030101010101" pitchFamily="2" charset="-122"/>
+              <a:cs typeface="宋体" panose="02010600030101010101" pitchFamily="2" charset="-122"/>
+            </a:endParaRPr>
           </a:p>
         </p:txBody>
       </p:sp>
@@ -10075,7 +10357,7 @@
 </file>
 
 <file path=ppt/slides/slide15.xml><?xml version="1.0" encoding="utf-8"?>
-<p:sld xmlns:a="http://schemas.openxmlformats.org/drawingml/2006/main" xmlns:p="http://schemas.openxmlformats.org/presentationml/2006/main" xmlns:r="http://schemas.openxmlformats.org/officeDocument/2006/relationships">
+<p:sld xmlns:a="http://schemas.openxmlformats.org/drawingml/2006/main" xmlns:r="http://schemas.openxmlformats.org/officeDocument/2006/relationships" xmlns:p="http://schemas.openxmlformats.org/presentationml/2006/main">
   <p:cSld>
     <p:spTree>
       <p:nvGrpSpPr>
@@ -10101,7 +10383,7 @@
           <a:noFill/>
         </p:spPr>
         <p:txBody>
-          <a:bodyPr wrap="square" lIns="0" rIns="0" tIns="0" bIns="0" anchor="t">
+          <a:bodyPr wrap="square" lIns="0" tIns="0" rIns="0" bIns="0" anchor="t">
             <a:spAutoFit/>
           </a:bodyPr>
           <a:lstStyle/>
@@ -10122,12 +10404,20 @@
                 <a:solidFill>
                   <a:srgbClr val="000000"/>
                 </a:solidFill>
-                <a:latin typeface="Times New Roman"/>
-                <a:ea typeface="黑体"/>
-                <a:cs typeface="黑体"/>
+                <a:latin typeface="Times New Roman" panose="02020603050405020304"/>
+                <a:ea typeface="黑体" panose="02010609060101010101" charset="-122"/>
+                <a:cs typeface="黑体" panose="02010609060101010101" charset="-122"/>
               </a:rPr>
               <a:t>第五步：证明「测得准」（下）</a:t>
             </a:r>
+            <a:endParaRPr sz="2300" b="1" i="0">
+              <a:solidFill>
+                <a:srgbClr val="000000"/>
+              </a:solidFill>
+              <a:latin typeface="Times New Roman" panose="02020603050405020304"/>
+              <a:ea typeface="黑体" panose="02010609060101010101" charset="-122"/>
+              <a:cs typeface="黑体" panose="02010609060101010101" charset="-122"/>
+            </a:endParaRPr>
           </a:p>
         </p:txBody>
       </p:sp>
@@ -10140,7 +10430,7 @@
           <p:nvPr/>
         </p:nvPicPr>
         <p:blipFill>
-          <a:blip r:embed="rId2"/>
+          <a:blip r:embed="rId1"/>
           <a:stretch>
             <a:fillRect/>
           </a:stretch>
@@ -10216,7 +10506,7 @@
           <a:noFill/>
         </p:spPr>
         <p:txBody>
-          <a:bodyPr wrap="square" lIns="0" rIns="0" tIns="0" bIns="0" anchor="t">
+          <a:bodyPr wrap="square" lIns="0" tIns="0" rIns="0" bIns="0" anchor="t">
             <a:spAutoFit/>
           </a:bodyPr>
           <a:lstStyle/>
@@ -10237,12 +10527,20 @@
                 <a:solidFill>
                   <a:srgbClr val="404040"/>
                 </a:solidFill>
-                <a:latin typeface="Times New Roman"/>
-                <a:ea typeface="宋体"/>
-                <a:cs typeface="宋体"/>
+                <a:latin typeface="Times New Roman" panose="02020603050405020304"/>
+                <a:ea typeface="宋体" panose="02010600030101010101" pitchFamily="2" charset="-122"/>
+                <a:cs typeface="宋体" panose="02010600030101010101" pitchFamily="2" charset="-122"/>
               </a:rPr>
               <a:t>效标系数 .473 / .539 / .556</a:t>
             </a:r>
+            <a:endParaRPr sz="950" b="0" i="0">
+              <a:solidFill>
+                <a:srgbClr val="404040"/>
+              </a:solidFill>
+              <a:latin typeface="Times New Roman" panose="02020603050405020304"/>
+              <a:ea typeface="宋体" panose="02010600030101010101" pitchFamily="2" charset="-122"/>
+              <a:cs typeface="宋体" panose="02010600030101010101" pitchFamily="2" charset="-122"/>
+            </a:endParaRPr>
           </a:p>
         </p:txBody>
       </p:sp>
@@ -10263,7 +10561,7 @@
           <a:noFill/>
         </p:spPr>
         <p:txBody>
-          <a:bodyPr wrap="square" lIns="0" rIns="0" tIns="0" bIns="0" anchor="t">
+          <a:bodyPr wrap="square" lIns="0" tIns="0" rIns="0" bIns="0" anchor="t">
             <a:spAutoFit/>
           </a:bodyPr>
           <a:lstStyle/>
@@ -10284,12 +10582,20 @@
                 <a:solidFill>
                   <a:srgbClr val="000000"/>
                 </a:solidFill>
-                <a:latin typeface="Times New Roman"/>
-                <a:ea typeface="宋体"/>
-                <a:cs typeface="宋体"/>
+                <a:latin typeface="Times New Roman" panose="02020603050405020304"/>
+                <a:ea typeface="宋体" panose="02010600030101010101" pitchFamily="2" charset="-122"/>
+                <a:cs typeface="宋体" panose="02010600030101010101" pitchFamily="2" charset="-122"/>
               </a:rPr>
               <a:t>· 效标关联效度：拿量表分数，和一个已知的「外部标准」去比，看对不对得上。</a:t>
             </a:r>
+            <a:endParaRPr sz="2000" b="0" i="0">
+              <a:solidFill>
+                <a:srgbClr val="000000"/>
+              </a:solidFill>
+              <a:latin typeface="Times New Roman" panose="02020603050405020304"/>
+              <a:ea typeface="宋体" panose="02010600030101010101" pitchFamily="2" charset="-122"/>
+              <a:cs typeface="宋体" panose="02010600030101010101" pitchFamily="2" charset="-122"/>
+            </a:endParaRPr>
           </a:p>
           <a:p>
             <a:pPr algn="l">
@@ -10308,12 +10614,20 @@
                 <a:solidFill>
                   <a:srgbClr val="000000"/>
                 </a:solidFill>
-                <a:latin typeface="Times New Roman"/>
-                <a:ea typeface="宋体"/>
-                <a:cs typeface="宋体"/>
+                <a:latin typeface="Times New Roman" panose="02020603050405020304"/>
+                <a:ea typeface="宋体" panose="02010600030101010101" pitchFamily="2" charset="-122"/>
+                <a:cs typeface="宋体" panose="02010600030101010101" pitchFamily="2" charset="-122"/>
               </a:rPr>
               <a:t>· 结果：量表分数和练习量（r=.473）、学习动机（r=.539）、口译绩效（r=.556）都显著正相关。</a:t>
             </a:r>
+            <a:endParaRPr sz="2000" b="0" i="0">
+              <a:solidFill>
+                <a:srgbClr val="000000"/>
+              </a:solidFill>
+              <a:latin typeface="Times New Roman" panose="02020603050405020304"/>
+              <a:ea typeface="宋体" panose="02010600030101010101" pitchFamily="2" charset="-122"/>
+              <a:cs typeface="宋体" panose="02010600030101010101" pitchFamily="2" charset="-122"/>
+            </a:endParaRPr>
           </a:p>
           <a:p>
             <a:pPr algn="l">
@@ -10332,12 +10646,20 @@
                 <a:solidFill>
                   <a:srgbClr val="000000"/>
                 </a:solidFill>
-                <a:latin typeface="Times New Roman"/>
-                <a:ea typeface="宋体"/>
-                <a:cs typeface="宋体"/>
+                <a:latin typeface="Times New Roman" panose="02020603050405020304"/>
+                <a:ea typeface="宋体" panose="02010600030101010101" pitchFamily="2" charset="-122"/>
+                <a:cs typeface="宋体" panose="02010600030101010101" pitchFamily="2" charset="-122"/>
               </a:rPr>
               <a:t>· 含义：练得多、动机强、口译好的学生，笔记熟练度分数也高，方向完全合理。</a:t>
             </a:r>
+            <a:endParaRPr sz="2000" b="0" i="0">
+              <a:solidFill>
+                <a:srgbClr val="000000"/>
+              </a:solidFill>
+              <a:latin typeface="Times New Roman" panose="02020603050405020304"/>
+              <a:ea typeface="宋体" panose="02010600030101010101" pitchFamily="2" charset="-122"/>
+              <a:cs typeface="宋体" panose="02010600030101010101" pitchFamily="2" charset="-122"/>
+            </a:endParaRPr>
           </a:p>
           <a:p>
             <a:pPr algn="l">
@@ -10356,12 +10678,20 @@
                 <a:solidFill>
                   <a:srgbClr val="000000"/>
                 </a:solidFill>
-                <a:latin typeface="Times New Roman"/>
-                <a:ea typeface="宋体"/>
-                <a:cs typeface="宋体"/>
+                <a:latin typeface="Times New Roman" panose="02020603050405020304"/>
+                <a:ea typeface="宋体" panose="02010600030101010101" pitchFamily="2" charset="-122"/>
+                <a:cs typeface="宋体" panose="02010600030101010101" pitchFamily="2" charset="-122"/>
               </a:rPr>
               <a:t>· 逻辑：信度 + 三种效度都过关，才能说「这份量表真的测到了笔记熟练度」。</a:t>
             </a:r>
+            <a:endParaRPr sz="2000" b="0" i="0">
+              <a:solidFill>
+                <a:srgbClr val="000000"/>
+              </a:solidFill>
+              <a:latin typeface="Times New Roman" panose="02020603050405020304"/>
+              <a:ea typeface="宋体" panose="02010600030101010101" pitchFamily="2" charset="-122"/>
+              <a:cs typeface="宋体" panose="02010600030101010101" pitchFamily="2" charset="-122"/>
+            </a:endParaRPr>
           </a:p>
         </p:txBody>
       </p:sp>
@@ -10382,7 +10712,7 @@
           <a:noFill/>
         </p:spPr>
         <p:txBody>
-          <a:bodyPr wrap="square" lIns="0" rIns="0" tIns="0" bIns="0" anchor="t">
+          <a:bodyPr wrap="square" lIns="0" tIns="0" rIns="0" bIns="0" anchor="t">
             <a:spAutoFit/>
           </a:bodyPr>
           <a:lstStyle/>
@@ -10403,12 +10733,20 @@
                 <a:solidFill>
                   <a:srgbClr val="404040"/>
                 </a:solidFill>
-                <a:latin typeface="Times New Roman"/>
-                <a:ea typeface="宋体"/>
-                <a:cs typeface="宋体"/>
+                <a:latin typeface="Times New Roman" panose="02020603050405020304"/>
+                <a:ea typeface="宋体" panose="02010600030101010101" pitchFamily="2" charset="-122"/>
+                <a:cs typeface="宋体" panose="02010600030101010101" pitchFamily="2" charset="-122"/>
               </a:rPr>
               <a:t>15 / 34</a:t>
             </a:r>
+            <a:endParaRPr sz="1000" b="0" i="0">
+              <a:solidFill>
+                <a:srgbClr val="404040"/>
+              </a:solidFill>
+              <a:latin typeface="Times New Roman" panose="02020603050405020304"/>
+              <a:ea typeface="宋体" panose="02010600030101010101" pitchFamily="2" charset="-122"/>
+              <a:cs typeface="宋体" panose="02010600030101010101" pitchFamily="2" charset="-122"/>
+            </a:endParaRPr>
           </a:p>
         </p:txBody>
       </p:sp>
@@ -10421,7 +10759,7 @@
 </file>
 
 <file path=ppt/slides/slide16.xml><?xml version="1.0" encoding="utf-8"?>
-<p:sld xmlns:a="http://schemas.openxmlformats.org/drawingml/2006/main" xmlns:p="http://schemas.openxmlformats.org/presentationml/2006/main" xmlns:r="http://schemas.openxmlformats.org/officeDocument/2006/relationships">
+<p:sld xmlns:a="http://schemas.openxmlformats.org/drawingml/2006/main" xmlns:r="http://schemas.openxmlformats.org/officeDocument/2006/relationships" xmlns:p="http://schemas.openxmlformats.org/presentationml/2006/main">
   <p:cSld>
     <p:spTree>
       <p:nvGrpSpPr>
@@ -10447,7 +10785,7 @@
           <a:noFill/>
         </p:spPr>
         <p:txBody>
-          <a:bodyPr wrap="square" lIns="0" rIns="0" tIns="0" bIns="0" anchor="t">
+          <a:bodyPr wrap="square" lIns="0" tIns="0" rIns="0" bIns="0" anchor="t">
             <a:spAutoFit/>
           </a:bodyPr>
           <a:lstStyle/>
@@ -10468,12 +10806,20 @@
                 <a:solidFill>
                   <a:srgbClr val="000000"/>
                 </a:solidFill>
-                <a:latin typeface="Times New Roman"/>
-                <a:ea typeface="黑体"/>
-                <a:cs typeface="黑体"/>
+                <a:latin typeface="Times New Roman" panose="02020603050405020304"/>
+                <a:ea typeface="黑体" panose="02010609060101010101" charset="-122"/>
+                <a:cs typeface="黑体" panose="02010609060101010101" charset="-122"/>
               </a:rPr>
               <a:t>正例小结：一条走通的证据链</a:t>
             </a:r>
+            <a:endParaRPr sz="2300" b="1" i="0">
+              <a:solidFill>
+                <a:srgbClr val="000000"/>
+              </a:solidFill>
+              <a:latin typeface="Times New Roman" panose="02020603050405020304"/>
+              <a:ea typeface="黑体" panose="02010609060101010101" charset="-122"/>
+              <a:cs typeface="黑体" panose="02010609060101010101" charset="-122"/>
+            </a:endParaRPr>
           </a:p>
         </p:txBody>
       </p:sp>
@@ -10494,7 +10840,7 @@
           <a:noFill/>
         </p:spPr>
         <p:txBody>
-          <a:bodyPr wrap="square" lIns="0" rIns="0" tIns="0" bIns="0" anchor="t">
+          <a:bodyPr wrap="square" lIns="0" tIns="0" rIns="0" bIns="0" anchor="t">
             <a:spAutoFit/>
           </a:bodyPr>
           <a:lstStyle/>
@@ -10515,12 +10861,20 @@
                 <a:solidFill>
                   <a:srgbClr val="000000"/>
                 </a:solidFill>
-                <a:latin typeface="Times New Roman"/>
-                <a:ea typeface="宋体"/>
-                <a:cs typeface="宋体"/>
+                <a:latin typeface="Times New Roman" panose="02020603050405020304"/>
+                <a:ea typeface="宋体" panose="02010600030101010101" pitchFamily="2" charset="-122"/>
+                <a:cs typeface="宋体" panose="02010600030101010101" pitchFamily="2" charset="-122"/>
               </a:rPr>
               <a:t>· 这篇论文的完整逻辑，就是围绕「熟练度能不能测」这一个问题，一步步给出证据：</a:t>
             </a:r>
+            <a:endParaRPr sz="2000" b="0" i="0">
+              <a:solidFill>
+                <a:srgbClr val="000000"/>
+              </a:solidFill>
+              <a:latin typeface="Times New Roman" panose="02020603050405020304"/>
+              <a:ea typeface="宋体" panose="02010600030101010101" pitchFamily="2" charset="-122"/>
+              <a:cs typeface="宋体" panose="02010600030101010101" pitchFamily="2" charset="-122"/>
+            </a:endParaRPr>
           </a:p>
           <a:p>
             <a:pPr algn="l">
@@ -10539,12 +10893,20 @@
                 <a:solidFill>
                   <a:srgbClr val="000000"/>
                 </a:solidFill>
-                <a:latin typeface="Times New Roman"/>
-                <a:ea typeface="宋体"/>
-                <a:cs typeface="宋体"/>
+                <a:latin typeface="Times New Roman" panose="02020603050405020304"/>
+                <a:ea typeface="宋体" panose="02010600030101010101" pitchFamily="2" charset="-122"/>
+                <a:cs typeface="宋体" panose="02010600030101010101" pitchFamily="2" charset="-122"/>
               </a:rPr>
               <a:t>· 问题 → 答案的对应：研究问题「熟练度能不能用自评量表测出来」，最终结论「能——信度 α=.901，内容、结构、效标三种效度都过关」。</a:t>
             </a:r>
+            <a:endParaRPr sz="2000" b="0" i="0">
+              <a:solidFill>
+                <a:srgbClr val="000000"/>
+              </a:solidFill>
+              <a:latin typeface="Times New Roman" panose="02020603050405020304"/>
+              <a:ea typeface="宋体" panose="02010600030101010101" pitchFamily="2" charset="-122"/>
+              <a:cs typeface="宋体" panose="02010600030101010101" pitchFamily="2" charset="-122"/>
+            </a:endParaRPr>
           </a:p>
           <a:p>
             <a:pPr algn="l">
@@ -10563,12 +10925,20 @@
                 <a:solidFill>
                   <a:srgbClr val="000000"/>
                 </a:solidFill>
-                <a:latin typeface="Times New Roman"/>
-                <a:ea typeface="宋体"/>
-                <a:cs typeface="宋体"/>
+                <a:latin typeface="Times New Roman" panose="02020603050405020304"/>
+                <a:ea typeface="宋体" panose="02010600030101010101" pitchFamily="2" charset="-122"/>
+                <a:cs typeface="宋体" panose="02010600030101010101" pitchFamily="2" charset="-122"/>
               </a:rPr>
               <a:t>· 每一步都为下一步打基础：定义构念（日志＋访谈）→ 编题（74→28→21）→ 试测 → 施测（144 人）→ 检验信度和效度。</a:t>
             </a:r>
+            <a:endParaRPr sz="2000" b="0" i="0">
+              <a:solidFill>
+                <a:srgbClr val="000000"/>
+              </a:solidFill>
+              <a:latin typeface="Times New Roman" panose="02020603050405020304"/>
+              <a:ea typeface="宋体" panose="02010600030101010101" pitchFamily="2" charset="-122"/>
+              <a:cs typeface="宋体" panose="02010600030101010101" pitchFamily="2" charset="-122"/>
+            </a:endParaRPr>
           </a:p>
           <a:p>
             <a:pPr algn="l">
@@ -10587,12 +10957,20 @@
                 <a:solidFill>
                   <a:srgbClr val="000000"/>
                 </a:solidFill>
-                <a:latin typeface="Times New Roman"/>
-                <a:ea typeface="宋体"/>
-                <a:cs typeface="宋体"/>
+                <a:latin typeface="Times New Roman" panose="02020603050405020304"/>
+                <a:ea typeface="宋体" panose="02010600030101010101" pitchFamily="2" charset="-122"/>
+                <a:cs typeface="宋体" panose="02010600030101010101" pitchFamily="2" charset="-122"/>
               </a:rPr>
               <a:t>· 因为它每一步都交代了「怎么做的、为什么这么做、得到什么」，所以最后的结论站得住。</a:t>
             </a:r>
+            <a:endParaRPr sz="2000" b="0" i="0">
+              <a:solidFill>
+                <a:srgbClr val="000000"/>
+              </a:solidFill>
+              <a:latin typeface="Times New Roman" panose="02020603050405020304"/>
+              <a:ea typeface="宋体" panose="02010600030101010101" pitchFamily="2" charset="-122"/>
+              <a:cs typeface="宋体" panose="02010600030101010101" pitchFamily="2" charset="-122"/>
+            </a:endParaRPr>
           </a:p>
         </p:txBody>
       </p:sp>
@@ -10613,7 +10991,7 @@
           <a:noFill/>
         </p:spPr>
         <p:txBody>
-          <a:bodyPr wrap="square" lIns="0" rIns="0" tIns="0" bIns="0" anchor="t">
+          <a:bodyPr wrap="square" lIns="0" tIns="0" rIns="0" bIns="0" anchor="t">
             <a:spAutoFit/>
           </a:bodyPr>
           <a:lstStyle/>
@@ -10634,12 +11012,20 @@
                 <a:solidFill>
                   <a:srgbClr val="404040"/>
                 </a:solidFill>
-                <a:latin typeface="Times New Roman"/>
-                <a:ea typeface="宋体"/>
-                <a:cs typeface="宋体"/>
+                <a:latin typeface="Times New Roman" panose="02020603050405020304"/>
+                <a:ea typeface="宋体" panose="02010600030101010101" pitchFamily="2" charset="-122"/>
+                <a:cs typeface="宋体" panose="02010600030101010101" pitchFamily="2" charset="-122"/>
               </a:rPr>
               <a:t>16 / 34</a:t>
             </a:r>
+            <a:endParaRPr sz="1000" b="0" i="0">
+              <a:solidFill>
+                <a:srgbClr val="404040"/>
+              </a:solidFill>
+              <a:latin typeface="Times New Roman" panose="02020603050405020304"/>
+              <a:ea typeface="宋体" panose="02010600030101010101" pitchFamily="2" charset="-122"/>
+              <a:cs typeface="宋体" panose="02010600030101010101" pitchFamily="2" charset="-122"/>
+            </a:endParaRPr>
           </a:p>
         </p:txBody>
       </p:sp>
@@ -10652,7 +11038,7 @@
 </file>
 
 <file path=ppt/slides/slide17.xml><?xml version="1.0" encoding="utf-8"?>
-<p:sld xmlns:a="http://schemas.openxmlformats.org/drawingml/2006/main" xmlns:p="http://schemas.openxmlformats.org/presentationml/2006/main" xmlns:r="http://schemas.openxmlformats.org/officeDocument/2006/relationships">
+<p:sld xmlns:a="http://schemas.openxmlformats.org/drawingml/2006/main" xmlns:r="http://schemas.openxmlformats.org/officeDocument/2006/relationships" xmlns:p="http://schemas.openxmlformats.org/presentationml/2006/main">
   <p:cSld>
     <p:spTree>
       <p:nvGrpSpPr>
@@ -10766,7 +11152,7 @@
           <a:noFill/>
         </p:spPr>
         <p:txBody>
-          <a:bodyPr wrap="square" lIns="0" rIns="0" tIns="0" bIns="0" anchor="t">
+          <a:bodyPr wrap="square" lIns="0" tIns="0" rIns="0" bIns="0" anchor="t">
             <a:spAutoFit/>
           </a:bodyPr>
           <a:lstStyle/>
@@ -10787,12 +11173,20 @@
                 <a:solidFill>
                   <a:srgbClr val="FFFFFF"/>
                 </a:solidFill>
-                <a:latin typeface="Times New Roman"/>
-                <a:ea typeface="宋体"/>
-                <a:cs typeface="宋体"/>
+                <a:latin typeface="Times New Roman" panose="02020603050405020304"/>
+                <a:ea typeface="宋体" panose="02010600030101010101" pitchFamily="2" charset="-122"/>
+                <a:cs typeface="宋体" panose="02010600030101010101" pitchFamily="2" charset="-122"/>
               </a:rPr>
               <a:t>03</a:t>
             </a:r>
+            <a:endParaRPr sz="9600" b="0" i="0">
+              <a:solidFill>
+                <a:srgbClr val="FFFFFF"/>
+              </a:solidFill>
+              <a:latin typeface="Times New Roman" panose="02020603050405020304"/>
+              <a:ea typeface="宋体" panose="02010600030101010101" pitchFamily="2" charset="-122"/>
+              <a:cs typeface="宋体" panose="02010600030101010101" pitchFamily="2" charset="-122"/>
+            </a:endParaRPr>
           </a:p>
         </p:txBody>
       </p:sp>
@@ -10804,8 +11198,8 @@
         </p:nvSpPr>
         <p:spPr>
           <a:xfrm>
-            <a:off x="3566160" y="3063240"/>
-            <a:ext cx="5303520" cy="1280160"/>
+            <a:off x="3521710" y="2966720"/>
+            <a:ext cx="5303520" cy="1484630"/>
           </a:xfrm>
           <a:prstGeom prst="rect">
             <a:avLst/>
@@ -10813,12 +11207,12 @@
           <a:noFill/>
         </p:spPr>
         <p:txBody>
-          <a:bodyPr wrap="square" lIns="0" rIns="0" tIns="0" bIns="0" anchor="t">
+          <a:bodyPr wrap="square" lIns="0" tIns="0" rIns="0" bIns="0" anchor="t">
             <a:spAutoFit/>
           </a:bodyPr>
           <a:lstStyle/>
           <a:p>
-            <a:pPr algn="l">
+            <a:pPr algn="ctr">
               <a:lnSpc>
                 <a:spcPct val="115000"/>
               </a:lnSpc>
@@ -10834,12 +11228,53 @@
                 <a:solidFill>
                   <a:srgbClr val="000000"/>
                 </a:solidFill>
-                <a:latin typeface="Times New Roman"/>
-                <a:ea typeface="黑体"/>
-                <a:cs typeface="黑体"/>
-              </a:rPr>
-              <a:t>反例：一份态度问卷问题出在哪</a:t>
-            </a:r>
+                <a:latin typeface="Times New Roman" panose="02020603050405020304"/>
+                <a:ea typeface="黑体" panose="02010609060101010101" charset="-122"/>
+                <a:cs typeface="黑体" panose="02010609060101010101" charset="-122"/>
+              </a:rPr>
+              <a:t>反例：</a:t>
+            </a:r>
+            <a:r>
+              <a:rPr sz="2800" b="1">
+                <a:solidFill>
+                  <a:srgbClr val="000000"/>
+                </a:solidFill>
+                <a:latin typeface="Times New Roman" panose="02020603050405020304"/>
+                <a:ea typeface="黑体" panose="02010609060101010101" charset="-122"/>
+                <a:cs typeface="黑体" panose="02010609060101010101" charset="-122"/>
+                <a:sym typeface="+mn-ea"/>
+              </a:rPr>
+              <a:t>机器翻译译后编辑（MTPE）态度问卷</a:t>
+            </a:r>
+            <a:endParaRPr sz="2800" b="1" i="0">
+              <a:solidFill>
+                <a:srgbClr val="000000"/>
+              </a:solidFill>
+              <a:latin typeface="Times New Roman" panose="02020603050405020304"/>
+              <a:ea typeface="黑体" panose="02010609060101010101" charset="-122"/>
+              <a:cs typeface="黑体" panose="02010609060101010101" charset="-122"/>
+            </a:endParaRPr>
+          </a:p>
+          <a:p>
+            <a:pPr algn="ctr">
+              <a:lnSpc>
+                <a:spcPct val="115000"/>
+              </a:lnSpc>
+              <a:spcBef>
+                <a:spcPts val="0"/>
+              </a:spcBef>
+              <a:spcAft>
+                <a:spcPts val="0"/>
+              </a:spcAft>
+            </a:pPr>
+            <a:endParaRPr sz="2800" b="1" i="0">
+              <a:solidFill>
+                <a:srgbClr val="000000"/>
+              </a:solidFill>
+              <a:latin typeface="Times New Roman" panose="02020603050405020304"/>
+              <a:ea typeface="黑体" panose="02010609060101010101" charset="-122"/>
+              <a:cs typeface="黑体" panose="02010609060101010101" charset="-122"/>
+            </a:endParaRPr>
           </a:p>
         </p:txBody>
       </p:sp>
@@ -10860,7 +11295,7 @@
           <a:noFill/>
         </p:spPr>
         <p:txBody>
-          <a:bodyPr wrap="square" lIns="0" rIns="0" tIns="0" bIns="0" anchor="t">
+          <a:bodyPr wrap="square" lIns="0" tIns="0" rIns="0" bIns="0" anchor="t">
             <a:spAutoFit/>
           </a:bodyPr>
           <a:lstStyle/>
@@ -10881,12 +11316,20 @@
                 <a:solidFill>
                   <a:srgbClr val="404040"/>
                 </a:solidFill>
-                <a:latin typeface="Times New Roman"/>
-                <a:ea typeface="宋体"/>
-                <a:cs typeface="宋体"/>
+                <a:latin typeface="Times New Roman" panose="02020603050405020304"/>
+                <a:ea typeface="宋体" panose="02010600030101010101" pitchFamily="2" charset="-122"/>
+                <a:cs typeface="宋体" panose="02010600030101010101" pitchFamily="2" charset="-122"/>
               </a:rPr>
               <a:t>17 / 34</a:t>
             </a:r>
+            <a:endParaRPr sz="1000" b="0" i="0">
+              <a:solidFill>
+                <a:srgbClr val="404040"/>
+              </a:solidFill>
+              <a:latin typeface="Times New Roman" panose="02020603050405020304"/>
+              <a:ea typeface="宋体" panose="02010600030101010101" pitchFamily="2" charset="-122"/>
+              <a:cs typeface="宋体" panose="02010600030101010101" pitchFamily="2" charset="-122"/>
+            </a:endParaRPr>
           </a:p>
         </p:txBody>
       </p:sp>
@@ -10899,7 +11342,7 @@
 </file>
 
 <file path=ppt/slides/slide18.xml><?xml version="1.0" encoding="utf-8"?>
-<p:sld xmlns:a="http://schemas.openxmlformats.org/drawingml/2006/main" xmlns:p="http://schemas.openxmlformats.org/presentationml/2006/main" xmlns:r="http://schemas.openxmlformats.org/officeDocument/2006/relationships">
+<p:sld xmlns:a="http://schemas.openxmlformats.org/drawingml/2006/main" xmlns:r="http://schemas.openxmlformats.org/officeDocument/2006/relationships" xmlns:p="http://schemas.openxmlformats.org/presentationml/2006/main">
   <p:cSld>
     <p:spTree>
       <p:nvGrpSpPr>
@@ -10925,7 +11368,7 @@
           <a:noFill/>
         </p:spPr>
         <p:txBody>
-          <a:bodyPr wrap="square" lIns="0" rIns="0" tIns="0" bIns="0" anchor="t">
+          <a:bodyPr wrap="square" lIns="0" tIns="0" rIns="0" bIns="0" anchor="t">
             <a:spAutoFit/>
           </a:bodyPr>
           <a:lstStyle/>
@@ -10946,12 +11389,20 @@
                 <a:solidFill>
                   <a:srgbClr val="000000"/>
                 </a:solidFill>
-                <a:latin typeface="Times New Roman"/>
-                <a:ea typeface="黑体"/>
-                <a:cs typeface="黑体"/>
+                <a:latin typeface="Times New Roman" panose="02020603050405020304"/>
+                <a:ea typeface="黑体" panose="02010609060101010101" charset="-122"/>
+                <a:cs typeface="黑体" panose="02010609060101010101" charset="-122"/>
               </a:rPr>
               <a:t>反例论文与它用的「策略」</a:t>
             </a:r>
+            <a:endParaRPr sz="2300" b="1" i="0">
+              <a:solidFill>
+                <a:srgbClr val="000000"/>
+              </a:solidFill>
+              <a:latin typeface="Times New Roman" panose="02020603050405020304"/>
+              <a:ea typeface="黑体" panose="02010609060101010101" charset="-122"/>
+              <a:cs typeface="黑体" panose="02010609060101010101" charset="-122"/>
+            </a:endParaRPr>
           </a:p>
         </p:txBody>
       </p:sp>
@@ -10964,7 +11415,7 @@
           <p:nvPr/>
         </p:nvPicPr>
         <p:blipFill>
-          <a:blip r:embed="rId2"/>
+          <a:blip r:embed="rId1"/>
           <a:stretch>
             <a:fillRect/>
           </a:stretch>
@@ -11040,7 +11491,7 @@
           <a:noFill/>
         </p:spPr>
         <p:txBody>
-          <a:bodyPr wrap="square" lIns="0" rIns="0" tIns="0" bIns="0" anchor="t">
+          <a:bodyPr wrap="square" lIns="0" tIns="0" rIns="0" bIns="0" anchor="t">
             <a:spAutoFit/>
           </a:bodyPr>
           <a:lstStyle/>
@@ -11061,12 +11512,20 @@
                 <a:solidFill>
                   <a:srgbClr val="404040"/>
                 </a:solidFill>
-                <a:latin typeface="Times New Roman"/>
-                <a:ea typeface="宋体"/>
-                <a:cs typeface="宋体"/>
+                <a:latin typeface="Times New Roman" panose="02020603050405020304"/>
+                <a:ea typeface="宋体" panose="02010600030101010101" pitchFamily="2" charset="-122"/>
+                <a:cs typeface="宋体" panose="02010600030101010101" pitchFamily="2" charset="-122"/>
               </a:rPr>
               <a:t>论文首页</a:t>
             </a:r>
+            <a:endParaRPr sz="950" b="0" i="0">
+              <a:solidFill>
+                <a:srgbClr val="404040"/>
+              </a:solidFill>
+              <a:latin typeface="Times New Roman" panose="02020603050405020304"/>
+              <a:ea typeface="宋体" panose="02010600030101010101" pitchFamily="2" charset="-122"/>
+              <a:cs typeface="宋体" panose="02010600030101010101" pitchFamily="2" charset="-122"/>
+            </a:endParaRPr>
           </a:p>
         </p:txBody>
       </p:sp>
@@ -11078,8 +11537,8 @@
         </p:nvSpPr>
         <p:spPr>
           <a:xfrm>
-            <a:off x="640080" y="1874519"/>
-            <a:ext cx="10881360" cy="1965960"/>
+            <a:off x="640080" y="1689734"/>
+            <a:ext cx="10881360" cy="2592705"/>
           </a:xfrm>
           <a:prstGeom prst="rect">
             <a:avLst/>
@@ -11087,7 +11546,7 @@
           <a:noFill/>
         </p:spPr>
         <p:txBody>
-          <a:bodyPr wrap="square" lIns="0" rIns="0" tIns="0" bIns="0" anchor="t">
+          <a:bodyPr wrap="square" lIns="0" tIns="0" rIns="0" bIns="0" anchor="t">
             <a:spAutoFit/>
           </a:bodyPr>
           <a:lstStyle/>
@@ -11108,12 +11567,20 @@
                 <a:solidFill>
                   <a:srgbClr val="000000"/>
                 </a:solidFill>
-                <a:latin typeface="Times New Roman"/>
-                <a:ea typeface="宋体"/>
-                <a:cs typeface="宋体"/>
+                <a:latin typeface="Times New Roman" panose="02020603050405020304"/>
+                <a:ea typeface="宋体" panose="02010600030101010101" pitchFamily="2" charset="-122"/>
+                <a:cs typeface="宋体" panose="02010600030101010101" pitchFamily="2" charset="-122"/>
               </a:rPr>
               <a:t>· 文献：Yang, Z. &amp; Mustafa, H. R. (2022)，研究本科生对「机器翻译译后编辑」（MTPE）的态度。</a:t>
             </a:r>
+            <a:endParaRPr sz="2000" b="0" i="0">
+              <a:solidFill>
+                <a:srgbClr val="000000"/>
+              </a:solidFill>
+              <a:latin typeface="Times New Roman" panose="02020603050405020304"/>
+              <a:ea typeface="宋体" panose="02010600030101010101" pitchFamily="2" charset="-122"/>
+              <a:cs typeface="宋体" panose="02010600030101010101" pitchFamily="2" charset="-122"/>
+            </a:endParaRPr>
           </a:p>
           <a:p>
             <a:pPr algn="l">
@@ -11132,12 +11599,120 @@
                 <a:solidFill>
                   <a:srgbClr val="000000"/>
                 </a:solidFill>
-                <a:latin typeface="Times New Roman"/>
-                <a:ea typeface="宋体"/>
-                <a:cs typeface="宋体"/>
-              </a:rPr>
-              <a:t>· 它想回答三个问题：① 学生对 MTPE 的正面/负面反应是什么；② 这些反应和两门课程的成绩有没有关系；③ 使用中有什么障碍。</a:t>
-            </a:r>
+                <a:latin typeface="Times New Roman" panose="02020603050405020304"/>
+                <a:ea typeface="宋体" panose="02010600030101010101" pitchFamily="2" charset="-122"/>
+                <a:cs typeface="宋体" panose="02010600030101010101" pitchFamily="2" charset="-122"/>
+              </a:rPr>
+              <a:t>· 它想回答三个问题：① 学生对 MTPE 的正面/负面</a:t>
+            </a:r>
+            <a:r>
+              <a:rPr lang="zh-CN" sz="2000" b="0" i="0">
+                <a:solidFill>
+                  <a:srgbClr val="000000"/>
+                </a:solidFill>
+                <a:latin typeface="Times New Roman" panose="02020603050405020304"/>
+                <a:ea typeface="宋体" panose="02010600030101010101" pitchFamily="2" charset="-122"/>
+                <a:cs typeface="宋体" panose="02010600030101010101" pitchFamily="2" charset="-122"/>
+              </a:rPr>
+              <a:t>评价</a:t>
+            </a:r>
+            <a:r>
+              <a:rPr sz="2000" b="0" i="0">
+                <a:solidFill>
+                  <a:srgbClr val="000000"/>
+                </a:solidFill>
+                <a:latin typeface="Times New Roman" panose="02020603050405020304"/>
+                <a:ea typeface="宋体" panose="02010600030101010101" pitchFamily="2" charset="-122"/>
+                <a:cs typeface="宋体" panose="02010600030101010101" pitchFamily="2" charset="-122"/>
+              </a:rPr>
+              <a:t>是什么；② 这些</a:t>
+            </a:r>
+            <a:r>
+              <a:rPr lang="zh-CN" sz="2000">
+                <a:solidFill>
+                  <a:srgbClr val="000000"/>
+                </a:solidFill>
+                <a:latin typeface="Times New Roman" panose="02020603050405020304"/>
+                <a:ea typeface="宋体" panose="02010600030101010101" pitchFamily="2" charset="-122"/>
+                <a:cs typeface="宋体" panose="02010600030101010101" pitchFamily="2" charset="-122"/>
+                <a:sym typeface="+mn-ea"/>
+              </a:rPr>
+              <a:t>评价</a:t>
+            </a:r>
+            <a:r>
+              <a:rPr sz="2000" b="0" i="0">
+                <a:solidFill>
+                  <a:srgbClr val="000000"/>
+                </a:solidFill>
+                <a:latin typeface="Times New Roman" panose="02020603050405020304"/>
+                <a:ea typeface="宋体" panose="02010600030101010101" pitchFamily="2" charset="-122"/>
+                <a:cs typeface="宋体" panose="02010600030101010101" pitchFamily="2" charset="-122"/>
+              </a:rPr>
+              <a:t>和</a:t>
+            </a:r>
+            <a:r>
+              <a:rPr lang="zh-CN" sz="2000" b="0" i="0">
+                <a:solidFill>
+                  <a:srgbClr val="000000"/>
+                </a:solidFill>
+                <a:latin typeface="Times New Roman" panose="02020603050405020304"/>
+                <a:ea typeface="宋体" panose="02010600030101010101" pitchFamily="2" charset="-122"/>
+                <a:cs typeface="宋体" panose="02010600030101010101" pitchFamily="2" charset="-122"/>
+              </a:rPr>
+              <a:t>计算机辅助翻译、笔译</a:t>
+            </a:r>
+            <a:r>
+              <a:rPr lang="zh-CN" sz="2000" b="0" i="0">
+                <a:solidFill>
+                  <a:srgbClr val="000000"/>
+                </a:solidFill>
+                <a:latin typeface="Times New Roman" panose="02020603050405020304"/>
+                <a:ea typeface="宋体" panose="02010600030101010101" pitchFamily="2" charset="-122"/>
+                <a:cs typeface="宋体" panose="02010600030101010101" pitchFamily="2" charset="-122"/>
+              </a:rPr>
+              <a:t>实务这</a:t>
+            </a:r>
+            <a:r>
+              <a:rPr sz="2000" b="0" i="0">
+                <a:solidFill>
+                  <a:srgbClr val="000000"/>
+                </a:solidFill>
+                <a:latin typeface="Times New Roman" panose="02020603050405020304"/>
+                <a:ea typeface="宋体" panose="02010600030101010101" pitchFamily="2" charset="-122"/>
+                <a:cs typeface="宋体" panose="02010600030101010101" pitchFamily="2" charset="-122"/>
+              </a:rPr>
+              <a:t>两门课程的成绩有没有关系；③ </a:t>
+            </a:r>
+            <a:r>
+              <a:rPr lang="en-US" sz="2000" b="0" i="0">
+                <a:solidFill>
+                  <a:srgbClr val="000000"/>
+                </a:solidFill>
+                <a:latin typeface="Times New Roman" panose="02020603050405020304"/>
+                <a:ea typeface="宋体" panose="02010600030101010101" pitchFamily="2" charset="-122"/>
+                <a:cs typeface="宋体" panose="02010600030101010101" pitchFamily="2" charset="-122"/>
+              </a:rPr>
+              <a:t>MTPE </a:t>
+            </a:r>
+            <a:r>
+              <a:rPr sz="2000" b="0" i="0">
+                <a:solidFill>
+                  <a:srgbClr val="000000"/>
+                </a:solidFill>
+                <a:latin typeface="Times New Roman" panose="02020603050405020304"/>
+                <a:ea typeface="宋体" panose="02010600030101010101" pitchFamily="2" charset="-122"/>
+                <a:cs typeface="宋体" panose="02010600030101010101" pitchFamily="2" charset="-122"/>
+              </a:rPr>
+              <a:t>使用中有什么障碍。</a:t>
+            </a:r>
+            <a:endParaRPr sz="2000" b="0" i="0">
+              <a:solidFill>
+                <a:srgbClr val="000000"/>
+              </a:solidFill>
+              <a:latin typeface="Times New Roman" panose="02020603050405020304"/>
+              <a:ea typeface="宋体" panose="02010600030101010101" pitchFamily="2" charset="-122"/>
+              <a:cs typeface="宋体" panose="02010600030101010101" pitchFamily="2" charset="-122"/>
+            </a:endParaRPr>
           </a:p>
           <a:p>
             <a:pPr algn="l">
@@ -11156,12 +11731,20 @@
                 <a:solidFill>
                   <a:srgbClr val="000000"/>
                 </a:solidFill>
-                <a:latin typeface="Times New Roman"/>
-                <a:ea typeface="宋体"/>
-                <a:cs typeface="宋体"/>
-              </a:rPr>
-              <a:t>· 它用的「策略」是：借一个经典理论 TAM 来设计问卷，用 6 道题 + 4 道开放题，找 127 名学生填，再做统计和定性分析。</a:t>
-            </a:r>
+                <a:latin typeface="Times New Roman" panose="02020603050405020304"/>
+                <a:ea typeface="宋体" panose="02010600030101010101" pitchFamily="2" charset="-122"/>
+                <a:cs typeface="宋体" panose="02010600030101010101" pitchFamily="2" charset="-122"/>
+              </a:rPr>
+              <a:t>· 用的策略是：借一个经典理论 TAM 来设计问卷，用 6 道题 + 4 道开放题，找 127 名学生填，再做统计和定性分析。</a:t>
+            </a:r>
+            <a:endParaRPr sz="2000" b="0" i="0">
+              <a:solidFill>
+                <a:srgbClr val="000000"/>
+              </a:solidFill>
+              <a:latin typeface="Times New Roman" panose="02020603050405020304"/>
+              <a:ea typeface="宋体" panose="02010600030101010101" pitchFamily="2" charset="-122"/>
+              <a:cs typeface="宋体" panose="02010600030101010101" pitchFamily="2" charset="-122"/>
+            </a:endParaRPr>
           </a:p>
           <a:p>
             <a:pPr algn="l">
@@ -11175,17 +11758,14 @@
                 <a:spcPts val="500"/>
               </a:spcAft>
             </a:pPr>
-            <a:r>
-              <a:rPr sz="2000" b="0" i="0">
-                <a:solidFill>
-                  <a:srgbClr val="000000"/>
-                </a:solidFill>
-                <a:latin typeface="Times New Roman"/>
-                <a:ea typeface="宋体"/>
-                <a:cs typeface="宋体"/>
-              </a:rPr>
-              <a:t>· 框架看着和正例一样正规，但往下看，它在证据链上断了好几处——每一处都有论文原文截图，不是凭空批评。</a:t>
-            </a:r>
+            <a:endParaRPr sz="2000" b="0" i="0">
+              <a:solidFill>
+                <a:srgbClr val="000000"/>
+              </a:solidFill>
+              <a:latin typeface="Times New Roman" panose="02020603050405020304"/>
+              <a:ea typeface="宋体" panose="02010600030101010101" pitchFamily="2" charset="-122"/>
+              <a:cs typeface="宋体" panose="02010600030101010101" pitchFamily="2" charset="-122"/>
+            </a:endParaRPr>
           </a:p>
         </p:txBody>
       </p:sp>
@@ -11206,7 +11786,7 @@
           <a:noFill/>
         </p:spPr>
         <p:txBody>
-          <a:bodyPr wrap="square" lIns="0" rIns="0" tIns="0" bIns="0" anchor="t">
+          <a:bodyPr wrap="square" lIns="0" tIns="0" rIns="0" bIns="0" anchor="t">
             <a:spAutoFit/>
           </a:bodyPr>
           <a:lstStyle/>
@@ -11227,12 +11807,20 @@
                 <a:solidFill>
                   <a:srgbClr val="404040"/>
                 </a:solidFill>
-                <a:latin typeface="Times New Roman"/>
-                <a:ea typeface="宋体"/>
-                <a:cs typeface="宋体"/>
+                <a:latin typeface="Times New Roman" panose="02020603050405020304"/>
+                <a:ea typeface="宋体" panose="02010600030101010101" pitchFamily="2" charset="-122"/>
+                <a:cs typeface="宋体" panose="02010600030101010101" pitchFamily="2" charset="-122"/>
               </a:rPr>
               <a:t>18 / 34</a:t>
             </a:r>
+            <a:endParaRPr sz="1000" b="0" i="0">
+              <a:solidFill>
+                <a:srgbClr val="404040"/>
+              </a:solidFill>
+              <a:latin typeface="Times New Roman" panose="02020603050405020304"/>
+              <a:ea typeface="宋体" panose="02010600030101010101" pitchFamily="2" charset="-122"/>
+              <a:cs typeface="宋体" panose="02010600030101010101" pitchFamily="2" charset="-122"/>
+            </a:endParaRPr>
           </a:p>
         </p:txBody>
       </p:sp>
@@ -11245,7 +11833,7 @@
 </file>
 
 <file path=ppt/slides/slide19.xml><?xml version="1.0" encoding="utf-8"?>
-<p:sld xmlns:a="http://schemas.openxmlformats.org/drawingml/2006/main" xmlns:p="http://schemas.openxmlformats.org/presentationml/2006/main" xmlns:r="http://schemas.openxmlformats.org/officeDocument/2006/relationships">
+<p:sld xmlns:a="http://schemas.openxmlformats.org/drawingml/2006/main" xmlns:r="http://schemas.openxmlformats.org/officeDocument/2006/relationships" xmlns:p="http://schemas.openxmlformats.org/presentationml/2006/main">
   <p:cSld>
     <p:spTree>
       <p:nvGrpSpPr>
@@ -11271,7 +11859,7 @@
           <a:noFill/>
         </p:spPr>
         <p:txBody>
-          <a:bodyPr wrap="square" lIns="0" rIns="0" tIns="0" bIns="0" anchor="t">
+          <a:bodyPr wrap="square" lIns="0" tIns="0" rIns="0" bIns="0" anchor="t">
             <a:spAutoFit/>
           </a:bodyPr>
           <a:lstStyle/>
@@ -11292,12 +11880,20 @@
                 <a:solidFill>
                   <a:srgbClr val="000000"/>
                 </a:solidFill>
-                <a:latin typeface="Times New Roman"/>
-                <a:ea typeface="黑体"/>
-                <a:cs typeface="黑体"/>
+                <a:latin typeface="Times New Roman" panose="02020603050405020304"/>
+                <a:ea typeface="黑体" panose="02010609060101010101" charset="-122"/>
+                <a:cs typeface="黑体" panose="02010609060101010101" charset="-122"/>
               </a:rPr>
               <a:t>环节一：借了 TAM，但题没跟上</a:t>
             </a:r>
+            <a:endParaRPr sz="2300" b="1" i="0">
+              <a:solidFill>
+                <a:srgbClr val="000000"/>
+              </a:solidFill>
+              <a:latin typeface="Times New Roman" panose="02020603050405020304"/>
+              <a:ea typeface="黑体" panose="02010609060101010101" charset="-122"/>
+              <a:cs typeface="黑体" panose="02010609060101010101" charset="-122"/>
+            </a:endParaRPr>
           </a:p>
         </p:txBody>
       </p:sp>
@@ -11310,7 +11906,7 @@
           <p:nvPr/>
         </p:nvPicPr>
         <p:blipFill>
-          <a:blip r:embed="rId2"/>
+          <a:blip r:embed="rId1"/>
           <a:stretch>
             <a:fillRect/>
           </a:stretch>
@@ -11386,7 +11982,7 @@
           <a:noFill/>
         </p:spPr>
         <p:txBody>
-          <a:bodyPr wrap="square" lIns="0" rIns="0" tIns="0" bIns="0" anchor="t">
+          <a:bodyPr wrap="square" lIns="0" tIns="0" rIns="0" bIns="0" anchor="t">
             <a:spAutoFit/>
           </a:bodyPr>
           <a:lstStyle/>
@@ -11407,12 +12003,20 @@
                 <a:solidFill>
                   <a:srgbClr val="404040"/>
                 </a:solidFill>
-                <a:latin typeface="Times New Roman"/>
-                <a:ea typeface="宋体"/>
-                <a:cs typeface="宋体"/>
+                <a:latin typeface="Times New Roman" panose="02020603050405020304"/>
+                <a:ea typeface="宋体" panose="02010600030101010101" pitchFamily="2" charset="-122"/>
+                <a:cs typeface="宋体" panose="02010600030101010101" pitchFamily="2" charset="-122"/>
               </a:rPr>
               <a:t>理论框架 TAM（论文 p3）</a:t>
             </a:r>
+            <a:endParaRPr sz="950" b="0" i="0">
+              <a:solidFill>
+                <a:srgbClr val="404040"/>
+              </a:solidFill>
+              <a:latin typeface="Times New Roman" panose="02020603050405020304"/>
+              <a:ea typeface="宋体" panose="02010600030101010101" pitchFamily="2" charset="-122"/>
+              <a:cs typeface="宋体" panose="02010600030101010101" pitchFamily="2" charset="-122"/>
+            </a:endParaRPr>
           </a:p>
         </p:txBody>
       </p:sp>
@@ -11425,7 +12029,7 @@
         <p:spPr>
           <a:xfrm>
             <a:off x="640080" y="1874519"/>
-            <a:ext cx="6720840" cy="3931920"/>
+            <a:ext cx="6720840" cy="2928620"/>
           </a:xfrm>
           <a:prstGeom prst="rect">
             <a:avLst/>
@@ -11433,7 +12037,7 @@
           <a:noFill/>
         </p:spPr>
         <p:txBody>
-          <a:bodyPr wrap="square" lIns="0" rIns="0" tIns="0" bIns="0" anchor="t">
+          <a:bodyPr wrap="square" lIns="0" tIns="0" rIns="0" bIns="0" anchor="t">
             <a:spAutoFit/>
           </a:bodyPr>
           <a:lstStyle/>
@@ -11454,12 +12058,64 @@
                 <a:solidFill>
                   <a:srgbClr val="000000"/>
                 </a:solidFill>
-                <a:latin typeface="Times New Roman"/>
-                <a:ea typeface="宋体"/>
-                <a:cs typeface="宋体"/>
-              </a:rPr>
-              <a:t>· TAM 是「技术接受模型」，一句话解释：人愿不愿意用一项新技术，主要看两点——「它对我有没有用」（有用性）和「它好不好上手」（易用性）。</a:t>
-            </a:r>
+                <a:latin typeface="Times New Roman" panose="02020603050405020304"/>
+                <a:ea typeface="宋体" panose="02010600030101010101" pitchFamily="2" charset="-122"/>
+                <a:cs typeface="宋体" panose="02010600030101010101" pitchFamily="2" charset="-122"/>
+              </a:rPr>
+              <a:t>· TAM 是「技术接受模型」，一句话解释：人愿不愿意用一项新技术，主要看两点</a:t>
+            </a:r>
+            <a:r>
+              <a:rPr lang="zh-CN" sz="2000" b="0" i="0">
+                <a:solidFill>
+                  <a:srgbClr val="000000"/>
+                </a:solidFill>
+                <a:latin typeface="Times New Roman" panose="02020603050405020304"/>
+                <a:ea typeface="宋体" panose="02010600030101010101" pitchFamily="2" charset="-122"/>
+                <a:cs typeface="宋体" panose="02010600030101010101" pitchFamily="2" charset="-122"/>
+              </a:rPr>
+              <a:t>：</a:t>
+            </a:r>
+            <a:r>
+              <a:rPr sz="2000" b="0" i="0">
+                <a:solidFill>
+                  <a:srgbClr val="000000"/>
+                </a:solidFill>
+                <a:latin typeface="Times New Roman" panose="02020603050405020304"/>
+                <a:ea typeface="宋体" panose="02010600030101010101" pitchFamily="2" charset="-122"/>
+                <a:cs typeface="宋体" panose="02010600030101010101" pitchFamily="2" charset="-122"/>
+              </a:rPr>
+              <a:t>它对我有没有用（有用性）</a:t>
+            </a:r>
+            <a:r>
+              <a:rPr lang="zh-CN" sz="2000" b="0" i="0">
+                <a:solidFill>
+                  <a:srgbClr val="000000"/>
+                </a:solidFill>
+                <a:latin typeface="Times New Roman" panose="02020603050405020304"/>
+                <a:ea typeface="宋体" panose="02010600030101010101" pitchFamily="2" charset="-122"/>
+                <a:cs typeface="宋体" panose="02010600030101010101" pitchFamily="2" charset="-122"/>
+              </a:rPr>
+              <a:t>，以及</a:t>
+            </a:r>
+            <a:r>
+              <a:rPr sz="2000" b="0" i="0">
+                <a:solidFill>
+                  <a:srgbClr val="000000"/>
+                </a:solidFill>
+                <a:latin typeface="Times New Roman" panose="02020603050405020304"/>
+                <a:ea typeface="宋体" panose="02010600030101010101" pitchFamily="2" charset="-122"/>
+                <a:cs typeface="宋体" panose="02010600030101010101" pitchFamily="2" charset="-122"/>
+              </a:rPr>
+              <a:t>它好不好上手（易用性）。</a:t>
+            </a:r>
+            <a:endParaRPr sz="2000" b="0" i="0">
+              <a:solidFill>
+                <a:srgbClr val="000000"/>
+              </a:solidFill>
+              <a:latin typeface="Times New Roman" panose="02020603050405020304"/>
+              <a:ea typeface="宋体" panose="02010600030101010101" pitchFamily="2" charset="-122"/>
+              <a:cs typeface="宋体" panose="02010600030101010101" pitchFamily="2" charset="-122"/>
+            </a:endParaRPr>
           </a:p>
           <a:p>
             <a:pPr algn="l">
@@ -11478,12 +12134,20 @@
                 <a:solidFill>
                   <a:srgbClr val="000000"/>
                 </a:solidFill>
-                <a:latin typeface="Times New Roman"/>
-                <a:ea typeface="宋体"/>
-                <a:cs typeface="宋体"/>
+                <a:latin typeface="Times New Roman" panose="02020603050405020304"/>
+                <a:ea typeface="宋体" panose="02010600030101010101" pitchFamily="2" charset="-122"/>
+                <a:cs typeface="宋体" panose="02010600030101010101" pitchFamily="2" charset="-122"/>
               </a:rPr>
               <a:t>· 这篇论文就借了 TAM，说要用问卷测这两个概念。借框架本身没错。</a:t>
             </a:r>
+            <a:endParaRPr sz="2000" b="0" i="0">
+              <a:solidFill>
+                <a:srgbClr val="000000"/>
+              </a:solidFill>
+              <a:latin typeface="Times New Roman" panose="02020603050405020304"/>
+              <a:ea typeface="宋体" panose="02010600030101010101" pitchFamily="2" charset="-122"/>
+              <a:cs typeface="宋体" panose="02010600030101010101" pitchFamily="2" charset="-122"/>
+            </a:endParaRPr>
           </a:p>
           <a:p>
             <a:pPr algn="l">
@@ -11502,12 +12166,20 @@
                 <a:solidFill>
                   <a:srgbClr val="000000"/>
                 </a:solidFill>
-                <a:latin typeface="Times New Roman"/>
-                <a:ea typeface="宋体"/>
-                <a:cs typeface="宋体"/>
+                <a:latin typeface="Times New Roman" panose="02020603050405020304"/>
+                <a:ea typeface="宋体" panose="02010600030101010101" pitchFamily="2" charset="-122"/>
+                <a:cs typeface="宋体" panose="02010600030101010101" pitchFamily="2" charset="-122"/>
               </a:rPr>
               <a:t>· 但问题是：它出的题，并没有真正照着这两个概念来设计。往下看具体出了什么题。</a:t>
             </a:r>
+            <a:endParaRPr sz="2000" b="0" i="0">
+              <a:solidFill>
+                <a:srgbClr val="000000"/>
+              </a:solidFill>
+              <a:latin typeface="Times New Roman" panose="02020603050405020304"/>
+              <a:ea typeface="宋体" panose="02010600030101010101" pitchFamily="2" charset="-122"/>
+              <a:cs typeface="宋体" panose="02010600030101010101" pitchFamily="2" charset="-122"/>
+            </a:endParaRPr>
           </a:p>
         </p:txBody>
       </p:sp>
@@ -11528,7 +12200,7 @@
           <a:noFill/>
         </p:spPr>
         <p:txBody>
-          <a:bodyPr wrap="square" lIns="0" rIns="0" tIns="0" bIns="0" anchor="t">
+          <a:bodyPr wrap="square" lIns="0" tIns="0" rIns="0" bIns="0" anchor="t">
             <a:spAutoFit/>
           </a:bodyPr>
           <a:lstStyle/>
@@ -11549,12 +12221,20 @@
                 <a:solidFill>
                   <a:srgbClr val="404040"/>
                 </a:solidFill>
-                <a:latin typeface="Times New Roman"/>
-                <a:ea typeface="宋体"/>
-                <a:cs typeface="宋体"/>
+                <a:latin typeface="Times New Roman" panose="02020603050405020304"/>
+                <a:ea typeface="宋体" panose="02010600030101010101" pitchFamily="2" charset="-122"/>
+                <a:cs typeface="宋体" panose="02010600030101010101" pitchFamily="2" charset="-122"/>
               </a:rPr>
               <a:t>19 / 34</a:t>
             </a:r>
+            <a:endParaRPr sz="1000" b="0" i="0">
+              <a:solidFill>
+                <a:srgbClr val="404040"/>
+              </a:solidFill>
+              <a:latin typeface="Times New Roman" panose="02020603050405020304"/>
+              <a:ea typeface="宋体" panose="02010600030101010101" pitchFamily="2" charset="-122"/>
+              <a:cs typeface="宋体" panose="02010600030101010101" pitchFamily="2" charset="-122"/>
+            </a:endParaRPr>
           </a:p>
         </p:txBody>
       </p:sp>
@@ -11567,7 +12247,7 @@
 </file>
 
 <file path=ppt/slides/slide2.xml><?xml version="1.0" encoding="utf-8"?>
-<p:sld xmlns:a="http://schemas.openxmlformats.org/drawingml/2006/main" xmlns:p="http://schemas.openxmlformats.org/presentationml/2006/main" xmlns:r="http://schemas.openxmlformats.org/officeDocument/2006/relationships">
+<p:sld xmlns:a="http://schemas.openxmlformats.org/drawingml/2006/main" xmlns:r="http://schemas.openxmlformats.org/officeDocument/2006/relationships" xmlns:p="http://schemas.openxmlformats.org/presentationml/2006/main">
   <p:cSld>
     <p:spTree>
       <p:nvGrpSpPr>
@@ -11637,7 +12317,7 @@
           <a:noFill/>
         </p:spPr>
         <p:txBody>
-          <a:bodyPr wrap="square" lIns="0" rIns="0" tIns="0" bIns="0" anchor="ctr">
+          <a:bodyPr wrap="square" lIns="0" tIns="0" rIns="0" bIns="0" anchor="ctr">
             <a:spAutoFit/>
           </a:bodyPr>
           <a:lstStyle/>
@@ -11658,12 +12338,20 @@
                 <a:solidFill>
                   <a:srgbClr val="0E7C86"/>
                 </a:solidFill>
-                <a:latin typeface="Times New Roman"/>
-                <a:ea typeface="黑体"/>
-                <a:cs typeface="黑体"/>
+                <a:latin typeface="Times New Roman" panose="02020603050405020304"/>
+                <a:ea typeface="黑体" panose="02010609060101010101" charset="-122"/>
+                <a:cs typeface="黑体" panose="02010609060101010101" charset="-122"/>
               </a:rPr>
               <a:t>目录</a:t>
             </a:r>
+            <a:endParaRPr sz="2700" b="1" i="0">
+              <a:solidFill>
+                <a:srgbClr val="0E7C86"/>
+              </a:solidFill>
+              <a:latin typeface="Times New Roman" panose="02020603050405020304"/>
+              <a:ea typeface="黑体" panose="02010609060101010101" charset="-122"/>
+              <a:cs typeface="黑体" panose="02010609060101010101" charset="-122"/>
+            </a:endParaRPr>
           </a:p>
           <a:p>
             <a:pPr algn="ctr">
@@ -11682,12 +12370,20 @@
                 <a:solidFill>
                   <a:srgbClr val="404040"/>
                 </a:solidFill>
-                <a:latin typeface="Times New Roman"/>
-                <a:ea typeface="宋体"/>
-                <a:cs typeface="宋体"/>
+                <a:latin typeface="Times New Roman" panose="02020603050405020304"/>
+                <a:ea typeface="宋体" panose="02010600030101010101" pitchFamily="2" charset="-122"/>
+                <a:cs typeface="宋体" panose="02010600030101010101" pitchFamily="2" charset="-122"/>
               </a:rPr>
               <a:t>CONTENTS</a:t>
             </a:r>
+            <a:endParaRPr sz="1300" b="0" i="0">
+              <a:solidFill>
+                <a:srgbClr val="404040"/>
+              </a:solidFill>
+              <a:latin typeface="Times New Roman" panose="02020603050405020304"/>
+              <a:ea typeface="宋体" panose="02010600030101010101" pitchFamily="2" charset="-122"/>
+              <a:cs typeface="宋体" panose="02010600030101010101" pitchFamily="2" charset="-122"/>
+            </a:endParaRPr>
           </a:p>
         </p:txBody>
       </p:sp>
@@ -11695,7 +12391,11 @@
         <p:nvSpPr>
           <p:cNvPr id="4" name="Oval 3"/>
           <p:cNvSpPr/>
-          <p:nvPr/>
+          <p:nvPr>
+            <p:custDataLst>
+              <p:tags r:id="rId1"/>
+            </p:custDataLst>
+          </p:nvPr>
         </p:nvSpPr>
         <p:spPr>
           <a:xfrm>
@@ -11728,7 +12428,7 @@
           </a:fontRef>
         </p:style>
         <p:txBody>
-          <a:bodyPr rtlCol="0" anchor="ctr" wrap="none" lIns="0" rIns="0" tIns="0" bIns="0"/>
+          <a:bodyPr wrap="none" lIns="0" tIns="0" rIns="0" bIns="0" rtlCol="0" anchor="ctr"/>
           <a:lstStyle/>
           <a:p>
             <a:pPr algn="ctr"/>
@@ -11737,12 +12437,20 @@
                 <a:solidFill>
                   <a:srgbClr val="FFFFFF"/>
                 </a:solidFill>
-                <a:latin typeface="Times New Roman"/>
-                <a:ea typeface="宋体"/>
-                <a:cs typeface="宋体"/>
+                <a:latin typeface="Times New Roman" panose="02020603050405020304"/>
+                <a:ea typeface="宋体" panose="02010600030101010101" pitchFamily="2" charset="-122"/>
+                <a:cs typeface="宋体" panose="02010600030101010101" pitchFamily="2" charset="-122"/>
               </a:rPr>
               <a:t>1</a:t>
             </a:r>
+            <a:endParaRPr sz="1500" b="1" i="0">
+              <a:solidFill>
+                <a:srgbClr val="FFFFFF"/>
+              </a:solidFill>
+              <a:latin typeface="Times New Roman" panose="02020603050405020304"/>
+              <a:ea typeface="宋体" panose="02010600030101010101" pitchFamily="2" charset="-122"/>
+              <a:cs typeface="宋体" panose="02010600030101010101" pitchFamily="2" charset="-122"/>
+            </a:endParaRPr>
           </a:p>
         </p:txBody>
       </p:sp>
@@ -11750,7 +12458,11 @@
         <p:nvSpPr>
           <p:cNvPr id="5" name="TextBox 4"/>
           <p:cNvSpPr txBox="1"/>
-          <p:nvPr/>
+          <p:nvPr>
+            <p:custDataLst>
+              <p:tags r:id="rId2"/>
+            </p:custDataLst>
+          </p:nvPr>
         </p:nvSpPr>
         <p:spPr>
           <a:xfrm>
@@ -11763,7 +12475,7 @@
           <a:noFill/>
         </p:spPr>
         <p:txBody>
-          <a:bodyPr wrap="square" lIns="0" rIns="0" tIns="0" bIns="0" anchor="ctr">
+          <a:bodyPr wrap="square" lIns="0" tIns="0" rIns="0" bIns="0" anchor="ctr">
             <a:spAutoFit/>
           </a:bodyPr>
           <a:lstStyle/>
@@ -11784,12 +12496,20 @@
                 <a:solidFill>
                   <a:srgbClr val="000000"/>
                 </a:solidFill>
-                <a:latin typeface="Times New Roman"/>
-                <a:ea typeface="宋体"/>
-                <a:cs typeface="宋体"/>
-              </a:rPr>
-              <a:t>先弄懂几个词，再看两篇论文</a:t>
-            </a:r>
+                <a:latin typeface="Times New Roman" panose="02020603050405020304"/>
+                <a:ea typeface="宋体" panose="02010600030101010101" pitchFamily="2" charset="-122"/>
+                <a:cs typeface="宋体" panose="02010600030101010101" pitchFamily="2" charset="-122"/>
+              </a:rPr>
+              <a:t>研究背景与判断标准</a:t>
+            </a:r>
+            <a:endParaRPr sz="1700" b="0" i="0">
+              <a:solidFill>
+                <a:srgbClr val="000000"/>
+              </a:solidFill>
+              <a:latin typeface="Times New Roman" panose="02020603050405020304"/>
+              <a:ea typeface="宋体" panose="02010600030101010101" pitchFamily="2" charset="-122"/>
+              <a:cs typeface="宋体" panose="02010600030101010101" pitchFamily="2" charset="-122"/>
+            </a:endParaRPr>
           </a:p>
         </p:txBody>
       </p:sp>
@@ -11797,7 +12517,11 @@
         <p:nvSpPr>
           <p:cNvPr id="6" name="Oval 5"/>
           <p:cNvSpPr/>
-          <p:nvPr/>
+          <p:nvPr>
+            <p:custDataLst>
+              <p:tags r:id="rId3"/>
+            </p:custDataLst>
+          </p:nvPr>
         </p:nvSpPr>
         <p:spPr>
           <a:xfrm>
@@ -11830,7 +12554,7 @@
           </a:fontRef>
         </p:style>
         <p:txBody>
-          <a:bodyPr rtlCol="0" anchor="ctr" wrap="none" lIns="0" rIns="0" tIns="0" bIns="0"/>
+          <a:bodyPr wrap="none" lIns="0" tIns="0" rIns="0" bIns="0" rtlCol="0" anchor="ctr"/>
           <a:lstStyle/>
           <a:p>
             <a:pPr algn="ctr"/>
@@ -11839,12 +12563,20 @@
                 <a:solidFill>
                   <a:srgbClr val="FFFFFF"/>
                 </a:solidFill>
-                <a:latin typeface="Times New Roman"/>
-                <a:ea typeface="宋体"/>
-                <a:cs typeface="宋体"/>
+                <a:latin typeface="Times New Roman" panose="02020603050405020304"/>
+                <a:ea typeface="宋体" panose="02010600030101010101" pitchFamily="2" charset="-122"/>
+                <a:cs typeface="宋体" panose="02010600030101010101" pitchFamily="2" charset="-122"/>
               </a:rPr>
               <a:t>2</a:t>
             </a:r>
+            <a:endParaRPr sz="1500" b="1" i="0">
+              <a:solidFill>
+                <a:srgbClr val="FFFFFF"/>
+              </a:solidFill>
+              <a:latin typeface="Times New Roman" panose="02020603050405020304"/>
+              <a:ea typeface="宋体" panose="02010600030101010101" pitchFamily="2" charset="-122"/>
+              <a:cs typeface="宋体" panose="02010600030101010101" pitchFamily="2" charset="-122"/>
+            </a:endParaRPr>
           </a:p>
         </p:txBody>
       </p:sp>
@@ -11852,7 +12584,11 @@
         <p:nvSpPr>
           <p:cNvPr id="7" name="TextBox 6"/>
           <p:cNvSpPr txBox="1"/>
-          <p:nvPr/>
+          <p:nvPr>
+            <p:custDataLst>
+              <p:tags r:id="rId4"/>
+            </p:custDataLst>
+          </p:nvPr>
         </p:nvSpPr>
         <p:spPr>
           <a:xfrm>
@@ -11865,7 +12601,7 @@
           <a:noFill/>
         </p:spPr>
         <p:txBody>
-          <a:bodyPr wrap="square" lIns="0" rIns="0" tIns="0" bIns="0" anchor="ctr">
+          <a:bodyPr wrap="square" lIns="0" tIns="0" rIns="0" bIns="0" anchor="ctr">
             <a:spAutoFit/>
           </a:bodyPr>
           <a:lstStyle/>
@@ -11886,12 +12622,20 @@
                 <a:solidFill>
                   <a:srgbClr val="000000"/>
                 </a:solidFill>
-                <a:latin typeface="Times New Roman"/>
-                <a:ea typeface="宋体"/>
-                <a:cs typeface="宋体"/>
-              </a:rPr>
-              <a:t>正例：口译笔记熟练度量表怎么一步步做出来</a:t>
-            </a:r>
+                <a:latin typeface="Times New Roman" panose="02020603050405020304"/>
+                <a:ea typeface="宋体" panose="02010600030101010101" pitchFamily="2" charset="-122"/>
+                <a:cs typeface="宋体" panose="02010600030101010101" pitchFamily="2" charset="-122"/>
+              </a:rPr>
+              <a:t>正例：口译笔记熟练度量表的开发</a:t>
+            </a:r>
+            <a:endParaRPr sz="1700" b="0" i="0">
+              <a:solidFill>
+                <a:srgbClr val="000000"/>
+              </a:solidFill>
+              <a:latin typeface="Times New Roman" panose="02020603050405020304"/>
+              <a:ea typeface="宋体" panose="02010600030101010101" pitchFamily="2" charset="-122"/>
+              <a:cs typeface="宋体" panose="02010600030101010101" pitchFamily="2" charset="-122"/>
+            </a:endParaRPr>
           </a:p>
         </p:txBody>
       </p:sp>
@@ -11899,7 +12643,11 @@
         <p:nvSpPr>
           <p:cNvPr id="8" name="Oval 7"/>
           <p:cNvSpPr/>
-          <p:nvPr/>
+          <p:nvPr>
+            <p:custDataLst>
+              <p:tags r:id="rId5"/>
+            </p:custDataLst>
+          </p:nvPr>
         </p:nvSpPr>
         <p:spPr>
           <a:xfrm>
@@ -11932,7 +12680,7 @@
           </a:fontRef>
         </p:style>
         <p:txBody>
-          <a:bodyPr rtlCol="0" anchor="ctr" wrap="none" lIns="0" rIns="0" tIns="0" bIns="0"/>
+          <a:bodyPr wrap="none" lIns="0" tIns="0" rIns="0" bIns="0" rtlCol="0" anchor="ctr"/>
           <a:lstStyle/>
           <a:p>
             <a:pPr algn="ctr"/>
@@ -11941,12 +12689,20 @@
                 <a:solidFill>
                   <a:srgbClr val="FFFFFF"/>
                 </a:solidFill>
-                <a:latin typeface="Times New Roman"/>
-                <a:ea typeface="宋体"/>
-                <a:cs typeface="宋体"/>
+                <a:latin typeface="Times New Roman" panose="02020603050405020304"/>
+                <a:ea typeface="宋体" panose="02010600030101010101" pitchFamily="2" charset="-122"/>
+                <a:cs typeface="宋体" panose="02010600030101010101" pitchFamily="2" charset="-122"/>
               </a:rPr>
               <a:t>3</a:t>
             </a:r>
+            <a:endParaRPr sz="1500" b="1" i="0">
+              <a:solidFill>
+                <a:srgbClr val="FFFFFF"/>
+              </a:solidFill>
+              <a:latin typeface="Times New Roman" panose="02020603050405020304"/>
+              <a:ea typeface="宋体" panose="02010600030101010101" pitchFamily="2" charset="-122"/>
+              <a:cs typeface="宋体" panose="02010600030101010101" pitchFamily="2" charset="-122"/>
+            </a:endParaRPr>
           </a:p>
         </p:txBody>
       </p:sp>
@@ -11954,7 +12710,11 @@
         <p:nvSpPr>
           <p:cNvPr id="9" name="TextBox 8"/>
           <p:cNvSpPr txBox="1"/>
-          <p:nvPr/>
+          <p:nvPr>
+            <p:custDataLst>
+              <p:tags r:id="rId6"/>
+            </p:custDataLst>
+          </p:nvPr>
         </p:nvSpPr>
         <p:spPr>
           <a:xfrm>
@@ -11967,7 +12727,7 @@
           <a:noFill/>
         </p:spPr>
         <p:txBody>
-          <a:bodyPr wrap="square" lIns="0" rIns="0" tIns="0" bIns="0" anchor="ctr">
+          <a:bodyPr wrap="square" lIns="0" tIns="0" rIns="0" bIns="0" anchor="ctr">
             <a:spAutoFit/>
           </a:bodyPr>
           <a:lstStyle/>
@@ -11988,12 +12748,20 @@
                 <a:solidFill>
                   <a:srgbClr val="000000"/>
                 </a:solidFill>
-                <a:latin typeface="Times New Roman"/>
-                <a:ea typeface="宋体"/>
-                <a:cs typeface="宋体"/>
-              </a:rPr>
-              <a:t>反例：一份态度问卷问题出在哪</a:t>
-            </a:r>
+                <a:latin typeface="Times New Roman" panose="02020603050405020304"/>
+                <a:ea typeface="宋体" panose="02010600030101010101" pitchFamily="2" charset="-122"/>
+                <a:cs typeface="宋体" panose="02010600030101010101" pitchFamily="2" charset="-122"/>
+              </a:rPr>
+              <a:t>反例：机器翻译译后编辑（MTPE）态度问卷</a:t>
+            </a:r>
+            <a:endParaRPr sz="1700" b="0" i="0">
+              <a:solidFill>
+                <a:srgbClr val="000000"/>
+              </a:solidFill>
+              <a:latin typeface="Times New Roman" panose="02020603050405020304"/>
+              <a:ea typeface="宋体" panose="02010600030101010101" pitchFamily="2" charset="-122"/>
+              <a:cs typeface="宋体" panose="02010600030101010101" pitchFamily="2" charset="-122"/>
+            </a:endParaRPr>
           </a:p>
         </p:txBody>
       </p:sp>
@@ -12001,7 +12769,11 @@
         <p:nvSpPr>
           <p:cNvPr id="10" name="Oval 9"/>
           <p:cNvSpPr/>
-          <p:nvPr/>
+          <p:nvPr>
+            <p:custDataLst>
+              <p:tags r:id="rId7"/>
+            </p:custDataLst>
+          </p:nvPr>
         </p:nvSpPr>
         <p:spPr>
           <a:xfrm>
@@ -12034,7 +12806,7 @@
           </a:fontRef>
         </p:style>
         <p:txBody>
-          <a:bodyPr rtlCol="0" anchor="ctr" wrap="none" lIns="0" rIns="0" tIns="0" bIns="0"/>
+          <a:bodyPr wrap="none" lIns="0" tIns="0" rIns="0" bIns="0" rtlCol="0" anchor="ctr"/>
           <a:lstStyle/>
           <a:p>
             <a:pPr algn="ctr"/>
@@ -12043,12 +12815,20 @@
                 <a:solidFill>
                   <a:srgbClr val="FFFFFF"/>
                 </a:solidFill>
-                <a:latin typeface="Times New Roman"/>
-                <a:ea typeface="宋体"/>
-                <a:cs typeface="宋体"/>
+                <a:latin typeface="Times New Roman" panose="02020603050405020304"/>
+                <a:ea typeface="宋体" panose="02010600030101010101" pitchFamily="2" charset="-122"/>
+                <a:cs typeface="宋体" panose="02010600030101010101" pitchFamily="2" charset="-122"/>
               </a:rPr>
               <a:t>4</a:t>
             </a:r>
+            <a:endParaRPr sz="1500" b="1" i="0">
+              <a:solidFill>
+                <a:srgbClr val="FFFFFF"/>
+              </a:solidFill>
+              <a:latin typeface="Times New Roman" panose="02020603050405020304"/>
+              <a:ea typeface="宋体" panose="02010600030101010101" pitchFamily="2" charset="-122"/>
+              <a:cs typeface="宋体" panose="02010600030101010101" pitchFamily="2" charset="-122"/>
+            </a:endParaRPr>
           </a:p>
         </p:txBody>
       </p:sp>
@@ -12056,7 +12836,11 @@
         <p:nvSpPr>
           <p:cNvPr id="11" name="TextBox 10"/>
           <p:cNvSpPr txBox="1"/>
-          <p:nvPr/>
+          <p:nvPr>
+            <p:custDataLst>
+              <p:tags r:id="rId8"/>
+            </p:custDataLst>
+          </p:nvPr>
         </p:nvSpPr>
         <p:spPr>
           <a:xfrm>
@@ -12069,7 +12853,7 @@
           <a:noFill/>
         </p:spPr>
         <p:txBody>
-          <a:bodyPr wrap="square" lIns="0" rIns="0" tIns="0" bIns="0" anchor="ctr">
+          <a:bodyPr wrap="square" lIns="0" tIns="0" rIns="0" bIns="0" anchor="ctr">
             <a:spAutoFit/>
           </a:bodyPr>
           <a:lstStyle/>
@@ -12090,12 +12874,20 @@
                 <a:solidFill>
                   <a:srgbClr val="000000"/>
                 </a:solidFill>
-                <a:latin typeface="Times New Roman"/>
-                <a:ea typeface="宋体"/>
-                <a:cs typeface="宋体"/>
-              </a:rPr>
-              <a:t>两篇放到一起对照</a:t>
-            </a:r>
+                <a:latin typeface="Times New Roman" panose="02020603050405020304"/>
+                <a:ea typeface="宋体" panose="02010600030101010101" pitchFamily="2" charset="-122"/>
+                <a:cs typeface="宋体" panose="02010600030101010101" pitchFamily="2" charset="-122"/>
+              </a:rPr>
+              <a:t>两篇论文的对照</a:t>
+            </a:r>
+            <a:endParaRPr sz="1700" b="0" i="0">
+              <a:solidFill>
+                <a:srgbClr val="000000"/>
+              </a:solidFill>
+              <a:latin typeface="Times New Roman" panose="02020603050405020304"/>
+              <a:ea typeface="宋体" panose="02010600030101010101" pitchFamily="2" charset="-122"/>
+              <a:cs typeface="宋体" panose="02010600030101010101" pitchFamily="2" charset="-122"/>
+            </a:endParaRPr>
           </a:p>
         </p:txBody>
       </p:sp>
@@ -12103,7 +12895,11 @@
         <p:nvSpPr>
           <p:cNvPr id="12" name="Oval 11"/>
           <p:cNvSpPr/>
-          <p:nvPr/>
+          <p:nvPr>
+            <p:custDataLst>
+              <p:tags r:id="rId9"/>
+            </p:custDataLst>
+          </p:nvPr>
         </p:nvSpPr>
         <p:spPr>
           <a:xfrm>
@@ -12136,7 +12932,7 @@
           </a:fontRef>
         </p:style>
         <p:txBody>
-          <a:bodyPr rtlCol="0" anchor="ctr" wrap="none" lIns="0" rIns="0" tIns="0" bIns="0"/>
+          <a:bodyPr wrap="none" lIns="0" tIns="0" rIns="0" bIns="0" rtlCol="0" anchor="ctr"/>
           <a:lstStyle/>
           <a:p>
             <a:pPr algn="ctr"/>
@@ -12145,12 +12941,20 @@
                 <a:solidFill>
                   <a:srgbClr val="FFFFFF"/>
                 </a:solidFill>
-                <a:latin typeface="Times New Roman"/>
-                <a:ea typeface="宋体"/>
-                <a:cs typeface="宋体"/>
+                <a:latin typeface="Times New Roman" panose="02020603050405020304"/>
+                <a:ea typeface="宋体" panose="02010600030101010101" pitchFamily="2" charset="-122"/>
+                <a:cs typeface="宋体" panose="02010600030101010101" pitchFamily="2" charset="-122"/>
               </a:rPr>
               <a:t>5</a:t>
             </a:r>
+            <a:endParaRPr sz="1500" b="1" i="0">
+              <a:solidFill>
+                <a:srgbClr val="FFFFFF"/>
+              </a:solidFill>
+              <a:latin typeface="Times New Roman" panose="02020603050405020304"/>
+              <a:ea typeface="宋体" panose="02010600030101010101" pitchFamily="2" charset="-122"/>
+              <a:cs typeface="宋体" panose="02010600030101010101" pitchFamily="2" charset="-122"/>
+            </a:endParaRPr>
           </a:p>
         </p:txBody>
       </p:sp>
@@ -12158,7 +12962,11 @@
         <p:nvSpPr>
           <p:cNvPr id="13" name="TextBox 12"/>
           <p:cNvSpPr txBox="1"/>
-          <p:nvPr/>
+          <p:nvPr>
+            <p:custDataLst>
+              <p:tags r:id="rId10"/>
+            </p:custDataLst>
+          </p:nvPr>
         </p:nvSpPr>
         <p:spPr>
           <a:xfrm>
@@ -12171,7 +12979,7 @@
           <a:noFill/>
         </p:spPr>
         <p:txBody>
-          <a:bodyPr wrap="square" lIns="0" rIns="0" tIns="0" bIns="0" anchor="ctr">
+          <a:bodyPr wrap="square" lIns="0" tIns="0" rIns="0" bIns="0" anchor="ctr">
             <a:spAutoFit/>
           </a:bodyPr>
           <a:lstStyle/>
@@ -12192,12 +13000,20 @@
                 <a:solidFill>
                   <a:srgbClr val="000000"/>
                 </a:solidFill>
-                <a:latin typeface="Times New Roman"/>
-                <a:ea typeface="宋体"/>
-                <a:cs typeface="宋体"/>
-              </a:rPr>
-              <a:t>交稿前该问自己的十句话</a:t>
-            </a:r>
+                <a:latin typeface="Times New Roman" panose="02020603050405020304"/>
+                <a:ea typeface="宋体" panose="02010600030101010101" pitchFamily="2" charset="-122"/>
+                <a:cs typeface="宋体" panose="02010600030101010101" pitchFamily="2" charset="-122"/>
+              </a:rPr>
+              <a:t>启示：问卷设计与施测的规范</a:t>
+            </a:r>
+            <a:endParaRPr sz="1700" b="0" i="0">
+              <a:solidFill>
+                <a:srgbClr val="000000"/>
+              </a:solidFill>
+              <a:latin typeface="Times New Roman" panose="02020603050405020304"/>
+              <a:ea typeface="宋体" panose="02010600030101010101" pitchFamily="2" charset="-122"/>
+              <a:cs typeface="宋体" panose="02010600030101010101" pitchFamily="2" charset="-122"/>
+            </a:endParaRPr>
           </a:p>
         </p:txBody>
       </p:sp>
@@ -12218,7 +13034,7 @@
           <a:noFill/>
         </p:spPr>
         <p:txBody>
-          <a:bodyPr wrap="square" lIns="0" rIns="0" tIns="0" bIns="0" anchor="t">
+          <a:bodyPr wrap="square" lIns="0" tIns="0" rIns="0" bIns="0" anchor="t">
             <a:spAutoFit/>
           </a:bodyPr>
           <a:lstStyle/>
@@ -12239,12 +13055,20 @@
                 <a:solidFill>
                   <a:srgbClr val="404040"/>
                 </a:solidFill>
-                <a:latin typeface="Times New Roman"/>
-                <a:ea typeface="宋体"/>
-                <a:cs typeface="宋体"/>
-              </a:rPr>
-              <a:t>2 / 34</a:t>
-            </a:r>
+                <a:latin typeface="Times New Roman" panose="02020603050405020304"/>
+                <a:ea typeface="宋体" panose="02010600030101010101" pitchFamily="2" charset="-122"/>
+                <a:cs typeface="宋体" panose="02010600030101010101" pitchFamily="2" charset="-122"/>
+              </a:rPr>
+              <a:t>2 / 32</a:t>
+            </a:r>
+            <a:endParaRPr sz="1000" b="0" i="0">
+              <a:solidFill>
+                <a:srgbClr val="404040"/>
+              </a:solidFill>
+              <a:latin typeface="Times New Roman" panose="02020603050405020304"/>
+              <a:ea typeface="宋体" panose="02010600030101010101" pitchFamily="2" charset="-122"/>
+              <a:cs typeface="宋体" panose="02010600030101010101" pitchFamily="2" charset="-122"/>
+            </a:endParaRPr>
           </a:p>
         </p:txBody>
       </p:sp>
@@ -12257,7 +13081,7 @@
 </file>
 
 <file path=ppt/slides/slide20.xml><?xml version="1.0" encoding="utf-8"?>
-<p:sld xmlns:a="http://schemas.openxmlformats.org/drawingml/2006/main" xmlns:p="http://schemas.openxmlformats.org/presentationml/2006/main" xmlns:r="http://schemas.openxmlformats.org/officeDocument/2006/relationships">
+<p:sld xmlns:a="http://schemas.openxmlformats.org/drawingml/2006/main" xmlns:r="http://schemas.openxmlformats.org/officeDocument/2006/relationships" xmlns:p="http://schemas.openxmlformats.org/presentationml/2006/main">
   <p:cSld>
     <p:spTree>
       <p:nvGrpSpPr>
@@ -12283,7 +13107,7 @@
           <a:noFill/>
         </p:spPr>
         <p:txBody>
-          <a:bodyPr wrap="square" lIns="0" rIns="0" tIns="0" bIns="0" anchor="t">
+          <a:bodyPr wrap="square" lIns="0" tIns="0" rIns="0" bIns="0" anchor="t">
             <a:spAutoFit/>
           </a:bodyPr>
           <a:lstStyle/>
@@ -12304,12 +13128,20 @@
                 <a:solidFill>
                   <a:srgbClr val="000000"/>
                 </a:solidFill>
-                <a:latin typeface="Times New Roman"/>
-                <a:ea typeface="黑体"/>
-                <a:cs typeface="黑体"/>
+                <a:latin typeface="Times New Roman" panose="02020603050405020304"/>
+                <a:ea typeface="黑体" panose="02010609060101010101" charset="-122"/>
+                <a:cs typeface="黑体" panose="02010609060101010101" charset="-122"/>
               </a:rPr>
               <a:t>环节一：6 道题是自编的，没验证过</a:t>
             </a:r>
+            <a:endParaRPr sz="2300" b="1" i="0">
+              <a:solidFill>
+                <a:srgbClr val="000000"/>
+              </a:solidFill>
+              <a:latin typeface="Times New Roman" panose="02020603050405020304"/>
+              <a:ea typeface="黑体" panose="02010609060101010101" charset="-122"/>
+              <a:cs typeface="黑体" panose="02010609060101010101" charset="-122"/>
+            </a:endParaRPr>
           </a:p>
         </p:txBody>
       </p:sp>
@@ -12322,7 +13154,7 @@
           <p:nvPr/>
         </p:nvPicPr>
         <p:blipFill>
-          <a:blip r:embed="rId2"/>
+          <a:blip r:embed="rId1"/>
           <a:stretch>
             <a:fillRect/>
           </a:stretch>
@@ -12398,7 +13230,7 @@
           <a:noFill/>
         </p:spPr>
         <p:txBody>
-          <a:bodyPr wrap="square" lIns="0" rIns="0" tIns="0" bIns="0" anchor="t">
+          <a:bodyPr wrap="square" lIns="0" tIns="0" rIns="0" bIns="0" anchor="t">
             <a:spAutoFit/>
           </a:bodyPr>
           <a:lstStyle/>
@@ -12419,12 +13251,20 @@
                 <a:solidFill>
                   <a:srgbClr val="404040"/>
                 </a:solidFill>
-                <a:latin typeface="Times New Roman"/>
-                <a:ea typeface="宋体"/>
-                <a:cs typeface="宋体"/>
+                <a:latin typeface="Times New Roman" panose="02020603050405020304"/>
+                <a:ea typeface="宋体" panose="02010600030101010101" pitchFamily="2" charset="-122"/>
+                <a:cs typeface="宋体" panose="02010600030101010101" pitchFamily="2" charset="-122"/>
               </a:rPr>
               <a:t>问卷 6 题 + 4 开放题</a:t>
             </a:r>
+            <a:endParaRPr sz="950" b="0" i="0">
+              <a:solidFill>
+                <a:srgbClr val="404040"/>
+              </a:solidFill>
+              <a:latin typeface="Times New Roman" panose="02020603050405020304"/>
+              <a:ea typeface="宋体" panose="02010600030101010101" pitchFamily="2" charset="-122"/>
+              <a:cs typeface="宋体" panose="02010600030101010101" pitchFamily="2" charset="-122"/>
+            </a:endParaRPr>
           </a:p>
         </p:txBody>
       </p:sp>
@@ -12445,7 +13285,7 @@
           <a:noFill/>
         </p:spPr>
         <p:txBody>
-          <a:bodyPr wrap="square" lIns="0" rIns="0" tIns="0" bIns="0" anchor="t">
+          <a:bodyPr wrap="square" lIns="0" tIns="0" rIns="0" bIns="0" anchor="t">
             <a:spAutoFit/>
           </a:bodyPr>
           <a:lstStyle/>
@@ -12466,12 +13306,20 @@
                 <a:solidFill>
                   <a:srgbClr val="000000"/>
                 </a:solidFill>
-                <a:latin typeface="Times New Roman"/>
-                <a:ea typeface="宋体"/>
-                <a:cs typeface="宋体"/>
+                <a:latin typeface="Times New Roman" panose="02020603050405020304"/>
+                <a:ea typeface="宋体" panose="02010600030101010101" pitchFamily="2" charset="-122"/>
+                <a:cs typeface="宋体" panose="02010600030101010101" pitchFamily="2" charset="-122"/>
               </a:rPr>
               <a:t>· 它一共出了 6 道题：3 道问「有用性」、3 道问「易用性」，再加 4 道开放题，让受试在 1 到 6 之间打分。</a:t>
             </a:r>
+            <a:endParaRPr sz="2000" b="0" i="0">
+              <a:solidFill>
+                <a:srgbClr val="000000"/>
+              </a:solidFill>
+              <a:latin typeface="Times New Roman" panose="02020603050405020304"/>
+              <a:ea typeface="宋体" panose="02010600030101010101" pitchFamily="2" charset="-122"/>
+              <a:cs typeface="宋体" panose="02010600030101010101" pitchFamily="2" charset="-122"/>
+            </a:endParaRPr>
           </a:p>
           <a:p>
             <a:pPr algn="l">
@@ -12490,12 +13338,20 @@
                 <a:solidFill>
                   <a:srgbClr val="000000"/>
                 </a:solidFill>
-                <a:latin typeface="Times New Roman"/>
-                <a:ea typeface="宋体"/>
-                <a:cs typeface="宋体"/>
+                <a:latin typeface="Times New Roman" panose="02020603050405020304"/>
+                <a:ea typeface="宋体" panose="02010600030101010101" pitchFamily="2" charset="-122"/>
+                <a:cs typeface="宋体" panose="02010600030101010101" pitchFamily="2" charset="-122"/>
               </a:rPr>
               <a:t>· 关键问题：这 6 道题是作者自己编的，但全文没说它们沿用自哪个现成量表，也没请专家评审，也没先试测。</a:t>
             </a:r>
+            <a:endParaRPr sz="2000" b="0" i="0">
+              <a:solidFill>
+                <a:srgbClr val="000000"/>
+              </a:solidFill>
+              <a:latin typeface="Times New Roman" panose="02020603050405020304"/>
+              <a:ea typeface="宋体" panose="02010600030101010101" pitchFamily="2" charset="-122"/>
+              <a:cs typeface="宋体" panose="02010600030101010101" pitchFamily="2" charset="-122"/>
+            </a:endParaRPr>
           </a:p>
           <a:p>
             <a:pPr algn="l">
@@ -12514,12 +13370,20 @@
                 <a:solidFill>
                   <a:srgbClr val="000000"/>
                 </a:solidFill>
-                <a:latin typeface="Times New Roman"/>
-                <a:ea typeface="宋体"/>
-                <a:cs typeface="宋体"/>
+                <a:latin typeface="Times New Roman" panose="02020603050405020304"/>
+                <a:ea typeface="宋体" panose="02010600030101010101" pitchFamily="2" charset="-122"/>
+                <a:cs typeface="宋体" panose="02010600030101010101" pitchFamily="2" charset="-122"/>
               </a:rPr>
               <a:t>· 换句话说，这 6 道题到底能不能代表「有用性」和「易用性」，从没人验证过——题目可能根本没测到点子上。</a:t>
             </a:r>
+            <a:endParaRPr sz="2000" b="0" i="0">
+              <a:solidFill>
+                <a:srgbClr val="000000"/>
+              </a:solidFill>
+              <a:latin typeface="Times New Roman" panose="02020603050405020304"/>
+              <a:ea typeface="宋体" panose="02010600030101010101" pitchFamily="2" charset="-122"/>
+              <a:cs typeface="宋体" panose="02010600030101010101" pitchFamily="2" charset="-122"/>
+            </a:endParaRPr>
           </a:p>
         </p:txBody>
       </p:sp>
@@ -12540,7 +13404,7 @@
           <a:noFill/>
         </p:spPr>
         <p:txBody>
-          <a:bodyPr wrap="square" lIns="0" rIns="0" tIns="0" bIns="0" anchor="t">
+          <a:bodyPr wrap="square" lIns="0" tIns="0" rIns="0" bIns="0" anchor="t">
             <a:spAutoFit/>
           </a:bodyPr>
           <a:lstStyle/>
@@ -12561,12 +13425,20 @@
                 <a:solidFill>
                   <a:srgbClr val="404040"/>
                 </a:solidFill>
-                <a:latin typeface="Times New Roman"/>
-                <a:ea typeface="宋体"/>
-                <a:cs typeface="宋体"/>
+                <a:latin typeface="Times New Roman" panose="02020603050405020304"/>
+                <a:ea typeface="宋体" panose="02010600030101010101" pitchFamily="2" charset="-122"/>
+                <a:cs typeface="宋体" panose="02010600030101010101" pitchFamily="2" charset="-122"/>
               </a:rPr>
               <a:t>20 / 34</a:t>
             </a:r>
+            <a:endParaRPr sz="1000" b="0" i="0">
+              <a:solidFill>
+                <a:srgbClr val="404040"/>
+              </a:solidFill>
+              <a:latin typeface="Times New Roman" panose="02020603050405020304"/>
+              <a:ea typeface="宋体" panose="02010600030101010101" pitchFamily="2" charset="-122"/>
+              <a:cs typeface="宋体" panose="02010600030101010101" pitchFamily="2" charset="-122"/>
+            </a:endParaRPr>
           </a:p>
         </p:txBody>
       </p:sp>
@@ -12579,7 +13451,7 @@
 </file>
 
 <file path=ppt/slides/slide21.xml><?xml version="1.0" encoding="utf-8"?>
-<p:sld xmlns:a="http://schemas.openxmlformats.org/drawingml/2006/main" xmlns:p="http://schemas.openxmlformats.org/presentationml/2006/main" xmlns:r="http://schemas.openxmlformats.org/officeDocument/2006/relationships">
+<p:sld xmlns:a="http://schemas.openxmlformats.org/drawingml/2006/main" xmlns:r="http://schemas.openxmlformats.org/officeDocument/2006/relationships" xmlns:p="http://schemas.openxmlformats.org/presentationml/2006/main">
   <p:cSld>
     <p:spTree>
       <p:nvGrpSpPr>
@@ -12605,7 +13477,7 @@
           <a:noFill/>
         </p:spPr>
         <p:txBody>
-          <a:bodyPr wrap="square" lIns="0" rIns="0" tIns="0" bIns="0" anchor="t">
+          <a:bodyPr wrap="square" lIns="0" tIns="0" rIns="0" bIns="0" anchor="t">
             <a:spAutoFit/>
           </a:bodyPr>
           <a:lstStyle/>
@@ -12626,12 +13498,20 @@
                 <a:solidFill>
                   <a:srgbClr val="000000"/>
                 </a:solidFill>
-                <a:latin typeface="Times New Roman"/>
-                <a:ea typeface="黑体"/>
-                <a:cs typeface="黑体"/>
+                <a:latin typeface="Times New Roman" panose="02020603050405020304"/>
+                <a:ea typeface="黑体" panose="02010609060101010101" charset="-122"/>
+                <a:cs typeface="黑体" panose="02010609060101010101" charset="-122"/>
               </a:rPr>
               <a:t>环节二：抽样和回收，都没交代</a:t>
             </a:r>
+            <a:endParaRPr sz="2300" b="1" i="0">
+              <a:solidFill>
+                <a:srgbClr val="000000"/>
+              </a:solidFill>
+              <a:latin typeface="Times New Roman" panose="02020603050405020304"/>
+              <a:ea typeface="黑体" panose="02010609060101010101" charset="-122"/>
+              <a:cs typeface="黑体" panose="02010609060101010101" charset="-122"/>
+            </a:endParaRPr>
           </a:p>
         </p:txBody>
       </p:sp>
@@ -12644,7 +13524,7 @@
           <p:nvPr/>
         </p:nvPicPr>
         <p:blipFill>
-          <a:blip r:embed="rId2"/>
+          <a:blip r:embed="rId1"/>
           <a:stretch>
             <a:fillRect/>
           </a:stretch>
@@ -12720,7 +13600,7 @@
           <a:noFill/>
         </p:spPr>
         <p:txBody>
-          <a:bodyPr wrap="square" lIns="0" rIns="0" tIns="0" bIns="0" anchor="t">
+          <a:bodyPr wrap="square" lIns="0" tIns="0" rIns="0" bIns="0" anchor="t">
             <a:spAutoFit/>
           </a:bodyPr>
           <a:lstStyle/>
@@ -12741,12 +13621,20 @@
                 <a:solidFill>
                   <a:srgbClr val="404040"/>
                 </a:solidFill>
-                <a:latin typeface="Times New Roman"/>
-                <a:ea typeface="宋体"/>
-                <a:cs typeface="宋体"/>
+                <a:latin typeface="Times New Roman" panose="02020603050405020304"/>
+                <a:ea typeface="宋体" panose="02010600030101010101" pitchFamily="2" charset="-122"/>
+                <a:cs typeface="宋体" panose="02010600030101010101" pitchFamily="2" charset="-122"/>
               </a:rPr>
               <a:t>被试说明（论文 p4）</a:t>
             </a:r>
+            <a:endParaRPr sz="950" b="0" i="0">
+              <a:solidFill>
+                <a:srgbClr val="404040"/>
+              </a:solidFill>
+              <a:latin typeface="Times New Roman" panose="02020603050405020304"/>
+              <a:ea typeface="宋体" panose="02010600030101010101" pitchFamily="2" charset="-122"/>
+              <a:cs typeface="宋体" panose="02010600030101010101" pitchFamily="2" charset="-122"/>
+            </a:endParaRPr>
           </a:p>
         </p:txBody>
       </p:sp>
@@ -12767,7 +13655,7 @@
           <a:noFill/>
         </p:spPr>
         <p:txBody>
-          <a:bodyPr wrap="square" lIns="0" rIns="0" tIns="0" bIns="0" anchor="t">
+          <a:bodyPr wrap="square" lIns="0" tIns="0" rIns="0" bIns="0" anchor="t">
             <a:spAutoFit/>
           </a:bodyPr>
           <a:lstStyle/>
@@ -12788,12 +13676,20 @@
                 <a:solidFill>
                   <a:srgbClr val="000000"/>
                 </a:solidFill>
-                <a:latin typeface="Times New Roman"/>
-                <a:ea typeface="宋体"/>
-                <a:cs typeface="宋体"/>
+                <a:latin typeface="Times New Roman" panose="02020603050405020304"/>
+                <a:ea typeface="宋体" panose="02010600030101010101" pitchFamily="2" charset="-122"/>
+                <a:cs typeface="宋体" panose="02010600030101010101" pitchFamily="2" charset="-122"/>
               </a:rPr>
               <a:t>· 论文只说：西北一所高校翻译专业的 127 名学生参与了，大三 39 人、大四 88 人。</a:t>
             </a:r>
+            <a:endParaRPr sz="2000" b="0" i="0">
+              <a:solidFill>
+                <a:srgbClr val="000000"/>
+              </a:solidFill>
+              <a:latin typeface="Times New Roman" panose="02020603050405020304"/>
+              <a:ea typeface="宋体" panose="02010600030101010101" pitchFamily="2" charset="-122"/>
+              <a:cs typeface="宋体" panose="02010600030101010101" pitchFamily="2" charset="-122"/>
+            </a:endParaRPr>
           </a:p>
           <a:p>
             <a:pPr algn="l">
@@ -12812,12 +13708,20 @@
                 <a:solidFill>
                   <a:srgbClr val="000000"/>
                 </a:solidFill>
-                <a:latin typeface="Times New Roman"/>
-                <a:ea typeface="宋体"/>
-                <a:cs typeface="宋体"/>
+                <a:latin typeface="Times New Roman" panose="02020603050405020304"/>
+                <a:ea typeface="宋体" panose="02010600030101010101" pitchFamily="2" charset="-122"/>
+                <a:cs typeface="宋体" panose="02010600030101010101" pitchFamily="2" charset="-122"/>
               </a:rPr>
               <a:t>· 缺了什么：怎么抽的（随机抽，还是随便找）、发出多少份、收回多少份、有效多少份，全都没写。</a:t>
             </a:r>
+            <a:endParaRPr sz="2000" b="0" i="0">
+              <a:solidFill>
+                <a:srgbClr val="000000"/>
+              </a:solidFill>
+              <a:latin typeface="Times New Roman" panose="02020603050405020304"/>
+              <a:ea typeface="宋体" panose="02010600030101010101" pitchFamily="2" charset="-122"/>
+              <a:cs typeface="宋体" panose="02010600030101010101" pitchFamily="2" charset="-122"/>
+            </a:endParaRPr>
           </a:p>
           <a:p>
             <a:pPr algn="l">
@@ -12836,12 +13740,20 @@
                 <a:solidFill>
                   <a:srgbClr val="000000"/>
                 </a:solidFill>
-                <a:latin typeface="Times New Roman"/>
-                <a:ea typeface="宋体"/>
-                <a:cs typeface="宋体"/>
+                <a:latin typeface="Times New Roman" panose="02020603050405020304"/>
+                <a:ea typeface="宋体" panose="02010600030101010101" pitchFamily="2" charset="-122"/>
+                <a:cs typeface="宋体" panose="02010600030101010101" pitchFamily="2" charset="-122"/>
               </a:rPr>
               <a:t>· 后果：不知道多少人没回、多少人被剔除，也就没法判断这 127 人能不能代表全体学生——结论的「地基」不牢。</a:t>
             </a:r>
+            <a:endParaRPr sz="2000" b="0" i="0">
+              <a:solidFill>
+                <a:srgbClr val="000000"/>
+              </a:solidFill>
+              <a:latin typeface="Times New Roman" panose="02020603050405020304"/>
+              <a:ea typeface="宋体" panose="02010600030101010101" pitchFamily="2" charset="-122"/>
+              <a:cs typeface="宋体" panose="02010600030101010101" pitchFamily="2" charset="-122"/>
+            </a:endParaRPr>
           </a:p>
         </p:txBody>
       </p:sp>
@@ -12862,7 +13774,7 @@
           <a:noFill/>
         </p:spPr>
         <p:txBody>
-          <a:bodyPr wrap="square" lIns="0" rIns="0" tIns="0" bIns="0" anchor="t">
+          <a:bodyPr wrap="square" lIns="0" tIns="0" rIns="0" bIns="0" anchor="t">
             <a:spAutoFit/>
           </a:bodyPr>
           <a:lstStyle/>
@@ -12883,12 +13795,20 @@
                 <a:solidFill>
                   <a:srgbClr val="404040"/>
                 </a:solidFill>
-                <a:latin typeface="Times New Roman"/>
-                <a:ea typeface="宋体"/>
-                <a:cs typeface="宋体"/>
+                <a:latin typeface="Times New Roman" panose="02020603050405020304"/>
+                <a:ea typeface="宋体" panose="02010600030101010101" pitchFamily="2" charset="-122"/>
+                <a:cs typeface="宋体" panose="02010600030101010101" pitchFamily="2" charset="-122"/>
               </a:rPr>
               <a:t>21 / 34</a:t>
             </a:r>
+            <a:endParaRPr sz="1000" b="0" i="0">
+              <a:solidFill>
+                <a:srgbClr val="404040"/>
+              </a:solidFill>
+              <a:latin typeface="Times New Roman" panose="02020603050405020304"/>
+              <a:ea typeface="宋体" panose="02010600030101010101" pitchFamily="2" charset="-122"/>
+              <a:cs typeface="宋体" panose="02010600030101010101" pitchFamily="2" charset="-122"/>
+            </a:endParaRPr>
           </a:p>
         </p:txBody>
       </p:sp>
@@ -12901,7 +13821,7 @@
 </file>
 
 <file path=ppt/slides/slide22.xml><?xml version="1.0" encoding="utf-8"?>
-<p:sld xmlns:a="http://schemas.openxmlformats.org/drawingml/2006/main" xmlns:p="http://schemas.openxmlformats.org/presentationml/2006/main" xmlns:r="http://schemas.openxmlformats.org/officeDocument/2006/relationships">
+<p:sld xmlns:a="http://schemas.openxmlformats.org/drawingml/2006/main" xmlns:r="http://schemas.openxmlformats.org/officeDocument/2006/relationships" xmlns:p="http://schemas.openxmlformats.org/presentationml/2006/main">
   <p:cSld>
     <p:spTree>
       <p:nvGrpSpPr>
@@ -12927,7 +13847,7 @@
           <a:noFill/>
         </p:spPr>
         <p:txBody>
-          <a:bodyPr wrap="square" lIns="0" rIns="0" tIns="0" bIns="0" anchor="t">
+          <a:bodyPr wrap="square" lIns="0" tIns="0" rIns="0" bIns="0" anchor="t">
             <a:spAutoFit/>
           </a:bodyPr>
           <a:lstStyle/>
@@ -12948,12 +13868,20 @@
                 <a:solidFill>
                   <a:srgbClr val="000000"/>
                 </a:solidFill>
-                <a:latin typeface="Times New Roman"/>
-                <a:ea typeface="黑体"/>
-                <a:cs typeface="黑体"/>
+                <a:latin typeface="Times New Roman" panose="02020603050405020304"/>
+                <a:ea typeface="黑体" panose="02010609060101010101" charset="-122"/>
+                <a:cs typeface="黑体" panose="02010609060101010101" charset="-122"/>
               </a:rPr>
               <a:t>环节三：只报了信度，没报效度</a:t>
             </a:r>
+            <a:endParaRPr sz="2300" b="1" i="0">
+              <a:solidFill>
+                <a:srgbClr val="000000"/>
+              </a:solidFill>
+              <a:latin typeface="Times New Roman" panose="02020603050405020304"/>
+              <a:ea typeface="黑体" panose="02010609060101010101" charset="-122"/>
+              <a:cs typeface="黑体" panose="02010609060101010101" charset="-122"/>
+            </a:endParaRPr>
           </a:p>
         </p:txBody>
       </p:sp>
@@ -12966,7 +13894,7 @@
           <p:nvPr/>
         </p:nvPicPr>
         <p:blipFill>
-          <a:blip r:embed="rId2"/>
+          <a:blip r:embed="rId1"/>
           <a:stretch>
             <a:fillRect/>
           </a:stretch>
@@ -13042,7 +13970,7 @@
           <a:noFill/>
         </p:spPr>
         <p:txBody>
-          <a:bodyPr wrap="square" lIns="0" rIns="0" tIns="0" bIns="0" anchor="t">
+          <a:bodyPr wrap="square" lIns="0" tIns="0" rIns="0" bIns="0" anchor="t">
             <a:spAutoFit/>
           </a:bodyPr>
           <a:lstStyle/>
@@ -13063,12 +13991,20 @@
                 <a:solidFill>
                   <a:srgbClr val="404040"/>
                 </a:solidFill>
-                <a:latin typeface="Times New Roman"/>
-                <a:ea typeface="宋体"/>
-                <a:cs typeface="宋体"/>
+                <a:latin typeface="Times New Roman" panose="02020603050405020304"/>
+                <a:ea typeface="宋体" panose="02010600030101010101" pitchFamily="2" charset="-122"/>
+                <a:cs typeface="宋体" panose="02010600030101010101" pitchFamily="2" charset="-122"/>
               </a:rPr>
               <a:t>信度 α=.714 / .835</a:t>
             </a:r>
+            <a:endParaRPr sz="950" b="0" i="0">
+              <a:solidFill>
+                <a:srgbClr val="404040"/>
+              </a:solidFill>
+              <a:latin typeface="Times New Roman" panose="02020603050405020304"/>
+              <a:ea typeface="宋体" panose="02010600030101010101" pitchFamily="2" charset="-122"/>
+              <a:cs typeface="宋体" panose="02010600030101010101" pitchFamily="2" charset="-122"/>
+            </a:endParaRPr>
           </a:p>
         </p:txBody>
       </p:sp>
@@ -13080,8 +14016,8 @@
         </p:nvSpPr>
         <p:spPr>
           <a:xfrm>
-            <a:off x="640080" y="1874519"/>
-            <a:ext cx="10881360" cy="1965960"/>
+            <a:off x="640080" y="1614804"/>
+            <a:ext cx="10881360" cy="2192655"/>
           </a:xfrm>
           <a:prstGeom prst="rect">
             <a:avLst/>
@@ -13089,7 +14025,7 @@
           <a:noFill/>
         </p:spPr>
         <p:txBody>
-          <a:bodyPr wrap="square" lIns="0" rIns="0" tIns="0" bIns="0" anchor="t">
+          <a:bodyPr wrap="square" lIns="0" tIns="0" rIns="0" bIns="0" anchor="t">
             <a:spAutoFit/>
           </a:bodyPr>
           <a:lstStyle/>
@@ -13110,12 +14046,42 @@
                 <a:solidFill>
                   <a:srgbClr val="000000"/>
                 </a:solidFill>
-                <a:latin typeface="Times New Roman"/>
-                <a:ea typeface="宋体"/>
-                <a:cs typeface="宋体"/>
-              </a:rPr>
-              <a:t>· 先公平地说：它报了信度——有用性 α=.714、易用性 α=.835，这一步它做了。</a:t>
-            </a:r>
+                <a:latin typeface="Times New Roman" panose="02020603050405020304"/>
+                <a:ea typeface="宋体" panose="02010600030101010101" pitchFamily="2" charset="-122"/>
+                <a:cs typeface="宋体" panose="02010600030101010101" pitchFamily="2" charset="-122"/>
+              </a:rPr>
+              <a:t>· </a:t>
+            </a:r>
+            <a:r>
+              <a:rPr lang="zh-CN" sz="2000" b="0" i="0">
+                <a:solidFill>
+                  <a:srgbClr val="000000"/>
+                </a:solidFill>
+                <a:latin typeface="Times New Roman" panose="02020603050405020304"/>
+                <a:ea typeface="宋体" panose="02010600030101010101" pitchFamily="2" charset="-122"/>
+                <a:cs typeface="宋体" panose="02010600030101010101" pitchFamily="2" charset="-122"/>
+              </a:rPr>
+              <a:t>坦率</a:t>
+            </a:r>
+            <a:r>
+              <a:rPr sz="2000" b="0" i="0">
+                <a:solidFill>
+                  <a:srgbClr val="000000"/>
+                </a:solidFill>
+                <a:latin typeface="Times New Roman" panose="02020603050405020304"/>
+                <a:ea typeface="宋体" panose="02010600030101010101" pitchFamily="2" charset="-122"/>
+                <a:cs typeface="宋体" panose="02010600030101010101" pitchFamily="2" charset="-122"/>
+              </a:rPr>
+              <a:t>地说：它报了信度——有用性 α=.714、易用性 α=.835，这一步它做了。</a:t>
+            </a:r>
+            <a:endParaRPr sz="2000" b="0" i="0">
+              <a:solidFill>
+                <a:srgbClr val="000000"/>
+              </a:solidFill>
+              <a:latin typeface="Times New Roman" panose="02020603050405020304"/>
+              <a:ea typeface="宋体" panose="02010600030101010101" pitchFamily="2" charset="-122"/>
+              <a:cs typeface="宋体" panose="02010600030101010101" pitchFamily="2" charset="-122"/>
+            </a:endParaRPr>
           </a:p>
           <a:p>
             <a:pPr algn="l">
@@ -13134,12 +14100,20 @@
                 <a:solidFill>
                   <a:srgbClr val="000000"/>
                 </a:solidFill>
-                <a:latin typeface="Times New Roman"/>
-                <a:ea typeface="宋体"/>
-                <a:cs typeface="宋体"/>
+                <a:latin typeface="Times New Roman" panose="02020603050405020304"/>
+                <a:ea typeface="宋体" panose="02010600030101010101" pitchFamily="2" charset="-122"/>
+                <a:cs typeface="宋体" panose="02010600030101010101" pitchFamily="2" charset="-122"/>
               </a:rPr>
               <a:t>· 但它从头到尾没报效度：没有内容效度、没有因素分析。</a:t>
             </a:r>
+            <a:endParaRPr sz="2000" b="0" i="0">
+              <a:solidFill>
+                <a:srgbClr val="000000"/>
+              </a:solidFill>
+              <a:latin typeface="Times New Roman" panose="02020603050405020304"/>
+              <a:ea typeface="宋体" panose="02010600030101010101" pitchFamily="2" charset="-122"/>
+              <a:cs typeface="宋体" panose="02010600030101010101" pitchFamily="2" charset="-122"/>
+            </a:endParaRPr>
           </a:p>
           <a:p>
             <a:pPr algn="l">
@@ -13158,12 +14132,20 @@
                 <a:solidFill>
                   <a:srgbClr val="000000"/>
                 </a:solidFill>
-                <a:latin typeface="Times New Roman"/>
-                <a:ea typeface="宋体"/>
-                <a:cs typeface="宋体"/>
+                <a:latin typeface="Times New Roman" panose="02020603050405020304"/>
+                <a:ea typeface="宋体" panose="02010600030101010101" pitchFamily="2" charset="-122"/>
+                <a:cs typeface="宋体" panose="02010600030101010101" pitchFamily="2" charset="-122"/>
               </a:rPr>
               <a:t>· 也就是说，这 6 道题「测得稳不稳」知道了，「测得准不准」完全不知道——题目可能一直在稳定地测一个错误的东西。</a:t>
             </a:r>
+            <a:endParaRPr sz="2000" b="0" i="0">
+              <a:solidFill>
+                <a:srgbClr val="000000"/>
+              </a:solidFill>
+              <a:latin typeface="Times New Roman" panose="02020603050405020304"/>
+              <a:ea typeface="宋体" panose="02010600030101010101" pitchFamily="2" charset="-122"/>
+              <a:cs typeface="宋体" panose="02010600030101010101" pitchFamily="2" charset="-122"/>
+            </a:endParaRPr>
           </a:p>
           <a:p>
             <a:pPr algn="l">
@@ -13182,12 +14164,20 @@
                 <a:solidFill>
                   <a:srgbClr val="000000"/>
                 </a:solidFill>
-                <a:latin typeface="Times New Roman"/>
-                <a:ea typeface="宋体"/>
-                <a:cs typeface="宋体"/>
+                <a:latin typeface="Times New Roman" panose="02020603050405020304"/>
+                <a:ea typeface="宋体" panose="02010600030101010101" pitchFamily="2" charset="-122"/>
+                <a:cs typeface="宋体" panose="02010600030101010101" pitchFamily="2" charset="-122"/>
               </a:rPr>
               <a:t>· 回顾那个比喻：体重秤读数很稳定（信度高），但量的是不是体重（效度），没人证明。</a:t>
             </a:r>
+            <a:endParaRPr sz="2000" b="0" i="0">
+              <a:solidFill>
+                <a:srgbClr val="000000"/>
+              </a:solidFill>
+              <a:latin typeface="Times New Roman" panose="02020603050405020304"/>
+              <a:ea typeface="宋体" panose="02010600030101010101" pitchFamily="2" charset="-122"/>
+              <a:cs typeface="宋体" panose="02010600030101010101" pitchFamily="2" charset="-122"/>
+            </a:endParaRPr>
           </a:p>
         </p:txBody>
       </p:sp>
@@ -13208,7 +14198,7 @@
           <a:noFill/>
         </p:spPr>
         <p:txBody>
-          <a:bodyPr wrap="square" lIns="0" rIns="0" tIns="0" bIns="0" anchor="t">
+          <a:bodyPr wrap="square" lIns="0" tIns="0" rIns="0" bIns="0" anchor="t">
             <a:spAutoFit/>
           </a:bodyPr>
           <a:lstStyle/>
@@ -13229,12 +14219,20 @@
                 <a:solidFill>
                   <a:srgbClr val="404040"/>
                 </a:solidFill>
-                <a:latin typeface="Times New Roman"/>
-                <a:ea typeface="宋体"/>
-                <a:cs typeface="宋体"/>
+                <a:latin typeface="Times New Roman" panose="02020603050405020304"/>
+                <a:ea typeface="宋体" panose="02010600030101010101" pitchFamily="2" charset="-122"/>
+                <a:cs typeface="宋体" panose="02010600030101010101" pitchFamily="2" charset="-122"/>
               </a:rPr>
               <a:t>22 / 34</a:t>
             </a:r>
+            <a:endParaRPr sz="1000" b="0" i="0">
+              <a:solidFill>
+                <a:srgbClr val="404040"/>
+              </a:solidFill>
+              <a:latin typeface="Times New Roman" panose="02020603050405020304"/>
+              <a:ea typeface="宋体" panose="02010600030101010101" pitchFamily="2" charset="-122"/>
+              <a:cs typeface="宋体" panose="02010600030101010101" pitchFamily="2" charset="-122"/>
+            </a:endParaRPr>
           </a:p>
         </p:txBody>
       </p:sp>
@@ -13247,7 +14245,7 @@
 </file>
 
 <file path=ppt/slides/slide23.xml><?xml version="1.0" encoding="utf-8"?>
-<p:sld xmlns:a="http://schemas.openxmlformats.org/drawingml/2006/main" xmlns:p="http://schemas.openxmlformats.org/presentationml/2006/main" xmlns:r="http://schemas.openxmlformats.org/officeDocument/2006/relationships">
+<p:sld xmlns:a="http://schemas.openxmlformats.org/drawingml/2006/main" xmlns:r="http://schemas.openxmlformats.org/officeDocument/2006/relationships" xmlns:p="http://schemas.openxmlformats.org/presentationml/2006/main">
   <p:cSld>
     <p:spTree>
       <p:nvGrpSpPr>
@@ -13273,7 +14271,7 @@
           <a:noFill/>
         </p:spPr>
         <p:txBody>
-          <a:bodyPr wrap="square" lIns="0" rIns="0" tIns="0" bIns="0" anchor="t">
+          <a:bodyPr wrap="square" lIns="0" tIns="0" rIns="0" bIns="0" anchor="t">
             <a:spAutoFit/>
           </a:bodyPr>
           <a:lstStyle/>
@@ -13294,12 +14292,20 @@
                 <a:solidFill>
                   <a:srgbClr val="000000"/>
                 </a:solidFill>
-                <a:latin typeface="Times New Roman"/>
-                <a:ea typeface="黑体"/>
-                <a:cs typeface="黑体"/>
+                <a:latin typeface="Times New Roman" panose="02020603050405020304"/>
+                <a:ea typeface="黑体" panose="02010609060101010101" charset="-122"/>
+                <a:cs typeface="黑体" panose="02010609060101010101" charset="-122"/>
               </a:rPr>
               <a:t>环节四：拿一道题当一整个概念</a:t>
             </a:r>
+            <a:endParaRPr sz="2300" b="1" i="0">
+              <a:solidFill>
+                <a:srgbClr val="000000"/>
+              </a:solidFill>
+              <a:latin typeface="Times New Roman" panose="02020603050405020304"/>
+              <a:ea typeface="黑体" panose="02010609060101010101" charset="-122"/>
+              <a:cs typeface="黑体" panose="02010609060101010101" charset="-122"/>
+            </a:endParaRPr>
           </a:p>
         </p:txBody>
       </p:sp>
@@ -13312,7 +14318,7 @@
           <p:nvPr/>
         </p:nvPicPr>
         <p:blipFill>
-          <a:blip r:embed="rId2"/>
+          <a:blip r:embed="rId1"/>
           <a:stretch>
             <a:fillRect/>
           </a:stretch>
@@ -13388,7 +14394,7 @@
           <a:noFill/>
         </p:spPr>
         <p:txBody>
-          <a:bodyPr wrap="square" lIns="0" rIns="0" tIns="0" bIns="0" anchor="t">
+          <a:bodyPr wrap="square" lIns="0" tIns="0" rIns="0" bIns="0" anchor="t">
             <a:spAutoFit/>
           </a:bodyPr>
           <a:lstStyle/>
@@ -13409,12 +14415,20 @@
                 <a:solidFill>
                   <a:srgbClr val="404040"/>
                 </a:solidFill>
-                <a:latin typeface="Times New Roman"/>
-                <a:ea typeface="宋体"/>
-                <a:cs typeface="宋体"/>
+                <a:latin typeface="Times New Roman" panose="02020603050405020304"/>
+                <a:ea typeface="宋体" panose="02010600030101010101" pitchFamily="2" charset="-122"/>
+                <a:cs typeface="宋体" panose="02010600030101010101" pitchFamily="2" charset="-122"/>
               </a:rPr>
               <a:t>单题相关分析（论文 p5）</a:t>
             </a:r>
+            <a:endParaRPr sz="950" b="0" i="0">
+              <a:solidFill>
+                <a:srgbClr val="404040"/>
+              </a:solidFill>
+              <a:latin typeface="Times New Roman" panose="02020603050405020304"/>
+              <a:ea typeface="宋体" panose="02010600030101010101" pitchFamily="2" charset="-122"/>
+              <a:cs typeface="宋体" panose="02010600030101010101" pitchFamily="2" charset="-122"/>
+            </a:endParaRPr>
           </a:p>
         </p:txBody>
       </p:sp>
@@ -13435,7 +14449,7 @@
           <a:noFill/>
         </p:spPr>
         <p:txBody>
-          <a:bodyPr wrap="square" lIns="0" rIns="0" tIns="0" bIns="0" anchor="t">
+          <a:bodyPr wrap="square" lIns="0" tIns="0" rIns="0" bIns="0" anchor="t">
             <a:spAutoFit/>
           </a:bodyPr>
           <a:lstStyle/>
@@ -13456,12 +14470,20 @@
                 <a:solidFill>
                   <a:srgbClr val="000000"/>
                 </a:solidFill>
-                <a:latin typeface="Times New Roman"/>
-                <a:ea typeface="宋体"/>
-                <a:cs typeface="宋体"/>
+                <a:latin typeface="Times New Roman" panose="02020603050405020304"/>
+                <a:ea typeface="宋体" panose="02010600030101010101" pitchFamily="2" charset="-122"/>
+                <a:cs typeface="宋体" panose="02010600030101010101" pitchFamily="2" charset="-122"/>
               </a:rPr>
               <a:t>· 它做相关分析时，拿「Q6 这一道题」去和 CAT 课成绩算相关（r=.746），拿「Q2 这一道题」去和翻译实践成绩算相关（r=-.419）。</a:t>
             </a:r>
+            <a:endParaRPr sz="2000" b="0" i="0">
+              <a:solidFill>
+                <a:srgbClr val="000000"/>
+              </a:solidFill>
+              <a:latin typeface="Times New Roman" panose="02020603050405020304"/>
+              <a:ea typeface="宋体" panose="02010600030101010101" pitchFamily="2" charset="-122"/>
+              <a:cs typeface="宋体" panose="02010600030101010101" pitchFamily="2" charset="-122"/>
+            </a:endParaRPr>
           </a:p>
           <a:p>
             <a:pPr algn="l">
@@ -13480,12 +14502,20 @@
                 <a:solidFill>
                   <a:srgbClr val="000000"/>
                 </a:solidFill>
-                <a:latin typeface="Times New Roman"/>
-                <a:ea typeface="宋体"/>
-                <a:cs typeface="宋体"/>
+                <a:latin typeface="Times New Roman" panose="02020603050405020304"/>
+                <a:ea typeface="宋体" panose="02010600030101010101" pitchFamily="2" charset="-122"/>
+                <a:cs typeface="宋体" panose="02010600030101010101" pitchFamily="2" charset="-122"/>
               </a:rPr>
               <a:t>· 正确做法应该是：把测同一个概念的 3 道题，先合成一个平均分，再拿这个平均分去算。</a:t>
             </a:r>
+            <a:endParaRPr sz="2000" b="0" i="0">
+              <a:solidFill>
+                <a:srgbClr val="000000"/>
+              </a:solidFill>
+              <a:latin typeface="Times New Roman" panose="02020603050405020304"/>
+              <a:ea typeface="宋体" panose="02010600030101010101" pitchFamily="2" charset="-122"/>
+              <a:cs typeface="宋体" panose="02010600030101010101" pitchFamily="2" charset="-122"/>
+            </a:endParaRPr>
           </a:p>
           <a:p>
             <a:pPr algn="l">
@@ -13504,12 +14534,20 @@
                 <a:solidFill>
                   <a:srgbClr val="000000"/>
                 </a:solidFill>
-                <a:latin typeface="Times New Roman"/>
-                <a:ea typeface="宋体"/>
-                <a:cs typeface="宋体"/>
+                <a:latin typeface="Times New Roman" panose="02020603050405020304"/>
+                <a:ea typeface="宋体" panose="02010600030101010101" pitchFamily="2" charset="-122"/>
+                <a:cs typeface="宋体" panose="02010600030101010101" pitchFamily="2" charset="-122"/>
               </a:rPr>
               <a:t>· 拿单题去算，就像用「一次考试里的一道小题」代表「整门课的水平」——太不稳定，换个题结论可能就变了。</a:t>
             </a:r>
+            <a:endParaRPr sz="2000" b="0" i="0">
+              <a:solidFill>
+                <a:srgbClr val="000000"/>
+              </a:solidFill>
+              <a:latin typeface="Times New Roman" panose="02020603050405020304"/>
+              <a:ea typeface="宋体" panose="02010600030101010101" pitchFamily="2" charset="-122"/>
+              <a:cs typeface="宋体" panose="02010600030101010101" pitchFamily="2" charset="-122"/>
+            </a:endParaRPr>
           </a:p>
         </p:txBody>
       </p:sp>
@@ -13530,7 +14568,7 @@
           <a:noFill/>
         </p:spPr>
         <p:txBody>
-          <a:bodyPr wrap="square" lIns="0" rIns="0" tIns="0" bIns="0" anchor="t">
+          <a:bodyPr wrap="square" lIns="0" tIns="0" rIns="0" bIns="0" anchor="t">
             <a:spAutoFit/>
           </a:bodyPr>
           <a:lstStyle/>
@@ -13551,12 +14589,20 @@
                 <a:solidFill>
                   <a:srgbClr val="404040"/>
                 </a:solidFill>
-                <a:latin typeface="Times New Roman"/>
-                <a:ea typeface="宋体"/>
-                <a:cs typeface="宋体"/>
+                <a:latin typeface="Times New Roman" panose="02020603050405020304"/>
+                <a:ea typeface="宋体" panose="02010600030101010101" pitchFamily="2" charset="-122"/>
+                <a:cs typeface="宋体" panose="02010600030101010101" pitchFamily="2" charset="-122"/>
               </a:rPr>
               <a:t>23 / 34</a:t>
             </a:r>
+            <a:endParaRPr sz="1000" b="0" i="0">
+              <a:solidFill>
+                <a:srgbClr val="404040"/>
+              </a:solidFill>
+              <a:latin typeface="Times New Roman" panose="02020603050405020304"/>
+              <a:ea typeface="宋体" panose="02010600030101010101" pitchFamily="2" charset="-122"/>
+              <a:cs typeface="宋体" panose="02010600030101010101" pitchFamily="2" charset="-122"/>
+            </a:endParaRPr>
           </a:p>
         </p:txBody>
       </p:sp>
@@ -13569,7 +14615,7 @@
 </file>
 
 <file path=ppt/slides/slide24.xml><?xml version="1.0" encoding="utf-8"?>
-<p:sld xmlns:a="http://schemas.openxmlformats.org/drawingml/2006/main" xmlns:p="http://schemas.openxmlformats.org/presentationml/2006/main" xmlns:r="http://schemas.openxmlformats.org/officeDocument/2006/relationships">
+<p:sld xmlns:a="http://schemas.openxmlformats.org/drawingml/2006/main" xmlns:r="http://schemas.openxmlformats.org/officeDocument/2006/relationships" xmlns:p="http://schemas.openxmlformats.org/presentationml/2006/main">
   <p:cSld>
     <p:spTree>
       <p:nvGrpSpPr>
@@ -13595,7 +14641,7 @@
           <a:noFill/>
         </p:spPr>
         <p:txBody>
-          <a:bodyPr wrap="square" lIns="0" rIns="0" tIns="0" bIns="0" anchor="t">
+          <a:bodyPr wrap="square" lIns="0" tIns="0" rIns="0" bIns="0" anchor="t">
             <a:spAutoFit/>
           </a:bodyPr>
           <a:lstStyle/>
@@ -13616,12 +14662,20 @@
                 <a:solidFill>
                   <a:srgbClr val="000000"/>
                 </a:solidFill>
-                <a:latin typeface="Times New Roman"/>
-                <a:ea typeface="黑体"/>
-                <a:cs typeface="黑体"/>
+                <a:latin typeface="Times New Roman" panose="02020603050405020304"/>
+                <a:ea typeface="黑体" panose="02010609060101010101" charset="-122"/>
+                <a:cs typeface="黑体" panose="02010609060101010101" charset="-122"/>
               </a:rPr>
               <a:t>环节五：结论跨得太大</a:t>
             </a:r>
+            <a:endParaRPr sz="2300" b="1" i="0">
+              <a:solidFill>
+                <a:srgbClr val="000000"/>
+              </a:solidFill>
+              <a:latin typeface="Times New Roman" panose="02020603050405020304"/>
+              <a:ea typeface="黑体" panose="02010609060101010101" charset="-122"/>
+              <a:cs typeface="黑体" panose="02010609060101010101" charset="-122"/>
+            </a:endParaRPr>
           </a:p>
         </p:txBody>
       </p:sp>
@@ -13642,7 +14696,7 @@
           <a:noFill/>
         </p:spPr>
         <p:txBody>
-          <a:bodyPr wrap="square" lIns="0" rIns="0" tIns="0" bIns="0" anchor="t">
+          <a:bodyPr wrap="square" lIns="0" tIns="0" rIns="0" bIns="0" anchor="t">
             <a:spAutoFit/>
           </a:bodyPr>
           <a:lstStyle/>
@@ -13663,12 +14717,20 @@
                 <a:solidFill>
                   <a:srgbClr val="000000"/>
                 </a:solidFill>
-                <a:latin typeface="Times New Roman"/>
-                <a:ea typeface="宋体"/>
-                <a:cs typeface="宋体"/>
+                <a:latin typeface="Times New Roman" panose="02020603050405020304"/>
+                <a:ea typeface="宋体" panose="02010600030101010101" pitchFamily="2" charset="-122"/>
+                <a:cs typeface="宋体" panose="02010600030101010101" pitchFamily="2" charset="-122"/>
               </a:rPr>
               <a:t>· 它从「127 名学生在一个时间点填的问卷、态度偏积极」，直接得出「应该把 MTPE 纳入本科教学」。</a:t>
             </a:r>
+            <a:endParaRPr sz="2000" b="0" i="0">
+              <a:solidFill>
+                <a:srgbClr val="000000"/>
+              </a:solidFill>
+              <a:latin typeface="Times New Roman" panose="02020603050405020304"/>
+              <a:ea typeface="宋体" panose="02010600030101010101" pitchFamily="2" charset="-122"/>
+              <a:cs typeface="宋体" panose="02010600030101010101" pitchFamily="2" charset="-122"/>
+            </a:endParaRPr>
           </a:p>
           <a:p>
             <a:pPr algn="l">
@@ -13687,12 +14749,20 @@
                 <a:solidFill>
                   <a:srgbClr val="000000"/>
                 </a:solidFill>
-                <a:latin typeface="Times New Roman"/>
-                <a:ea typeface="宋体"/>
-                <a:cs typeface="宋体"/>
+                <a:latin typeface="Times New Roman" panose="02020603050405020304"/>
+                <a:ea typeface="宋体" panose="02010600030101010101" pitchFamily="2" charset="-122"/>
+                <a:cs typeface="宋体" panose="02010600030101010101" pitchFamily="2" charset="-122"/>
               </a:rPr>
               <a:t>· 问题在于：一次横断面问卷（只在一个时间点测一次），最多只能说「这批学生现在比较接受」。</a:t>
             </a:r>
+            <a:endParaRPr sz="2000" b="0" i="0">
+              <a:solidFill>
+                <a:srgbClr val="000000"/>
+              </a:solidFill>
+              <a:latin typeface="Times New Roman" panose="02020603050405020304"/>
+              <a:ea typeface="宋体" panose="02010600030101010101" pitchFamily="2" charset="-122"/>
+              <a:cs typeface="宋体" panose="02010600030101010101" pitchFamily="2" charset="-122"/>
+            </a:endParaRPr>
           </a:p>
           <a:p>
             <a:pPr algn="l">
@@ -13711,12 +14781,20 @@
                 <a:solidFill>
                   <a:srgbClr val="000000"/>
                 </a:solidFill>
-                <a:latin typeface="Times New Roman"/>
-                <a:ea typeface="宋体"/>
-                <a:cs typeface="宋体"/>
+                <a:latin typeface="Times New Roman" panose="02020603050405020304"/>
+                <a:ea typeface="宋体" panose="02010600030101010101" pitchFamily="2" charset="-122"/>
+                <a:cs typeface="宋体" panose="02010600030101010101" pitchFamily="2" charset="-122"/>
               </a:rPr>
               <a:t>· 从「有关联」「态度积极」跳到「应该纳入教学」，中间缺了一大段证据——那是一个教学决策，需要更多支撑。</a:t>
             </a:r>
+            <a:endParaRPr sz="2000" b="0" i="0">
+              <a:solidFill>
+                <a:srgbClr val="000000"/>
+              </a:solidFill>
+              <a:latin typeface="Times New Roman" panose="02020603050405020304"/>
+              <a:ea typeface="宋体" panose="02010600030101010101" pitchFamily="2" charset="-122"/>
+              <a:cs typeface="宋体" panose="02010600030101010101" pitchFamily="2" charset="-122"/>
+            </a:endParaRPr>
           </a:p>
         </p:txBody>
       </p:sp>
@@ -13737,7 +14815,7 @@
           <a:noFill/>
         </p:spPr>
         <p:txBody>
-          <a:bodyPr wrap="square" lIns="0" rIns="0" tIns="0" bIns="0" anchor="t">
+          <a:bodyPr wrap="square" lIns="0" tIns="0" rIns="0" bIns="0" anchor="t">
             <a:spAutoFit/>
           </a:bodyPr>
           <a:lstStyle/>
@@ -13758,12 +14836,20 @@
                 <a:solidFill>
                   <a:srgbClr val="404040"/>
                 </a:solidFill>
-                <a:latin typeface="Times New Roman"/>
-                <a:ea typeface="宋体"/>
-                <a:cs typeface="宋体"/>
+                <a:latin typeface="Times New Roman" panose="02020603050405020304"/>
+                <a:ea typeface="宋体" panose="02010600030101010101" pitchFamily="2" charset="-122"/>
+                <a:cs typeface="宋体" panose="02010600030101010101" pitchFamily="2" charset="-122"/>
               </a:rPr>
               <a:t>24 / 34</a:t>
             </a:r>
+            <a:endParaRPr sz="1000" b="0" i="0">
+              <a:solidFill>
+                <a:srgbClr val="404040"/>
+              </a:solidFill>
+              <a:latin typeface="Times New Roman" panose="02020603050405020304"/>
+              <a:ea typeface="宋体" panose="02010600030101010101" pitchFamily="2" charset="-122"/>
+              <a:cs typeface="宋体" panose="02010600030101010101" pitchFamily="2" charset="-122"/>
+            </a:endParaRPr>
           </a:p>
         </p:txBody>
       </p:sp>
@@ -13776,7 +14862,7 @@
 </file>
 
 <file path=ppt/slides/slide25.xml><?xml version="1.0" encoding="utf-8"?>
-<p:sld xmlns:a="http://schemas.openxmlformats.org/drawingml/2006/main" xmlns:p="http://schemas.openxmlformats.org/presentationml/2006/main" xmlns:r="http://schemas.openxmlformats.org/officeDocument/2006/relationships">
+<p:sld xmlns:a="http://schemas.openxmlformats.org/drawingml/2006/main" xmlns:r="http://schemas.openxmlformats.org/officeDocument/2006/relationships" xmlns:p="http://schemas.openxmlformats.org/presentationml/2006/main">
   <p:cSld>
     <p:spTree>
       <p:nvGrpSpPr>
@@ -13802,7 +14888,7 @@
           <a:noFill/>
         </p:spPr>
         <p:txBody>
-          <a:bodyPr wrap="square" lIns="0" rIns="0" tIns="0" bIns="0" anchor="t">
+          <a:bodyPr wrap="square" lIns="0" tIns="0" rIns="0" bIns="0" anchor="t">
             <a:spAutoFit/>
           </a:bodyPr>
           <a:lstStyle/>
@@ -13823,12 +14909,20 @@
                 <a:solidFill>
                   <a:srgbClr val="000000"/>
                 </a:solidFill>
-                <a:latin typeface="Times New Roman"/>
-                <a:ea typeface="黑体"/>
-                <a:cs typeface="黑体"/>
+                <a:latin typeface="Times New Roman" panose="02020603050405020304"/>
+                <a:ea typeface="黑体" panose="02010609060101010101" charset="-122"/>
+                <a:cs typeface="黑体" panose="02010609060101010101" charset="-122"/>
               </a:rPr>
               <a:t>反例：证据链断在四个地方</a:t>
             </a:r>
+            <a:endParaRPr sz="2300" b="1" i="0">
+              <a:solidFill>
+                <a:srgbClr val="000000"/>
+              </a:solidFill>
+              <a:latin typeface="Times New Roman" panose="02020603050405020304"/>
+              <a:ea typeface="黑体" panose="02010609060101010101" charset="-122"/>
+              <a:cs typeface="黑体" panose="02010609060101010101" charset="-122"/>
+            </a:endParaRPr>
           </a:p>
         </p:txBody>
       </p:sp>
@@ -13836,7 +14930,11 @@
         <p:nvSpPr>
           <p:cNvPr id="3" name="Rounded Rectangle 2"/>
           <p:cNvSpPr/>
-          <p:nvPr/>
+          <p:nvPr>
+            <p:custDataLst>
+              <p:tags r:id="rId1"/>
+            </p:custDataLst>
+          </p:nvPr>
         </p:nvSpPr>
         <p:spPr>
           <a:xfrm>
@@ -13884,7 +14982,11 @@
         <p:nvSpPr>
           <p:cNvPr id="4" name="TextBox 3"/>
           <p:cNvSpPr txBox="1"/>
-          <p:nvPr/>
+          <p:nvPr>
+            <p:custDataLst>
+              <p:tags r:id="rId2"/>
+            </p:custDataLst>
+          </p:nvPr>
         </p:nvSpPr>
         <p:spPr>
           <a:xfrm>
@@ -13897,7 +14999,7 @@
           <a:noFill/>
         </p:spPr>
         <p:txBody>
-          <a:bodyPr wrap="square" lIns="0" rIns="0" tIns="0" bIns="0" anchor="ctr">
+          <a:bodyPr wrap="square" lIns="0" tIns="0" rIns="0" bIns="0" anchor="ctr">
             <a:spAutoFit/>
           </a:bodyPr>
           <a:lstStyle/>
@@ -13918,12 +15020,20 @@
                 <a:solidFill>
                   <a:srgbClr val="000000"/>
                 </a:solidFill>
-                <a:latin typeface="Times New Roman"/>
-                <a:ea typeface="黑体"/>
-                <a:cs typeface="黑体"/>
+                <a:latin typeface="Times New Roman" panose="02020603050405020304"/>
+                <a:ea typeface="黑体" panose="02010609060101010101" charset="-122"/>
+                <a:cs typeface="黑体" panose="02010609060101010101" charset="-122"/>
               </a:rPr>
               <a:t>构念与题项</a:t>
             </a:r>
+            <a:endParaRPr sz="1500" b="1" i="0">
+              <a:solidFill>
+                <a:srgbClr val="000000"/>
+              </a:solidFill>
+              <a:latin typeface="Times New Roman" panose="02020603050405020304"/>
+              <a:ea typeface="黑体" panose="02010609060101010101" charset="-122"/>
+              <a:cs typeface="黑体" panose="02010609060101010101" charset="-122"/>
+            </a:endParaRPr>
           </a:p>
         </p:txBody>
       </p:sp>
@@ -13931,7 +15041,11 @@
         <p:nvSpPr>
           <p:cNvPr id="5" name="Rounded Rectangle 4"/>
           <p:cNvSpPr/>
-          <p:nvPr/>
+          <p:nvPr>
+            <p:custDataLst>
+              <p:tags r:id="rId3"/>
+            </p:custDataLst>
+          </p:nvPr>
         </p:nvSpPr>
         <p:spPr>
           <a:xfrm>
@@ -13979,12 +15093,16 @@
         <p:nvSpPr>
           <p:cNvPr id="6" name="TextBox 5"/>
           <p:cNvSpPr txBox="1"/>
-          <p:nvPr/>
-        </p:nvSpPr>
-        <p:spPr>
-          <a:xfrm>
-            <a:off x="731519" y="3886200"/>
-            <a:ext cx="2368296" cy="777240"/>
+          <p:nvPr>
+            <p:custDataLst>
+              <p:tags r:id="rId4"/>
+            </p:custDataLst>
+          </p:nvPr>
+        </p:nvSpPr>
+        <p:spPr>
+          <a:xfrm>
+            <a:off x="731519" y="4164330"/>
+            <a:ext cx="2368296" cy="220980"/>
           </a:xfrm>
           <a:prstGeom prst="rect">
             <a:avLst/>
@@ -13992,7 +15110,7 @@
           <a:noFill/>
         </p:spPr>
         <p:txBody>
-          <a:bodyPr wrap="square" lIns="0" rIns="0" tIns="0" bIns="0" anchor="ctr">
+          <a:bodyPr wrap="square" lIns="0" tIns="0" rIns="0" bIns="0" anchor="ctr">
             <a:spAutoFit/>
           </a:bodyPr>
           <a:lstStyle/>
@@ -14013,12 +15131,20 @@
                 <a:solidFill>
                   <a:srgbClr val="B4451F"/>
                 </a:solidFill>
-                <a:latin typeface="Times New Roman"/>
-                <a:ea typeface="宋体"/>
-                <a:cs typeface="宋体"/>
-              </a:rPr>
-              <a:t>✕ 6 题自编、没验证</a:t>
-            </a:r>
+                <a:latin typeface="Times New Roman" panose="02020603050405020304"/>
+                <a:ea typeface="宋体" panose="02010600030101010101" pitchFamily="2" charset="-122"/>
+                <a:cs typeface="宋体" panose="02010600030101010101" pitchFamily="2" charset="-122"/>
+              </a:rPr>
+              <a:t>6 题自编、没验证</a:t>
+            </a:r>
+            <a:endParaRPr sz="1250" b="1" i="0">
+              <a:solidFill>
+                <a:srgbClr val="B4451F"/>
+              </a:solidFill>
+              <a:latin typeface="Times New Roman" panose="02020603050405020304"/>
+              <a:ea typeface="宋体" panose="02010600030101010101" pitchFamily="2" charset="-122"/>
+              <a:cs typeface="宋体" panose="02010600030101010101" pitchFamily="2" charset="-122"/>
+            </a:endParaRPr>
           </a:p>
         </p:txBody>
       </p:sp>
@@ -14026,7 +15152,11 @@
         <p:nvSpPr>
           <p:cNvPr id="7" name="Right Arrow 6"/>
           <p:cNvSpPr/>
-          <p:nvPr/>
+          <p:nvPr>
+            <p:custDataLst>
+              <p:tags r:id="rId5"/>
+            </p:custDataLst>
+          </p:nvPr>
         </p:nvSpPr>
         <p:spPr>
           <a:xfrm>
@@ -14070,7 +15200,11 @@
         <p:nvSpPr>
           <p:cNvPr id="8" name="Rounded Rectangle 7"/>
           <p:cNvSpPr/>
-          <p:nvPr/>
+          <p:nvPr>
+            <p:custDataLst>
+              <p:tags r:id="rId6"/>
+            </p:custDataLst>
+          </p:nvPr>
         </p:nvSpPr>
         <p:spPr>
           <a:xfrm>
@@ -14118,7 +15252,11 @@
         <p:nvSpPr>
           <p:cNvPr id="9" name="TextBox 8"/>
           <p:cNvSpPr txBox="1"/>
-          <p:nvPr/>
+          <p:nvPr>
+            <p:custDataLst>
+              <p:tags r:id="rId7"/>
+            </p:custDataLst>
+          </p:nvPr>
         </p:nvSpPr>
         <p:spPr>
           <a:xfrm>
@@ -14131,7 +15269,7 @@
           <a:noFill/>
         </p:spPr>
         <p:txBody>
-          <a:bodyPr wrap="square" lIns="0" rIns="0" tIns="0" bIns="0" anchor="ctr">
+          <a:bodyPr wrap="square" lIns="0" tIns="0" rIns="0" bIns="0" anchor="ctr">
             <a:spAutoFit/>
           </a:bodyPr>
           <a:lstStyle/>
@@ -14152,12 +15290,20 @@
                 <a:solidFill>
                   <a:srgbClr val="000000"/>
                 </a:solidFill>
-                <a:latin typeface="Times New Roman"/>
-                <a:ea typeface="黑体"/>
-                <a:cs typeface="黑体"/>
+                <a:latin typeface="Times New Roman" panose="02020603050405020304"/>
+                <a:ea typeface="黑体" panose="02010609060101010101" charset="-122"/>
+                <a:cs typeface="黑体" panose="02010609060101010101" charset="-122"/>
               </a:rPr>
               <a:t>抽样与施测</a:t>
             </a:r>
+            <a:endParaRPr sz="1500" b="1" i="0">
+              <a:solidFill>
+                <a:srgbClr val="000000"/>
+              </a:solidFill>
+              <a:latin typeface="Times New Roman" panose="02020603050405020304"/>
+              <a:ea typeface="黑体" panose="02010609060101010101" charset="-122"/>
+              <a:cs typeface="黑体" panose="02010609060101010101" charset="-122"/>
+            </a:endParaRPr>
           </a:p>
         </p:txBody>
       </p:sp>
@@ -14165,7 +15311,11 @@
         <p:nvSpPr>
           <p:cNvPr id="10" name="Rounded Rectangle 9"/>
           <p:cNvSpPr/>
-          <p:nvPr/>
+          <p:nvPr>
+            <p:custDataLst>
+              <p:tags r:id="rId8"/>
+            </p:custDataLst>
+          </p:nvPr>
         </p:nvSpPr>
         <p:spPr>
           <a:xfrm>
@@ -14213,12 +15363,16 @@
         <p:nvSpPr>
           <p:cNvPr id="11" name="TextBox 10"/>
           <p:cNvSpPr txBox="1"/>
-          <p:nvPr/>
-        </p:nvSpPr>
-        <p:spPr>
-          <a:xfrm>
-            <a:off x="3520439" y="3886200"/>
-            <a:ext cx="2368296" cy="777240"/>
+          <p:nvPr>
+            <p:custDataLst>
+              <p:tags r:id="rId9"/>
+            </p:custDataLst>
+          </p:nvPr>
+        </p:nvSpPr>
+        <p:spPr>
+          <a:xfrm>
+            <a:off x="3520439" y="4164330"/>
+            <a:ext cx="2368296" cy="220980"/>
           </a:xfrm>
           <a:prstGeom prst="rect">
             <a:avLst/>
@@ -14226,7 +15380,7 @@
           <a:noFill/>
         </p:spPr>
         <p:txBody>
-          <a:bodyPr wrap="square" lIns="0" rIns="0" tIns="0" bIns="0" anchor="ctr">
+          <a:bodyPr wrap="square" lIns="0" tIns="0" rIns="0" bIns="0" anchor="ctr">
             <a:spAutoFit/>
           </a:bodyPr>
           <a:lstStyle/>
@@ -14247,12 +15401,20 @@
                 <a:solidFill>
                   <a:srgbClr val="B4451F"/>
                 </a:solidFill>
-                <a:latin typeface="Times New Roman"/>
-                <a:ea typeface="宋体"/>
-                <a:cs typeface="宋体"/>
-              </a:rPr>
-              <a:t>✕ 抽样、回收没交代</a:t>
-            </a:r>
+                <a:latin typeface="Times New Roman" panose="02020603050405020304"/>
+                <a:ea typeface="宋体" panose="02010600030101010101" pitchFamily="2" charset="-122"/>
+                <a:cs typeface="宋体" panose="02010600030101010101" pitchFamily="2" charset="-122"/>
+              </a:rPr>
+              <a:t>抽样、回收没交代</a:t>
+            </a:r>
+            <a:endParaRPr sz="1250" b="1" i="0">
+              <a:solidFill>
+                <a:srgbClr val="B4451F"/>
+              </a:solidFill>
+              <a:latin typeface="Times New Roman" panose="02020603050405020304"/>
+              <a:ea typeface="宋体" panose="02010600030101010101" pitchFamily="2" charset="-122"/>
+              <a:cs typeface="宋体" panose="02010600030101010101" pitchFamily="2" charset="-122"/>
+            </a:endParaRPr>
           </a:p>
         </p:txBody>
       </p:sp>
@@ -14260,7 +15422,11 @@
         <p:nvSpPr>
           <p:cNvPr id="12" name="Right Arrow 11"/>
           <p:cNvSpPr/>
-          <p:nvPr/>
+          <p:nvPr>
+            <p:custDataLst>
+              <p:tags r:id="rId10"/>
+            </p:custDataLst>
+          </p:nvPr>
         </p:nvSpPr>
         <p:spPr>
           <a:xfrm>
@@ -14304,7 +15470,11 @@
         <p:nvSpPr>
           <p:cNvPr id="13" name="Rounded Rectangle 12"/>
           <p:cNvSpPr/>
-          <p:nvPr/>
+          <p:nvPr>
+            <p:custDataLst>
+              <p:tags r:id="rId11"/>
+            </p:custDataLst>
+          </p:nvPr>
         </p:nvSpPr>
         <p:spPr>
           <a:xfrm>
@@ -14352,7 +15522,11 @@
         <p:nvSpPr>
           <p:cNvPr id="14" name="TextBox 13"/>
           <p:cNvSpPr txBox="1"/>
-          <p:nvPr/>
+          <p:nvPr>
+            <p:custDataLst>
+              <p:tags r:id="rId12"/>
+            </p:custDataLst>
+          </p:nvPr>
         </p:nvSpPr>
         <p:spPr>
           <a:xfrm>
@@ -14365,7 +15539,7 @@
           <a:noFill/>
         </p:spPr>
         <p:txBody>
-          <a:bodyPr wrap="square" lIns="0" rIns="0" tIns="0" bIns="0" anchor="ctr">
+          <a:bodyPr wrap="square" lIns="0" tIns="0" rIns="0" bIns="0" anchor="ctr">
             <a:spAutoFit/>
           </a:bodyPr>
           <a:lstStyle/>
@@ -14386,12 +15560,20 @@
                 <a:solidFill>
                   <a:srgbClr val="000000"/>
                 </a:solidFill>
-                <a:latin typeface="Times New Roman"/>
-                <a:ea typeface="黑体"/>
-                <a:cs typeface="黑体"/>
+                <a:latin typeface="Times New Roman" panose="02020603050405020304"/>
+                <a:ea typeface="黑体" panose="02010609060101010101" charset="-122"/>
+                <a:cs typeface="黑体" panose="02010609060101010101" charset="-122"/>
               </a:rPr>
               <a:t>信度与效度</a:t>
             </a:r>
+            <a:endParaRPr sz="1500" b="1" i="0">
+              <a:solidFill>
+                <a:srgbClr val="000000"/>
+              </a:solidFill>
+              <a:latin typeface="Times New Roman" panose="02020603050405020304"/>
+              <a:ea typeface="黑体" panose="02010609060101010101" charset="-122"/>
+              <a:cs typeface="黑体" panose="02010609060101010101" charset="-122"/>
+            </a:endParaRPr>
           </a:p>
         </p:txBody>
       </p:sp>
@@ -14399,7 +15581,11 @@
         <p:nvSpPr>
           <p:cNvPr id="15" name="Rounded Rectangle 14"/>
           <p:cNvSpPr/>
-          <p:nvPr/>
+          <p:nvPr>
+            <p:custDataLst>
+              <p:tags r:id="rId13"/>
+            </p:custDataLst>
+          </p:nvPr>
         </p:nvSpPr>
         <p:spPr>
           <a:xfrm>
@@ -14447,12 +15633,16 @@
         <p:nvSpPr>
           <p:cNvPr id="16" name="TextBox 15"/>
           <p:cNvSpPr txBox="1"/>
-          <p:nvPr/>
-        </p:nvSpPr>
-        <p:spPr>
-          <a:xfrm>
-            <a:off x="6309359" y="3886200"/>
-            <a:ext cx="2368296" cy="777240"/>
+          <p:nvPr>
+            <p:custDataLst>
+              <p:tags r:id="rId14"/>
+            </p:custDataLst>
+          </p:nvPr>
+        </p:nvSpPr>
+        <p:spPr>
+          <a:xfrm>
+            <a:off x="6309359" y="4164330"/>
+            <a:ext cx="2368296" cy="220980"/>
           </a:xfrm>
           <a:prstGeom prst="rect">
             <a:avLst/>
@@ -14460,7 +15650,7 @@
           <a:noFill/>
         </p:spPr>
         <p:txBody>
-          <a:bodyPr wrap="square" lIns="0" rIns="0" tIns="0" bIns="0" anchor="ctr">
+          <a:bodyPr wrap="square" lIns="0" tIns="0" rIns="0" bIns="0" anchor="ctr">
             <a:spAutoFit/>
           </a:bodyPr>
           <a:lstStyle/>
@@ -14481,12 +15671,20 @@
                 <a:solidFill>
                   <a:srgbClr val="B4451F"/>
                 </a:solidFill>
-                <a:latin typeface="Times New Roman"/>
-                <a:ea typeface="宋体"/>
-                <a:cs typeface="宋体"/>
-              </a:rPr>
-              <a:t>✕ 只报信度、没报效度</a:t>
-            </a:r>
+                <a:latin typeface="Times New Roman" panose="02020603050405020304"/>
+                <a:ea typeface="宋体" panose="02010600030101010101" pitchFamily="2" charset="-122"/>
+                <a:cs typeface="宋体" panose="02010600030101010101" pitchFamily="2" charset="-122"/>
+              </a:rPr>
+              <a:t>只报信度、没报效度</a:t>
+            </a:r>
+            <a:endParaRPr sz="1250" b="1" i="0">
+              <a:solidFill>
+                <a:srgbClr val="B4451F"/>
+              </a:solidFill>
+              <a:latin typeface="Times New Roman" panose="02020603050405020304"/>
+              <a:ea typeface="宋体" panose="02010600030101010101" pitchFamily="2" charset="-122"/>
+              <a:cs typeface="宋体" panose="02010600030101010101" pitchFamily="2" charset="-122"/>
+            </a:endParaRPr>
           </a:p>
         </p:txBody>
       </p:sp>
@@ -14494,7 +15692,11 @@
         <p:nvSpPr>
           <p:cNvPr id="17" name="Right Arrow 16"/>
           <p:cNvSpPr/>
-          <p:nvPr/>
+          <p:nvPr>
+            <p:custDataLst>
+              <p:tags r:id="rId15"/>
+            </p:custDataLst>
+          </p:nvPr>
         </p:nvSpPr>
         <p:spPr>
           <a:xfrm>
@@ -14538,7 +15740,11 @@
         <p:nvSpPr>
           <p:cNvPr id="18" name="Rounded Rectangle 17"/>
           <p:cNvSpPr/>
-          <p:nvPr/>
+          <p:nvPr>
+            <p:custDataLst>
+              <p:tags r:id="rId16"/>
+            </p:custDataLst>
+          </p:nvPr>
         </p:nvSpPr>
         <p:spPr>
           <a:xfrm>
@@ -14586,7 +15792,11 @@
         <p:nvSpPr>
           <p:cNvPr id="19" name="TextBox 18"/>
           <p:cNvSpPr txBox="1"/>
-          <p:nvPr/>
+          <p:nvPr>
+            <p:custDataLst>
+              <p:tags r:id="rId17"/>
+            </p:custDataLst>
+          </p:nvPr>
         </p:nvSpPr>
         <p:spPr>
           <a:xfrm>
@@ -14599,7 +15809,7 @@
           <a:noFill/>
         </p:spPr>
         <p:txBody>
-          <a:bodyPr wrap="square" lIns="0" rIns="0" tIns="0" bIns="0" anchor="ctr">
+          <a:bodyPr wrap="square" lIns="0" tIns="0" rIns="0" bIns="0" anchor="ctr">
             <a:spAutoFit/>
           </a:bodyPr>
           <a:lstStyle/>
@@ -14620,12 +15830,20 @@
                 <a:solidFill>
                   <a:srgbClr val="000000"/>
                 </a:solidFill>
-                <a:latin typeface="Times New Roman"/>
-                <a:ea typeface="黑体"/>
-                <a:cs typeface="黑体"/>
+                <a:latin typeface="Times New Roman" panose="02020603050405020304"/>
+                <a:ea typeface="黑体" panose="02010609060101010101" charset="-122"/>
+                <a:cs typeface="黑体" panose="02010609060101010101" charset="-122"/>
               </a:rPr>
               <a:t>数据分析与结论</a:t>
             </a:r>
+            <a:endParaRPr sz="1500" b="1" i="0">
+              <a:solidFill>
+                <a:srgbClr val="000000"/>
+              </a:solidFill>
+              <a:latin typeface="Times New Roman" panose="02020603050405020304"/>
+              <a:ea typeface="黑体" panose="02010609060101010101" charset="-122"/>
+              <a:cs typeface="黑体" panose="02010609060101010101" charset="-122"/>
+            </a:endParaRPr>
           </a:p>
         </p:txBody>
       </p:sp>
@@ -14633,7 +15851,11 @@
         <p:nvSpPr>
           <p:cNvPr id="20" name="Rounded Rectangle 19"/>
           <p:cNvSpPr/>
-          <p:nvPr/>
+          <p:nvPr>
+            <p:custDataLst>
+              <p:tags r:id="rId18"/>
+            </p:custDataLst>
+          </p:nvPr>
         </p:nvSpPr>
         <p:spPr>
           <a:xfrm>
@@ -14681,12 +15903,16 @@
         <p:nvSpPr>
           <p:cNvPr id="21" name="TextBox 20"/>
           <p:cNvSpPr txBox="1"/>
-          <p:nvPr/>
-        </p:nvSpPr>
-        <p:spPr>
-          <a:xfrm>
-            <a:off x="9098280" y="3886200"/>
-            <a:ext cx="2368296" cy="777240"/>
+          <p:nvPr>
+            <p:custDataLst>
+              <p:tags r:id="rId19"/>
+            </p:custDataLst>
+          </p:nvPr>
+        </p:nvSpPr>
+        <p:spPr>
+          <a:xfrm>
+            <a:off x="9098280" y="4164330"/>
+            <a:ext cx="2368296" cy="220980"/>
           </a:xfrm>
           <a:prstGeom prst="rect">
             <a:avLst/>
@@ -14694,7 +15920,7 @@
           <a:noFill/>
         </p:spPr>
         <p:txBody>
-          <a:bodyPr wrap="square" lIns="0" rIns="0" tIns="0" bIns="0" anchor="ctr">
+          <a:bodyPr wrap="square" lIns="0" tIns="0" rIns="0" bIns="0" anchor="ctr">
             <a:spAutoFit/>
           </a:bodyPr>
           <a:lstStyle/>
@@ -14715,24 +15941,32 @@
                 <a:solidFill>
                   <a:srgbClr val="B4451F"/>
                 </a:solidFill>
-                <a:latin typeface="Times New Roman"/>
-                <a:ea typeface="宋体"/>
-                <a:cs typeface="宋体"/>
-              </a:rPr>
-              <a:t>✕ 单题当概念 + 结论跨太大</a:t>
-            </a:r>
-          </a:p>
-        </p:txBody>
-      </p:sp>
-      <p:sp>
-        <p:nvSpPr>
-          <p:cNvPr id="22" name="TextBox 21"/>
+                <a:latin typeface="Times New Roman" panose="02020603050405020304"/>
+                <a:ea typeface="宋体" panose="02010600030101010101" pitchFamily="2" charset="-122"/>
+                <a:cs typeface="宋体" panose="02010600030101010101" pitchFamily="2" charset="-122"/>
+              </a:rPr>
+              <a:t>单题当概念 + 结论跨太大</a:t>
+            </a:r>
+            <a:endParaRPr sz="1250" b="1" i="0">
+              <a:solidFill>
+                <a:srgbClr val="B4451F"/>
+              </a:solidFill>
+              <a:latin typeface="Times New Roman" panose="02020603050405020304"/>
+              <a:ea typeface="宋体" panose="02010600030101010101" pitchFamily="2" charset="-122"/>
+              <a:cs typeface="宋体" panose="02010600030101010101" pitchFamily="2" charset="-122"/>
+            </a:endParaRPr>
+          </a:p>
+        </p:txBody>
+      </p:sp>
+      <p:sp>
+        <p:nvSpPr>
+          <p:cNvPr id="23" name="TextBox 22"/>
           <p:cNvSpPr txBox="1"/>
           <p:nvPr/>
         </p:nvSpPr>
         <p:spPr>
           <a:xfrm>
-            <a:off x="10332720" y="5742432"/>
+            <a:off x="10332720" y="5943727"/>
             <a:ext cx="1645920" cy="201168"/>
           </a:xfrm>
           <a:prstGeom prst="rect">
@@ -14741,7 +15975,7 @@
           <a:noFill/>
         </p:spPr>
         <p:txBody>
-          <a:bodyPr wrap="square" lIns="0" rIns="0" tIns="0" bIns="0" anchor="t">
+          <a:bodyPr wrap="square" lIns="0" tIns="0" rIns="0" bIns="0" anchor="t">
             <a:spAutoFit/>
           </a:bodyPr>
           <a:lstStyle/>
@@ -14762,59 +15996,20 @@
                 <a:solidFill>
                   <a:srgbClr val="404040"/>
                 </a:solidFill>
-                <a:latin typeface="Times New Roman"/>
-                <a:ea typeface="宋体"/>
-                <a:cs typeface="宋体"/>
-              </a:rPr>
-              <a:t>0 / 0</a:t>
-            </a:r>
-          </a:p>
-        </p:txBody>
-      </p:sp>
-      <p:sp>
-        <p:nvSpPr>
-          <p:cNvPr id="23" name="TextBox 22"/>
-          <p:cNvSpPr txBox="1"/>
-          <p:nvPr/>
-        </p:nvSpPr>
-        <p:spPr>
-          <a:xfrm>
-            <a:off x="10332720" y="5742432"/>
-            <a:ext cx="1645920" cy="201168"/>
-          </a:xfrm>
-          <a:prstGeom prst="rect">
-            <a:avLst/>
-          </a:prstGeom>
-          <a:noFill/>
-        </p:spPr>
-        <p:txBody>
-          <a:bodyPr wrap="square" lIns="0" rIns="0" tIns="0" bIns="0" anchor="t">
-            <a:spAutoFit/>
-          </a:bodyPr>
-          <a:lstStyle/>
-          <a:p>
-            <a:pPr algn="r">
-              <a:lnSpc>
-                <a:spcPct val="130000"/>
-              </a:lnSpc>
-              <a:spcBef>
-                <a:spcPts val="0"/>
-              </a:spcBef>
-              <a:spcAft>
-                <a:spcPts val="0"/>
-              </a:spcAft>
-            </a:pPr>
-            <a:r>
-              <a:rPr sz="1000" b="0" i="0">
-                <a:solidFill>
-                  <a:srgbClr val="404040"/>
-                </a:solidFill>
-                <a:latin typeface="Times New Roman"/>
-                <a:ea typeface="宋体"/>
-                <a:cs typeface="宋体"/>
+                <a:latin typeface="Times New Roman" panose="02020603050405020304"/>
+                <a:ea typeface="宋体" panose="02010600030101010101" pitchFamily="2" charset="-122"/>
+                <a:cs typeface="宋体" panose="02010600030101010101" pitchFamily="2" charset="-122"/>
               </a:rPr>
               <a:t>25 / 34</a:t>
             </a:r>
+            <a:endParaRPr sz="1000" b="0" i="0">
+              <a:solidFill>
+                <a:srgbClr val="404040"/>
+              </a:solidFill>
+              <a:latin typeface="Times New Roman" panose="02020603050405020304"/>
+              <a:ea typeface="宋体" panose="02010600030101010101" pitchFamily="2" charset="-122"/>
+              <a:cs typeface="宋体" panose="02010600030101010101" pitchFamily="2" charset="-122"/>
+            </a:endParaRPr>
           </a:p>
         </p:txBody>
       </p:sp>
@@ -14827,7 +16022,7 @@
 </file>
 
 <file path=ppt/slides/slide26.xml><?xml version="1.0" encoding="utf-8"?>
-<p:sld xmlns:a="http://schemas.openxmlformats.org/drawingml/2006/main" xmlns:p="http://schemas.openxmlformats.org/presentationml/2006/main" xmlns:r="http://schemas.openxmlformats.org/officeDocument/2006/relationships">
+<p:sld xmlns:a="http://schemas.openxmlformats.org/drawingml/2006/main" xmlns:r="http://schemas.openxmlformats.org/officeDocument/2006/relationships" xmlns:p="http://schemas.openxmlformats.org/presentationml/2006/main">
   <p:cSld>
     <p:spTree>
       <p:nvGrpSpPr>
@@ -14853,7 +16048,7 @@
           <a:noFill/>
         </p:spPr>
         <p:txBody>
-          <a:bodyPr wrap="square" lIns="0" rIns="0" tIns="0" bIns="0" anchor="t">
+          <a:bodyPr wrap="square" lIns="0" tIns="0" rIns="0" bIns="0" anchor="t">
             <a:spAutoFit/>
           </a:bodyPr>
           <a:lstStyle/>
@@ -14874,12 +16069,20 @@
                 <a:solidFill>
                   <a:srgbClr val="000000"/>
                 </a:solidFill>
-                <a:latin typeface="Times New Roman"/>
-                <a:ea typeface="黑体"/>
-                <a:cs typeface="黑体"/>
+                <a:latin typeface="Times New Roman" panose="02020603050405020304"/>
+                <a:ea typeface="黑体" panose="02010609060101010101" charset="-122"/>
+                <a:cs typeface="黑体" panose="02010609060101010101" charset="-122"/>
               </a:rPr>
               <a:t>反例小结：问题不在数据，在逻辑</a:t>
             </a:r>
+            <a:endParaRPr sz="2300" b="1" i="0">
+              <a:solidFill>
+                <a:srgbClr val="000000"/>
+              </a:solidFill>
+              <a:latin typeface="Times New Roman" panose="02020603050405020304"/>
+              <a:ea typeface="黑体" panose="02010609060101010101" charset="-122"/>
+              <a:cs typeface="黑体" panose="02010609060101010101" charset="-122"/>
+            </a:endParaRPr>
           </a:p>
         </p:txBody>
       </p:sp>
@@ -14892,7 +16095,7 @@
         <p:spPr>
           <a:xfrm>
             <a:off x="640080" y="1874519"/>
-            <a:ext cx="10881360" cy="3931920"/>
+            <a:ext cx="10881360" cy="2192655"/>
           </a:xfrm>
           <a:prstGeom prst="rect">
             <a:avLst/>
@@ -14900,7 +16103,7 @@
           <a:noFill/>
         </p:spPr>
         <p:txBody>
-          <a:bodyPr wrap="square" lIns="0" rIns="0" tIns="0" bIns="0" anchor="t">
+          <a:bodyPr wrap="square" lIns="0" tIns="0" rIns="0" bIns="0" anchor="t">
             <a:spAutoFit/>
           </a:bodyPr>
           <a:lstStyle/>
@@ -14921,12 +16124,131 @@
                 <a:solidFill>
                   <a:srgbClr val="000000"/>
                 </a:solidFill>
-                <a:latin typeface="Times New Roman"/>
-                <a:ea typeface="宋体"/>
-                <a:cs typeface="宋体"/>
-              </a:rPr>
-              <a:t>· 它想回答三个问题：态度如何、和成绩有没有关系、障碍是什么。</a:t>
-            </a:r>
+                <a:latin typeface="Times New Roman" panose="02020603050405020304"/>
+                <a:ea typeface="宋体" panose="02010600030101010101" pitchFamily="2" charset="-122"/>
+                <a:cs typeface="宋体" panose="02010600030101010101" pitchFamily="2" charset="-122"/>
+              </a:rPr>
+              <a:t>· </a:t>
+            </a:r>
+            <a:r>
+              <a:rPr lang="zh-CN" sz="2000">
+                <a:solidFill>
+                  <a:srgbClr val="000000"/>
+                </a:solidFill>
+                <a:latin typeface="Times New Roman" panose="02020603050405020304"/>
+                <a:ea typeface="宋体" panose="02010600030101010101" pitchFamily="2" charset="-122"/>
+                <a:cs typeface="宋体" panose="02010600030101010101" pitchFamily="2" charset="-122"/>
+                <a:sym typeface="+mn-ea"/>
+              </a:rPr>
+              <a:t>问卷</a:t>
+            </a:r>
+            <a:r>
+              <a:rPr sz="2000" b="0" i="0">
+                <a:solidFill>
+                  <a:srgbClr val="000000"/>
+                </a:solidFill>
+                <a:latin typeface="Times New Roman" panose="02020603050405020304"/>
+                <a:ea typeface="宋体" panose="02010600030101010101" pitchFamily="2" charset="-122"/>
+                <a:cs typeface="宋体" panose="02010600030101010101" pitchFamily="2" charset="-122"/>
+              </a:rPr>
+              <a:t>想回答三个问题：</a:t>
+            </a:r>
+            <a:r>
+              <a:rPr lang="zh-CN" sz="2000" b="0" i="0">
+                <a:solidFill>
+                  <a:srgbClr val="000000"/>
+                </a:solidFill>
+                <a:latin typeface="Times New Roman" panose="02020603050405020304"/>
+                <a:ea typeface="宋体" panose="02010600030101010101" pitchFamily="2" charset="-122"/>
+                <a:cs typeface="宋体" panose="02010600030101010101" pitchFamily="2" charset="-122"/>
+              </a:rPr>
+              <a:t>对</a:t>
+            </a:r>
+            <a:r>
+              <a:rPr lang="en-US" altLang="zh-CN" sz="2000" b="0" i="0">
+                <a:solidFill>
+                  <a:srgbClr val="000000"/>
+                </a:solidFill>
+                <a:latin typeface="Times New Roman" panose="02020603050405020304"/>
+                <a:ea typeface="宋体" panose="02010600030101010101" pitchFamily="2" charset="-122"/>
+                <a:cs typeface="宋体" panose="02010600030101010101" pitchFamily="2" charset="-122"/>
+              </a:rPr>
+              <a:t> </a:t>
+            </a:r>
+            <a:r>
+              <a:rPr lang="en-US" sz="2000" b="0" i="0">
+                <a:solidFill>
+                  <a:srgbClr val="000000"/>
+                </a:solidFill>
+                <a:latin typeface="Times New Roman" panose="02020603050405020304"/>
+                <a:ea typeface="宋体" panose="02010600030101010101" pitchFamily="2" charset="-122"/>
+                <a:cs typeface="宋体" panose="02010600030101010101" pitchFamily="2" charset="-122"/>
+              </a:rPr>
+              <a:t>MTPE </a:t>
+            </a:r>
+            <a:r>
+              <a:rPr sz="2000" b="0" i="0">
+                <a:solidFill>
+                  <a:srgbClr val="000000"/>
+                </a:solidFill>
+                <a:latin typeface="Times New Roman" panose="02020603050405020304"/>
+                <a:ea typeface="宋体" panose="02010600030101010101" pitchFamily="2" charset="-122"/>
+                <a:cs typeface="宋体" panose="02010600030101010101" pitchFamily="2" charset="-122"/>
+              </a:rPr>
+              <a:t>态度如何、和</a:t>
+            </a:r>
+            <a:r>
+              <a:rPr lang="zh-CN" sz="2000" b="0" i="0">
+                <a:solidFill>
+                  <a:srgbClr val="000000"/>
+                </a:solidFill>
+                <a:latin typeface="Times New Roman" panose="02020603050405020304"/>
+                <a:ea typeface="宋体" panose="02010600030101010101" pitchFamily="2" charset="-122"/>
+                <a:cs typeface="宋体" panose="02010600030101010101" pitchFamily="2" charset="-122"/>
+              </a:rPr>
+              <a:t>相关课程</a:t>
+            </a:r>
+            <a:r>
+              <a:rPr sz="2000" b="0" i="0">
+                <a:solidFill>
+                  <a:srgbClr val="000000"/>
+                </a:solidFill>
+                <a:latin typeface="Times New Roman" panose="02020603050405020304"/>
+                <a:ea typeface="宋体" panose="02010600030101010101" pitchFamily="2" charset="-122"/>
+                <a:cs typeface="宋体" panose="02010600030101010101" pitchFamily="2" charset="-122"/>
+              </a:rPr>
+              <a:t>成绩有没有关系、</a:t>
+            </a:r>
+            <a:r>
+              <a:rPr lang="zh-CN" sz="2000" b="0" i="0">
+                <a:solidFill>
+                  <a:srgbClr val="000000"/>
+                </a:solidFill>
+                <a:latin typeface="Times New Roman" panose="02020603050405020304"/>
+                <a:ea typeface="宋体" panose="02010600030101010101" pitchFamily="2" charset="-122"/>
+                <a:cs typeface="宋体" panose="02010600030101010101" pitchFamily="2" charset="-122"/>
+              </a:rPr>
+              <a:t>使用</a:t>
+            </a:r>
+            <a:r>
+              <a:rPr sz="2000" b="0" i="0">
+                <a:solidFill>
+                  <a:srgbClr val="000000"/>
+                </a:solidFill>
+                <a:latin typeface="Times New Roman" panose="02020603050405020304"/>
+                <a:ea typeface="宋体" panose="02010600030101010101" pitchFamily="2" charset="-122"/>
+                <a:cs typeface="宋体" panose="02010600030101010101" pitchFamily="2" charset="-122"/>
+              </a:rPr>
+              <a:t>障碍是什么。</a:t>
+            </a:r>
+            <a:endParaRPr sz="2000" b="0" i="0">
+              <a:solidFill>
+                <a:srgbClr val="000000"/>
+              </a:solidFill>
+              <a:latin typeface="Times New Roman" panose="02020603050405020304"/>
+              <a:ea typeface="宋体" panose="02010600030101010101" pitchFamily="2" charset="-122"/>
+              <a:cs typeface="宋体" panose="02010600030101010101" pitchFamily="2" charset="-122"/>
+            </a:endParaRPr>
           </a:p>
           <a:p>
             <a:pPr algn="l">
@@ -14945,12 +16267,64 @@
                 <a:solidFill>
                   <a:srgbClr val="000000"/>
                 </a:solidFill>
-                <a:latin typeface="Times New Roman"/>
-                <a:ea typeface="宋体"/>
-                <a:cs typeface="宋体"/>
-              </a:rPr>
-              <a:t>· 它其实回答了前两个（态度偏积极、Q6/Q2 和成绩相关），但每个答案的「证据」都不够硬。</a:t>
-            </a:r>
+                <a:latin typeface="Times New Roman" panose="02020603050405020304"/>
+                <a:ea typeface="宋体" panose="02010600030101010101" pitchFamily="2" charset="-122"/>
+                <a:cs typeface="宋体" panose="02010600030101010101" pitchFamily="2" charset="-122"/>
+              </a:rPr>
+              <a:t>· </a:t>
+            </a:r>
+            <a:r>
+              <a:rPr lang="zh-CN" sz="2000" b="0" i="0">
+                <a:solidFill>
+                  <a:srgbClr val="000000"/>
+                </a:solidFill>
+                <a:latin typeface="Times New Roman" panose="02020603050405020304"/>
+                <a:ea typeface="宋体" panose="02010600030101010101" pitchFamily="2" charset="-122"/>
+                <a:cs typeface="宋体" panose="02010600030101010101" pitchFamily="2" charset="-122"/>
+              </a:rPr>
+              <a:t>问卷</a:t>
+            </a:r>
+            <a:r>
+              <a:rPr sz="2000" b="0" i="0">
+                <a:solidFill>
+                  <a:srgbClr val="000000"/>
+                </a:solidFill>
+                <a:latin typeface="Times New Roman" panose="02020603050405020304"/>
+                <a:ea typeface="宋体" panose="02010600030101010101" pitchFamily="2" charset="-122"/>
+                <a:cs typeface="宋体" panose="02010600030101010101" pitchFamily="2" charset="-122"/>
+              </a:rPr>
+              <a:t>其实回答了前两个（态度偏积极、Q6/Q2 和成绩相关），但每个答案的证据都不够</a:t>
+            </a:r>
+            <a:r>
+              <a:rPr lang="zh-CN" sz="2000" b="0" i="0">
+                <a:solidFill>
+                  <a:srgbClr val="000000"/>
+                </a:solidFill>
+                <a:latin typeface="Times New Roman" panose="02020603050405020304"/>
+                <a:ea typeface="宋体" panose="02010600030101010101" pitchFamily="2" charset="-122"/>
+                <a:cs typeface="宋体" panose="02010600030101010101" pitchFamily="2" charset="-122"/>
+              </a:rPr>
+              <a:t>扎实</a:t>
+            </a:r>
+            <a:r>
+              <a:rPr sz="2000" b="0" i="0">
+                <a:solidFill>
+                  <a:srgbClr val="000000"/>
+                </a:solidFill>
+                <a:latin typeface="Times New Roman" panose="02020603050405020304"/>
+                <a:ea typeface="宋体" panose="02010600030101010101" pitchFamily="2" charset="-122"/>
+                <a:cs typeface="宋体" panose="02010600030101010101" pitchFamily="2" charset="-122"/>
+              </a:rPr>
+              <a:t>。</a:t>
+            </a:r>
+            <a:endParaRPr sz="2000" b="0" i="0">
+              <a:solidFill>
+                <a:srgbClr val="000000"/>
+              </a:solidFill>
+              <a:latin typeface="Times New Roman" panose="02020603050405020304"/>
+              <a:ea typeface="宋体" panose="02010600030101010101" pitchFamily="2" charset="-122"/>
+              <a:cs typeface="宋体" panose="02010600030101010101" pitchFamily="2" charset="-122"/>
+            </a:endParaRPr>
           </a:p>
           <a:p>
             <a:pPr algn="l">
@@ -14969,12 +16343,20 @@
                 <a:solidFill>
                   <a:srgbClr val="000000"/>
                 </a:solidFill>
-                <a:latin typeface="Times New Roman"/>
-                <a:ea typeface="宋体"/>
-                <a:cs typeface="宋体"/>
+                <a:latin typeface="Times New Roman" panose="02020603050405020304"/>
+                <a:ea typeface="宋体" panose="02010600030101010101" pitchFamily="2" charset="-122"/>
+                <a:cs typeface="宋体" panose="02010600030101010101" pitchFamily="2" charset="-122"/>
               </a:rPr>
               <a:t>· 最关键的越界：从「这 127 个学生态度积极」，跳到「应该纳入教学」——这一步没有证据支撑。</a:t>
             </a:r>
+            <a:endParaRPr sz="2000" b="0" i="0">
+              <a:solidFill>
+                <a:srgbClr val="000000"/>
+              </a:solidFill>
+              <a:latin typeface="Times New Roman" panose="02020603050405020304"/>
+              <a:ea typeface="宋体" panose="02010600030101010101" pitchFamily="2" charset="-122"/>
+              <a:cs typeface="宋体" panose="02010600030101010101" pitchFamily="2" charset="-122"/>
+            </a:endParaRPr>
           </a:p>
           <a:p>
             <a:pPr algn="l">
@@ -14993,12 +16375,20 @@
                 <a:solidFill>
                   <a:srgbClr val="000000"/>
                 </a:solidFill>
-                <a:latin typeface="Times New Roman"/>
-                <a:ea typeface="宋体"/>
-                <a:cs typeface="宋体"/>
+                <a:latin typeface="Times New Roman" panose="02020603050405020304"/>
+                <a:ea typeface="宋体" panose="02010600030101010101" pitchFamily="2" charset="-122"/>
+                <a:cs typeface="宋体" panose="02010600030101010101" pitchFamily="2" charset="-122"/>
               </a:rPr>
               <a:t>· 所以它不是数据造假，而是「问题 → 结论」的链条断了好几处，导致结论超出了数据能承担的范围。</a:t>
             </a:r>
+            <a:endParaRPr sz="2000" b="0" i="0">
+              <a:solidFill>
+                <a:srgbClr val="000000"/>
+              </a:solidFill>
+              <a:latin typeface="Times New Roman" panose="02020603050405020304"/>
+              <a:ea typeface="宋体" panose="02010600030101010101" pitchFamily="2" charset="-122"/>
+              <a:cs typeface="宋体" panose="02010600030101010101" pitchFamily="2" charset="-122"/>
+            </a:endParaRPr>
           </a:p>
         </p:txBody>
       </p:sp>
@@ -15019,7 +16409,7 @@
           <a:noFill/>
         </p:spPr>
         <p:txBody>
-          <a:bodyPr wrap="square" lIns="0" rIns="0" tIns="0" bIns="0" anchor="t">
+          <a:bodyPr wrap="square" lIns="0" tIns="0" rIns="0" bIns="0" anchor="t">
             <a:spAutoFit/>
           </a:bodyPr>
           <a:lstStyle/>
@@ -15040,12 +16430,20 @@
                 <a:solidFill>
                   <a:srgbClr val="404040"/>
                 </a:solidFill>
-                <a:latin typeface="Times New Roman"/>
-                <a:ea typeface="宋体"/>
-                <a:cs typeface="宋体"/>
+                <a:latin typeface="Times New Roman" panose="02020603050405020304"/>
+                <a:ea typeface="宋体" panose="02010600030101010101" pitchFamily="2" charset="-122"/>
+                <a:cs typeface="宋体" panose="02010600030101010101" pitchFamily="2" charset="-122"/>
               </a:rPr>
               <a:t>26 / 34</a:t>
             </a:r>
+            <a:endParaRPr sz="1000" b="0" i="0">
+              <a:solidFill>
+                <a:srgbClr val="404040"/>
+              </a:solidFill>
+              <a:latin typeface="Times New Roman" panose="02020603050405020304"/>
+              <a:ea typeface="宋体" panose="02010600030101010101" pitchFamily="2" charset="-122"/>
+              <a:cs typeface="宋体" panose="02010600030101010101" pitchFamily="2" charset="-122"/>
+            </a:endParaRPr>
           </a:p>
         </p:txBody>
       </p:sp>
@@ -15058,7 +16456,7 @@
 </file>
 
 <file path=ppt/slides/slide27.xml><?xml version="1.0" encoding="utf-8"?>
-<p:sld xmlns:a="http://schemas.openxmlformats.org/drawingml/2006/main" xmlns:p="http://schemas.openxmlformats.org/presentationml/2006/main" xmlns:r="http://schemas.openxmlformats.org/officeDocument/2006/relationships">
+<p:sld xmlns:a="http://schemas.openxmlformats.org/drawingml/2006/main" xmlns:r="http://schemas.openxmlformats.org/officeDocument/2006/relationships" xmlns:p="http://schemas.openxmlformats.org/presentationml/2006/main">
   <p:cSld>
     <p:spTree>
       <p:nvGrpSpPr>
@@ -15172,7 +16570,7 @@
           <a:noFill/>
         </p:spPr>
         <p:txBody>
-          <a:bodyPr wrap="square" lIns="0" rIns="0" tIns="0" bIns="0" anchor="t">
+          <a:bodyPr wrap="square" lIns="0" tIns="0" rIns="0" bIns="0" anchor="t">
             <a:spAutoFit/>
           </a:bodyPr>
           <a:lstStyle/>
@@ -15193,12 +16591,20 @@
                 <a:solidFill>
                   <a:srgbClr val="FFFFFF"/>
                 </a:solidFill>
-                <a:latin typeface="Times New Roman"/>
-                <a:ea typeface="宋体"/>
-                <a:cs typeface="宋体"/>
+                <a:latin typeface="Times New Roman" panose="02020603050405020304"/>
+                <a:ea typeface="宋体" panose="02010600030101010101" pitchFamily="2" charset="-122"/>
+                <a:cs typeface="宋体" panose="02010600030101010101" pitchFamily="2" charset="-122"/>
               </a:rPr>
               <a:t>04</a:t>
             </a:r>
+            <a:endParaRPr sz="9600" b="0" i="0">
+              <a:solidFill>
+                <a:srgbClr val="FFFFFF"/>
+              </a:solidFill>
+              <a:latin typeface="Times New Roman" panose="02020603050405020304"/>
+              <a:ea typeface="宋体" panose="02010600030101010101" pitchFamily="2" charset="-122"/>
+              <a:cs typeface="宋体" panose="02010600030101010101" pitchFamily="2" charset="-122"/>
+            </a:endParaRPr>
           </a:p>
         </p:txBody>
       </p:sp>
@@ -15210,8 +16616,8 @@
         </p:nvSpPr>
         <p:spPr>
           <a:xfrm>
-            <a:off x="3566160" y="3063240"/>
-            <a:ext cx="5303520" cy="1280160"/>
+            <a:off x="4432300" y="3181985"/>
+            <a:ext cx="5303520" cy="494665"/>
           </a:xfrm>
           <a:prstGeom prst="rect">
             <a:avLst/>
@@ -15219,7 +16625,7 @@
           <a:noFill/>
         </p:spPr>
         <p:txBody>
-          <a:bodyPr wrap="square" lIns="0" rIns="0" tIns="0" bIns="0" anchor="t">
+          <a:bodyPr wrap="square" lIns="0" tIns="0" rIns="0" bIns="0" anchor="t">
             <a:spAutoFit/>
           </a:bodyPr>
           <a:lstStyle/>
@@ -15236,16 +16642,25 @@
               </a:spcAft>
             </a:pPr>
             <a:r>
-              <a:rPr sz="2800" b="1" i="0">
+              <a:rPr sz="2800" b="1">
                 <a:solidFill>
                   <a:srgbClr val="000000"/>
                 </a:solidFill>
-                <a:latin typeface="Times New Roman"/>
-                <a:ea typeface="黑体"/>
-                <a:cs typeface="黑体"/>
-              </a:rPr>
-              <a:t>两篇放到一起对照</a:t>
-            </a:r>
+                <a:latin typeface="Times New Roman" panose="02020603050405020304"/>
+                <a:ea typeface="黑体" panose="02010609060101010101" charset="-122"/>
+                <a:cs typeface="黑体" panose="02010609060101010101" charset="-122"/>
+                <a:sym typeface="+mn-ea"/>
+              </a:rPr>
+              <a:t>两篇论文的对照</a:t>
+            </a:r>
+            <a:endParaRPr sz="2800" b="1" i="0">
+              <a:solidFill>
+                <a:srgbClr val="000000"/>
+              </a:solidFill>
+              <a:latin typeface="Times New Roman" panose="02020603050405020304"/>
+              <a:ea typeface="黑体" panose="02010609060101010101" charset="-122"/>
+              <a:cs typeface="黑体" panose="02010609060101010101" charset="-122"/>
+            </a:endParaRPr>
           </a:p>
         </p:txBody>
       </p:sp>
@@ -15266,7 +16681,7 @@
           <a:noFill/>
         </p:spPr>
         <p:txBody>
-          <a:bodyPr wrap="square" lIns="0" rIns="0" tIns="0" bIns="0" anchor="t">
+          <a:bodyPr wrap="square" lIns="0" tIns="0" rIns="0" bIns="0" anchor="t">
             <a:spAutoFit/>
           </a:bodyPr>
           <a:lstStyle/>
@@ -15287,12 +16702,20 @@
                 <a:solidFill>
                   <a:srgbClr val="404040"/>
                 </a:solidFill>
-                <a:latin typeface="Times New Roman"/>
-                <a:ea typeface="宋体"/>
-                <a:cs typeface="宋体"/>
+                <a:latin typeface="Times New Roman" panose="02020603050405020304"/>
+                <a:ea typeface="宋体" panose="02010600030101010101" pitchFamily="2" charset="-122"/>
+                <a:cs typeface="宋体" panose="02010600030101010101" pitchFamily="2" charset="-122"/>
               </a:rPr>
               <a:t>27 / 34</a:t>
             </a:r>
+            <a:endParaRPr sz="1000" b="0" i="0">
+              <a:solidFill>
+                <a:srgbClr val="404040"/>
+              </a:solidFill>
+              <a:latin typeface="Times New Roman" panose="02020603050405020304"/>
+              <a:ea typeface="宋体" panose="02010600030101010101" pitchFamily="2" charset="-122"/>
+              <a:cs typeface="宋体" panose="02010600030101010101" pitchFamily="2" charset="-122"/>
+            </a:endParaRPr>
           </a:p>
         </p:txBody>
       </p:sp>
@@ -15305,7 +16728,7 @@
 </file>
 
 <file path=ppt/slides/slide28.xml><?xml version="1.0" encoding="utf-8"?>
-<p:sld xmlns:a="http://schemas.openxmlformats.org/drawingml/2006/main" xmlns:p="http://schemas.openxmlformats.org/presentationml/2006/main" xmlns:r="http://schemas.openxmlformats.org/officeDocument/2006/relationships">
+<p:sld xmlns:a="http://schemas.openxmlformats.org/drawingml/2006/main" xmlns:r="http://schemas.openxmlformats.org/officeDocument/2006/relationships" xmlns:p="http://schemas.openxmlformats.org/presentationml/2006/main">
   <p:cSld>
     <p:spTree>
       <p:nvGrpSpPr>
@@ -15331,7 +16754,7 @@
           <a:noFill/>
         </p:spPr>
         <p:txBody>
-          <a:bodyPr wrap="square" lIns="0" rIns="0" tIns="0" bIns="0" anchor="t">
+          <a:bodyPr wrap="square" lIns="0" tIns="0" rIns="0" bIns="0" anchor="t">
             <a:spAutoFit/>
           </a:bodyPr>
           <a:lstStyle/>
@@ -15352,12 +16775,20 @@
                 <a:solidFill>
                   <a:srgbClr val="000000"/>
                 </a:solidFill>
-                <a:latin typeface="Times New Roman"/>
-                <a:ea typeface="黑体"/>
-                <a:cs typeface="黑体"/>
+                <a:latin typeface="Times New Roman" panose="02020603050405020304"/>
+                <a:ea typeface="黑体" panose="02010609060101010101" charset="-122"/>
+                <a:cs typeface="黑体" panose="02010609060101010101" charset="-122"/>
               </a:rPr>
               <a:t>对照（一）：题目、概念、样本</a:t>
             </a:r>
+            <a:endParaRPr sz="2300" b="1" i="0">
+              <a:solidFill>
+                <a:srgbClr val="000000"/>
+              </a:solidFill>
+              <a:latin typeface="Times New Roman" panose="02020603050405020304"/>
+              <a:ea typeface="黑体" panose="02010609060101010101" charset="-122"/>
+              <a:cs typeface="黑体" panose="02010609060101010101" charset="-122"/>
+            </a:endParaRPr>
           </a:p>
         </p:txBody>
       </p:sp>
@@ -15378,7 +16809,7 @@
           <a:noFill/>
         </p:spPr>
         <p:txBody>
-          <a:bodyPr wrap="square" lIns="0" rIns="0" tIns="0" bIns="0" anchor="t">
+          <a:bodyPr wrap="square" lIns="0" tIns="0" rIns="0" bIns="0" anchor="t">
             <a:spAutoFit/>
           </a:bodyPr>
           <a:lstStyle/>
@@ -15399,12 +16830,20 @@
                 <a:solidFill>
                   <a:srgbClr val="000000"/>
                 </a:solidFill>
-                <a:latin typeface="Times New Roman"/>
-                <a:ea typeface="宋体"/>
-                <a:cs typeface="宋体"/>
+                <a:latin typeface="Times New Roman" panose="02020603050405020304"/>
+                <a:ea typeface="宋体" panose="02010600030101010101" pitchFamily="2" charset="-122"/>
+                <a:cs typeface="宋体" panose="02010600030101010101" pitchFamily="2" charset="-122"/>
               </a:rPr>
               <a:t>· 题目来源：正例用日志＋访谈＋三轮评审，74 题删到 21 题；反例自编 6 题，无评审、无试测。</a:t>
             </a:r>
+            <a:endParaRPr sz="2000" b="0" i="0">
+              <a:solidFill>
+                <a:srgbClr val="000000"/>
+              </a:solidFill>
+              <a:latin typeface="Times New Roman" panose="02020603050405020304"/>
+              <a:ea typeface="宋体" panose="02010600030101010101" pitchFamily="2" charset="-122"/>
+              <a:cs typeface="宋体" panose="02010600030101010101" pitchFamily="2" charset="-122"/>
+            </a:endParaRPr>
           </a:p>
           <a:p>
             <a:pPr algn="l">
@@ -15423,12 +16862,20 @@
                 <a:solidFill>
                   <a:srgbClr val="000000"/>
                 </a:solidFill>
-                <a:latin typeface="Times New Roman"/>
-                <a:ea typeface="宋体"/>
-                <a:cs typeface="宋体"/>
+                <a:latin typeface="Times New Roman" panose="02020603050405020304"/>
+                <a:ea typeface="宋体" panose="02010600030101010101" pitchFamily="2" charset="-122"/>
+                <a:cs typeface="宋体" panose="02010600030101010101" pitchFamily="2" charset="-122"/>
               </a:rPr>
               <a:t>· 概念对应：正例的四个维度经过因素分析验证；反例的两个概念，从头到尾没检验过。</a:t>
             </a:r>
+            <a:endParaRPr sz="2000" b="0" i="0">
+              <a:solidFill>
+                <a:srgbClr val="000000"/>
+              </a:solidFill>
+              <a:latin typeface="Times New Roman" panose="02020603050405020304"/>
+              <a:ea typeface="宋体" panose="02010600030101010101" pitchFamily="2" charset="-122"/>
+              <a:cs typeface="宋体" panose="02010600030101010101" pitchFamily="2" charset="-122"/>
+            </a:endParaRPr>
           </a:p>
           <a:p>
             <a:pPr algn="l">
@@ -15447,12 +16894,20 @@
                 <a:solidFill>
                   <a:srgbClr val="000000"/>
                 </a:solidFill>
-                <a:latin typeface="Times New Roman"/>
-                <a:ea typeface="宋体"/>
-                <a:cs typeface="宋体"/>
+                <a:latin typeface="Times New Roman" panose="02020603050405020304"/>
+                <a:ea typeface="宋体" panose="02010600030101010101" pitchFamily="2" charset="-122"/>
+                <a:cs typeface="宋体" panose="02010600030101010101" pitchFamily="2" charset="-122"/>
               </a:rPr>
               <a:t>· 样本：正例 144 人、纳入条件写明；反例 127 人、连发放回收的口径都没报。</a:t>
             </a:r>
+            <a:endParaRPr sz="2000" b="0" i="0">
+              <a:solidFill>
+                <a:srgbClr val="000000"/>
+              </a:solidFill>
+              <a:latin typeface="Times New Roman" panose="02020603050405020304"/>
+              <a:ea typeface="宋体" panose="02010600030101010101" pitchFamily="2" charset="-122"/>
+              <a:cs typeface="宋体" panose="02010600030101010101" pitchFamily="2" charset="-122"/>
+            </a:endParaRPr>
           </a:p>
         </p:txBody>
       </p:sp>
@@ -15473,7 +16928,7 @@
           <a:noFill/>
         </p:spPr>
         <p:txBody>
-          <a:bodyPr wrap="square" lIns="0" rIns="0" tIns="0" bIns="0" anchor="t">
+          <a:bodyPr wrap="square" lIns="0" tIns="0" rIns="0" bIns="0" anchor="t">
             <a:spAutoFit/>
           </a:bodyPr>
           <a:lstStyle/>
@@ -15494,12 +16949,20 @@
                 <a:solidFill>
                   <a:srgbClr val="404040"/>
                 </a:solidFill>
-                <a:latin typeface="Times New Roman"/>
-                <a:ea typeface="宋体"/>
-                <a:cs typeface="宋体"/>
+                <a:latin typeface="Times New Roman" panose="02020603050405020304"/>
+                <a:ea typeface="宋体" panose="02010600030101010101" pitchFamily="2" charset="-122"/>
+                <a:cs typeface="宋体" panose="02010600030101010101" pitchFamily="2" charset="-122"/>
               </a:rPr>
               <a:t>28 / 34</a:t>
             </a:r>
+            <a:endParaRPr sz="1000" b="0" i="0">
+              <a:solidFill>
+                <a:srgbClr val="404040"/>
+              </a:solidFill>
+              <a:latin typeface="Times New Roman" panose="02020603050405020304"/>
+              <a:ea typeface="宋体" panose="02010600030101010101" pitchFamily="2" charset="-122"/>
+              <a:cs typeface="宋体" panose="02010600030101010101" pitchFamily="2" charset="-122"/>
+            </a:endParaRPr>
           </a:p>
         </p:txBody>
       </p:sp>
@@ -15512,7 +16975,7 @@
 </file>
 
 <file path=ppt/slides/slide29.xml><?xml version="1.0" encoding="utf-8"?>
-<p:sld xmlns:a="http://schemas.openxmlformats.org/drawingml/2006/main" xmlns:p="http://schemas.openxmlformats.org/presentationml/2006/main" xmlns:r="http://schemas.openxmlformats.org/officeDocument/2006/relationships">
+<p:sld xmlns:a="http://schemas.openxmlformats.org/drawingml/2006/main" xmlns:r="http://schemas.openxmlformats.org/officeDocument/2006/relationships" xmlns:p="http://schemas.openxmlformats.org/presentationml/2006/main">
   <p:cSld>
     <p:spTree>
       <p:nvGrpSpPr>
@@ -15538,7 +17001,7 @@
           <a:noFill/>
         </p:spPr>
         <p:txBody>
-          <a:bodyPr wrap="square" lIns="0" rIns="0" tIns="0" bIns="0" anchor="t">
+          <a:bodyPr wrap="square" lIns="0" tIns="0" rIns="0" bIns="0" anchor="t">
             <a:spAutoFit/>
           </a:bodyPr>
           <a:lstStyle/>
@@ -15559,12 +17022,20 @@
                 <a:solidFill>
                   <a:srgbClr val="000000"/>
                 </a:solidFill>
-                <a:latin typeface="Times New Roman"/>
-                <a:ea typeface="黑体"/>
-                <a:cs typeface="黑体"/>
+                <a:latin typeface="Times New Roman" panose="02020603050405020304"/>
+                <a:ea typeface="黑体" panose="02010609060101010101" charset="-122"/>
+                <a:cs typeface="黑体" panose="02010609060101010101" charset="-122"/>
               </a:rPr>
               <a:t>对照（二）：信度、效度、结论</a:t>
             </a:r>
+            <a:endParaRPr sz="2300" b="1" i="0">
+              <a:solidFill>
+                <a:srgbClr val="000000"/>
+              </a:solidFill>
+              <a:latin typeface="Times New Roman" panose="02020603050405020304"/>
+              <a:ea typeface="黑体" panose="02010609060101010101" charset="-122"/>
+              <a:cs typeface="黑体" panose="02010609060101010101" charset="-122"/>
+            </a:endParaRPr>
           </a:p>
         </p:txBody>
       </p:sp>
@@ -15585,7 +17056,7 @@
           <a:noFill/>
         </p:spPr>
         <p:txBody>
-          <a:bodyPr wrap="square" lIns="0" rIns="0" tIns="0" bIns="0" anchor="t">
+          <a:bodyPr wrap="square" lIns="0" tIns="0" rIns="0" bIns="0" anchor="t">
             <a:spAutoFit/>
           </a:bodyPr>
           <a:lstStyle/>
@@ -15606,12 +17077,20 @@
                 <a:solidFill>
                   <a:srgbClr val="000000"/>
                 </a:solidFill>
-                <a:latin typeface="Times New Roman"/>
-                <a:ea typeface="宋体"/>
-                <a:cs typeface="宋体"/>
+                <a:latin typeface="Times New Roman" panose="02020603050405020304"/>
+                <a:ea typeface="宋体" panose="02010600030101010101" pitchFamily="2" charset="-122"/>
+                <a:cs typeface="宋体" panose="02010600030101010101" pitchFamily="2" charset="-122"/>
               </a:rPr>
               <a:t>· 信度：两篇都报了，正例 α=.901，反例 α=.714/.835，都及格。</a:t>
             </a:r>
+            <a:endParaRPr sz="2000" b="0" i="0">
+              <a:solidFill>
+                <a:srgbClr val="000000"/>
+              </a:solidFill>
+              <a:latin typeface="Times New Roman" panose="02020603050405020304"/>
+              <a:ea typeface="宋体" panose="02010600030101010101" pitchFamily="2" charset="-122"/>
+              <a:cs typeface="宋体" panose="02010600030101010101" pitchFamily="2" charset="-122"/>
+            </a:endParaRPr>
           </a:p>
           <a:p>
             <a:pPr algn="l">
@@ -15630,12 +17109,20 @@
                 <a:solidFill>
                   <a:srgbClr val="000000"/>
                 </a:solidFill>
-                <a:latin typeface="Times New Roman"/>
-                <a:ea typeface="宋体"/>
-                <a:cs typeface="宋体"/>
+                <a:latin typeface="Times New Roman" panose="02020603050405020304"/>
+                <a:ea typeface="宋体" panose="02010600030101010101" pitchFamily="2" charset="-122"/>
+                <a:cs typeface="宋体" panose="02010600030101010101" pitchFamily="2" charset="-122"/>
               </a:rPr>
               <a:t>· 效度：正例有内容效度＋因素分析＋三项效标；反例只有「单题与成绩的相关」，而这一步还做错了。</a:t>
             </a:r>
+            <a:endParaRPr sz="2000" b="0" i="0">
+              <a:solidFill>
+                <a:srgbClr val="000000"/>
+              </a:solidFill>
+              <a:latin typeface="Times New Roman" panose="02020603050405020304"/>
+              <a:ea typeface="宋体" panose="02010600030101010101" pitchFamily="2" charset="-122"/>
+              <a:cs typeface="宋体" panose="02010600030101010101" pitchFamily="2" charset="-122"/>
+            </a:endParaRPr>
           </a:p>
           <a:p>
             <a:pPr algn="l">
@@ -15654,12 +17141,20 @@
                 <a:solidFill>
                   <a:srgbClr val="000000"/>
                 </a:solidFill>
-                <a:latin typeface="Times New Roman"/>
-                <a:ea typeface="宋体"/>
-                <a:cs typeface="宋体"/>
+                <a:latin typeface="Times New Roman" panose="02020603050405020304"/>
+                <a:ea typeface="宋体" panose="02010600030101010101" pitchFamily="2" charset="-122"/>
+                <a:cs typeface="宋体" panose="02010600030101010101" pitchFamily="2" charset="-122"/>
               </a:rPr>
               <a:t>· 结论：正例停在「可测、能区分训练阶段」；反例写到「应纳入教学」，越过了数据。</a:t>
             </a:r>
+            <a:endParaRPr sz="2000" b="0" i="0">
+              <a:solidFill>
+                <a:srgbClr val="000000"/>
+              </a:solidFill>
+              <a:latin typeface="Times New Roman" panose="02020603050405020304"/>
+              <a:ea typeface="宋体" panose="02010600030101010101" pitchFamily="2" charset="-122"/>
+              <a:cs typeface="宋体" panose="02010600030101010101" pitchFamily="2" charset="-122"/>
+            </a:endParaRPr>
           </a:p>
           <a:p>
             <a:pPr algn="l">
@@ -15678,12 +17173,20 @@
                 <a:solidFill>
                   <a:srgbClr val="000000"/>
                 </a:solidFill>
-                <a:latin typeface="Times New Roman"/>
-                <a:ea typeface="宋体"/>
-                <a:cs typeface="宋体"/>
+                <a:latin typeface="Times New Roman" panose="02020603050405020304"/>
+                <a:ea typeface="宋体" panose="02010600030101010101" pitchFamily="2" charset="-122"/>
+                <a:cs typeface="宋体" panose="02010600030101010101" pitchFamily="2" charset="-122"/>
               </a:rPr>
               <a:t>· 差距不在数据好不好看，而在结论敢不敢、该不该。</a:t>
             </a:r>
+            <a:endParaRPr sz="2000" b="0" i="0">
+              <a:solidFill>
+                <a:srgbClr val="000000"/>
+              </a:solidFill>
+              <a:latin typeface="Times New Roman" panose="02020603050405020304"/>
+              <a:ea typeface="宋体" panose="02010600030101010101" pitchFamily="2" charset="-122"/>
+              <a:cs typeface="宋体" panose="02010600030101010101" pitchFamily="2" charset="-122"/>
+            </a:endParaRPr>
           </a:p>
         </p:txBody>
       </p:sp>
@@ -15704,7 +17207,7 @@
           <a:noFill/>
         </p:spPr>
         <p:txBody>
-          <a:bodyPr wrap="square" lIns="0" rIns="0" tIns="0" bIns="0" anchor="t">
+          <a:bodyPr wrap="square" lIns="0" tIns="0" rIns="0" bIns="0" anchor="t">
             <a:spAutoFit/>
           </a:bodyPr>
           <a:lstStyle/>
@@ -15725,12 +17228,20 @@
                 <a:solidFill>
                   <a:srgbClr val="404040"/>
                 </a:solidFill>
-                <a:latin typeface="Times New Roman"/>
-                <a:ea typeface="宋体"/>
-                <a:cs typeface="宋体"/>
+                <a:latin typeface="Times New Roman" panose="02020603050405020304"/>
+                <a:ea typeface="宋体" panose="02010600030101010101" pitchFamily="2" charset="-122"/>
+                <a:cs typeface="宋体" panose="02010600030101010101" pitchFamily="2" charset="-122"/>
               </a:rPr>
               <a:t>29 / 34</a:t>
             </a:r>
+            <a:endParaRPr sz="1000" b="0" i="0">
+              <a:solidFill>
+                <a:srgbClr val="404040"/>
+              </a:solidFill>
+              <a:latin typeface="Times New Roman" panose="02020603050405020304"/>
+              <a:ea typeface="宋体" panose="02010600030101010101" pitchFamily="2" charset="-122"/>
+              <a:cs typeface="宋体" panose="02010600030101010101" pitchFamily="2" charset="-122"/>
+            </a:endParaRPr>
           </a:p>
         </p:txBody>
       </p:sp>
@@ -15743,7 +17254,7 @@
 </file>
 
 <file path=ppt/slides/slide3.xml><?xml version="1.0" encoding="utf-8"?>
-<p:sld xmlns:a="http://schemas.openxmlformats.org/drawingml/2006/main" xmlns:p="http://schemas.openxmlformats.org/presentationml/2006/main" xmlns:r="http://schemas.openxmlformats.org/officeDocument/2006/relationships">
+<p:sld xmlns:a="http://schemas.openxmlformats.org/drawingml/2006/main" xmlns:r="http://schemas.openxmlformats.org/officeDocument/2006/relationships" xmlns:p="http://schemas.openxmlformats.org/presentationml/2006/main">
   <p:cSld>
     <p:spTree>
       <p:nvGrpSpPr>
@@ -15857,7 +17368,7 @@
           <a:noFill/>
         </p:spPr>
         <p:txBody>
-          <a:bodyPr wrap="square" lIns="0" rIns="0" tIns="0" bIns="0" anchor="t">
+          <a:bodyPr wrap="square" lIns="0" tIns="0" rIns="0" bIns="0" anchor="t">
             <a:spAutoFit/>
           </a:bodyPr>
           <a:lstStyle/>
@@ -15878,12 +17389,20 @@
                 <a:solidFill>
                   <a:srgbClr val="FFFFFF"/>
                 </a:solidFill>
-                <a:latin typeface="Times New Roman"/>
-                <a:ea typeface="宋体"/>
-                <a:cs typeface="宋体"/>
+                <a:latin typeface="Times New Roman" panose="02020603050405020304"/>
+                <a:ea typeface="宋体" panose="02010600030101010101" pitchFamily="2" charset="-122"/>
+                <a:cs typeface="宋体" panose="02010600030101010101" pitchFamily="2" charset="-122"/>
               </a:rPr>
               <a:t>01</a:t>
             </a:r>
+            <a:endParaRPr sz="9600" b="0" i="0">
+              <a:solidFill>
+                <a:srgbClr val="FFFFFF"/>
+              </a:solidFill>
+              <a:latin typeface="Times New Roman" panose="02020603050405020304"/>
+              <a:ea typeface="宋体" panose="02010600030101010101" pitchFamily="2" charset="-122"/>
+              <a:cs typeface="宋体" panose="02010600030101010101" pitchFamily="2" charset="-122"/>
+            </a:endParaRPr>
           </a:p>
         </p:txBody>
       </p:sp>
@@ -15895,8 +17414,8 @@
         </p:nvSpPr>
         <p:spPr>
           <a:xfrm>
-            <a:off x="3566160" y="3063240"/>
-            <a:ext cx="5303520" cy="1280160"/>
+            <a:off x="4017645" y="3429000"/>
+            <a:ext cx="5303520" cy="494665"/>
           </a:xfrm>
           <a:prstGeom prst="rect">
             <a:avLst/>
@@ -15904,7 +17423,7 @@
           <a:noFill/>
         </p:spPr>
         <p:txBody>
-          <a:bodyPr wrap="square" lIns="0" rIns="0" tIns="0" bIns="0" anchor="t">
+          <a:bodyPr wrap="square" lIns="0" tIns="0" rIns="0" bIns="0" anchor="t">
             <a:spAutoFit/>
           </a:bodyPr>
           <a:lstStyle/>
@@ -15921,16 +17440,25 @@
               </a:spcAft>
             </a:pPr>
             <a:r>
-              <a:rPr sz="2800" b="1" i="0">
+              <a:rPr sz="2800" b="1">
                 <a:solidFill>
                   <a:srgbClr val="000000"/>
                 </a:solidFill>
-                <a:latin typeface="Times New Roman"/>
-                <a:ea typeface="黑体"/>
-                <a:cs typeface="黑体"/>
-              </a:rPr>
-              <a:t>先弄懂几个词，再看两篇论文</a:t>
-            </a:r>
+                <a:latin typeface="Times New Roman" panose="02020603050405020304"/>
+                <a:ea typeface="黑体" panose="02010609060101010101" charset="-122"/>
+                <a:cs typeface="黑体" panose="02010609060101010101" charset="-122"/>
+                <a:sym typeface="+mn-ea"/>
+              </a:rPr>
+              <a:t>研究背景与判断标准</a:t>
+            </a:r>
+            <a:endParaRPr sz="2800" b="1" i="0">
+              <a:solidFill>
+                <a:srgbClr val="000000"/>
+              </a:solidFill>
+              <a:latin typeface="Times New Roman" panose="02020603050405020304"/>
+              <a:ea typeface="黑体" panose="02010609060101010101" charset="-122"/>
+              <a:cs typeface="黑体" panose="02010609060101010101" charset="-122"/>
+            </a:endParaRPr>
           </a:p>
         </p:txBody>
       </p:sp>
@@ -15951,7 +17479,7 @@
           <a:noFill/>
         </p:spPr>
         <p:txBody>
-          <a:bodyPr wrap="square" lIns="0" rIns="0" tIns="0" bIns="0" anchor="t">
+          <a:bodyPr wrap="square" lIns="0" tIns="0" rIns="0" bIns="0" anchor="t">
             <a:spAutoFit/>
           </a:bodyPr>
           <a:lstStyle/>
@@ -15972,12 +17500,20 @@
                 <a:solidFill>
                   <a:srgbClr val="404040"/>
                 </a:solidFill>
-                <a:latin typeface="Times New Roman"/>
-                <a:ea typeface="宋体"/>
-                <a:cs typeface="宋体"/>
+                <a:latin typeface="Times New Roman" panose="02020603050405020304"/>
+                <a:ea typeface="宋体" panose="02010600030101010101" pitchFamily="2" charset="-122"/>
+                <a:cs typeface="宋体" panose="02010600030101010101" pitchFamily="2" charset="-122"/>
               </a:rPr>
               <a:t>3 / 34</a:t>
             </a:r>
+            <a:endParaRPr sz="1000" b="0" i="0">
+              <a:solidFill>
+                <a:srgbClr val="404040"/>
+              </a:solidFill>
+              <a:latin typeface="Times New Roman" panose="02020603050405020304"/>
+              <a:ea typeface="宋体" panose="02010600030101010101" pitchFamily="2" charset="-122"/>
+              <a:cs typeface="宋体" panose="02010600030101010101" pitchFamily="2" charset="-122"/>
+            </a:endParaRPr>
           </a:p>
         </p:txBody>
       </p:sp>
@@ -15990,7 +17526,7 @@
 </file>
 
 <file path=ppt/slides/slide30.xml><?xml version="1.0" encoding="utf-8"?>
-<p:sld xmlns:a="http://schemas.openxmlformats.org/drawingml/2006/main" xmlns:p="http://schemas.openxmlformats.org/presentationml/2006/main" xmlns:r="http://schemas.openxmlformats.org/officeDocument/2006/relationships">
+<p:sld xmlns:a="http://schemas.openxmlformats.org/drawingml/2006/main" xmlns:r="http://schemas.openxmlformats.org/officeDocument/2006/relationships" xmlns:p="http://schemas.openxmlformats.org/presentationml/2006/main">
   <p:cSld>
     <p:spTree>
       <p:nvGrpSpPr>
@@ -16104,7 +17640,7 @@
           <a:noFill/>
         </p:spPr>
         <p:txBody>
-          <a:bodyPr wrap="square" lIns="0" rIns="0" tIns="0" bIns="0" anchor="t">
+          <a:bodyPr wrap="square" lIns="0" tIns="0" rIns="0" bIns="0" anchor="t">
             <a:spAutoFit/>
           </a:bodyPr>
           <a:lstStyle/>
@@ -16125,12 +17661,20 @@
                 <a:solidFill>
                   <a:srgbClr val="FFFFFF"/>
                 </a:solidFill>
-                <a:latin typeface="Times New Roman"/>
-                <a:ea typeface="宋体"/>
-                <a:cs typeface="宋体"/>
+                <a:latin typeface="Times New Roman" panose="02020603050405020304"/>
+                <a:ea typeface="宋体" panose="02010600030101010101" pitchFamily="2" charset="-122"/>
+                <a:cs typeface="宋体" panose="02010600030101010101" pitchFamily="2" charset="-122"/>
               </a:rPr>
               <a:t>05</a:t>
             </a:r>
+            <a:endParaRPr sz="9600" b="0" i="0">
+              <a:solidFill>
+                <a:srgbClr val="FFFFFF"/>
+              </a:solidFill>
+              <a:latin typeface="Times New Roman" panose="02020603050405020304"/>
+              <a:ea typeface="宋体" panose="02010600030101010101" pitchFamily="2" charset="-122"/>
+              <a:cs typeface="宋体" panose="02010600030101010101" pitchFamily="2" charset="-122"/>
+            </a:endParaRPr>
           </a:p>
         </p:txBody>
       </p:sp>
@@ -16142,8 +17686,8 @@
         </p:nvSpPr>
         <p:spPr>
           <a:xfrm>
-            <a:off x="3566160" y="3063240"/>
-            <a:ext cx="5303520" cy="1280160"/>
+            <a:off x="3781425" y="3115310"/>
+            <a:ext cx="5303520" cy="494665"/>
           </a:xfrm>
           <a:prstGeom prst="rect">
             <a:avLst/>
@@ -16151,7 +17695,7 @@
           <a:noFill/>
         </p:spPr>
         <p:txBody>
-          <a:bodyPr wrap="square" lIns="0" rIns="0" tIns="0" bIns="0" anchor="t">
+          <a:bodyPr wrap="square" lIns="0" tIns="0" rIns="0" bIns="0" anchor="t">
             <a:spAutoFit/>
           </a:bodyPr>
           <a:lstStyle/>
@@ -16168,16 +17712,25 @@
               </a:spcAft>
             </a:pPr>
             <a:r>
-              <a:rPr sz="2800" b="1" i="0">
+              <a:rPr sz="2800" b="1">
                 <a:solidFill>
                   <a:srgbClr val="000000"/>
                 </a:solidFill>
-                <a:latin typeface="Times New Roman"/>
-                <a:ea typeface="黑体"/>
-                <a:cs typeface="黑体"/>
-              </a:rPr>
-              <a:t>交稿前该问自己的十句话</a:t>
-            </a:r>
+                <a:latin typeface="Times New Roman" panose="02020603050405020304"/>
+                <a:ea typeface="黑体" panose="02010609060101010101" charset="-122"/>
+                <a:cs typeface="黑体" panose="02010609060101010101" charset="-122"/>
+                <a:sym typeface="+mn-ea"/>
+              </a:rPr>
+              <a:t>启示：问卷设计与施测的规范</a:t>
+            </a:r>
+            <a:endParaRPr sz="2800" b="1" i="0">
+              <a:solidFill>
+                <a:srgbClr val="000000"/>
+              </a:solidFill>
+              <a:latin typeface="Times New Roman" panose="02020603050405020304"/>
+              <a:ea typeface="黑体" panose="02010609060101010101" charset="-122"/>
+              <a:cs typeface="黑体" panose="02010609060101010101" charset="-122"/>
+            </a:endParaRPr>
           </a:p>
         </p:txBody>
       </p:sp>
@@ -16198,7 +17751,7 @@
           <a:noFill/>
         </p:spPr>
         <p:txBody>
-          <a:bodyPr wrap="square" lIns="0" rIns="0" tIns="0" bIns="0" anchor="t">
+          <a:bodyPr wrap="square" lIns="0" tIns="0" rIns="0" bIns="0" anchor="t">
             <a:spAutoFit/>
           </a:bodyPr>
           <a:lstStyle/>
@@ -16219,12 +17772,20 @@
                 <a:solidFill>
                   <a:srgbClr val="404040"/>
                 </a:solidFill>
-                <a:latin typeface="Times New Roman"/>
-                <a:ea typeface="宋体"/>
-                <a:cs typeface="宋体"/>
+                <a:latin typeface="Times New Roman" panose="02020603050405020304"/>
+                <a:ea typeface="宋体" panose="02010600030101010101" pitchFamily="2" charset="-122"/>
+                <a:cs typeface="宋体" panose="02010600030101010101" pitchFamily="2" charset="-122"/>
               </a:rPr>
               <a:t>30 / 34</a:t>
             </a:r>
+            <a:endParaRPr sz="1000" b="0" i="0">
+              <a:solidFill>
+                <a:srgbClr val="404040"/>
+              </a:solidFill>
+              <a:latin typeface="Times New Roman" panose="02020603050405020304"/>
+              <a:ea typeface="宋体" panose="02010600030101010101" pitchFamily="2" charset="-122"/>
+              <a:cs typeface="宋体" panose="02010600030101010101" pitchFamily="2" charset="-122"/>
+            </a:endParaRPr>
           </a:p>
         </p:txBody>
       </p:sp>
@@ -16237,7 +17798,7 @@
 </file>
 
 <file path=ppt/slides/slide31.xml><?xml version="1.0" encoding="utf-8"?>
-<p:sld xmlns:a="http://schemas.openxmlformats.org/drawingml/2006/main" xmlns:p="http://schemas.openxmlformats.org/presentationml/2006/main" xmlns:r="http://schemas.openxmlformats.org/officeDocument/2006/relationships">
+<p:sld xmlns:a="http://schemas.openxmlformats.org/drawingml/2006/main" xmlns:r="http://schemas.openxmlformats.org/officeDocument/2006/relationships" xmlns:p="http://schemas.openxmlformats.org/presentationml/2006/main">
   <p:cSld>
     <p:spTree>
       <p:nvGrpSpPr>
@@ -16263,7 +17824,7 @@
           <a:noFill/>
         </p:spPr>
         <p:txBody>
-          <a:bodyPr wrap="square" lIns="0" rIns="0" tIns="0" bIns="0" anchor="t">
+          <a:bodyPr wrap="square" lIns="0" tIns="0" rIns="0" bIns="0" anchor="t">
             <a:spAutoFit/>
           </a:bodyPr>
           <a:lstStyle/>
@@ -16284,12 +17845,20 @@
                 <a:solidFill>
                   <a:srgbClr val="000000"/>
                 </a:solidFill>
-                <a:latin typeface="Times New Roman"/>
-                <a:ea typeface="黑体"/>
-                <a:cs typeface="黑体"/>
+                <a:latin typeface="Times New Roman" panose="02020603050405020304"/>
+                <a:ea typeface="黑体" panose="02010609060101010101" charset="-122"/>
+                <a:cs typeface="黑体" panose="02010609060101010101" charset="-122"/>
               </a:rPr>
               <a:t>交稿前问自己十句话（上）</a:t>
             </a:r>
+            <a:endParaRPr sz="2300" b="1" i="0">
+              <a:solidFill>
+                <a:srgbClr val="000000"/>
+              </a:solidFill>
+              <a:latin typeface="Times New Roman" panose="02020603050405020304"/>
+              <a:ea typeface="黑体" panose="02010609060101010101" charset="-122"/>
+              <a:cs typeface="黑体" panose="02010609060101010101" charset="-122"/>
+            </a:endParaRPr>
           </a:p>
         </p:txBody>
       </p:sp>
@@ -16310,7 +17879,7 @@
           <a:noFill/>
         </p:spPr>
         <p:txBody>
-          <a:bodyPr wrap="square" lIns="0" rIns="0" tIns="0" bIns="0" anchor="t">
+          <a:bodyPr wrap="square" lIns="0" tIns="0" rIns="0" bIns="0" anchor="t">
             <a:spAutoFit/>
           </a:bodyPr>
           <a:lstStyle/>
@@ -16331,12 +17900,20 @@
                 <a:solidFill>
                   <a:srgbClr val="000000"/>
                 </a:solidFill>
-                <a:latin typeface="Times New Roman"/>
-                <a:ea typeface="宋体"/>
-                <a:cs typeface="宋体"/>
+                <a:latin typeface="Times New Roman" panose="02020603050405020304"/>
+                <a:ea typeface="宋体" panose="02010600030101010101" pitchFamily="2" charset="-122"/>
+                <a:cs typeface="宋体" panose="02010600030101010101" pitchFamily="2" charset="-122"/>
               </a:rPr>
               <a:t>1. 我要回答什么问题？——先写成一句能检验的话，别写「我研究翻译教学」这种空话。</a:t>
             </a:r>
+            <a:endParaRPr sz="2000" b="0" i="0">
+              <a:solidFill>
+                <a:srgbClr val="000000"/>
+              </a:solidFill>
+              <a:latin typeface="Times New Roman" panose="02020603050405020304"/>
+              <a:ea typeface="宋体" panose="02010600030101010101" pitchFamily="2" charset="-122"/>
+              <a:cs typeface="宋体" panose="02010600030101010101" pitchFamily="2" charset="-122"/>
+            </a:endParaRPr>
           </a:p>
           <a:p>
             <a:pPr algn="l">
@@ -16355,12 +17932,20 @@
                 <a:solidFill>
                   <a:srgbClr val="000000"/>
                 </a:solidFill>
-                <a:latin typeface="Times New Roman"/>
-                <a:ea typeface="宋体"/>
-                <a:cs typeface="宋体"/>
+                <a:latin typeface="Times New Roman" panose="02020603050405020304"/>
+                <a:ea typeface="宋体" panose="02010600030101010101" pitchFamily="2" charset="-122"/>
+                <a:cs typeface="宋体" panose="02010600030101010101" pitchFamily="2" charset="-122"/>
               </a:rPr>
               <a:t>2. 题目和概念对得上吗？——先定义概念，再列「概念 → 维度 → 题目」对照表，别想到哪问到哪。</a:t>
             </a:r>
+            <a:endParaRPr sz="2000" b="0" i="0">
+              <a:solidFill>
+                <a:srgbClr val="000000"/>
+              </a:solidFill>
+              <a:latin typeface="Times New Roman" panose="02020603050405020304"/>
+              <a:ea typeface="宋体" panose="02010600030101010101" pitchFamily="2" charset="-122"/>
+              <a:cs typeface="宋体" panose="02010600030101010101" pitchFamily="2" charset="-122"/>
+            </a:endParaRPr>
           </a:p>
           <a:p>
             <a:pPr algn="l">
@@ -16379,12 +17964,20 @@
                 <a:solidFill>
                   <a:srgbClr val="000000"/>
                 </a:solidFill>
-                <a:latin typeface="Times New Roman"/>
-                <a:ea typeface="宋体"/>
-                <a:cs typeface="宋体"/>
+                <a:latin typeface="Times New Roman" panose="02020603050405020304"/>
+                <a:ea typeface="宋体" panose="02010600030101010101" pitchFamily="2" charset="-122"/>
+                <a:cs typeface="宋体" panose="02010600030101010101" pitchFamily="2" charset="-122"/>
               </a:rPr>
               <a:t>3. 题目是哪来的？——沿用别人的要注明出处，改编的要说明改了哪，自己编的要交代怎么编出来的。</a:t>
             </a:r>
+            <a:endParaRPr sz="2000" b="0" i="0">
+              <a:solidFill>
+                <a:srgbClr val="000000"/>
+              </a:solidFill>
+              <a:latin typeface="Times New Roman" panose="02020603050405020304"/>
+              <a:ea typeface="宋体" panose="02010600030101010101" pitchFamily="2" charset="-122"/>
+              <a:cs typeface="宋体" panose="02010600030101010101" pitchFamily="2" charset="-122"/>
+            </a:endParaRPr>
           </a:p>
           <a:p>
             <a:pPr algn="l">
@@ -16403,12 +17996,20 @@
                 <a:solidFill>
                   <a:srgbClr val="000000"/>
                 </a:solidFill>
-                <a:latin typeface="Times New Roman"/>
-                <a:ea typeface="宋体"/>
-                <a:cs typeface="宋体"/>
+                <a:latin typeface="Times New Roman" panose="02020603050405020304"/>
+                <a:ea typeface="宋体" panose="02010600030101010101" pitchFamily="2" charset="-122"/>
+                <a:cs typeface="宋体" panose="02010600030101010101" pitchFamily="2" charset="-122"/>
               </a:rPr>
               <a:t>4. 问卷发给谁？——写清楚总体是谁、怎么抽的、谁算合格、谁不算。</a:t>
             </a:r>
+            <a:endParaRPr sz="2000" b="0" i="0">
+              <a:solidFill>
+                <a:srgbClr val="000000"/>
+              </a:solidFill>
+              <a:latin typeface="Times New Roman" panose="02020603050405020304"/>
+              <a:ea typeface="宋体" panose="02010600030101010101" pitchFamily="2" charset="-122"/>
+              <a:cs typeface="宋体" panose="02010600030101010101" pitchFamily="2" charset="-122"/>
+            </a:endParaRPr>
           </a:p>
           <a:p>
             <a:pPr algn="l">
@@ -16427,12 +18028,20 @@
                 <a:solidFill>
                   <a:srgbClr val="000000"/>
                 </a:solidFill>
-                <a:latin typeface="Times New Roman"/>
-                <a:ea typeface="宋体"/>
-                <a:cs typeface="宋体"/>
+                <a:latin typeface="Times New Roman" panose="02020603050405020304"/>
+                <a:ea typeface="宋体" panose="02010600030101010101" pitchFamily="2" charset="-122"/>
+                <a:cs typeface="宋体" panose="02010600030101010101" pitchFamily="2" charset="-122"/>
               </a:rPr>
               <a:t>5. 三份数字报了吗？——发出去多少、收回多少、有效多少，还要先说清「怎样算无效」。</a:t>
             </a:r>
+            <a:endParaRPr sz="2000" b="0" i="0">
+              <a:solidFill>
+                <a:srgbClr val="000000"/>
+              </a:solidFill>
+              <a:latin typeface="Times New Roman" panose="02020603050405020304"/>
+              <a:ea typeface="宋体" panose="02010600030101010101" pitchFamily="2" charset="-122"/>
+              <a:cs typeface="宋体" panose="02010600030101010101" pitchFamily="2" charset="-122"/>
+            </a:endParaRPr>
           </a:p>
         </p:txBody>
       </p:sp>
@@ -16453,7 +18062,7 @@
           <a:noFill/>
         </p:spPr>
         <p:txBody>
-          <a:bodyPr wrap="square" lIns="0" rIns="0" tIns="0" bIns="0" anchor="t">
+          <a:bodyPr wrap="square" lIns="0" tIns="0" rIns="0" bIns="0" anchor="t">
             <a:spAutoFit/>
           </a:bodyPr>
           <a:lstStyle/>
@@ -16474,12 +18083,20 @@
                 <a:solidFill>
                   <a:srgbClr val="404040"/>
                 </a:solidFill>
-                <a:latin typeface="Times New Roman"/>
-                <a:ea typeface="宋体"/>
-                <a:cs typeface="宋体"/>
+                <a:latin typeface="Times New Roman" panose="02020603050405020304"/>
+                <a:ea typeface="宋体" panose="02010600030101010101" pitchFamily="2" charset="-122"/>
+                <a:cs typeface="宋体" panose="02010600030101010101" pitchFamily="2" charset="-122"/>
               </a:rPr>
               <a:t>31 / 34</a:t>
             </a:r>
+            <a:endParaRPr sz="1000" b="0" i="0">
+              <a:solidFill>
+                <a:srgbClr val="404040"/>
+              </a:solidFill>
+              <a:latin typeface="Times New Roman" panose="02020603050405020304"/>
+              <a:ea typeface="宋体" panose="02010600030101010101" pitchFamily="2" charset="-122"/>
+              <a:cs typeface="宋体" panose="02010600030101010101" pitchFamily="2" charset="-122"/>
+            </a:endParaRPr>
           </a:p>
         </p:txBody>
       </p:sp>
@@ -16492,7 +18109,7 @@
 </file>
 
 <file path=ppt/slides/slide32.xml><?xml version="1.0" encoding="utf-8"?>
-<p:sld xmlns:a="http://schemas.openxmlformats.org/drawingml/2006/main" xmlns:p="http://schemas.openxmlformats.org/presentationml/2006/main" xmlns:r="http://schemas.openxmlformats.org/officeDocument/2006/relationships">
+<p:sld xmlns:a="http://schemas.openxmlformats.org/drawingml/2006/main" xmlns:r="http://schemas.openxmlformats.org/officeDocument/2006/relationships" xmlns:p="http://schemas.openxmlformats.org/presentationml/2006/main">
   <p:cSld>
     <p:spTree>
       <p:nvGrpSpPr>
@@ -16518,7 +18135,7 @@
           <a:noFill/>
         </p:spPr>
         <p:txBody>
-          <a:bodyPr wrap="square" lIns="0" rIns="0" tIns="0" bIns="0" anchor="t">
+          <a:bodyPr wrap="square" lIns="0" tIns="0" rIns="0" bIns="0" anchor="t">
             <a:spAutoFit/>
           </a:bodyPr>
           <a:lstStyle/>
@@ -16539,12 +18156,20 @@
                 <a:solidFill>
                   <a:srgbClr val="000000"/>
                 </a:solidFill>
-                <a:latin typeface="Times New Roman"/>
-                <a:ea typeface="黑体"/>
-                <a:cs typeface="黑体"/>
+                <a:latin typeface="Times New Roman" panose="02020603050405020304"/>
+                <a:ea typeface="黑体" panose="02010609060101010101" charset="-122"/>
+                <a:cs typeface="黑体" panose="02010609060101010101" charset="-122"/>
               </a:rPr>
               <a:t>交稿前问自己十句话（下）</a:t>
             </a:r>
+            <a:endParaRPr sz="2300" b="1" i="0">
+              <a:solidFill>
+                <a:srgbClr val="000000"/>
+              </a:solidFill>
+              <a:latin typeface="Times New Roman" panose="02020603050405020304"/>
+              <a:ea typeface="黑体" panose="02010609060101010101" charset="-122"/>
+              <a:cs typeface="黑体" panose="02010609060101010101" charset="-122"/>
+            </a:endParaRPr>
           </a:p>
         </p:txBody>
       </p:sp>
@@ -16565,7 +18190,7 @@
           <a:noFill/>
         </p:spPr>
         <p:txBody>
-          <a:bodyPr wrap="square" lIns="0" rIns="0" tIns="0" bIns="0" anchor="t">
+          <a:bodyPr wrap="square" lIns="0" tIns="0" rIns="0" bIns="0" anchor="t">
             <a:spAutoFit/>
           </a:bodyPr>
           <a:lstStyle/>
@@ -16586,12 +18211,20 @@
                 <a:solidFill>
                   <a:srgbClr val="000000"/>
                 </a:solidFill>
-                <a:latin typeface="Times New Roman"/>
-                <a:ea typeface="宋体"/>
-                <a:cs typeface="宋体"/>
+                <a:latin typeface="Times New Roman" panose="02020603050405020304"/>
+                <a:ea typeface="宋体" panose="02010600030101010101" pitchFamily="2" charset="-122"/>
+                <a:cs typeface="宋体" panose="02010600030101010101" pitchFamily="2" charset="-122"/>
               </a:rPr>
               <a:t>6. 先试测了吗？——正式发之前，先找几个人试填，或者请专家把把关。</a:t>
             </a:r>
+            <a:endParaRPr sz="2000" b="0" i="0">
+              <a:solidFill>
+                <a:srgbClr val="000000"/>
+              </a:solidFill>
+              <a:latin typeface="Times New Roman" panose="02020603050405020304"/>
+              <a:ea typeface="宋体" panose="02010600030101010101" pitchFamily="2" charset="-122"/>
+              <a:cs typeface="宋体" panose="02010600030101010101" pitchFamily="2" charset="-122"/>
+            </a:endParaRPr>
           </a:p>
           <a:p>
             <a:pPr algn="l">
@@ -16610,12 +18243,20 @@
                 <a:solidFill>
                   <a:srgbClr val="000000"/>
                 </a:solidFill>
-                <a:latin typeface="Times New Roman"/>
-                <a:ea typeface="宋体"/>
-                <a:cs typeface="宋体"/>
+                <a:latin typeface="Times New Roman" panose="02020603050405020304"/>
+                <a:ea typeface="宋体" panose="02010600030101010101" pitchFamily="2" charset="-122"/>
+                <a:cs typeface="宋体" panose="02010600030101010101" pitchFamily="2" charset="-122"/>
               </a:rPr>
               <a:t>7. 信度效度报了吗？——报 α（或 ω）；问卷分了维度，还要报因素分析。</a:t>
             </a:r>
+            <a:endParaRPr sz="2000" b="0" i="0">
+              <a:solidFill>
+                <a:srgbClr val="000000"/>
+              </a:solidFill>
+              <a:latin typeface="Times New Roman" panose="02020603050405020304"/>
+              <a:ea typeface="宋体" panose="02010600030101010101" pitchFamily="2" charset="-122"/>
+              <a:cs typeface="宋体" panose="02010600030101010101" pitchFamily="2" charset="-122"/>
+            </a:endParaRPr>
           </a:p>
           <a:p>
             <a:pPr algn="l">
@@ -16634,12 +18275,20 @@
                 <a:solidFill>
                   <a:srgbClr val="000000"/>
                 </a:solidFill>
-                <a:latin typeface="Times New Roman"/>
-                <a:ea typeface="宋体"/>
-                <a:cs typeface="宋体"/>
+                <a:latin typeface="Times New Roman" panose="02020603050405020304"/>
+                <a:ea typeface="宋体" panose="02010600030101010101" pitchFamily="2" charset="-122"/>
+                <a:cs typeface="宋体" panose="02010600030101010101" pitchFamily="2" charset="-122"/>
               </a:rPr>
               <a:t>8. 指导语写清楚了吗？——说明用途、匿名、可以中途退出，别让人稀里糊涂填。</a:t>
             </a:r>
+            <a:endParaRPr sz="2000" b="0" i="0">
+              <a:solidFill>
+                <a:srgbClr val="000000"/>
+              </a:solidFill>
+              <a:latin typeface="Times New Roman" panose="02020603050405020304"/>
+              <a:ea typeface="宋体" panose="02010600030101010101" pitchFamily="2" charset="-122"/>
+              <a:cs typeface="宋体" panose="02010600030101010101" pitchFamily="2" charset="-122"/>
+            </a:endParaRPr>
           </a:p>
           <a:p>
             <a:pPr algn="l">
@@ -16658,12 +18307,20 @@
                 <a:solidFill>
                   <a:srgbClr val="000000"/>
                 </a:solidFill>
-                <a:latin typeface="Times New Roman"/>
-                <a:ea typeface="宋体"/>
-                <a:cs typeface="宋体"/>
+                <a:latin typeface="Times New Roman" panose="02020603050405020304"/>
+                <a:ea typeface="宋体" panose="02010600030101010101" pitchFamily="2" charset="-122"/>
+                <a:cs typeface="宋体" panose="02010600030101010101" pitchFamily="2" charset="-122"/>
               </a:rPr>
               <a:t>9. 题型和统计方法配吗？——单选用频数、量表用均值、开放题用编码，别乱套。</a:t>
             </a:r>
+            <a:endParaRPr sz="2000" b="0" i="0">
+              <a:solidFill>
+                <a:srgbClr val="000000"/>
+              </a:solidFill>
+              <a:latin typeface="Times New Roman" panose="02020603050405020304"/>
+              <a:ea typeface="宋体" panose="02010600030101010101" pitchFamily="2" charset="-122"/>
+              <a:cs typeface="宋体" panose="02010600030101010101" pitchFamily="2" charset="-122"/>
+            </a:endParaRPr>
           </a:p>
           <a:p>
             <a:pPr algn="l">
@@ -16682,12 +18339,20 @@
                 <a:solidFill>
                   <a:srgbClr val="000000"/>
                 </a:solidFill>
-                <a:latin typeface="Times New Roman"/>
-                <a:ea typeface="宋体"/>
-                <a:cs typeface="宋体"/>
+                <a:latin typeface="Times New Roman" panose="02020603050405020304"/>
+                <a:ea typeface="宋体" panose="02010600030101010101" pitchFamily="2" charset="-122"/>
+                <a:cs typeface="宋体" panose="02010600030101010101" pitchFamily="2" charset="-122"/>
               </a:rPr>
               <a:t>10. 结论有没有越界？——横断面问卷只能说「有关联」，不能说「导致」。</a:t>
             </a:r>
+            <a:endParaRPr sz="2000" b="0" i="0">
+              <a:solidFill>
+                <a:srgbClr val="000000"/>
+              </a:solidFill>
+              <a:latin typeface="Times New Roman" panose="02020603050405020304"/>
+              <a:ea typeface="宋体" panose="02010600030101010101" pitchFamily="2" charset="-122"/>
+              <a:cs typeface="宋体" panose="02010600030101010101" pitchFamily="2" charset="-122"/>
+            </a:endParaRPr>
           </a:p>
         </p:txBody>
       </p:sp>
@@ -16708,7 +18373,7 @@
           <a:noFill/>
         </p:spPr>
         <p:txBody>
-          <a:bodyPr wrap="square" lIns="0" rIns="0" tIns="0" bIns="0" anchor="t">
+          <a:bodyPr wrap="square" lIns="0" tIns="0" rIns="0" bIns="0" anchor="t">
             <a:spAutoFit/>
           </a:bodyPr>
           <a:lstStyle/>
@@ -16729,12 +18394,20 @@
                 <a:solidFill>
                   <a:srgbClr val="404040"/>
                 </a:solidFill>
-                <a:latin typeface="Times New Roman"/>
-                <a:ea typeface="宋体"/>
-                <a:cs typeface="宋体"/>
+                <a:latin typeface="Times New Roman" panose="02020603050405020304"/>
+                <a:ea typeface="宋体" panose="02010600030101010101" pitchFamily="2" charset="-122"/>
+                <a:cs typeface="宋体" panose="02010600030101010101" pitchFamily="2" charset="-122"/>
               </a:rPr>
               <a:t>32 / 34</a:t>
             </a:r>
+            <a:endParaRPr sz="1000" b="0" i="0">
+              <a:solidFill>
+                <a:srgbClr val="404040"/>
+              </a:solidFill>
+              <a:latin typeface="Times New Roman" panose="02020603050405020304"/>
+              <a:ea typeface="宋体" panose="02010600030101010101" pitchFamily="2" charset="-122"/>
+              <a:cs typeface="宋体" panose="02010600030101010101" pitchFamily="2" charset="-122"/>
+            </a:endParaRPr>
           </a:p>
         </p:txBody>
       </p:sp>
@@ -16747,7 +18420,7 @@
 </file>
 
 <file path=ppt/slides/slide33.xml><?xml version="1.0" encoding="utf-8"?>
-<p:sld xmlns:a="http://schemas.openxmlformats.org/drawingml/2006/main" xmlns:p="http://schemas.openxmlformats.org/presentationml/2006/main" xmlns:r="http://schemas.openxmlformats.org/officeDocument/2006/relationships">
+<p:sld xmlns:a="http://schemas.openxmlformats.org/drawingml/2006/main" xmlns:r="http://schemas.openxmlformats.org/officeDocument/2006/relationships" xmlns:p="http://schemas.openxmlformats.org/presentationml/2006/main">
   <p:cSld>
     <p:spTree>
       <p:nvGrpSpPr>
@@ -16773,7 +18446,7 @@
           <a:noFill/>
         </p:spPr>
         <p:txBody>
-          <a:bodyPr wrap="square" lIns="0" rIns="0" tIns="0" bIns="0" anchor="t">
+          <a:bodyPr wrap="square" lIns="0" tIns="0" rIns="0" bIns="0" anchor="t">
             <a:spAutoFit/>
           </a:bodyPr>
           <a:lstStyle/>
@@ -16794,12 +18467,20 @@
                 <a:solidFill>
                   <a:srgbClr val="000000"/>
                 </a:solidFill>
-                <a:latin typeface="Times New Roman"/>
-                <a:ea typeface="黑体"/>
-                <a:cs typeface="黑体"/>
+                <a:latin typeface="Times New Roman" panose="02020603050405020304"/>
+                <a:ea typeface="黑体" panose="02010609060101010101" charset="-122"/>
+                <a:cs typeface="黑体" panose="02010609060101010101" charset="-122"/>
               </a:rPr>
               <a:t>反例只改三处，就能变好</a:t>
             </a:r>
+            <a:endParaRPr sz="2300" b="1" i="0">
+              <a:solidFill>
+                <a:srgbClr val="000000"/>
+              </a:solidFill>
+              <a:latin typeface="Times New Roman" panose="02020603050405020304"/>
+              <a:ea typeface="黑体" panose="02010609060101010101" charset="-122"/>
+              <a:cs typeface="黑体" panose="02010609060101010101" charset="-122"/>
+            </a:endParaRPr>
           </a:p>
         </p:txBody>
       </p:sp>
@@ -16820,7 +18501,7 @@
           <a:noFill/>
         </p:spPr>
         <p:txBody>
-          <a:bodyPr wrap="square" lIns="0" rIns="0" tIns="0" bIns="0" anchor="t">
+          <a:bodyPr wrap="square" lIns="0" tIns="0" rIns="0" bIns="0" anchor="t">
             <a:spAutoFit/>
           </a:bodyPr>
           <a:lstStyle/>
@@ -16841,12 +18522,20 @@
                 <a:solidFill>
                   <a:srgbClr val="000000"/>
                 </a:solidFill>
-                <a:latin typeface="Times New Roman"/>
-                <a:ea typeface="宋体"/>
-                <a:cs typeface="宋体"/>
+                <a:latin typeface="Times New Roman" panose="02020603050405020304"/>
+                <a:ea typeface="宋体" panose="02010600030101010101" pitchFamily="2" charset="-122"/>
+                <a:cs typeface="宋体" panose="02010600030101010101" pitchFamily="2" charset="-122"/>
               </a:rPr>
               <a:t>· 第一处 题目来源：换成已验证的量表题并注明出处；坚持自编，就补一次因素分析，证明题目真的在测那个概念。</a:t>
             </a:r>
+            <a:endParaRPr sz="2000" b="0" i="0">
+              <a:solidFill>
+                <a:srgbClr val="000000"/>
+              </a:solidFill>
+              <a:latin typeface="Times New Roman" panose="02020603050405020304"/>
+              <a:ea typeface="宋体" panose="02010600030101010101" pitchFamily="2" charset="-122"/>
+              <a:cs typeface="宋体" panose="02010600030101010101" pitchFamily="2" charset="-122"/>
+            </a:endParaRPr>
           </a:p>
           <a:p>
             <a:pPr algn="l">
@@ -16865,12 +18554,20 @@
                 <a:solidFill>
                   <a:srgbClr val="000000"/>
                 </a:solidFill>
-                <a:latin typeface="Times New Roman"/>
-                <a:ea typeface="宋体"/>
-                <a:cs typeface="宋体"/>
+                <a:latin typeface="Times New Roman" panose="02020603050405020304"/>
+                <a:ea typeface="宋体" panose="02010600030101010101" pitchFamily="2" charset="-122"/>
+                <a:cs typeface="宋体" panose="02010600030101010101" pitchFamily="2" charset="-122"/>
               </a:rPr>
               <a:t>· 第二处 单题当构念：把同维度的 3 题合成一个平均分再算相关，别拿单题；措辞用「有关联」，不用「影响」。</a:t>
             </a:r>
+            <a:endParaRPr sz="2000" b="0" i="0">
+              <a:solidFill>
+                <a:srgbClr val="000000"/>
+              </a:solidFill>
+              <a:latin typeface="Times New Roman" panose="02020603050405020304"/>
+              <a:ea typeface="宋体" panose="02010600030101010101" pitchFamily="2" charset="-122"/>
+              <a:cs typeface="宋体" panose="02010600030101010101" pitchFamily="2" charset="-122"/>
+            </a:endParaRPr>
           </a:p>
           <a:p>
             <a:pPr algn="l">
@@ -16889,12 +18586,20 @@
                 <a:solidFill>
                   <a:srgbClr val="000000"/>
                 </a:solidFill>
-                <a:latin typeface="Times New Roman"/>
-                <a:ea typeface="宋体"/>
-                <a:cs typeface="宋体"/>
+                <a:latin typeface="Times New Roman" panose="02020603050405020304"/>
+                <a:ea typeface="宋体" panose="02010600030101010101" pitchFamily="2" charset="-122"/>
+                <a:cs typeface="宋体" panose="02010600030101010101" pitchFamily="2" charset="-122"/>
               </a:rPr>
               <a:t>· 第三处 结论越界：把结论收窄到「这 127 名学生、这所学校」，并补上发放、回收、有效三个数。</a:t>
             </a:r>
+            <a:endParaRPr sz="2000" b="0" i="0">
+              <a:solidFill>
+                <a:srgbClr val="000000"/>
+              </a:solidFill>
+              <a:latin typeface="Times New Roman" panose="02020603050405020304"/>
+              <a:ea typeface="宋体" panose="02010600030101010101" pitchFamily="2" charset="-122"/>
+              <a:cs typeface="宋体" panose="02010600030101010101" pitchFamily="2" charset="-122"/>
+            </a:endParaRPr>
           </a:p>
           <a:p>
             <a:pPr algn="l">
@@ -16913,12 +18618,20 @@
                 <a:solidFill>
                   <a:srgbClr val="000000"/>
                 </a:solidFill>
-                <a:latin typeface="Times New Roman"/>
-                <a:ea typeface="宋体"/>
-                <a:cs typeface="宋体"/>
+                <a:latin typeface="Times New Roman" panose="02020603050405020304"/>
+                <a:ea typeface="宋体" panose="02010600030101010101" pitchFamily="2" charset="-122"/>
+                <a:cs typeface="宋体" panose="02010600030101010101" pitchFamily="2" charset="-122"/>
               </a:rPr>
               <a:t>· 没有一个是推倒重来，都是「补一步」就能补上——方法规范的门槛不高，关键是每一步都别省。</a:t>
             </a:r>
+            <a:endParaRPr sz="2000" b="0" i="0">
+              <a:solidFill>
+                <a:srgbClr val="000000"/>
+              </a:solidFill>
+              <a:latin typeface="Times New Roman" panose="02020603050405020304"/>
+              <a:ea typeface="宋体" panose="02010600030101010101" pitchFamily="2" charset="-122"/>
+              <a:cs typeface="宋体" panose="02010600030101010101" pitchFamily="2" charset="-122"/>
+            </a:endParaRPr>
           </a:p>
         </p:txBody>
       </p:sp>
@@ -16939,7 +18652,7 @@
           <a:noFill/>
         </p:spPr>
         <p:txBody>
-          <a:bodyPr wrap="square" lIns="0" rIns="0" tIns="0" bIns="0" anchor="t">
+          <a:bodyPr wrap="square" lIns="0" tIns="0" rIns="0" bIns="0" anchor="t">
             <a:spAutoFit/>
           </a:bodyPr>
           <a:lstStyle/>
@@ -16960,12 +18673,20 @@
                 <a:solidFill>
                   <a:srgbClr val="404040"/>
                 </a:solidFill>
-                <a:latin typeface="Times New Roman"/>
-                <a:ea typeface="宋体"/>
-                <a:cs typeface="宋体"/>
+                <a:latin typeface="Times New Roman" panose="02020603050405020304"/>
+                <a:ea typeface="宋体" panose="02010600030101010101" pitchFamily="2" charset="-122"/>
+                <a:cs typeface="宋体" panose="02010600030101010101" pitchFamily="2" charset="-122"/>
               </a:rPr>
               <a:t>33 / 34</a:t>
             </a:r>
+            <a:endParaRPr sz="1000" b="0" i="0">
+              <a:solidFill>
+                <a:srgbClr val="404040"/>
+              </a:solidFill>
+              <a:latin typeface="Times New Roman" panose="02020603050405020304"/>
+              <a:ea typeface="宋体" panose="02010600030101010101" pitchFamily="2" charset="-122"/>
+              <a:cs typeface="宋体" panose="02010600030101010101" pitchFamily="2" charset="-122"/>
+            </a:endParaRPr>
           </a:p>
         </p:txBody>
       </p:sp>
@@ -16978,7 +18699,7 @@
 </file>
 
 <file path=ppt/slides/slide34.xml><?xml version="1.0" encoding="utf-8"?>
-<p:sld xmlns:a="http://schemas.openxmlformats.org/drawingml/2006/main" xmlns:p="http://schemas.openxmlformats.org/presentationml/2006/main" xmlns:r="http://schemas.openxmlformats.org/officeDocument/2006/relationships">
+<p:sld xmlns:a="http://schemas.openxmlformats.org/drawingml/2006/main" xmlns:r="http://schemas.openxmlformats.org/officeDocument/2006/relationships" xmlns:p="http://schemas.openxmlformats.org/presentationml/2006/main">
   <p:cSld>
     <p:spTree>
       <p:nvGrpSpPr>
@@ -16995,6 +18716,328 @@
         </p:nvSpPr>
         <p:spPr>
           <a:xfrm>
+            <a:off x="640080" y="1143000"/>
+            <a:ext cx="10881360" cy="388620"/>
+          </a:xfrm>
+          <a:prstGeom prst="rect">
+            <a:avLst/>
+          </a:prstGeom>
+          <a:noFill/>
+        </p:spPr>
+        <p:txBody>
+          <a:bodyPr wrap="square" lIns="0" tIns="0" rIns="0" bIns="0" anchor="t">
+            <a:spAutoFit/>
+          </a:bodyPr>
+          <a:lstStyle/>
+          <a:p>
+            <a:pPr algn="l">
+              <a:lnSpc>
+                <a:spcPct val="110000"/>
+              </a:lnSpc>
+              <a:spcBef>
+                <a:spcPts val="0"/>
+              </a:spcBef>
+              <a:spcAft>
+                <a:spcPts val="0"/>
+              </a:spcAft>
+            </a:pPr>
+            <a:r>
+              <a:rPr lang="zh-CN" sz="2300" b="1" i="0">
+                <a:solidFill>
+                  <a:srgbClr val="000000"/>
+                </a:solidFill>
+                <a:latin typeface="Times New Roman" panose="02020603050405020304"/>
+                <a:ea typeface="黑体" panose="02010609060101010101" charset="-122"/>
+                <a:cs typeface="黑体" panose="02010609060101010101" charset="-122"/>
+              </a:rPr>
+              <a:t>参考</a:t>
+            </a:r>
+            <a:r>
+              <a:rPr lang="zh-CN" sz="2300" b="1" i="0">
+                <a:solidFill>
+                  <a:srgbClr val="000000"/>
+                </a:solidFill>
+                <a:latin typeface="Times New Roman" panose="02020603050405020304"/>
+                <a:ea typeface="黑体" panose="02010609060101010101" charset="-122"/>
+                <a:cs typeface="黑体" panose="02010609060101010101" charset="-122"/>
+              </a:rPr>
+              <a:t>文献</a:t>
+            </a:r>
+            <a:endParaRPr lang="zh-CN" sz="2300" b="1" i="0">
+              <a:solidFill>
+                <a:srgbClr val="000000"/>
+              </a:solidFill>
+              <a:latin typeface="Times New Roman" panose="02020603050405020304"/>
+              <a:ea typeface="黑体" panose="02010609060101010101" charset="-122"/>
+              <a:cs typeface="黑体" panose="02010609060101010101" charset="-122"/>
+            </a:endParaRPr>
+          </a:p>
+        </p:txBody>
+      </p:sp>
+      <p:sp>
+        <p:nvSpPr>
+          <p:cNvPr id="3" name="TextBox 2"/>
+          <p:cNvSpPr txBox="1"/>
+          <p:nvPr/>
+        </p:nvSpPr>
+        <p:spPr>
+          <a:xfrm>
+            <a:off x="640080" y="1874519"/>
+            <a:ext cx="10881360" cy="1728470"/>
+          </a:xfrm>
+          <a:prstGeom prst="rect">
+            <a:avLst/>
+          </a:prstGeom>
+          <a:noFill/>
+        </p:spPr>
+        <p:txBody>
+          <a:bodyPr wrap="square" lIns="0" tIns="0" rIns="0" bIns="0" anchor="t">
+            <a:spAutoFit/>
+          </a:bodyPr>
+          <a:lstStyle/>
+          <a:p>
+            <a:pPr algn="l">
+              <a:lnSpc>
+                <a:spcPct val="130000"/>
+              </a:lnSpc>
+              <a:spcBef>
+                <a:spcPts val="0"/>
+              </a:spcBef>
+              <a:spcAft>
+                <a:spcPts val="500"/>
+              </a:spcAft>
+            </a:pPr>
+            <a:r>
+              <a:rPr lang="zh-CN" sz="2000">
+                <a:solidFill>
+                  <a:srgbClr val="000000"/>
+                </a:solidFill>
+                <a:latin typeface="Times New Roman" panose="02020603050405020304"/>
+                <a:ea typeface="宋体" panose="02010600030101010101" pitchFamily="2" charset="-122"/>
+                <a:cs typeface="宋体" panose="02010600030101010101" pitchFamily="2" charset="-122"/>
+                <a:sym typeface="+mn-ea"/>
+              </a:rPr>
+              <a:t>（</a:t>
+            </a:r>
+            <a:r>
+              <a:rPr lang="en-US" altLang="zh-CN" sz="2000">
+                <a:solidFill>
+                  <a:srgbClr val="000000"/>
+                </a:solidFill>
+                <a:latin typeface="Times New Roman" panose="02020603050405020304"/>
+                <a:ea typeface="宋体" panose="02010600030101010101" pitchFamily="2" charset="-122"/>
+                <a:cs typeface="宋体" panose="02010600030101010101" pitchFamily="2" charset="-122"/>
+                <a:sym typeface="+mn-ea"/>
+              </a:rPr>
+              <a:t>1</a:t>
+            </a:r>
+            <a:r>
+              <a:rPr lang="zh-CN" altLang="en-US" sz="2000">
+                <a:solidFill>
+                  <a:srgbClr val="000000"/>
+                </a:solidFill>
+                <a:latin typeface="Times New Roman" panose="02020603050405020304"/>
+                <a:ea typeface="宋体" panose="02010600030101010101" pitchFamily="2" charset="-122"/>
+                <a:cs typeface="宋体" panose="02010600030101010101" pitchFamily="2" charset="-122"/>
+                <a:sym typeface="+mn-ea"/>
+              </a:rPr>
+              <a:t>）</a:t>
+            </a:r>
+            <a:r>
+              <a:rPr sz="2000">
+                <a:solidFill>
+                  <a:srgbClr val="000000"/>
+                </a:solidFill>
+                <a:latin typeface="Times New Roman" panose="02020603050405020304"/>
+                <a:ea typeface="宋体" panose="02010600030101010101" pitchFamily="2" charset="-122"/>
+                <a:cs typeface="宋体" panose="02010600030101010101" pitchFamily="2" charset="-122"/>
+                <a:sym typeface="+mn-ea"/>
+              </a:rPr>
+              <a:t>周金华、董燕萍（2019）. 口译笔记熟练度量表的开发. 外语教学与研究 51(6): 925-937.</a:t>
+            </a:r>
+            <a:endParaRPr sz="2000">
+              <a:solidFill>
+                <a:srgbClr val="000000"/>
+              </a:solidFill>
+              <a:latin typeface="Times New Roman" panose="02020603050405020304"/>
+              <a:ea typeface="宋体" panose="02010600030101010101" pitchFamily="2" charset="-122"/>
+              <a:cs typeface="宋体" panose="02010600030101010101" pitchFamily="2" charset="-122"/>
+              <a:sym typeface="+mn-ea"/>
+            </a:endParaRPr>
+          </a:p>
+          <a:p>
+            <a:pPr algn="l">
+              <a:lnSpc>
+                <a:spcPct val="130000"/>
+              </a:lnSpc>
+              <a:spcBef>
+                <a:spcPts val="0"/>
+              </a:spcBef>
+              <a:spcAft>
+                <a:spcPts val="500"/>
+              </a:spcAft>
+            </a:pPr>
+            <a:r>
+              <a:rPr lang="zh-CN" sz="2000">
+                <a:solidFill>
+                  <a:srgbClr val="000000"/>
+                </a:solidFill>
+                <a:latin typeface="Times New Roman" panose="02020603050405020304"/>
+                <a:ea typeface="宋体" panose="02010600030101010101" pitchFamily="2" charset="-122"/>
+                <a:cs typeface="宋体" panose="02010600030101010101" pitchFamily="2" charset="-122"/>
+                <a:sym typeface="+mn-ea"/>
+              </a:rPr>
+              <a:t>（</a:t>
+            </a:r>
+            <a:r>
+              <a:rPr lang="en-US" altLang="zh-CN" sz="2000">
+                <a:solidFill>
+                  <a:srgbClr val="000000"/>
+                </a:solidFill>
+                <a:latin typeface="Times New Roman" panose="02020603050405020304"/>
+                <a:ea typeface="宋体" panose="02010600030101010101" pitchFamily="2" charset="-122"/>
+                <a:cs typeface="宋体" panose="02010600030101010101" pitchFamily="2" charset="-122"/>
+                <a:sym typeface="+mn-ea"/>
+              </a:rPr>
+              <a:t>2</a:t>
+            </a:r>
+            <a:r>
+              <a:rPr lang="zh-CN" altLang="en-US" sz="2000">
+                <a:solidFill>
+                  <a:srgbClr val="000000"/>
+                </a:solidFill>
+                <a:latin typeface="Times New Roman" panose="02020603050405020304"/>
+                <a:ea typeface="宋体" panose="02010600030101010101" pitchFamily="2" charset="-122"/>
+                <a:cs typeface="宋体" panose="02010600030101010101" pitchFamily="2" charset="-122"/>
+                <a:sym typeface="+mn-ea"/>
+              </a:rPr>
+              <a:t>）</a:t>
+            </a:r>
+            <a:r>
+              <a:rPr sz="2000">
+                <a:solidFill>
+                  <a:srgbClr val="000000"/>
+                </a:solidFill>
+                <a:latin typeface="Times New Roman" panose="02020603050405020304"/>
+                <a:ea typeface="宋体" panose="02010600030101010101" pitchFamily="2" charset="-122"/>
+                <a:cs typeface="宋体" panose="02010600030101010101" pitchFamily="2" charset="-122"/>
+                <a:sym typeface="+mn-ea"/>
+              </a:rPr>
+              <a:t>Yang, Z. &amp; Mustafa, H. R. (2022). On postediting of machine translation and workflow. HBET, 5793054.</a:t>
+            </a:r>
+            <a:endParaRPr sz="2000" b="0" i="0">
+              <a:solidFill>
+                <a:srgbClr val="000000"/>
+              </a:solidFill>
+              <a:latin typeface="Times New Roman" panose="02020603050405020304"/>
+              <a:ea typeface="宋体" panose="02010600030101010101" pitchFamily="2" charset="-122"/>
+              <a:cs typeface="宋体" panose="02010600030101010101" pitchFamily="2" charset="-122"/>
+            </a:endParaRPr>
+          </a:p>
+          <a:p>
+            <a:pPr algn="l">
+              <a:lnSpc>
+                <a:spcPct val="130000"/>
+              </a:lnSpc>
+              <a:spcBef>
+                <a:spcPts val="0"/>
+              </a:spcBef>
+              <a:spcAft>
+                <a:spcPts val="500"/>
+              </a:spcAft>
+            </a:pPr>
+            <a:endParaRPr sz="2000" b="0" i="0">
+              <a:solidFill>
+                <a:srgbClr val="000000"/>
+              </a:solidFill>
+              <a:latin typeface="Times New Roman" panose="02020603050405020304"/>
+              <a:ea typeface="宋体" panose="02010600030101010101" pitchFamily="2" charset="-122"/>
+              <a:cs typeface="宋体" panose="02010600030101010101" pitchFamily="2" charset="-122"/>
+            </a:endParaRPr>
+          </a:p>
+        </p:txBody>
+      </p:sp>
+      <p:sp>
+        <p:nvSpPr>
+          <p:cNvPr id="4" name="TextBox 3"/>
+          <p:cNvSpPr txBox="1"/>
+          <p:nvPr/>
+        </p:nvSpPr>
+        <p:spPr>
+          <a:xfrm>
+            <a:off x="10332720" y="5742432"/>
+            <a:ext cx="1645920" cy="201168"/>
+          </a:xfrm>
+          <a:prstGeom prst="rect">
+            <a:avLst/>
+          </a:prstGeom>
+          <a:noFill/>
+        </p:spPr>
+        <p:txBody>
+          <a:bodyPr wrap="square" lIns="0" tIns="0" rIns="0" bIns="0" anchor="t">
+            <a:spAutoFit/>
+          </a:bodyPr>
+          <a:lstStyle/>
+          <a:p>
+            <a:pPr algn="r">
+              <a:lnSpc>
+                <a:spcPct val="130000"/>
+              </a:lnSpc>
+              <a:spcBef>
+                <a:spcPts val="0"/>
+              </a:spcBef>
+              <a:spcAft>
+                <a:spcPts val="0"/>
+              </a:spcAft>
+            </a:pPr>
+            <a:r>
+              <a:rPr sz="1000" b="0" i="0">
+                <a:solidFill>
+                  <a:srgbClr val="404040"/>
+                </a:solidFill>
+                <a:latin typeface="Times New Roman" panose="02020603050405020304"/>
+                <a:ea typeface="宋体" panose="02010600030101010101" pitchFamily="2" charset="-122"/>
+                <a:cs typeface="宋体" panose="02010600030101010101" pitchFamily="2" charset="-122"/>
+              </a:rPr>
+              <a:t>33 / 34</a:t>
+            </a:r>
+            <a:endParaRPr sz="1000" b="0" i="0">
+              <a:solidFill>
+                <a:srgbClr val="404040"/>
+              </a:solidFill>
+              <a:latin typeface="Times New Roman" panose="02020603050405020304"/>
+              <a:ea typeface="宋体" panose="02010600030101010101" pitchFamily="2" charset="-122"/>
+              <a:cs typeface="宋体" panose="02010600030101010101" pitchFamily="2" charset="-122"/>
+            </a:endParaRPr>
+          </a:p>
+        </p:txBody>
+      </p:sp>
+    </p:spTree>
+  </p:cSld>
+  <p:clrMapOvr>
+    <a:masterClrMapping/>
+  </p:clrMapOvr>
+</p:sld>
+</file>
+
+<file path=ppt/slides/slide35.xml><?xml version="1.0" encoding="utf-8"?>
+<p:sld xmlns:a="http://schemas.openxmlformats.org/drawingml/2006/main" xmlns:r="http://schemas.openxmlformats.org/officeDocument/2006/relationships" xmlns:p="http://schemas.openxmlformats.org/presentationml/2006/main">
+  <p:cSld>
+    <p:spTree>
+      <p:nvGrpSpPr>
+        <p:cNvPr id="1" name=""/>
+        <p:cNvGrpSpPr/>
+        <p:nvPr/>
+      </p:nvGrpSpPr>
+      <p:grpSpPr/>
+      <p:sp>
+        <p:nvSpPr>
+          <p:cNvPr id="2" name="TextBox 1"/>
+          <p:cNvSpPr txBox="1"/>
+          <p:nvPr/>
+        </p:nvSpPr>
+        <p:spPr>
+          <a:xfrm>
             <a:off x="914400" y="2194560"/>
             <a:ext cx="10332720" cy="914400"/>
           </a:xfrm>
@@ -17004,7 +19047,7 @@
           <a:noFill/>
         </p:spPr>
         <p:txBody>
-          <a:bodyPr wrap="square" lIns="0" rIns="0" tIns="0" bIns="0" anchor="t">
+          <a:bodyPr wrap="square" lIns="0" tIns="0" rIns="0" bIns="0" anchor="t">
             <a:spAutoFit/>
           </a:bodyPr>
           <a:lstStyle/>
@@ -17025,12 +19068,20 @@
                 <a:solidFill>
                   <a:srgbClr val="000000"/>
                 </a:solidFill>
-                <a:latin typeface="Times New Roman"/>
-                <a:ea typeface="黑体"/>
-                <a:cs typeface="黑体"/>
+                <a:latin typeface="Times New Roman" panose="02020603050405020304"/>
+                <a:ea typeface="黑体" panose="02010609060101010101" charset="-122"/>
+                <a:cs typeface="黑体" panose="02010609060101010101" charset="-122"/>
               </a:rPr>
               <a:t>谢谢观看</a:t>
             </a:r>
+            <a:endParaRPr sz="4000" b="1" i="0">
+              <a:solidFill>
+                <a:srgbClr val="000000"/>
+              </a:solidFill>
+              <a:latin typeface="Times New Roman" panose="02020603050405020304"/>
+              <a:ea typeface="黑体" panose="02010609060101010101" charset="-122"/>
+              <a:cs typeface="黑体" panose="02010609060101010101" charset="-122"/>
+            </a:endParaRPr>
           </a:p>
         </p:txBody>
       </p:sp>
@@ -17051,7 +19102,7 @@
           <a:noFill/>
         </p:spPr>
         <p:txBody>
-          <a:bodyPr wrap="square" lIns="0" rIns="0" tIns="0" bIns="0" anchor="t">
+          <a:bodyPr wrap="square" lIns="0" tIns="0" rIns="0" bIns="0" anchor="t">
             <a:spAutoFit/>
           </a:bodyPr>
           <a:lstStyle/>
@@ -17072,107 +19123,20 @@
                 <a:solidFill>
                   <a:srgbClr val="404040"/>
                 </a:solidFill>
-                <a:latin typeface="Times New Roman"/>
-                <a:ea typeface="宋体"/>
-                <a:cs typeface="宋体"/>
+                <a:latin typeface="Times New Roman" panose="02020603050405020304"/>
+                <a:ea typeface="宋体" panose="02010600030101010101" pitchFamily="2" charset="-122"/>
+                <a:cs typeface="宋体" panose="02010600030101010101" pitchFamily="2" charset="-122"/>
               </a:rPr>
               <a:t>Thank You</a:t>
             </a:r>
-          </a:p>
-        </p:txBody>
-      </p:sp>
-      <p:sp>
-        <p:nvSpPr>
-          <p:cNvPr id="4" name="TextBox 3"/>
-          <p:cNvSpPr txBox="1"/>
-          <p:nvPr/>
-        </p:nvSpPr>
-        <p:spPr>
-          <a:xfrm>
-            <a:off x="914400" y="3749039"/>
-            <a:ext cx="10332720" cy="1828800"/>
-          </a:xfrm>
-          <a:prstGeom prst="rect">
-            <a:avLst/>
-          </a:prstGeom>
-          <a:noFill/>
-        </p:spPr>
-        <p:txBody>
-          <a:bodyPr wrap="square" lIns="0" rIns="0" tIns="0" bIns="0" anchor="t">
-            <a:spAutoFit/>
-          </a:bodyPr>
-          <a:lstStyle/>
-          <a:p>
-            <a:pPr algn="ctr">
-              <a:lnSpc>
-                <a:spcPct val="150000"/>
-              </a:lnSpc>
-              <a:spcBef>
-                <a:spcPts val="0"/>
-              </a:spcBef>
-              <a:spcAft>
-                <a:spcPts val="0"/>
-              </a:spcAft>
-            </a:pPr>
-            <a:r>
-              <a:rPr sz="1200" b="0" i="0">
-                <a:solidFill>
-                  <a:srgbClr val="000000"/>
-                </a:solidFill>
-                <a:latin typeface="Times New Roman"/>
-                <a:ea typeface="宋体"/>
-                <a:cs typeface="宋体"/>
-              </a:rPr>
-              <a:t>周金华、董燕萍（2019）. 口译笔记熟练度量表的开发. 外语教学与研究 51(6): 925-937.</a:t>
-            </a:r>
-          </a:p>
-          <a:p>
-            <a:pPr algn="ctr">
-              <a:lnSpc>
-                <a:spcPct val="150000"/>
-              </a:lnSpc>
-              <a:spcBef>
-                <a:spcPts val="0"/>
-              </a:spcBef>
-              <a:spcAft>
-                <a:spcPts val="0"/>
-              </a:spcAft>
-            </a:pPr>
-            <a:r>
-              <a:rPr sz="1200" b="0" i="0">
-                <a:solidFill>
-                  <a:srgbClr val="000000"/>
-                </a:solidFill>
-                <a:latin typeface="Times New Roman"/>
-                <a:ea typeface="宋体"/>
-                <a:cs typeface="宋体"/>
-              </a:rPr>
-              <a:t>Yang, Z. &amp; Mustafa, H. R. (2022). On postediting of machine translation and workflow. HBET, 5793054.</a:t>
-            </a:r>
-          </a:p>
-          <a:p>
-            <a:pPr algn="ctr">
-              <a:lnSpc>
-                <a:spcPct val="150000"/>
-              </a:lnSpc>
-              <a:spcBef>
-                <a:spcPts val="0"/>
-              </a:spcBef>
-              <a:spcAft>
-                <a:spcPts val="0"/>
-              </a:spcAft>
-            </a:pPr>
-            <a:r>
-              <a:rPr sz="1200" b="0" i="0">
-                <a:solidFill>
-                  <a:srgbClr val="000000"/>
-                </a:solidFill>
-                <a:latin typeface="Times New Roman"/>
-                <a:ea typeface="宋体"/>
-                <a:cs typeface="宋体"/>
-              </a:rPr>
-              <a:t>汇报人：陈冠臻    学号：20261210050</a:t>
-            </a:r>
+            <a:endParaRPr sz="1800" b="0" i="0">
+              <a:solidFill>
+                <a:srgbClr val="404040"/>
+              </a:solidFill>
+              <a:latin typeface="Times New Roman" panose="02020603050405020304"/>
+              <a:ea typeface="宋体" panose="02010600030101010101" pitchFamily="2" charset="-122"/>
+              <a:cs typeface="宋体" panose="02010600030101010101" pitchFamily="2" charset="-122"/>
+            </a:endParaRPr>
           </a:p>
         </p:txBody>
       </p:sp>
@@ -17185,7 +19149,7 @@
 </file>
 
 <file path=ppt/slides/slide4.xml><?xml version="1.0" encoding="utf-8"?>
-<p:sld xmlns:a="http://schemas.openxmlformats.org/drawingml/2006/main" xmlns:p="http://schemas.openxmlformats.org/presentationml/2006/main" xmlns:r="http://schemas.openxmlformats.org/officeDocument/2006/relationships">
+<p:sld xmlns:a="http://schemas.openxmlformats.org/drawingml/2006/main" xmlns:r="http://schemas.openxmlformats.org/officeDocument/2006/relationships" xmlns:p="http://schemas.openxmlformats.org/presentationml/2006/main">
   <p:cSld>
     <p:spTree>
       <p:nvGrpSpPr>
@@ -17211,7 +19175,7 @@
           <a:noFill/>
         </p:spPr>
         <p:txBody>
-          <a:bodyPr wrap="square" lIns="0" rIns="0" tIns="0" bIns="0" anchor="t">
+          <a:bodyPr wrap="square" lIns="0" tIns="0" rIns="0" bIns="0" anchor="t">
             <a:spAutoFit/>
           </a:bodyPr>
           <a:lstStyle/>
@@ -17232,12 +19196,20 @@
                 <a:solidFill>
                   <a:srgbClr val="000000"/>
                 </a:solidFill>
-                <a:latin typeface="Times New Roman"/>
-                <a:ea typeface="黑体"/>
-                <a:cs typeface="黑体"/>
+                <a:latin typeface="Times New Roman" panose="02020603050405020304"/>
+                <a:ea typeface="黑体" panose="02010609060101010101" charset="-122"/>
+                <a:cs typeface="黑体" panose="02010609060101010101" charset="-122"/>
               </a:rPr>
               <a:t>问卷调查法是干什么的</a:t>
             </a:r>
+            <a:endParaRPr sz="2300" b="1" i="0">
+              <a:solidFill>
+                <a:srgbClr val="000000"/>
+              </a:solidFill>
+              <a:latin typeface="Times New Roman" panose="02020603050405020304"/>
+              <a:ea typeface="黑体" panose="02010609060101010101" charset="-122"/>
+              <a:cs typeface="黑体" panose="02010609060101010101" charset="-122"/>
+            </a:endParaRPr>
           </a:p>
         </p:txBody>
       </p:sp>
@@ -17250,7 +19222,7 @@
         <p:spPr>
           <a:xfrm>
             <a:off x="640080" y="1874519"/>
-            <a:ext cx="10881360" cy="3931920"/>
+            <a:ext cx="10881360" cy="2192655"/>
           </a:xfrm>
           <a:prstGeom prst="rect">
             <a:avLst/>
@@ -17258,7 +19230,7 @@
           <a:noFill/>
         </p:spPr>
         <p:txBody>
-          <a:bodyPr wrap="square" lIns="0" rIns="0" tIns="0" bIns="0" anchor="t">
+          <a:bodyPr wrap="square" lIns="0" tIns="0" rIns="0" bIns="0" anchor="t">
             <a:spAutoFit/>
           </a:bodyPr>
           <a:lstStyle/>
@@ -17279,12 +19251,42 @@
                 <a:solidFill>
                   <a:srgbClr val="000000"/>
                 </a:solidFill>
-                <a:latin typeface="Times New Roman"/>
-                <a:ea typeface="宋体"/>
-                <a:cs typeface="宋体"/>
-              </a:rPr>
-              <a:t>· 问卷调查法，就是拿一份标准化的问卷，去系统地收集很多人的答案，属于定量研究。</a:t>
-            </a:r>
+                <a:latin typeface="Times New Roman" panose="02020603050405020304"/>
+                <a:ea typeface="宋体" panose="02010600030101010101" pitchFamily="2" charset="-122"/>
+                <a:cs typeface="宋体" panose="02010600030101010101" pitchFamily="2" charset="-122"/>
+              </a:rPr>
+              <a:t>· 问卷调查法，就是拿一份标准化的问卷，去系统地收集很多人的答案，属于</a:t>
+            </a:r>
+            <a:r>
+              <a:rPr sz="2000" b="1" i="0">
+                <a:solidFill>
+                  <a:srgbClr val="FF0000"/>
+                </a:solidFill>
+                <a:latin typeface="Times New Roman" panose="02020603050405020304"/>
+                <a:ea typeface="宋体" panose="02010600030101010101" pitchFamily="2" charset="-122"/>
+                <a:cs typeface="宋体" panose="02010600030101010101" pitchFamily="2" charset="-122"/>
+              </a:rPr>
+              <a:t>定量研究</a:t>
+            </a:r>
+            <a:r>
+              <a:rPr sz="2000" b="0" i="0">
+                <a:solidFill>
+                  <a:srgbClr val="000000"/>
+                </a:solidFill>
+                <a:latin typeface="Times New Roman" panose="02020603050405020304"/>
+                <a:ea typeface="宋体" panose="02010600030101010101" pitchFamily="2" charset="-122"/>
+                <a:cs typeface="宋体" panose="02010600030101010101" pitchFamily="2" charset="-122"/>
+              </a:rPr>
+              <a:t>。</a:t>
+            </a:r>
+            <a:endParaRPr sz="2000" b="0" i="0">
+              <a:solidFill>
+                <a:srgbClr val="000000"/>
+              </a:solidFill>
+              <a:latin typeface="Times New Roman" panose="02020603050405020304"/>
+              <a:ea typeface="宋体" panose="02010600030101010101" pitchFamily="2" charset="-122"/>
+              <a:cs typeface="宋体" panose="02010600030101010101" pitchFamily="2" charset="-122"/>
+            </a:endParaRPr>
           </a:p>
           <a:p>
             <a:pPr algn="l">
@@ -17303,12 +19305,20 @@
                 <a:solidFill>
                   <a:srgbClr val="000000"/>
                 </a:solidFill>
-                <a:latin typeface="Times New Roman"/>
-                <a:ea typeface="宋体"/>
-                <a:cs typeface="宋体"/>
+                <a:latin typeface="Times New Roman" panose="02020603050405020304"/>
+                <a:ea typeface="宋体" panose="02010600030101010101" pitchFamily="2" charset="-122"/>
+                <a:cs typeface="宋体" panose="02010600030101010101" pitchFamily="2" charset="-122"/>
               </a:rPr>
               <a:t>· 在翻译研究里，它常用来问：读者觉得译文好不好、译者平时怎么做、教学有没有效果、行业现状怎么样。</a:t>
             </a:r>
+            <a:endParaRPr sz="2000" b="0" i="0">
+              <a:solidFill>
+                <a:srgbClr val="000000"/>
+              </a:solidFill>
+              <a:latin typeface="Times New Roman" panose="02020603050405020304"/>
+              <a:ea typeface="宋体" panose="02010600030101010101" pitchFamily="2" charset="-122"/>
+              <a:cs typeface="宋体" panose="02010600030101010101" pitchFamily="2" charset="-122"/>
+            </a:endParaRPr>
           </a:p>
           <a:p>
             <a:pPr algn="l">
@@ -17327,12 +19337,20 @@
                 <a:solidFill>
                   <a:srgbClr val="000000"/>
                 </a:solidFill>
-                <a:latin typeface="Times New Roman"/>
-                <a:ea typeface="宋体"/>
-                <a:cs typeface="宋体"/>
-              </a:rPr>
-              <a:t>· 它的好处是能大规模收数据、好比较；风险是——问卷设计得随意，结论就不可靠。</a:t>
-            </a:r>
+                <a:latin typeface="Times New Roman" panose="02020603050405020304"/>
+                <a:ea typeface="宋体" panose="02010600030101010101" pitchFamily="2" charset="-122"/>
+                <a:cs typeface="宋体" panose="02010600030101010101" pitchFamily="2" charset="-122"/>
+              </a:rPr>
+              <a:t>· 它的好处是能大规模收数据、好比较；风险是问卷设计得随意，结论就不可靠。</a:t>
+            </a:r>
+            <a:endParaRPr sz="2000" b="0" i="0">
+              <a:solidFill>
+                <a:srgbClr val="000000"/>
+              </a:solidFill>
+              <a:latin typeface="Times New Roman" panose="02020603050405020304"/>
+              <a:ea typeface="宋体" panose="02010600030101010101" pitchFamily="2" charset="-122"/>
+              <a:cs typeface="宋体" panose="02010600030101010101" pitchFamily="2" charset="-122"/>
+            </a:endParaRPr>
           </a:p>
           <a:p>
             <a:pPr algn="l">
@@ -17351,12 +19369,20 @@
                 <a:solidFill>
                   <a:srgbClr val="000000"/>
                 </a:solidFill>
-                <a:latin typeface="Times New Roman"/>
-                <a:ea typeface="宋体"/>
-                <a:cs typeface="宋体"/>
+                <a:latin typeface="Times New Roman" panose="02020603050405020304"/>
+                <a:ea typeface="宋体" panose="02010600030101010101" pitchFamily="2" charset="-122"/>
+                <a:cs typeface="宋体" panose="02010600030101010101" pitchFamily="2" charset="-122"/>
               </a:rPr>
               <a:t>· 所以我们今天真正要解决的，是一个问题：一份好问卷，到底好在哪里，又容易在哪里翻车。</a:t>
             </a:r>
+            <a:endParaRPr sz="2000" b="0" i="0">
+              <a:solidFill>
+                <a:srgbClr val="000000"/>
+              </a:solidFill>
+              <a:latin typeface="Times New Roman" panose="02020603050405020304"/>
+              <a:ea typeface="宋体" panose="02010600030101010101" pitchFamily="2" charset="-122"/>
+              <a:cs typeface="宋体" panose="02010600030101010101" pitchFamily="2" charset="-122"/>
+            </a:endParaRPr>
           </a:p>
         </p:txBody>
       </p:sp>
@@ -17377,7 +19403,7 @@
           <a:noFill/>
         </p:spPr>
         <p:txBody>
-          <a:bodyPr wrap="square" lIns="0" rIns="0" tIns="0" bIns="0" anchor="t">
+          <a:bodyPr wrap="square" lIns="0" tIns="0" rIns="0" bIns="0" anchor="t">
             <a:spAutoFit/>
           </a:bodyPr>
           <a:lstStyle/>
@@ -17398,12 +19424,20 @@
                 <a:solidFill>
                   <a:srgbClr val="404040"/>
                 </a:solidFill>
-                <a:latin typeface="Times New Roman"/>
-                <a:ea typeface="宋体"/>
-                <a:cs typeface="宋体"/>
+                <a:latin typeface="Times New Roman" panose="02020603050405020304"/>
+                <a:ea typeface="宋体" panose="02010600030101010101" pitchFamily="2" charset="-122"/>
+                <a:cs typeface="宋体" panose="02010600030101010101" pitchFamily="2" charset="-122"/>
               </a:rPr>
               <a:t>4 / 34</a:t>
             </a:r>
+            <a:endParaRPr sz="1000" b="0" i="0">
+              <a:solidFill>
+                <a:srgbClr val="404040"/>
+              </a:solidFill>
+              <a:latin typeface="Times New Roman" panose="02020603050405020304"/>
+              <a:ea typeface="宋体" panose="02010600030101010101" pitchFamily="2" charset="-122"/>
+              <a:cs typeface="宋体" panose="02010600030101010101" pitchFamily="2" charset="-122"/>
+            </a:endParaRPr>
           </a:p>
         </p:txBody>
       </p:sp>
@@ -17416,7 +19450,7 @@
 </file>
 
 <file path=ppt/slides/slide5.xml><?xml version="1.0" encoding="utf-8"?>
-<p:sld xmlns:a="http://schemas.openxmlformats.org/drawingml/2006/main" xmlns:p="http://schemas.openxmlformats.org/presentationml/2006/main" xmlns:r="http://schemas.openxmlformats.org/officeDocument/2006/relationships">
+<p:sld xmlns:a="http://schemas.openxmlformats.org/drawingml/2006/main" xmlns:r="http://schemas.openxmlformats.org/officeDocument/2006/relationships" xmlns:p="http://schemas.openxmlformats.org/presentationml/2006/main">
   <p:cSld>
     <p:spTree>
       <p:nvGrpSpPr>
@@ -17442,7 +19476,7 @@
           <a:noFill/>
         </p:spPr>
         <p:txBody>
-          <a:bodyPr wrap="square" lIns="0" rIns="0" tIns="0" bIns="0" anchor="t">
+          <a:bodyPr wrap="square" lIns="0" tIns="0" rIns="0" bIns="0" anchor="t">
             <a:spAutoFit/>
           </a:bodyPr>
           <a:lstStyle/>
@@ -17463,12 +19497,20 @@
                 <a:solidFill>
                   <a:srgbClr val="000000"/>
                 </a:solidFill>
-                <a:latin typeface="Times New Roman"/>
-                <a:ea typeface="黑体"/>
-                <a:cs typeface="黑体"/>
+                <a:latin typeface="Times New Roman" panose="02020603050405020304"/>
+                <a:ea typeface="黑体" panose="02010609060101010101" charset="-122"/>
+                <a:cs typeface="黑体" panose="02010609060101010101" charset="-122"/>
               </a:rPr>
               <a:t>先弄懂三个词，后面全靠它们</a:t>
             </a:r>
+            <a:endParaRPr sz="2300" b="1" i="0">
+              <a:solidFill>
+                <a:srgbClr val="000000"/>
+              </a:solidFill>
+              <a:latin typeface="Times New Roman" panose="02020603050405020304"/>
+              <a:ea typeface="黑体" panose="02010609060101010101" charset="-122"/>
+              <a:cs typeface="黑体" panose="02010609060101010101" charset="-122"/>
+            </a:endParaRPr>
           </a:p>
         </p:txBody>
       </p:sp>
@@ -17489,7 +19531,7 @@
           <a:noFill/>
         </p:spPr>
         <p:txBody>
-          <a:bodyPr wrap="square" lIns="0" rIns="0" tIns="0" bIns="0" anchor="t">
+          <a:bodyPr wrap="square" lIns="0" tIns="0" rIns="0" bIns="0" anchor="t">
             <a:spAutoFit/>
           </a:bodyPr>
           <a:lstStyle/>
@@ -17510,12 +19552,20 @@
                 <a:solidFill>
                   <a:srgbClr val="000000"/>
                 </a:solidFill>
-                <a:latin typeface="Times New Roman"/>
-                <a:ea typeface="宋体"/>
-                <a:cs typeface="宋体"/>
+                <a:latin typeface="Times New Roman" panose="02020603050405020304"/>
+                <a:ea typeface="宋体" panose="02010600030101010101" pitchFamily="2" charset="-122"/>
+                <a:cs typeface="宋体" panose="02010600030101010101" pitchFamily="2" charset="-122"/>
               </a:rPr>
               <a:t>· 构念（construct）：一个看不见、摸不着的抽象概念，比如「熟练度」「态度」「满意度」。它没法直接用尺子量，只能靠一份问卷去「测」。</a:t>
             </a:r>
+            <a:endParaRPr sz="2000" b="0" i="0">
+              <a:solidFill>
+                <a:srgbClr val="000000"/>
+              </a:solidFill>
+              <a:latin typeface="Times New Roman" panose="02020603050405020304"/>
+              <a:ea typeface="宋体" panose="02010600030101010101" pitchFamily="2" charset="-122"/>
+              <a:cs typeface="宋体" panose="02010600030101010101" pitchFamily="2" charset="-122"/>
+            </a:endParaRPr>
           </a:p>
           <a:p>
             <a:pPr algn="l">
@@ -17534,12 +19584,20 @@
                 <a:solidFill>
                   <a:srgbClr val="000000"/>
                 </a:solidFill>
-                <a:latin typeface="Times New Roman"/>
-                <a:ea typeface="宋体"/>
-                <a:cs typeface="宋体"/>
+                <a:latin typeface="Times New Roman" panose="02020603050405020304"/>
+                <a:ea typeface="宋体" panose="02010600030101010101" pitchFamily="2" charset="-122"/>
+                <a:cs typeface="宋体" panose="02010600030101010101" pitchFamily="2" charset="-122"/>
               </a:rPr>
               <a:t>· 信度（reliability）：测得稳不稳。同一把尺子量两次，结果都一样，就说明它稳。</a:t>
             </a:r>
+            <a:endParaRPr sz="2000" b="0" i="0">
+              <a:solidFill>
+                <a:srgbClr val="000000"/>
+              </a:solidFill>
+              <a:latin typeface="Times New Roman" panose="02020603050405020304"/>
+              <a:ea typeface="宋体" panose="02010600030101010101" pitchFamily="2" charset="-122"/>
+              <a:cs typeface="宋体" panose="02010600030101010101" pitchFamily="2" charset="-122"/>
+            </a:endParaRPr>
           </a:p>
           <a:p>
             <a:pPr algn="l">
@@ -17558,12 +19616,20 @@
                 <a:solidFill>
                   <a:srgbClr val="000000"/>
                 </a:solidFill>
-                <a:latin typeface="Times New Roman"/>
-                <a:ea typeface="宋体"/>
-                <a:cs typeface="宋体"/>
+                <a:latin typeface="Times New Roman" panose="02020603050405020304"/>
+                <a:ea typeface="宋体" panose="02010600030101010101" pitchFamily="2" charset="-122"/>
+                <a:cs typeface="宋体" panose="02010600030101010101" pitchFamily="2" charset="-122"/>
               </a:rPr>
               <a:t>· 效度（validity）：测得准不准。这把尺子量的，是不是你真正想量的那个东西。</a:t>
             </a:r>
+            <a:endParaRPr sz="2000" b="0" i="0">
+              <a:solidFill>
+                <a:srgbClr val="000000"/>
+              </a:solidFill>
+              <a:latin typeface="Times New Roman" panose="02020603050405020304"/>
+              <a:ea typeface="宋体" panose="02010600030101010101" pitchFamily="2" charset="-122"/>
+              <a:cs typeface="宋体" panose="02010600030101010101" pitchFamily="2" charset="-122"/>
+            </a:endParaRPr>
           </a:p>
           <a:p>
             <a:pPr algn="l">
@@ -17582,12 +19648,20 @@
                 <a:solidFill>
                   <a:srgbClr val="000000"/>
                 </a:solidFill>
-                <a:latin typeface="Times New Roman"/>
-                <a:ea typeface="宋体"/>
-                <a:cs typeface="宋体"/>
+                <a:latin typeface="Times New Roman" panose="02020603050405020304"/>
+                <a:ea typeface="宋体" panose="02010600030101010101" pitchFamily="2" charset="-122"/>
+                <a:cs typeface="宋体" panose="02010600030101010101" pitchFamily="2" charset="-122"/>
               </a:rPr>
               <a:t>· 打个比方：一台体重秤每次读数都一样，是「信度高」；但它要是不小心把身高也算进去，就量不准体重，是「效度低」。信度和效度，是两个不同的东西。</a:t>
             </a:r>
+            <a:endParaRPr sz="2000" b="0" i="0">
+              <a:solidFill>
+                <a:srgbClr val="000000"/>
+              </a:solidFill>
+              <a:latin typeface="Times New Roman" panose="02020603050405020304"/>
+              <a:ea typeface="宋体" panose="02010600030101010101" pitchFamily="2" charset="-122"/>
+              <a:cs typeface="宋体" panose="02010600030101010101" pitchFamily="2" charset="-122"/>
+            </a:endParaRPr>
           </a:p>
         </p:txBody>
       </p:sp>
@@ -17608,7 +19682,7 @@
           <a:noFill/>
         </p:spPr>
         <p:txBody>
-          <a:bodyPr wrap="square" lIns="0" rIns="0" tIns="0" bIns="0" anchor="t">
+          <a:bodyPr wrap="square" lIns="0" tIns="0" rIns="0" bIns="0" anchor="t">
             <a:spAutoFit/>
           </a:bodyPr>
           <a:lstStyle/>
@@ -17629,12 +19703,20 @@
                 <a:solidFill>
                   <a:srgbClr val="404040"/>
                 </a:solidFill>
-                <a:latin typeface="Times New Roman"/>
-                <a:ea typeface="宋体"/>
-                <a:cs typeface="宋体"/>
+                <a:latin typeface="Times New Roman" panose="02020603050405020304"/>
+                <a:ea typeface="宋体" panose="02010600030101010101" pitchFamily="2" charset="-122"/>
+                <a:cs typeface="宋体" panose="02010600030101010101" pitchFamily="2" charset="-122"/>
               </a:rPr>
               <a:t>5 / 34</a:t>
             </a:r>
+            <a:endParaRPr sz="1000" b="0" i="0">
+              <a:solidFill>
+                <a:srgbClr val="404040"/>
+              </a:solidFill>
+              <a:latin typeface="Times New Roman" panose="02020603050405020304"/>
+              <a:ea typeface="宋体" panose="02010600030101010101" pitchFamily="2" charset="-122"/>
+              <a:cs typeface="宋体" panose="02010600030101010101" pitchFamily="2" charset="-122"/>
+            </a:endParaRPr>
           </a:p>
         </p:txBody>
       </p:sp>
@@ -17647,7 +19729,7 @@
 </file>
 
 <file path=ppt/slides/slide6.xml><?xml version="1.0" encoding="utf-8"?>
-<p:sld xmlns:a="http://schemas.openxmlformats.org/drawingml/2006/main" xmlns:p="http://schemas.openxmlformats.org/presentationml/2006/main" xmlns:r="http://schemas.openxmlformats.org/officeDocument/2006/relationships">
+<p:sld xmlns:a="http://schemas.openxmlformats.org/drawingml/2006/main" xmlns:r="http://schemas.openxmlformats.org/officeDocument/2006/relationships" xmlns:p="http://schemas.openxmlformats.org/presentationml/2006/main">
   <p:cSld>
     <p:spTree>
       <p:nvGrpSpPr>
@@ -17673,7 +19755,7 @@
           <a:noFill/>
         </p:spPr>
         <p:txBody>
-          <a:bodyPr wrap="square" lIns="0" rIns="0" tIns="0" bIns="0" anchor="t">
+          <a:bodyPr wrap="square" lIns="0" tIns="0" rIns="0" bIns="0" anchor="t">
             <a:spAutoFit/>
           </a:bodyPr>
           <a:lstStyle/>
@@ -17694,12 +19776,20 @@
                 <a:solidFill>
                   <a:srgbClr val="000000"/>
                 </a:solidFill>
-                <a:latin typeface="Times New Roman"/>
-                <a:ea typeface="黑体"/>
-                <a:cs typeface="黑体"/>
+                <a:latin typeface="Times New Roman" panose="02020603050405020304"/>
+                <a:ea typeface="黑体" panose="02010609060101010101" charset="-122"/>
+                <a:cs typeface="黑体" panose="02010609060101010101" charset="-122"/>
               </a:rPr>
               <a:t>判断标准：一条证据链</a:t>
             </a:r>
+            <a:endParaRPr sz="2300" b="1" i="0">
+              <a:solidFill>
+                <a:srgbClr val="000000"/>
+              </a:solidFill>
+              <a:latin typeface="Times New Roman" panose="02020603050405020304"/>
+              <a:ea typeface="黑体" panose="02010609060101010101" charset="-122"/>
+              <a:cs typeface="黑体" panose="02010609060101010101" charset="-122"/>
+            </a:endParaRPr>
           </a:p>
         </p:txBody>
       </p:sp>
@@ -17712,7 +19802,7 @@
         <p:spPr>
           <a:xfrm>
             <a:off x="640080" y="1874519"/>
-            <a:ext cx="10881360" cy="3931920"/>
+            <a:ext cx="10881360" cy="2720975"/>
           </a:xfrm>
           <a:prstGeom prst="rect">
             <a:avLst/>
@@ -17720,7 +19810,7 @@
           <a:noFill/>
         </p:spPr>
         <p:txBody>
-          <a:bodyPr wrap="square" lIns="0" rIns="0" tIns="0" bIns="0" anchor="t">
+          <a:bodyPr wrap="square" lIns="0" tIns="0" rIns="0" bIns="0" anchor="t">
             <a:spAutoFit/>
           </a:bodyPr>
           <a:lstStyle/>
@@ -17741,12 +19831,20 @@
                 <a:solidFill>
                   <a:srgbClr val="000000"/>
                 </a:solidFill>
-                <a:latin typeface="Times New Roman"/>
-                <a:ea typeface="宋体"/>
-                <a:cs typeface="宋体"/>
+                <a:latin typeface="Times New Roman" panose="02020603050405020304"/>
+                <a:ea typeface="宋体" panose="02010600030101010101" pitchFamily="2" charset="-122"/>
+                <a:cs typeface="宋体" panose="02010600030101010101" pitchFamily="2" charset="-122"/>
               </a:rPr>
               <a:t>· 判断一份问卷研究靠不靠谱，就看它有没有把下面四步都走通：</a:t>
             </a:r>
+            <a:endParaRPr sz="2000" b="0" i="0">
+              <a:solidFill>
+                <a:srgbClr val="000000"/>
+              </a:solidFill>
+              <a:latin typeface="Times New Roman" panose="02020603050405020304"/>
+              <a:ea typeface="宋体" panose="02010600030101010101" pitchFamily="2" charset="-122"/>
+              <a:cs typeface="宋体" panose="02010600030101010101" pitchFamily="2" charset="-122"/>
+            </a:endParaRPr>
           </a:p>
           <a:p>
             <a:pPr algn="l">
@@ -17765,12 +19863,20 @@
                 <a:solidFill>
                   <a:srgbClr val="000000"/>
                 </a:solidFill>
-                <a:latin typeface="Times New Roman"/>
-                <a:ea typeface="宋体"/>
-                <a:cs typeface="宋体"/>
+                <a:latin typeface="Times New Roman" panose="02020603050405020304"/>
+                <a:ea typeface="宋体" panose="02010600030101010101" pitchFamily="2" charset="-122"/>
+                <a:cs typeface="宋体" panose="02010600030101010101" pitchFamily="2" charset="-122"/>
               </a:rPr>
               <a:t>· 第一步 研究问题：你到底想问什么，先写成一句能检验的话。</a:t>
             </a:r>
+            <a:endParaRPr sz="2000" b="0" i="0">
+              <a:solidFill>
+                <a:srgbClr val="000000"/>
+              </a:solidFill>
+              <a:latin typeface="Times New Roman" panose="02020603050405020304"/>
+              <a:ea typeface="宋体" panose="02010600030101010101" pitchFamily="2" charset="-122"/>
+              <a:cs typeface="宋体" panose="02010600030101010101" pitchFamily="2" charset="-122"/>
+            </a:endParaRPr>
           </a:p>
           <a:p>
             <a:pPr algn="l">
@@ -17789,12 +19895,20 @@
                 <a:solidFill>
                   <a:srgbClr val="000000"/>
                 </a:solidFill>
-                <a:latin typeface="Times New Roman"/>
-                <a:ea typeface="宋体"/>
-                <a:cs typeface="宋体"/>
+                <a:latin typeface="Times New Roman" panose="02020603050405020304"/>
+                <a:ea typeface="宋体" panose="02010600030101010101" pitchFamily="2" charset="-122"/>
+                <a:cs typeface="宋体" panose="02010600030101010101" pitchFamily="2" charset="-122"/>
               </a:rPr>
               <a:t>· 第二步 构念与题项：把你那个看不见的概念，变成一道道别人能答、且答得准的题。</a:t>
             </a:r>
+            <a:endParaRPr sz="2000" b="0" i="0">
+              <a:solidFill>
+                <a:srgbClr val="000000"/>
+              </a:solidFill>
+              <a:latin typeface="Times New Roman" panose="02020603050405020304"/>
+              <a:ea typeface="宋体" panose="02010600030101010101" pitchFamily="2" charset="-122"/>
+              <a:cs typeface="宋体" panose="02010600030101010101" pitchFamily="2" charset="-122"/>
+            </a:endParaRPr>
           </a:p>
           <a:p>
             <a:pPr algn="l">
@@ -17813,12 +19927,20 @@
                 <a:solidFill>
                   <a:srgbClr val="000000"/>
                 </a:solidFill>
-                <a:latin typeface="Times New Roman"/>
-                <a:ea typeface="宋体"/>
-                <a:cs typeface="宋体"/>
+                <a:latin typeface="Times New Roman" panose="02020603050405020304"/>
+                <a:ea typeface="宋体" panose="02010600030101010101" pitchFamily="2" charset="-122"/>
+                <a:cs typeface="宋体" panose="02010600030101010101" pitchFamily="2" charset="-122"/>
               </a:rPr>
               <a:t>· 第三步 抽样与施测：问卷发给谁、怎么发、收回来多少，都要交代清楚。</a:t>
             </a:r>
+            <a:endParaRPr sz="2000" b="0" i="0">
+              <a:solidFill>
+                <a:srgbClr val="000000"/>
+              </a:solidFill>
+              <a:latin typeface="Times New Roman" panose="02020603050405020304"/>
+              <a:ea typeface="宋体" panose="02010600030101010101" pitchFamily="2" charset="-122"/>
+              <a:cs typeface="宋体" panose="02010600030101010101" pitchFamily="2" charset="-122"/>
+            </a:endParaRPr>
           </a:p>
           <a:p>
             <a:pPr algn="l">
@@ -17837,12 +19959,20 @@
                 <a:solidFill>
                   <a:srgbClr val="000000"/>
                 </a:solidFill>
-                <a:latin typeface="Times New Roman"/>
-                <a:ea typeface="宋体"/>
-                <a:cs typeface="宋体"/>
+                <a:latin typeface="Times New Roman" panose="02020603050405020304"/>
+                <a:ea typeface="宋体" panose="02010600030101010101" pitchFamily="2" charset="-122"/>
+                <a:cs typeface="宋体" panose="02010600030101010101" pitchFamily="2" charset="-122"/>
               </a:rPr>
               <a:t>· 第四步 数据分析与结论：数据算出来以后，能得出什么结论，只能说到哪一步。</a:t>
             </a:r>
+            <a:endParaRPr sz="2000" b="0" i="0">
+              <a:solidFill>
+                <a:srgbClr val="000000"/>
+              </a:solidFill>
+              <a:latin typeface="Times New Roman" panose="02020603050405020304"/>
+              <a:ea typeface="宋体" panose="02010600030101010101" pitchFamily="2" charset="-122"/>
+              <a:cs typeface="宋体" panose="02010600030101010101" pitchFamily="2" charset="-122"/>
+            </a:endParaRPr>
           </a:p>
           <a:p>
             <a:pPr algn="l">
@@ -17861,12 +19991,64 @@
                 <a:solidFill>
                   <a:srgbClr val="000000"/>
                 </a:solidFill>
-                <a:latin typeface="Times New Roman"/>
-                <a:ea typeface="宋体"/>
-                <a:cs typeface="宋体"/>
-              </a:rPr>
-              <a:t>· 四步都走通，结论才站得住；断在哪一步，结论就悬空。下面就用这把尺子，量两篇论文。</a:t>
-            </a:r>
+                <a:latin typeface="Times New Roman" panose="02020603050405020304"/>
+                <a:ea typeface="宋体" panose="02010600030101010101" pitchFamily="2" charset="-122"/>
+                <a:cs typeface="宋体" panose="02010600030101010101" pitchFamily="2" charset="-122"/>
+              </a:rPr>
+              <a:t>· 四步都走通，结论才站得住；断在哪一步，结论就悬空。下面就用这</a:t>
+            </a:r>
+            <a:r>
+              <a:rPr lang="zh-CN" sz="2000" b="0" i="0">
+                <a:solidFill>
+                  <a:srgbClr val="000000"/>
+                </a:solidFill>
+                <a:latin typeface="Times New Roman" panose="02020603050405020304"/>
+                <a:ea typeface="宋体" panose="02010600030101010101" pitchFamily="2" charset="-122"/>
+                <a:cs typeface="宋体" panose="02010600030101010101" pitchFamily="2" charset="-122"/>
+              </a:rPr>
+              <a:t>个标准</a:t>
+            </a:r>
+            <a:r>
+              <a:rPr sz="2000" b="0" i="0">
+                <a:solidFill>
+                  <a:srgbClr val="000000"/>
+                </a:solidFill>
+                <a:latin typeface="Times New Roman" panose="02020603050405020304"/>
+                <a:ea typeface="宋体" panose="02010600030101010101" pitchFamily="2" charset="-122"/>
+                <a:cs typeface="宋体" panose="02010600030101010101" pitchFamily="2" charset="-122"/>
+              </a:rPr>
+              <a:t>，</a:t>
+            </a:r>
+            <a:r>
+              <a:rPr lang="zh-CN" sz="2000" b="0" i="0">
+                <a:solidFill>
+                  <a:srgbClr val="000000"/>
+                </a:solidFill>
+                <a:latin typeface="Times New Roman" panose="02020603050405020304"/>
+                <a:ea typeface="宋体" panose="02010600030101010101" pitchFamily="2" charset="-122"/>
+                <a:cs typeface="宋体" panose="02010600030101010101" pitchFamily="2" charset="-122"/>
+              </a:rPr>
+              <a:t>分析</a:t>
+            </a:r>
+            <a:r>
+              <a:rPr sz="2000" b="0" i="0">
+                <a:solidFill>
+                  <a:srgbClr val="000000"/>
+                </a:solidFill>
+                <a:latin typeface="Times New Roman" panose="02020603050405020304"/>
+                <a:ea typeface="宋体" panose="02010600030101010101" pitchFamily="2" charset="-122"/>
+                <a:cs typeface="宋体" panose="02010600030101010101" pitchFamily="2" charset="-122"/>
+              </a:rPr>
+              <a:t>两篇论文。</a:t>
+            </a:r>
+            <a:endParaRPr sz="2000" b="0" i="0">
+              <a:solidFill>
+                <a:srgbClr val="000000"/>
+              </a:solidFill>
+              <a:latin typeface="Times New Roman" panose="02020603050405020304"/>
+              <a:ea typeface="宋体" panose="02010600030101010101" pitchFamily="2" charset="-122"/>
+              <a:cs typeface="宋体" panose="02010600030101010101" pitchFamily="2" charset="-122"/>
+            </a:endParaRPr>
           </a:p>
         </p:txBody>
       </p:sp>
@@ -17887,7 +20069,7 @@
           <a:noFill/>
         </p:spPr>
         <p:txBody>
-          <a:bodyPr wrap="square" lIns="0" rIns="0" tIns="0" bIns="0" anchor="t">
+          <a:bodyPr wrap="square" lIns="0" tIns="0" rIns="0" bIns="0" anchor="t">
             <a:spAutoFit/>
           </a:bodyPr>
           <a:lstStyle/>
@@ -17908,12 +20090,20 @@
                 <a:solidFill>
                   <a:srgbClr val="404040"/>
                 </a:solidFill>
-                <a:latin typeface="Times New Roman"/>
-                <a:ea typeface="宋体"/>
-                <a:cs typeface="宋体"/>
+                <a:latin typeface="Times New Roman" panose="02020603050405020304"/>
+                <a:ea typeface="宋体" panose="02010600030101010101" pitchFamily="2" charset="-122"/>
+                <a:cs typeface="宋体" panose="02010600030101010101" pitchFamily="2" charset="-122"/>
               </a:rPr>
               <a:t>6 / 34</a:t>
             </a:r>
+            <a:endParaRPr sz="1000" b="0" i="0">
+              <a:solidFill>
+                <a:srgbClr val="404040"/>
+              </a:solidFill>
+              <a:latin typeface="Times New Roman" panose="02020603050405020304"/>
+              <a:ea typeface="宋体" panose="02010600030101010101" pitchFamily="2" charset="-122"/>
+              <a:cs typeface="宋体" panose="02010600030101010101" pitchFamily="2" charset="-122"/>
+            </a:endParaRPr>
           </a:p>
         </p:txBody>
       </p:sp>
@@ -17926,7 +20116,7 @@
 </file>
 
 <file path=ppt/slides/slide7.xml><?xml version="1.0" encoding="utf-8"?>
-<p:sld xmlns:a="http://schemas.openxmlformats.org/drawingml/2006/main" xmlns:p="http://schemas.openxmlformats.org/presentationml/2006/main" xmlns:r="http://schemas.openxmlformats.org/officeDocument/2006/relationships">
+<p:sld xmlns:a="http://schemas.openxmlformats.org/drawingml/2006/main" xmlns:r="http://schemas.openxmlformats.org/officeDocument/2006/relationships" xmlns:p="http://schemas.openxmlformats.org/presentationml/2006/main">
   <p:cSld>
     <p:spTree>
       <p:nvGrpSpPr>
@@ -18040,7 +20230,7 @@
           <a:noFill/>
         </p:spPr>
         <p:txBody>
-          <a:bodyPr wrap="square" lIns="0" rIns="0" tIns="0" bIns="0" anchor="t">
+          <a:bodyPr wrap="square" lIns="0" tIns="0" rIns="0" bIns="0" anchor="t">
             <a:spAutoFit/>
           </a:bodyPr>
           <a:lstStyle/>
@@ -18061,12 +20251,20 @@
                 <a:solidFill>
                   <a:srgbClr val="FFFFFF"/>
                 </a:solidFill>
-                <a:latin typeface="Times New Roman"/>
-                <a:ea typeface="宋体"/>
-                <a:cs typeface="宋体"/>
+                <a:latin typeface="Times New Roman" panose="02020603050405020304"/>
+                <a:ea typeface="宋体" panose="02010600030101010101" pitchFamily="2" charset="-122"/>
+                <a:cs typeface="宋体" panose="02010600030101010101" pitchFamily="2" charset="-122"/>
               </a:rPr>
               <a:t>02</a:t>
             </a:r>
+            <a:endParaRPr sz="9600" b="0" i="0">
+              <a:solidFill>
+                <a:srgbClr val="FFFFFF"/>
+              </a:solidFill>
+              <a:latin typeface="Times New Roman" panose="02020603050405020304"/>
+              <a:ea typeface="宋体" panose="02010600030101010101" pitchFamily="2" charset="-122"/>
+              <a:cs typeface="宋体" panose="02010600030101010101" pitchFamily="2" charset="-122"/>
+            </a:endParaRPr>
           </a:p>
         </p:txBody>
       </p:sp>
@@ -18079,7 +20277,7 @@
         <p:spPr>
           <a:xfrm>
             <a:off x="3566160" y="3063240"/>
-            <a:ext cx="5303520" cy="1280160"/>
+            <a:ext cx="5303520" cy="494665"/>
           </a:xfrm>
           <a:prstGeom prst="rect">
             <a:avLst/>
@@ -18087,7 +20285,7 @@
           <a:noFill/>
         </p:spPr>
         <p:txBody>
-          <a:bodyPr wrap="square" lIns="0" rIns="0" tIns="0" bIns="0" anchor="t">
+          <a:bodyPr wrap="square" lIns="0" tIns="0" rIns="0" bIns="0" anchor="t">
             <a:spAutoFit/>
           </a:bodyPr>
           <a:lstStyle/>
@@ -18108,12 +20306,31 @@
                 <a:solidFill>
                   <a:srgbClr val="000000"/>
                 </a:solidFill>
-                <a:latin typeface="Times New Roman"/>
-                <a:ea typeface="黑体"/>
-                <a:cs typeface="黑体"/>
-              </a:rPr>
-              <a:t>正例：口译笔记熟练度量表怎么一步步做出来</a:t>
-            </a:r>
+                <a:latin typeface="Times New Roman" panose="02020603050405020304"/>
+                <a:ea typeface="黑体" panose="02010609060101010101" charset="-122"/>
+                <a:cs typeface="黑体" panose="02010609060101010101" charset="-122"/>
+              </a:rPr>
+              <a:t>正例：口译笔记熟练度量表</a:t>
+            </a:r>
+            <a:r>
+              <a:rPr lang="zh-CN" sz="2800" b="1" i="0">
+                <a:solidFill>
+                  <a:srgbClr val="000000"/>
+                </a:solidFill>
+                <a:latin typeface="Times New Roman" panose="02020603050405020304"/>
+                <a:ea typeface="黑体" panose="02010609060101010101" charset="-122"/>
+                <a:cs typeface="黑体" panose="02010609060101010101" charset="-122"/>
+              </a:rPr>
+              <a:t>制作</a:t>
+            </a:r>
+            <a:endParaRPr lang="zh-CN" sz="2800" b="1" i="0">
+              <a:solidFill>
+                <a:srgbClr val="000000"/>
+              </a:solidFill>
+              <a:latin typeface="Times New Roman" panose="02020603050405020304"/>
+              <a:ea typeface="黑体" panose="02010609060101010101" charset="-122"/>
+              <a:cs typeface="黑体" panose="02010609060101010101" charset="-122"/>
+            </a:endParaRPr>
           </a:p>
         </p:txBody>
       </p:sp>
@@ -18134,7 +20351,7 @@
           <a:noFill/>
         </p:spPr>
         <p:txBody>
-          <a:bodyPr wrap="square" lIns="0" rIns="0" tIns="0" bIns="0" anchor="t">
+          <a:bodyPr wrap="square" lIns="0" tIns="0" rIns="0" bIns="0" anchor="t">
             <a:spAutoFit/>
           </a:bodyPr>
           <a:lstStyle/>
@@ -18155,12 +20372,20 @@
                 <a:solidFill>
                   <a:srgbClr val="404040"/>
                 </a:solidFill>
-                <a:latin typeface="Times New Roman"/>
-                <a:ea typeface="宋体"/>
-                <a:cs typeface="宋体"/>
+                <a:latin typeface="Times New Roman" panose="02020603050405020304"/>
+                <a:ea typeface="宋体" panose="02010600030101010101" pitchFamily="2" charset="-122"/>
+                <a:cs typeface="宋体" panose="02010600030101010101" pitchFamily="2" charset="-122"/>
               </a:rPr>
               <a:t>7 / 34</a:t>
             </a:r>
+            <a:endParaRPr sz="1000" b="0" i="0">
+              <a:solidFill>
+                <a:srgbClr val="404040"/>
+              </a:solidFill>
+              <a:latin typeface="Times New Roman" panose="02020603050405020304"/>
+              <a:ea typeface="宋体" panose="02010600030101010101" pitchFamily="2" charset="-122"/>
+              <a:cs typeface="宋体" panose="02010600030101010101" pitchFamily="2" charset="-122"/>
+            </a:endParaRPr>
           </a:p>
         </p:txBody>
       </p:sp>
@@ -18173,7 +20398,7 @@
 </file>
 
 <file path=ppt/slides/slide8.xml><?xml version="1.0" encoding="utf-8"?>
-<p:sld xmlns:a="http://schemas.openxmlformats.org/drawingml/2006/main" xmlns:p="http://schemas.openxmlformats.org/presentationml/2006/main" xmlns:r="http://schemas.openxmlformats.org/officeDocument/2006/relationships">
+<p:sld xmlns:a="http://schemas.openxmlformats.org/drawingml/2006/main" xmlns:r="http://schemas.openxmlformats.org/officeDocument/2006/relationships" xmlns:p="http://schemas.openxmlformats.org/presentationml/2006/main">
   <p:cSld>
     <p:spTree>
       <p:nvGrpSpPr>
@@ -18199,7 +20424,7 @@
           <a:noFill/>
         </p:spPr>
         <p:txBody>
-          <a:bodyPr wrap="square" lIns="0" rIns="0" tIns="0" bIns="0" anchor="t">
+          <a:bodyPr wrap="square" lIns="0" tIns="0" rIns="0" bIns="0" anchor="t">
             <a:spAutoFit/>
           </a:bodyPr>
           <a:lstStyle/>
@@ -18220,12 +20445,20 @@
                 <a:solidFill>
                   <a:srgbClr val="000000"/>
                 </a:solidFill>
-                <a:latin typeface="Times New Roman"/>
-                <a:ea typeface="黑体"/>
-                <a:cs typeface="黑体"/>
+                <a:latin typeface="Times New Roman" panose="02020603050405020304"/>
+                <a:ea typeface="黑体" panose="02010609060101010101" charset="-122"/>
+                <a:cs typeface="黑体" panose="02010609060101010101" charset="-122"/>
               </a:rPr>
               <a:t>正例论文与它想回答的问题</a:t>
             </a:r>
+            <a:endParaRPr sz="2300" b="1" i="0">
+              <a:solidFill>
+                <a:srgbClr val="000000"/>
+              </a:solidFill>
+              <a:latin typeface="Times New Roman" panose="02020603050405020304"/>
+              <a:ea typeface="黑体" panose="02010609060101010101" charset="-122"/>
+              <a:cs typeface="黑体" panose="02010609060101010101" charset="-122"/>
+            </a:endParaRPr>
           </a:p>
         </p:txBody>
       </p:sp>
@@ -18238,7 +20471,7 @@
           <p:nvPr/>
         </p:nvPicPr>
         <p:blipFill>
-          <a:blip r:embed="rId2"/>
+          <a:blip r:embed="rId1"/>
           <a:stretch>
             <a:fillRect/>
           </a:stretch>
@@ -18314,7 +20547,7 @@
           <a:noFill/>
         </p:spPr>
         <p:txBody>
-          <a:bodyPr wrap="square" lIns="0" rIns="0" tIns="0" bIns="0" anchor="t">
+          <a:bodyPr wrap="square" lIns="0" tIns="0" rIns="0" bIns="0" anchor="t">
             <a:spAutoFit/>
           </a:bodyPr>
           <a:lstStyle/>
@@ -18335,12 +20568,20 @@
                 <a:solidFill>
                   <a:srgbClr val="404040"/>
                 </a:solidFill>
-                <a:latin typeface="Times New Roman"/>
-                <a:ea typeface="宋体"/>
-                <a:cs typeface="宋体"/>
+                <a:latin typeface="Times New Roman" panose="02020603050405020304"/>
+                <a:ea typeface="宋体" panose="02010600030101010101" pitchFamily="2" charset="-122"/>
+                <a:cs typeface="宋体" panose="02010600030101010101" pitchFamily="2" charset="-122"/>
               </a:rPr>
               <a:t>论文首页</a:t>
             </a:r>
+            <a:endParaRPr sz="950" b="0" i="0">
+              <a:solidFill>
+                <a:srgbClr val="404040"/>
+              </a:solidFill>
+              <a:latin typeface="Times New Roman" panose="02020603050405020304"/>
+              <a:ea typeface="宋体" panose="02010600030101010101" pitchFamily="2" charset="-122"/>
+              <a:cs typeface="宋体" panose="02010600030101010101" pitchFamily="2" charset="-122"/>
+            </a:endParaRPr>
           </a:p>
         </p:txBody>
       </p:sp>
@@ -18361,7 +20602,7 @@
           <a:noFill/>
         </p:spPr>
         <p:txBody>
-          <a:bodyPr wrap="square" lIns="0" rIns="0" tIns="0" bIns="0" anchor="t">
+          <a:bodyPr wrap="square" lIns="0" tIns="0" rIns="0" bIns="0" anchor="t">
             <a:spAutoFit/>
           </a:bodyPr>
           <a:lstStyle/>
@@ -18382,12 +20623,20 @@
                 <a:solidFill>
                   <a:srgbClr val="000000"/>
                 </a:solidFill>
-                <a:latin typeface="Times New Roman"/>
-                <a:ea typeface="宋体"/>
-                <a:cs typeface="宋体"/>
+                <a:latin typeface="Times New Roman" panose="02020603050405020304"/>
+                <a:ea typeface="宋体" panose="02010600030101010101" pitchFamily="2" charset="-122"/>
+                <a:cs typeface="宋体" panose="02010600030101010101" pitchFamily="2" charset="-122"/>
               </a:rPr>
               <a:t>· 文献：周金华、董燕萍（2019），《外语教学与研究》51(6)：925-937。</a:t>
             </a:r>
+            <a:endParaRPr sz="2000" b="0" i="0">
+              <a:solidFill>
+                <a:srgbClr val="000000"/>
+              </a:solidFill>
+              <a:latin typeface="Times New Roman" panose="02020603050405020304"/>
+              <a:ea typeface="宋体" panose="02010600030101010101" pitchFamily="2" charset="-122"/>
+              <a:cs typeface="宋体" panose="02010600030101010101" pitchFamily="2" charset="-122"/>
+            </a:endParaRPr>
           </a:p>
           <a:p>
             <a:pPr algn="l">
@@ -18406,12 +20655,20 @@
                 <a:solidFill>
                   <a:srgbClr val="000000"/>
                 </a:solidFill>
-                <a:latin typeface="Times New Roman"/>
-                <a:ea typeface="宋体"/>
-                <a:cs typeface="宋体"/>
+                <a:latin typeface="Times New Roman" panose="02020603050405020304"/>
+                <a:ea typeface="宋体" panose="02010600030101010101" pitchFamily="2" charset="-122"/>
+                <a:cs typeface="宋体" panose="02010600030101010101" pitchFamily="2" charset="-122"/>
               </a:rPr>
               <a:t>· 它想回答的问题：交替传译里的「笔记熟练度」看不见、摸不着，既不能看笔记成品打分，也很难由别人代评。那么，它能不能用一份自评量表测出来？</a:t>
             </a:r>
+            <a:endParaRPr sz="2000" b="0" i="0">
+              <a:solidFill>
+                <a:srgbClr val="000000"/>
+              </a:solidFill>
+              <a:latin typeface="Times New Roman" panose="02020603050405020304"/>
+              <a:ea typeface="宋体" panose="02010600030101010101" pitchFamily="2" charset="-122"/>
+              <a:cs typeface="宋体" panose="02010600030101010101" pitchFamily="2" charset="-122"/>
+            </a:endParaRPr>
           </a:p>
           <a:p>
             <a:pPr algn="l">
@@ -18430,12 +20687,20 @@
                 <a:solidFill>
                   <a:srgbClr val="000000"/>
                 </a:solidFill>
-                <a:latin typeface="Times New Roman"/>
-                <a:ea typeface="宋体"/>
-                <a:cs typeface="宋体"/>
+                <a:latin typeface="Times New Roman" panose="02020603050405020304"/>
+                <a:ea typeface="宋体" panose="02010600030101010101" pitchFamily="2" charset="-122"/>
+                <a:cs typeface="宋体" panose="02010600030101010101" pitchFamily="2" charset="-122"/>
               </a:rPr>
               <a:t>· 作者的思路分三步：先给「笔记熟练度」下定义，再编量表，最后用信度和效度检验这份量表好不好用。</a:t>
             </a:r>
+            <a:endParaRPr sz="2000" b="0" i="0">
+              <a:solidFill>
+                <a:srgbClr val="000000"/>
+              </a:solidFill>
+              <a:latin typeface="Times New Roman" panose="02020603050405020304"/>
+              <a:ea typeface="宋体" panose="02010600030101010101" pitchFamily="2" charset="-122"/>
+              <a:cs typeface="宋体" panose="02010600030101010101" pitchFamily="2" charset="-122"/>
+            </a:endParaRPr>
           </a:p>
           <a:p>
             <a:pPr algn="l">
@@ -18454,12 +20719,20 @@
                 <a:solidFill>
                   <a:srgbClr val="000000"/>
                 </a:solidFill>
-                <a:latin typeface="Times New Roman"/>
-                <a:ea typeface="宋体"/>
-                <a:cs typeface="宋体"/>
+                <a:latin typeface="Times New Roman" panose="02020603050405020304"/>
+                <a:ea typeface="宋体" panose="02010600030101010101" pitchFamily="2" charset="-122"/>
+                <a:cs typeface="宋体" panose="02010600030101010101" pitchFamily="2" charset="-122"/>
               </a:rPr>
               <a:t>· 整篇论文，就是围绕「熟练度能不能测」这一个问题，一步步给出证据。</a:t>
             </a:r>
+            <a:endParaRPr sz="2000" b="0" i="0">
+              <a:solidFill>
+                <a:srgbClr val="000000"/>
+              </a:solidFill>
+              <a:latin typeface="Times New Roman" panose="02020603050405020304"/>
+              <a:ea typeface="宋体" panose="02010600030101010101" pitchFamily="2" charset="-122"/>
+              <a:cs typeface="宋体" panose="02010600030101010101" pitchFamily="2" charset="-122"/>
+            </a:endParaRPr>
           </a:p>
         </p:txBody>
       </p:sp>
@@ -18480,7 +20753,7 @@
           <a:noFill/>
         </p:spPr>
         <p:txBody>
-          <a:bodyPr wrap="square" lIns="0" rIns="0" tIns="0" bIns="0" anchor="t">
+          <a:bodyPr wrap="square" lIns="0" tIns="0" rIns="0" bIns="0" anchor="t">
             <a:spAutoFit/>
           </a:bodyPr>
           <a:lstStyle/>
@@ -18501,12 +20774,20 @@
                 <a:solidFill>
                   <a:srgbClr val="404040"/>
                 </a:solidFill>
-                <a:latin typeface="Times New Roman"/>
-                <a:ea typeface="宋体"/>
-                <a:cs typeface="宋体"/>
+                <a:latin typeface="Times New Roman" panose="02020603050405020304"/>
+                <a:ea typeface="宋体" panose="02010600030101010101" pitchFamily="2" charset="-122"/>
+                <a:cs typeface="宋体" panose="02010600030101010101" pitchFamily="2" charset="-122"/>
               </a:rPr>
               <a:t>8 / 34</a:t>
             </a:r>
+            <a:endParaRPr sz="1000" b="0" i="0">
+              <a:solidFill>
+                <a:srgbClr val="404040"/>
+              </a:solidFill>
+              <a:latin typeface="Times New Roman" panose="02020603050405020304"/>
+              <a:ea typeface="宋体" panose="02010600030101010101" pitchFamily="2" charset="-122"/>
+              <a:cs typeface="宋体" panose="02010600030101010101" pitchFamily="2" charset="-122"/>
+            </a:endParaRPr>
           </a:p>
         </p:txBody>
       </p:sp>
@@ -18519,7 +20800,7 @@
 </file>
 
 <file path=ppt/slides/slide9.xml><?xml version="1.0" encoding="utf-8"?>
-<p:sld xmlns:a="http://schemas.openxmlformats.org/drawingml/2006/main" xmlns:p="http://schemas.openxmlformats.org/presentationml/2006/main" xmlns:r="http://schemas.openxmlformats.org/officeDocument/2006/relationships">
+<p:sld xmlns:a="http://schemas.openxmlformats.org/drawingml/2006/main" xmlns:r="http://schemas.openxmlformats.org/officeDocument/2006/relationships" xmlns:p="http://schemas.openxmlformats.org/presentationml/2006/main">
   <p:cSld>
     <p:spTree>
       <p:nvGrpSpPr>
@@ -18537,7 +20818,7 @@
         <p:spPr>
           <a:xfrm>
             <a:off x="640080" y="1143000"/>
-            <a:ext cx="10881360" cy="640080"/>
+            <a:ext cx="10881360" cy="388620"/>
           </a:xfrm>
           <a:prstGeom prst="rect">
             <a:avLst/>
@@ -18545,7 +20826,7 @@
           <a:noFill/>
         </p:spPr>
         <p:txBody>
-          <a:bodyPr wrap="square" lIns="0" rIns="0" tIns="0" bIns="0" anchor="t">
+          <a:bodyPr wrap="square" lIns="0" tIns="0" rIns="0" bIns="0" anchor="t">
             <a:spAutoFit/>
           </a:bodyPr>
           <a:lstStyle/>
@@ -18562,16 +20843,35 @@
               </a:spcAft>
             </a:pPr>
             <a:r>
+              <a:rPr lang="zh-CN" sz="2300" b="1" i="0">
+                <a:solidFill>
+                  <a:srgbClr val="000000"/>
+                </a:solidFill>
+                <a:latin typeface="Times New Roman" panose="02020603050405020304"/>
+                <a:ea typeface="黑体" panose="02010609060101010101" charset="-122"/>
+                <a:cs typeface="黑体" panose="02010609060101010101" charset="-122"/>
+              </a:rPr>
+              <a:t>研究</a:t>
+            </a:r>
+            <a:r>
               <a:rPr sz="2300" b="1" i="0">
                 <a:solidFill>
                   <a:srgbClr val="000000"/>
                 </a:solidFill>
-                <a:latin typeface="Times New Roman"/>
-                <a:ea typeface="黑体"/>
-                <a:cs typeface="黑体"/>
-              </a:rPr>
-              <a:t>正例的完整流程：五个步骤</a:t>
-            </a:r>
+                <a:latin typeface="Times New Roman" panose="02020603050405020304"/>
+                <a:ea typeface="黑体" panose="02010609060101010101" charset="-122"/>
+                <a:cs typeface="黑体" panose="02010609060101010101" charset="-122"/>
+              </a:rPr>
+              <a:t>流程</a:t>
+            </a:r>
+            <a:endParaRPr sz="2300" b="1" i="0">
+              <a:solidFill>
+                <a:srgbClr val="000000"/>
+              </a:solidFill>
+              <a:latin typeface="Times New Roman" panose="02020603050405020304"/>
+              <a:ea typeface="黑体" panose="02010609060101010101" charset="-122"/>
+              <a:cs typeface="黑体" panose="02010609060101010101" charset="-122"/>
+            </a:endParaRPr>
           </a:p>
         </p:txBody>
       </p:sp>
@@ -18640,7 +20940,7 @@
           <a:noFill/>
         </p:spPr>
         <p:txBody>
-          <a:bodyPr wrap="square" lIns="0" rIns="0" tIns="0" bIns="0" anchor="ctr">
+          <a:bodyPr wrap="square" lIns="0" tIns="0" rIns="0" bIns="0" anchor="ctr">
             <a:spAutoFit/>
           </a:bodyPr>
           <a:lstStyle/>
@@ -18661,12 +20961,20 @@
                 <a:solidFill>
                   <a:srgbClr val="000000"/>
                 </a:solidFill>
-                <a:latin typeface="Times New Roman"/>
-                <a:ea typeface="黑体"/>
-                <a:cs typeface="黑体"/>
+                <a:latin typeface="Times New Roman" panose="02020603050405020304"/>
+                <a:ea typeface="黑体" panose="02010609060101010101" charset="-122"/>
+                <a:cs typeface="黑体" panose="02010609060101010101" charset="-122"/>
               </a:rPr>
               <a:t>界定构念</a:t>
             </a:r>
+            <a:endParaRPr sz="1500" b="1" i="0">
+              <a:solidFill>
+                <a:srgbClr val="000000"/>
+              </a:solidFill>
+              <a:latin typeface="Times New Roman" panose="02020603050405020304"/>
+              <a:ea typeface="黑体" panose="02010609060101010101" charset="-122"/>
+              <a:cs typeface="黑体" panose="02010609060101010101" charset="-122"/>
+            </a:endParaRPr>
           </a:p>
           <a:p>
             <a:pPr algn="ctr">
@@ -18685,12 +20993,20 @@
                 <a:solidFill>
                   <a:srgbClr val="404040"/>
                 </a:solidFill>
-                <a:latin typeface="Times New Roman"/>
-                <a:ea typeface="宋体"/>
-                <a:cs typeface="宋体"/>
+                <a:latin typeface="Times New Roman" panose="02020603050405020304"/>
+                <a:ea typeface="宋体" panose="02010600030101010101" pitchFamily="2" charset="-122"/>
+                <a:cs typeface="宋体" panose="02010600030101010101" pitchFamily="2" charset="-122"/>
               </a:rPr>
               <a:t>先想清楚要测什么</a:t>
             </a:r>
+            <a:endParaRPr sz="1100" b="0" i="0">
+              <a:solidFill>
+                <a:srgbClr val="404040"/>
+              </a:solidFill>
+              <a:latin typeface="Times New Roman" panose="02020603050405020304"/>
+              <a:ea typeface="宋体" panose="02010600030101010101" pitchFamily="2" charset="-122"/>
+              <a:cs typeface="宋体" panose="02010600030101010101" pitchFamily="2" charset="-122"/>
+            </a:endParaRPr>
           </a:p>
         </p:txBody>
       </p:sp>
@@ -18794,8 +21110,8 @@
         </p:nvSpPr>
         <p:spPr>
           <a:xfrm>
-            <a:off x="2984601" y="2834640"/>
-            <a:ext cx="1759305" cy="1371600"/>
+            <a:off x="2984601" y="3296603"/>
+            <a:ext cx="1759305" cy="447675"/>
           </a:xfrm>
           <a:prstGeom prst="rect">
             <a:avLst/>
@@ -18803,7 +21119,7 @@
           <a:noFill/>
         </p:spPr>
         <p:txBody>
-          <a:bodyPr wrap="square" lIns="0" rIns="0" tIns="0" bIns="0" anchor="ctr">
+          <a:bodyPr wrap="square" lIns="0" tIns="0" rIns="0" bIns="0" anchor="ctr">
             <a:spAutoFit/>
           </a:bodyPr>
           <a:lstStyle/>
@@ -18824,12 +21140,20 @@
                 <a:solidFill>
                   <a:srgbClr val="000000"/>
                 </a:solidFill>
-                <a:latin typeface="Times New Roman"/>
-                <a:ea typeface="黑体"/>
-                <a:cs typeface="黑体"/>
+                <a:latin typeface="Times New Roman" panose="02020603050405020304"/>
+                <a:ea typeface="黑体" panose="02010609060101010101" charset="-122"/>
+                <a:cs typeface="黑体" panose="02010609060101010101" charset="-122"/>
               </a:rPr>
               <a:t>编制题项</a:t>
             </a:r>
+            <a:endParaRPr sz="1500" b="1" i="0">
+              <a:solidFill>
+                <a:srgbClr val="000000"/>
+              </a:solidFill>
+              <a:latin typeface="Times New Roman" panose="02020603050405020304"/>
+              <a:ea typeface="黑体" panose="02010609060101010101" charset="-122"/>
+              <a:cs typeface="黑体" panose="02010609060101010101" charset="-122"/>
+            </a:endParaRPr>
           </a:p>
           <a:p>
             <a:pPr algn="ctr">
@@ -18843,17 +21167,14 @@
                 <a:spcPts val="0"/>
               </a:spcAft>
             </a:pPr>
-            <a:r>
-              <a:rPr sz="1100" b="0" i="0">
-                <a:solidFill>
-                  <a:srgbClr val="404040"/>
-                </a:solidFill>
-                <a:latin typeface="Times New Roman"/>
-                <a:ea typeface="宋体"/>
-                <a:cs typeface="宋体"/>
-              </a:rPr>
-              <a:t>74 → 28 → 21</a:t>
-            </a:r>
+            <a:endParaRPr sz="1100" b="0" i="0">
+              <a:solidFill>
+                <a:srgbClr val="404040"/>
+              </a:solidFill>
+              <a:latin typeface="Times New Roman" panose="02020603050405020304"/>
+              <a:ea typeface="宋体" panose="02010600030101010101" pitchFamily="2" charset="-122"/>
+              <a:cs typeface="宋体" panose="02010600030101010101" pitchFamily="2" charset="-122"/>
+            </a:endParaRPr>
           </a:p>
         </p:txBody>
       </p:sp>
@@ -18966,7 +21287,7 @@
           <a:noFill/>
         </p:spPr>
         <p:txBody>
-          <a:bodyPr wrap="square" lIns="0" rIns="0" tIns="0" bIns="0" anchor="ctr">
+          <a:bodyPr wrap="square" lIns="0" tIns="0" rIns="0" bIns="0" anchor="ctr">
             <a:spAutoFit/>
           </a:bodyPr>
           <a:lstStyle/>
@@ -18987,12 +21308,20 @@
                 <a:solidFill>
                   <a:srgbClr val="000000"/>
                 </a:solidFill>
-                <a:latin typeface="Times New Roman"/>
-                <a:ea typeface="黑体"/>
-                <a:cs typeface="黑体"/>
+                <a:latin typeface="Times New Roman" panose="02020603050405020304"/>
+                <a:ea typeface="黑体" panose="02010609060101010101" charset="-122"/>
+                <a:cs typeface="黑体" panose="02010609060101010101" charset="-122"/>
               </a:rPr>
               <a:t>正式施测</a:t>
             </a:r>
+            <a:endParaRPr sz="1500" b="1" i="0">
+              <a:solidFill>
+                <a:srgbClr val="000000"/>
+              </a:solidFill>
+              <a:latin typeface="Times New Roman" panose="02020603050405020304"/>
+              <a:ea typeface="黑体" panose="02010609060101010101" charset="-122"/>
+              <a:cs typeface="黑体" panose="02010609060101010101" charset="-122"/>
+            </a:endParaRPr>
           </a:p>
           <a:p>
             <a:pPr algn="ctr">
@@ -19011,12 +21340,20 @@
                 <a:solidFill>
                   <a:srgbClr val="404040"/>
                 </a:solidFill>
-                <a:latin typeface="Times New Roman"/>
-                <a:ea typeface="宋体"/>
-                <a:cs typeface="宋体"/>
+                <a:latin typeface="Times New Roman" panose="02020603050405020304"/>
+                <a:ea typeface="宋体" panose="02010600030101010101" pitchFamily="2" charset="-122"/>
+                <a:cs typeface="宋体" panose="02010600030101010101" pitchFamily="2" charset="-122"/>
               </a:rPr>
               <a:t>144 名学生</a:t>
             </a:r>
+            <a:endParaRPr sz="1100" b="0" i="0">
+              <a:solidFill>
+                <a:srgbClr val="404040"/>
+              </a:solidFill>
+              <a:latin typeface="Times New Roman" panose="02020603050405020304"/>
+              <a:ea typeface="宋体" panose="02010600030101010101" pitchFamily="2" charset="-122"/>
+              <a:cs typeface="宋体" panose="02010600030101010101" pitchFamily="2" charset="-122"/>
+            </a:endParaRPr>
           </a:p>
         </p:txBody>
       </p:sp>
@@ -19120,8 +21457,8 @@
         </p:nvSpPr>
         <p:spPr>
           <a:xfrm>
-            <a:off x="7454188" y="2834640"/>
-            <a:ext cx="1759305" cy="1371600"/>
+            <a:off x="7454188" y="3296603"/>
+            <a:ext cx="1759305" cy="447675"/>
           </a:xfrm>
           <a:prstGeom prst="rect">
             <a:avLst/>
@@ -19129,7 +21466,7 @@
           <a:noFill/>
         </p:spPr>
         <p:txBody>
-          <a:bodyPr wrap="square" lIns="0" rIns="0" tIns="0" bIns="0" anchor="ctr">
+          <a:bodyPr wrap="square" lIns="0" tIns="0" rIns="0" bIns="0" anchor="ctr">
             <a:spAutoFit/>
           </a:bodyPr>
           <a:lstStyle/>
@@ -19150,12 +21487,20 @@
                 <a:solidFill>
                   <a:srgbClr val="000000"/>
                 </a:solidFill>
-                <a:latin typeface="Times New Roman"/>
-                <a:ea typeface="黑体"/>
-                <a:cs typeface="黑体"/>
+                <a:latin typeface="Times New Roman" panose="02020603050405020304"/>
+                <a:ea typeface="黑体" panose="02010609060101010101" charset="-122"/>
+                <a:cs typeface="黑体" panose="02010609060101010101" charset="-122"/>
               </a:rPr>
               <a:t>信度检验</a:t>
             </a:r>
+            <a:endParaRPr sz="1500" b="1" i="0">
+              <a:solidFill>
+                <a:srgbClr val="000000"/>
+              </a:solidFill>
+              <a:latin typeface="Times New Roman" panose="02020603050405020304"/>
+              <a:ea typeface="黑体" panose="02010609060101010101" charset="-122"/>
+              <a:cs typeface="黑体" panose="02010609060101010101" charset="-122"/>
+            </a:endParaRPr>
           </a:p>
           <a:p>
             <a:pPr algn="ctr">
@@ -19169,17 +21514,14 @@
                 <a:spcPts val="0"/>
               </a:spcAft>
             </a:pPr>
-            <a:r>
-              <a:rPr sz="1100" b="0" i="0">
-                <a:solidFill>
-                  <a:srgbClr val="404040"/>
-                </a:solidFill>
-                <a:latin typeface="Times New Roman"/>
-                <a:ea typeface="宋体"/>
-                <a:cs typeface="宋体"/>
-              </a:rPr>
-              <a:t>α = .901</a:t>
-            </a:r>
+            <a:endParaRPr sz="1100" b="0" i="0">
+              <a:solidFill>
+                <a:srgbClr val="404040"/>
+              </a:solidFill>
+              <a:latin typeface="Times New Roman" panose="02020603050405020304"/>
+              <a:ea typeface="宋体" panose="02010600030101010101" pitchFamily="2" charset="-122"/>
+              <a:cs typeface="宋体" panose="02010600030101010101" pitchFamily="2" charset="-122"/>
+            </a:endParaRPr>
           </a:p>
         </p:txBody>
       </p:sp>
@@ -19283,8 +21625,8 @@
         </p:nvSpPr>
         <p:spPr>
           <a:xfrm>
-            <a:off x="9688982" y="2834640"/>
-            <a:ext cx="1759305" cy="1371600"/>
+            <a:off x="9688982" y="3296603"/>
+            <a:ext cx="1759305" cy="447675"/>
           </a:xfrm>
           <a:prstGeom prst="rect">
             <a:avLst/>
@@ -19292,7 +21634,7 @@
           <a:noFill/>
         </p:spPr>
         <p:txBody>
-          <a:bodyPr wrap="square" lIns="0" rIns="0" tIns="0" bIns="0" anchor="ctr">
+          <a:bodyPr wrap="square" lIns="0" tIns="0" rIns="0" bIns="0" anchor="ctr">
             <a:spAutoFit/>
           </a:bodyPr>
           <a:lstStyle/>
@@ -19313,12 +21655,20 @@
                 <a:solidFill>
                   <a:srgbClr val="000000"/>
                 </a:solidFill>
-                <a:latin typeface="Times New Roman"/>
-                <a:ea typeface="黑体"/>
-                <a:cs typeface="黑体"/>
+                <a:latin typeface="Times New Roman" panose="02020603050405020304"/>
+                <a:ea typeface="黑体" panose="02010609060101010101" charset="-122"/>
+                <a:cs typeface="黑体" panose="02010609060101010101" charset="-122"/>
               </a:rPr>
               <a:t>效度验证</a:t>
             </a:r>
+            <a:endParaRPr sz="1500" b="1" i="0">
+              <a:solidFill>
+                <a:srgbClr val="000000"/>
+              </a:solidFill>
+              <a:latin typeface="Times New Roman" panose="02020603050405020304"/>
+              <a:ea typeface="黑体" panose="02010609060101010101" charset="-122"/>
+              <a:cs typeface="黑体" panose="02010609060101010101" charset="-122"/>
+            </a:endParaRPr>
           </a:p>
           <a:p>
             <a:pPr algn="ctr">
@@ -19332,17 +21682,14 @@
                 <a:spcPts val="0"/>
               </a:spcAft>
             </a:pPr>
-            <a:r>
-              <a:rPr sz="1100" b="0" i="0">
-                <a:solidFill>
-                  <a:srgbClr val="404040"/>
-                </a:solidFill>
-                <a:latin typeface="Times New Roman"/>
-                <a:ea typeface="宋体"/>
-                <a:cs typeface="宋体"/>
-              </a:rPr>
-              <a:t>三种效度都过关</a:t>
-            </a:r>
+            <a:endParaRPr sz="1100" b="0" i="0">
+              <a:solidFill>
+                <a:srgbClr val="404040"/>
+              </a:solidFill>
+              <a:latin typeface="Times New Roman" panose="02020603050405020304"/>
+              <a:ea typeface="宋体" panose="02010600030101010101" pitchFamily="2" charset="-122"/>
+              <a:cs typeface="宋体" panose="02010600030101010101" pitchFamily="2" charset="-122"/>
+            </a:endParaRPr>
           </a:p>
         </p:txBody>
       </p:sp>
@@ -19363,7 +21710,7 @@
           <a:noFill/>
         </p:spPr>
         <p:txBody>
-          <a:bodyPr wrap="square" lIns="0" rIns="0" tIns="0" bIns="0" anchor="t">
+          <a:bodyPr wrap="square" lIns="0" tIns="0" rIns="0" bIns="0" anchor="t">
             <a:spAutoFit/>
           </a:bodyPr>
           <a:lstStyle/>
@@ -19384,12 +21731,20 @@
                 <a:solidFill>
                   <a:srgbClr val="404040"/>
                 </a:solidFill>
-                <a:latin typeface="Times New Roman"/>
-                <a:ea typeface="宋体"/>
-                <a:cs typeface="宋体"/>
+                <a:latin typeface="Times New Roman" panose="02020603050405020304"/>
+                <a:ea typeface="宋体" panose="02010600030101010101" pitchFamily="2" charset="-122"/>
+                <a:cs typeface="宋体" panose="02010600030101010101" pitchFamily="2" charset="-122"/>
               </a:rPr>
               <a:t>0 / 0</a:t>
             </a:r>
+            <a:endParaRPr sz="1000" b="0" i="0">
+              <a:solidFill>
+                <a:srgbClr val="404040"/>
+              </a:solidFill>
+              <a:latin typeface="Times New Roman" panose="02020603050405020304"/>
+              <a:ea typeface="宋体" panose="02010600030101010101" pitchFamily="2" charset="-122"/>
+              <a:cs typeface="宋体" panose="02010600030101010101" pitchFamily="2" charset="-122"/>
+            </a:endParaRPr>
           </a:p>
         </p:txBody>
       </p:sp>
@@ -19410,7 +21765,7 @@
           <a:noFill/>
         </p:spPr>
         <p:txBody>
-          <a:bodyPr wrap="square" lIns="0" rIns="0" tIns="0" bIns="0" anchor="t">
+          <a:bodyPr wrap="square" lIns="0" tIns="0" rIns="0" bIns="0" anchor="t">
             <a:spAutoFit/>
           </a:bodyPr>
           <a:lstStyle/>
@@ -19431,12 +21786,20 @@
                 <a:solidFill>
                   <a:srgbClr val="404040"/>
                 </a:solidFill>
-                <a:latin typeface="Times New Roman"/>
-                <a:ea typeface="宋体"/>
-                <a:cs typeface="宋体"/>
+                <a:latin typeface="Times New Roman" panose="02020603050405020304"/>
+                <a:ea typeface="宋体" panose="02010600030101010101" pitchFamily="2" charset="-122"/>
+                <a:cs typeface="宋体" panose="02010600030101010101" pitchFamily="2" charset="-122"/>
               </a:rPr>
               <a:t>9 / 34</a:t>
             </a:r>
+            <a:endParaRPr sz="1000" b="0" i="0">
+              <a:solidFill>
+                <a:srgbClr val="404040"/>
+              </a:solidFill>
+              <a:latin typeface="Times New Roman" panose="02020603050405020304"/>
+              <a:ea typeface="宋体" panose="02010600030101010101" pitchFamily="2" charset="-122"/>
+              <a:cs typeface="宋体" panose="02010600030101010101" pitchFamily="2" charset="-122"/>
+            </a:endParaRPr>
           </a:p>
         </p:txBody>
       </p:sp>
@@ -19450,8 +21813,182 @@
 
 <file path=ppt/tags/tag1.xml><?xml version="1.0" encoding="utf-8"?>
 <p:tagLst xmlns:p="http://schemas.openxmlformats.org/presentationml/2006/main">
+  <p:tag name="KSO_WM_DIAGRAM_VIRTUALLY_FRAME" val="{&quot;height&quot;:339.83992125984247,&quot;left&quot;:410.4,&quot;top&quot;:116.64000000000001,&quot;width&quot;:505.43999999999994}"/>
+</p:tagLst>
+</file>
+
+<file path=ppt/tags/tag10.xml><?xml version="1.0" encoding="utf-8"?>
+<p:tagLst xmlns:p="http://schemas.openxmlformats.org/presentationml/2006/main">
+  <p:tag name="KSO_WM_DIAGRAM_VIRTUALLY_FRAME" val="{&quot;height&quot;:339.83992125984247,&quot;left&quot;:410.4,&quot;top&quot;:116.64000000000001,&quot;width&quot;:505.43999999999994}"/>
+</p:tagLst>
+</file>
+
+<file path=ppt/tags/tag11.xml><?xml version="1.0" encoding="utf-8"?>
+<p:tagLst xmlns:p="http://schemas.openxmlformats.org/presentationml/2006/main">
+  <p:tag name="KSO_WM_DIAGRAM_VIRTUALLY_FRAME" val="{&quot;height&quot;:187.2,&quot;left&quot;:51.839999999999996,&quot;top&quot;:180,&quot;width&quot;:856.8}"/>
+</p:tagLst>
+</file>
+
+<file path=ppt/tags/tag12.xml><?xml version="1.0" encoding="utf-8"?>
+<p:tagLst xmlns:p="http://schemas.openxmlformats.org/presentationml/2006/main">
+  <p:tag name="KSO_WM_DIAGRAM_VIRTUALLY_FRAME" val="{&quot;height&quot;:187.2,&quot;left&quot;:51.839999999999996,&quot;top&quot;:180,&quot;width&quot;:856.8}"/>
+</p:tagLst>
+</file>
+
+<file path=ppt/tags/tag13.xml><?xml version="1.0" encoding="utf-8"?>
+<p:tagLst xmlns:p="http://schemas.openxmlformats.org/presentationml/2006/main">
+  <p:tag name="KSO_WM_DIAGRAM_VIRTUALLY_FRAME" val="{&quot;height&quot;:187.2,&quot;left&quot;:51.839999999999996,&quot;top&quot;:180,&quot;width&quot;:856.8}"/>
+</p:tagLst>
+</file>
+
+<file path=ppt/tags/tag14.xml><?xml version="1.0" encoding="utf-8"?>
+<p:tagLst xmlns:p="http://schemas.openxmlformats.org/presentationml/2006/main">
+  <p:tag name="KSO_WM_DIAGRAM_VIRTUALLY_FRAME" val="{&quot;height&quot;:187.2,&quot;left&quot;:51.839999999999996,&quot;top&quot;:180,&quot;width&quot;:856.8}"/>
+</p:tagLst>
+</file>
+
+<file path=ppt/tags/tag15.xml><?xml version="1.0" encoding="utf-8"?>
+<p:tagLst xmlns:p="http://schemas.openxmlformats.org/presentationml/2006/main">
+  <p:tag name="KSO_WM_DIAGRAM_VIRTUALLY_FRAME" val="{&quot;height&quot;:187.2,&quot;left&quot;:51.839999999999996,&quot;top&quot;:180,&quot;width&quot;:856.8}"/>
+</p:tagLst>
+</file>
+
+<file path=ppt/tags/tag16.xml><?xml version="1.0" encoding="utf-8"?>
+<p:tagLst xmlns:p="http://schemas.openxmlformats.org/presentationml/2006/main">
+  <p:tag name="KSO_WM_DIAGRAM_VIRTUALLY_FRAME" val="{&quot;height&quot;:187.2,&quot;left&quot;:51.839999999999996,&quot;top&quot;:180,&quot;width&quot;:856.8}"/>
+</p:tagLst>
+</file>
+
+<file path=ppt/tags/tag17.xml><?xml version="1.0" encoding="utf-8"?>
+<p:tagLst xmlns:p="http://schemas.openxmlformats.org/presentationml/2006/main">
+  <p:tag name="KSO_WM_DIAGRAM_VIRTUALLY_FRAME" val="{&quot;height&quot;:187.2,&quot;left&quot;:51.839999999999996,&quot;top&quot;:180,&quot;width&quot;:856.8}"/>
+</p:tagLst>
+</file>
+
+<file path=ppt/tags/tag18.xml><?xml version="1.0" encoding="utf-8"?>
+<p:tagLst xmlns:p="http://schemas.openxmlformats.org/presentationml/2006/main">
+  <p:tag name="KSO_WM_DIAGRAM_VIRTUALLY_FRAME" val="{&quot;height&quot;:187.2,&quot;left&quot;:51.839999999999996,&quot;top&quot;:180,&quot;width&quot;:856.8}"/>
+</p:tagLst>
+</file>
+
+<file path=ppt/tags/tag19.xml><?xml version="1.0" encoding="utf-8"?>
+<p:tagLst xmlns:p="http://schemas.openxmlformats.org/presentationml/2006/main">
+  <p:tag name="KSO_WM_DIAGRAM_VIRTUALLY_FRAME" val="{&quot;height&quot;:187.2,&quot;left&quot;:51.839999999999996,&quot;top&quot;:180,&quot;width&quot;:856.8}"/>
+</p:tagLst>
+</file>
+
+<file path=ppt/tags/tag2.xml><?xml version="1.0" encoding="utf-8"?>
+<p:tagLst xmlns:p="http://schemas.openxmlformats.org/presentationml/2006/main">
+  <p:tag name="KSO_WM_DIAGRAM_VIRTUALLY_FRAME" val="{&quot;height&quot;:339.83992125984247,&quot;left&quot;:410.4,&quot;top&quot;:116.64000000000001,&quot;width&quot;:505.43999999999994}"/>
+</p:tagLst>
+</file>
+
+<file path=ppt/tags/tag20.xml><?xml version="1.0" encoding="utf-8"?>
+<p:tagLst xmlns:p="http://schemas.openxmlformats.org/presentationml/2006/main">
+  <p:tag name="KSO_WM_DIAGRAM_VIRTUALLY_FRAME" val="{&quot;height&quot;:187.2,&quot;left&quot;:51.839999999999996,&quot;top&quot;:180,&quot;width&quot;:856.8}"/>
+</p:tagLst>
+</file>
+
+<file path=ppt/tags/tag21.xml><?xml version="1.0" encoding="utf-8"?>
+<p:tagLst xmlns:p="http://schemas.openxmlformats.org/presentationml/2006/main">
+  <p:tag name="KSO_WM_DIAGRAM_VIRTUALLY_FRAME" val="{&quot;height&quot;:187.2,&quot;left&quot;:51.839999999999996,&quot;top&quot;:180,&quot;width&quot;:856.8}"/>
+</p:tagLst>
+</file>
+
+<file path=ppt/tags/tag22.xml><?xml version="1.0" encoding="utf-8"?>
+<p:tagLst xmlns:p="http://schemas.openxmlformats.org/presentationml/2006/main">
+  <p:tag name="KSO_WM_DIAGRAM_VIRTUALLY_FRAME" val="{&quot;height&quot;:187.2,&quot;left&quot;:51.839999999999996,&quot;top&quot;:180,&quot;width&quot;:856.8}"/>
+</p:tagLst>
+</file>
+
+<file path=ppt/tags/tag23.xml><?xml version="1.0" encoding="utf-8"?>
+<p:tagLst xmlns:p="http://schemas.openxmlformats.org/presentationml/2006/main">
+  <p:tag name="KSO_WM_DIAGRAM_VIRTUALLY_FRAME" val="{&quot;height&quot;:187.2,&quot;left&quot;:51.839999999999996,&quot;top&quot;:180,&quot;width&quot;:856.8}"/>
+</p:tagLst>
+</file>
+
+<file path=ppt/tags/tag24.xml><?xml version="1.0" encoding="utf-8"?>
+<p:tagLst xmlns:p="http://schemas.openxmlformats.org/presentationml/2006/main">
+  <p:tag name="KSO_WM_DIAGRAM_VIRTUALLY_FRAME" val="{&quot;height&quot;:187.2,&quot;left&quot;:51.839999999999996,&quot;top&quot;:180,&quot;width&quot;:856.8}"/>
+</p:tagLst>
+</file>
+
+<file path=ppt/tags/tag25.xml><?xml version="1.0" encoding="utf-8"?>
+<p:tagLst xmlns:p="http://schemas.openxmlformats.org/presentationml/2006/main">
+  <p:tag name="KSO_WM_DIAGRAM_VIRTUALLY_FRAME" val="{&quot;height&quot;:187.2,&quot;left&quot;:51.839999999999996,&quot;top&quot;:180,&quot;width&quot;:856.8}"/>
+</p:tagLst>
+</file>
+
+<file path=ppt/tags/tag26.xml><?xml version="1.0" encoding="utf-8"?>
+<p:tagLst xmlns:p="http://schemas.openxmlformats.org/presentationml/2006/main">
+  <p:tag name="KSO_WM_DIAGRAM_VIRTUALLY_FRAME" val="{&quot;height&quot;:187.2,&quot;left&quot;:51.839999999999996,&quot;top&quot;:180,&quot;width&quot;:856.8}"/>
+</p:tagLst>
+</file>
+
+<file path=ppt/tags/tag27.xml><?xml version="1.0" encoding="utf-8"?>
+<p:tagLst xmlns:p="http://schemas.openxmlformats.org/presentationml/2006/main">
+  <p:tag name="KSO_WM_DIAGRAM_VIRTUALLY_FRAME" val="{&quot;height&quot;:187.2,&quot;left&quot;:51.839999999999996,&quot;top&quot;:180,&quot;width&quot;:856.8}"/>
+</p:tagLst>
+</file>
+
+<file path=ppt/tags/tag28.xml><?xml version="1.0" encoding="utf-8"?>
+<p:tagLst xmlns:p="http://schemas.openxmlformats.org/presentationml/2006/main">
+  <p:tag name="KSO_WM_DIAGRAM_VIRTUALLY_FRAME" val="{&quot;height&quot;:187.2,&quot;left&quot;:51.839999999999996,&quot;top&quot;:180,&quot;width&quot;:856.8}"/>
+</p:tagLst>
+</file>
+
+<file path=ppt/tags/tag29.xml><?xml version="1.0" encoding="utf-8"?>
+<p:tagLst xmlns:p="http://schemas.openxmlformats.org/presentationml/2006/main">
+  <p:tag name="KSO_WM_DIAGRAM_VIRTUALLY_FRAME" val="{&quot;height&quot;:187.2,&quot;left&quot;:51.839999999999996,&quot;top&quot;:180,&quot;width&quot;:856.8}"/>
+</p:tagLst>
+</file>
+
+<file path=ppt/tags/tag3.xml><?xml version="1.0" encoding="utf-8"?>
+<p:tagLst xmlns:p="http://schemas.openxmlformats.org/presentationml/2006/main">
+  <p:tag name="KSO_WM_DIAGRAM_VIRTUALLY_FRAME" val="{&quot;height&quot;:339.83992125984247,&quot;left&quot;:410.4,&quot;top&quot;:116.64000000000001,&quot;width&quot;:505.43999999999994}"/>
+</p:tagLst>
+</file>
+
+<file path=ppt/tags/tag30.xml><?xml version="1.0" encoding="utf-8"?>
+<p:tagLst xmlns:p="http://schemas.openxmlformats.org/presentationml/2006/main">
   <p:tag name="ISPRING_PRESENTATION_TITLE" val="PowerPoint 演示文稿"/>
   <p:tag name="KSO_WM_DOC_GUID" val="{7646b040-3551-49a0-9609-8286eb574aa4}"/>
+</p:tagLst>
+</file>
+
+<file path=ppt/tags/tag4.xml><?xml version="1.0" encoding="utf-8"?>
+<p:tagLst xmlns:p="http://schemas.openxmlformats.org/presentationml/2006/main">
+  <p:tag name="KSO_WM_DIAGRAM_VIRTUALLY_FRAME" val="{&quot;height&quot;:339.83992125984247,&quot;left&quot;:410.4,&quot;top&quot;:116.64000000000001,&quot;width&quot;:505.43999999999994}"/>
+</p:tagLst>
+</file>
+
+<file path=ppt/tags/tag5.xml><?xml version="1.0" encoding="utf-8"?>
+<p:tagLst xmlns:p="http://schemas.openxmlformats.org/presentationml/2006/main">
+  <p:tag name="KSO_WM_DIAGRAM_VIRTUALLY_FRAME" val="{&quot;height&quot;:339.83992125984247,&quot;left&quot;:410.4,&quot;top&quot;:116.64000000000001,&quot;width&quot;:505.43999999999994}"/>
+</p:tagLst>
+</file>
+
+<file path=ppt/tags/tag6.xml><?xml version="1.0" encoding="utf-8"?>
+<p:tagLst xmlns:p="http://schemas.openxmlformats.org/presentationml/2006/main">
+  <p:tag name="KSO_WM_DIAGRAM_VIRTUALLY_FRAME" val="{&quot;height&quot;:339.83992125984247,&quot;left&quot;:410.4,&quot;top&quot;:116.64000000000001,&quot;width&quot;:505.43999999999994}"/>
+</p:tagLst>
+</file>
+
+<file path=ppt/tags/tag7.xml><?xml version="1.0" encoding="utf-8"?>
+<p:tagLst xmlns:p="http://schemas.openxmlformats.org/presentationml/2006/main">
+  <p:tag name="KSO_WM_DIAGRAM_VIRTUALLY_FRAME" val="{&quot;height&quot;:339.83992125984247,&quot;left&quot;:410.4,&quot;top&quot;:116.64000000000001,&quot;width&quot;:505.43999999999994}"/>
+</p:tagLst>
+</file>
+
+<file path=ppt/tags/tag8.xml><?xml version="1.0" encoding="utf-8"?>
+<p:tagLst xmlns:p="http://schemas.openxmlformats.org/presentationml/2006/main">
+  <p:tag name="KSO_WM_DIAGRAM_VIRTUALLY_FRAME" val="{&quot;height&quot;:339.83992125984247,&quot;left&quot;:410.4,&quot;top&quot;:116.64000000000001,&quot;width&quot;:505.43999999999994}"/>
+</p:tagLst>
+</file>
+
+<file path=ppt/tags/tag9.xml><?xml version="1.0" encoding="utf-8"?>
+<p:tagLst xmlns:p="http://schemas.openxmlformats.org/presentationml/2006/main">
+  <p:tag name="KSO_WM_DIAGRAM_VIRTUALLY_FRAME" val="{&quot;height&quot;:339.83992125984247,&quot;left&quot;:410.4,&quot;top&quot;:116.64000000000001,&quot;width&quot;:505.43999999999994}"/>
 </p:tagLst>
 </file>
 
